--- a/decks/Molecular_04_Solid-Tumor-and-Germline-Testing.pptx
+++ b/decks/Molecular_04_Solid-Tumor-and-Germline-Testing.pptx
@@ -26,9 +26,13 @@
     <p:sldId id="274" r:id="rId20"/>
     <p:sldId id="275" r:id="rId21"/>
     <p:sldId id="276" r:id="rId22"/>
+    <p:sldId id="277" r:id="rId23"/>
+    <p:sldId id="278" r:id="rId24"/>
+    <p:sldId id="279" r:id="rId25"/>
+    <p:sldId id="280" r:id="rId26"/>
   </p:sldIdLst>
   <p:notesMasterIdLst>
-    <p:notesMasterId r:id="rId23"/>
+    <p:notesMasterId r:id="rId27"/>
   </p:notesMasterIdLst>
   <p:sldSz cx="12191695" cy="6858000"/>
   <p:notesSz cx="6858000" cy="12191695"/>
@@ -1690,6 +1694,358 @@
             <a:fld id="{F7021451-1387-4CA6-816F-3879F97B5CBC}" type="slidenum">
               <a:rPr lang="en-US"/>
               <a:t>21</a:t>
+            </a:fld>
+            <a:endParaRPr lang="en-US"/>
+          </a:p>
+        </p:txBody>
+      </p:sp>
+    </p:spTree>
+    <p:extLst>
+      <p:ext uri="{BB962C8B-B14F-4D97-AF65-F5344CB8AC3E}">
+        <p14:creationId xmlns:p14="http://schemas.microsoft.com/office/powerpoint/2010/main" val="1024086991"/>
+      </p:ext>
+    </p:extLst>
+  </p:cSld>
+  <p:clrMapOvr>
+    <a:masterClrMapping/>
+  </p:clrMapOvr>
+</p:notes>
+</file>
+
+<file path=ppt/notesSlides/notesSlide22.xml><?xml version="1.0" encoding="utf-8"?>
+<p:notes xmlns:a="http://schemas.openxmlformats.org/drawingml/2006/main" xmlns:r="http://schemas.openxmlformats.org/officeDocument/2006/relationships" xmlns:p="http://schemas.openxmlformats.org/presentationml/2006/main">
+  <p:cSld>
+    <p:spTree>
+      <p:nvGrpSpPr>
+        <p:cNvPr id="1" name=""/>
+        <p:cNvGrpSpPr/>
+        <p:nvPr/>
+      </p:nvGrpSpPr>
+      <p:grpSpPr>
+        <a:xfrm>
+          <a:off x="0" y="0"/>
+          <a:ext cx="0" cy="0"/>
+          <a:chOff x="0" y="0"/>
+          <a:chExt cx="0" cy="0"/>
+        </a:xfrm>
+      </p:grpSpPr>
+      <p:sp>
+        <p:nvSpPr>
+          <p:cNvPr id="2" name="Slide Image Placeholder 1"/>
+          <p:cNvSpPr>
+            <a:spLocks noGrp="1" noRot="1" noChangeAspect="1"/>
+          </p:cNvSpPr>
+          <p:nvPr>
+            <p:ph type="sldImg"/>
+          </p:nvPr>
+        </p:nvSpPr>
+        <p:spPr/>
+      </p:sp>
+      <p:sp>
+        <p:nvSpPr>
+          <p:cNvPr id="3" name="Notes Placeholder 2"/>
+          <p:cNvSpPr>
+            <a:spLocks noGrp="1"/>
+          </p:cNvSpPr>
+          <p:nvPr>
+            <p:ph type="body" idx="1"/>
+          </p:nvPr>
+        </p:nvSpPr>
+        <p:spPr/>
+        <p:txBody>
+          <a:bodyPr/>
+          <a:lstStyle/>
+          <a:p>
+            <a:r>
+              <a:rPr lang="en-US" dirty="0"/>
+              <a:t/>
+            </a:r>
+            <a:endParaRPr lang="en-US" dirty="0"/>
+          </a:p>
+        </p:txBody>
+      </p:sp>
+      <p:sp>
+        <p:nvSpPr>
+          <p:cNvPr id="4" name="Slide Number Placeholder 3"/>
+          <p:cNvSpPr>
+            <a:spLocks noGrp="1"/>
+          </p:cNvSpPr>
+          <p:nvPr>
+            <p:ph type="sldNum" sz="quarter" idx="10"/>
+          </p:nvPr>
+        </p:nvSpPr>
+        <p:spPr/>
+        <p:txBody>
+          <a:bodyPr/>
+          <a:lstStyle/>
+          <a:p>
+            <a:fld id="{F7021451-1387-4CA6-816F-3879F97B5CBC}" type="slidenum">
+              <a:rPr lang="en-US"/>
+              <a:t>22</a:t>
+            </a:fld>
+            <a:endParaRPr lang="en-US"/>
+          </a:p>
+        </p:txBody>
+      </p:sp>
+    </p:spTree>
+    <p:extLst>
+      <p:ext uri="{BB962C8B-B14F-4D97-AF65-F5344CB8AC3E}">
+        <p14:creationId xmlns:p14="http://schemas.microsoft.com/office/powerpoint/2010/main" val="1024086991"/>
+      </p:ext>
+    </p:extLst>
+  </p:cSld>
+  <p:clrMapOvr>
+    <a:masterClrMapping/>
+  </p:clrMapOvr>
+</p:notes>
+</file>
+
+<file path=ppt/notesSlides/notesSlide23.xml><?xml version="1.0" encoding="utf-8"?>
+<p:notes xmlns:a="http://schemas.openxmlformats.org/drawingml/2006/main" xmlns:r="http://schemas.openxmlformats.org/officeDocument/2006/relationships" xmlns:p="http://schemas.openxmlformats.org/presentationml/2006/main">
+  <p:cSld>
+    <p:spTree>
+      <p:nvGrpSpPr>
+        <p:cNvPr id="1" name=""/>
+        <p:cNvGrpSpPr/>
+        <p:nvPr/>
+      </p:nvGrpSpPr>
+      <p:grpSpPr>
+        <a:xfrm>
+          <a:off x="0" y="0"/>
+          <a:ext cx="0" cy="0"/>
+          <a:chOff x="0" y="0"/>
+          <a:chExt cx="0" cy="0"/>
+        </a:xfrm>
+      </p:grpSpPr>
+      <p:sp>
+        <p:nvSpPr>
+          <p:cNvPr id="2" name="Slide Image Placeholder 1"/>
+          <p:cNvSpPr>
+            <a:spLocks noGrp="1" noRot="1" noChangeAspect="1"/>
+          </p:cNvSpPr>
+          <p:nvPr>
+            <p:ph type="sldImg"/>
+          </p:nvPr>
+        </p:nvSpPr>
+        <p:spPr/>
+      </p:sp>
+      <p:sp>
+        <p:nvSpPr>
+          <p:cNvPr id="3" name="Notes Placeholder 2"/>
+          <p:cNvSpPr>
+            <a:spLocks noGrp="1"/>
+          </p:cNvSpPr>
+          <p:nvPr>
+            <p:ph type="body" idx="1"/>
+          </p:nvPr>
+        </p:nvSpPr>
+        <p:spPr/>
+        <p:txBody>
+          <a:bodyPr/>
+          <a:lstStyle/>
+          <a:p>
+            <a:r>
+              <a:rPr lang="en-US" dirty="0"/>
+              <a:t/>
+            </a:r>
+            <a:endParaRPr lang="en-US" dirty="0"/>
+          </a:p>
+        </p:txBody>
+      </p:sp>
+      <p:sp>
+        <p:nvSpPr>
+          <p:cNvPr id="4" name="Slide Number Placeholder 3"/>
+          <p:cNvSpPr>
+            <a:spLocks noGrp="1"/>
+          </p:cNvSpPr>
+          <p:nvPr>
+            <p:ph type="sldNum" sz="quarter" idx="10"/>
+          </p:nvPr>
+        </p:nvSpPr>
+        <p:spPr/>
+        <p:txBody>
+          <a:bodyPr/>
+          <a:lstStyle/>
+          <a:p>
+            <a:fld id="{F7021451-1387-4CA6-816F-3879F97B5CBC}" type="slidenum">
+              <a:rPr lang="en-US"/>
+              <a:t>23</a:t>
+            </a:fld>
+            <a:endParaRPr lang="en-US"/>
+          </a:p>
+        </p:txBody>
+      </p:sp>
+    </p:spTree>
+    <p:extLst>
+      <p:ext uri="{BB962C8B-B14F-4D97-AF65-F5344CB8AC3E}">
+        <p14:creationId xmlns:p14="http://schemas.microsoft.com/office/powerpoint/2010/main" val="1024086991"/>
+      </p:ext>
+    </p:extLst>
+  </p:cSld>
+  <p:clrMapOvr>
+    <a:masterClrMapping/>
+  </p:clrMapOvr>
+</p:notes>
+</file>
+
+<file path=ppt/notesSlides/notesSlide24.xml><?xml version="1.0" encoding="utf-8"?>
+<p:notes xmlns:a="http://schemas.openxmlformats.org/drawingml/2006/main" xmlns:r="http://schemas.openxmlformats.org/officeDocument/2006/relationships" xmlns:p="http://schemas.openxmlformats.org/presentationml/2006/main">
+  <p:cSld>
+    <p:spTree>
+      <p:nvGrpSpPr>
+        <p:cNvPr id="1" name=""/>
+        <p:cNvGrpSpPr/>
+        <p:nvPr/>
+      </p:nvGrpSpPr>
+      <p:grpSpPr>
+        <a:xfrm>
+          <a:off x="0" y="0"/>
+          <a:ext cx="0" cy="0"/>
+          <a:chOff x="0" y="0"/>
+          <a:chExt cx="0" cy="0"/>
+        </a:xfrm>
+      </p:grpSpPr>
+      <p:sp>
+        <p:nvSpPr>
+          <p:cNvPr id="2" name="Slide Image Placeholder 1"/>
+          <p:cNvSpPr>
+            <a:spLocks noGrp="1" noRot="1" noChangeAspect="1"/>
+          </p:cNvSpPr>
+          <p:nvPr>
+            <p:ph type="sldImg"/>
+          </p:nvPr>
+        </p:nvSpPr>
+        <p:spPr/>
+      </p:sp>
+      <p:sp>
+        <p:nvSpPr>
+          <p:cNvPr id="3" name="Notes Placeholder 2"/>
+          <p:cNvSpPr>
+            <a:spLocks noGrp="1"/>
+          </p:cNvSpPr>
+          <p:nvPr>
+            <p:ph type="body" idx="1"/>
+          </p:nvPr>
+        </p:nvSpPr>
+        <p:spPr/>
+        <p:txBody>
+          <a:bodyPr/>
+          <a:lstStyle/>
+          <a:p>
+            <a:r>
+              <a:rPr lang="en-US" dirty="0"/>
+              <a:t/>
+            </a:r>
+            <a:endParaRPr lang="en-US" dirty="0"/>
+          </a:p>
+        </p:txBody>
+      </p:sp>
+      <p:sp>
+        <p:nvSpPr>
+          <p:cNvPr id="4" name="Slide Number Placeholder 3"/>
+          <p:cNvSpPr>
+            <a:spLocks noGrp="1"/>
+          </p:cNvSpPr>
+          <p:nvPr>
+            <p:ph type="sldNum" sz="quarter" idx="10"/>
+          </p:nvPr>
+        </p:nvSpPr>
+        <p:spPr/>
+        <p:txBody>
+          <a:bodyPr/>
+          <a:lstStyle/>
+          <a:p>
+            <a:fld id="{F7021451-1387-4CA6-816F-3879F97B5CBC}" type="slidenum">
+              <a:rPr lang="en-US"/>
+              <a:t>24</a:t>
+            </a:fld>
+            <a:endParaRPr lang="en-US"/>
+          </a:p>
+        </p:txBody>
+      </p:sp>
+    </p:spTree>
+    <p:extLst>
+      <p:ext uri="{BB962C8B-B14F-4D97-AF65-F5344CB8AC3E}">
+        <p14:creationId xmlns:p14="http://schemas.microsoft.com/office/powerpoint/2010/main" val="1024086991"/>
+      </p:ext>
+    </p:extLst>
+  </p:cSld>
+  <p:clrMapOvr>
+    <a:masterClrMapping/>
+  </p:clrMapOvr>
+</p:notes>
+</file>
+
+<file path=ppt/notesSlides/notesSlide25.xml><?xml version="1.0" encoding="utf-8"?>
+<p:notes xmlns:a="http://schemas.openxmlformats.org/drawingml/2006/main" xmlns:r="http://schemas.openxmlformats.org/officeDocument/2006/relationships" xmlns:p="http://schemas.openxmlformats.org/presentationml/2006/main">
+  <p:cSld>
+    <p:spTree>
+      <p:nvGrpSpPr>
+        <p:cNvPr id="1" name=""/>
+        <p:cNvGrpSpPr/>
+        <p:nvPr/>
+      </p:nvGrpSpPr>
+      <p:grpSpPr>
+        <a:xfrm>
+          <a:off x="0" y="0"/>
+          <a:ext cx="0" cy="0"/>
+          <a:chOff x="0" y="0"/>
+          <a:chExt cx="0" cy="0"/>
+        </a:xfrm>
+      </p:grpSpPr>
+      <p:sp>
+        <p:nvSpPr>
+          <p:cNvPr id="2" name="Slide Image Placeholder 1"/>
+          <p:cNvSpPr>
+            <a:spLocks noGrp="1" noRot="1" noChangeAspect="1"/>
+          </p:cNvSpPr>
+          <p:nvPr>
+            <p:ph type="sldImg"/>
+          </p:nvPr>
+        </p:nvSpPr>
+        <p:spPr/>
+      </p:sp>
+      <p:sp>
+        <p:nvSpPr>
+          <p:cNvPr id="3" name="Notes Placeholder 2"/>
+          <p:cNvSpPr>
+            <a:spLocks noGrp="1"/>
+          </p:cNvSpPr>
+          <p:nvPr>
+            <p:ph type="body" idx="1"/>
+          </p:nvPr>
+        </p:nvSpPr>
+        <p:spPr/>
+        <p:txBody>
+          <a:bodyPr/>
+          <a:lstStyle/>
+          <a:p>
+            <a:r>
+              <a:rPr lang="en-US" dirty="0"/>
+              <a:t/>
+            </a:r>
+            <a:endParaRPr lang="en-US" dirty="0"/>
+          </a:p>
+        </p:txBody>
+      </p:sp>
+      <p:sp>
+        <p:nvSpPr>
+          <p:cNvPr id="4" name="Slide Number Placeholder 3"/>
+          <p:cNvSpPr>
+            <a:spLocks noGrp="1"/>
+          </p:cNvSpPr>
+          <p:nvPr>
+            <p:ph type="sldNum" sz="quarter" idx="10"/>
+          </p:nvPr>
+        </p:nvSpPr>
+        <p:spPr/>
+        <p:txBody>
+          <a:bodyPr/>
+          <a:lstStyle/>
+          <a:p>
+            <a:fld id="{F7021451-1387-4CA6-816F-3879F97B5CBC}" type="slidenum">
+              <a:rPr lang="en-US"/>
+              <a:t>25</a:t>
             </a:fld>
             <a:endParaRPr lang="en-US"/>
           </a:p>
@@ -2854,7 +3210,7 @@
                 <a:ea typeface="Calibri" pitchFamily="34" charset="-122"/>
                 <a:cs typeface="Calibri" pitchFamily="34" charset="-120"/>
               </a:rPr>
-              <a:t>Solid Tumor &amp; Germline Testing Fundamentals</a:t>
+              <a:t>Solid Tumor &amp; Germline Testing</a:t>
             </a:r>
             <a:endParaRPr lang="en-US" sz="4600" dirty="0"/>
           </a:p>
@@ -2893,7 +3249,7 @@
                 <a:ea typeface="Calibri" pitchFamily="34" charset="-122"/>
                 <a:cs typeface="Calibri" pitchFamily="34" charset="-120"/>
               </a:rPr>
-              <a:t>Companion Diagnostics, Hereditary Cancer, and Tissue Adequacy</a:t>
+              <a:t>Companion Diagnostics, Tumor Profiling, and Hereditary Risk</a:t>
             </a:r>
             <a:endParaRPr lang="en-US" sz="1900" dirty="0"/>
           </a:p>
@@ -3085,7 +3441,7 @@
                 <a:ea typeface="Calibri" pitchFamily="34" charset="-122"/>
                 <a:cs typeface="Calibri" pitchFamily="34" charset="-120"/>
               </a:rPr>
-              <a:t>MOLECULAR &amp; CYTOGENETICS   ·   GERMLINE</a:t>
+              <a:t>MOLECULAR &amp; CYTOGENETICS   ·   SOMATIC vs GERMLINE</a:t>
             </a:r>
             <a:endParaRPr lang="en-US" sz="1100" dirty="0"/>
           </a:p>
@@ -3124,7 +3480,7 @@
                 <a:ea typeface="Calibri" pitchFamily="34" charset="-122"/>
                 <a:cs typeface="Calibri" pitchFamily="34" charset="-120"/>
               </a:rPr>
-              <a:t>Tumor Profiling vs Germline Testing</a:t>
+              <a:t>Distinguishing Somatic from Germline</a:t>
             </a:r>
             <a:endParaRPr lang="en-US" sz="3000" dirty="0"/>
           </a:p>
@@ -3138,18 +3494,23 @@
         </p:nvSpPr>
         <p:spPr>
           <a:xfrm>
-            <a:off x="566928" y="1517904"/>
-            <a:ext cx="5346040" cy="4114800"/>
+            <a:off x="883768" y="1481328"/>
+            <a:ext cx="10424160" cy="4343400"/>
           </a:xfrm>
           <a:prstGeom prst="roundRect">
             <a:avLst>
-              <a:gd name="adj" fmla="val 2000"/>
+              <a:gd name="adj" fmla="val 1895"/>
             </a:avLst>
           </a:prstGeom>
           <a:solidFill>
-            <a:srgbClr val="E0F2F4"/>
+            <a:srgbClr val="FFFFFF"/>
           </a:solidFill>
-          <a:ln/>
+          <a:ln w="12700">
+            <a:solidFill>
+              <a:srgbClr val="DCE4EC"/>
+            </a:solidFill>
+            <a:prstDash val="solid"/>
+          </a:ln>
           <a:effectLst>
             <a:outerShdw sx="100000" sy="100000" kx="0" ky="0" algn="bl" rotWithShape="0" blurRad="88900" dist="25400" dir="5400000">
               <a:srgbClr val="22303C">
@@ -3159,55 +3520,40 @@
           </a:effectLst>
         </p:spPr>
       </p:sp>
-      <p:sp>
-        <p:nvSpPr>
-          <p:cNvPr id="5" name="Text 3"/>
-          <p:cNvSpPr/>
-          <p:nvPr/>
-        </p:nvSpPr>
-        <p:spPr>
-          <a:xfrm>
-            <a:off x="804672" y="1682496"/>
-            <a:ext cx="4888840" cy="274320"/>
-          </a:xfrm>
-          <a:prstGeom prst="rect">
-            <a:avLst/>
-          </a:prstGeom>
-          <a:noFill/>
-          <a:ln/>
-        </p:spPr>
-        <p:txBody>
-          <a:bodyPr wrap="square" lIns="0" tIns="0" rIns="0" bIns="0" rtlCol="0" anchor="ctr"/>
-          <a:lstStyle/>
-          <a:p>
-            <a:pPr indent="0" marL="0">
-              <a:buNone/>
-            </a:pPr>
-            <a:r>
-              <a:rPr lang="en-US" sz="1200" b="1" spc="100" kern="0" dirty="0">
-                <a:solidFill>
-                  <a:srgbClr val="005A63"/>
-                </a:solidFill>
-                <a:latin typeface="Calibri" pitchFamily="34" charset="0"/>
-                <a:ea typeface="Calibri" pitchFamily="34" charset="-122"/>
-                <a:cs typeface="Calibri" pitchFamily="34" charset="-120"/>
-              </a:rPr>
-              <a:t>DIFFERENT QUESTIONS</a:t>
-            </a:r>
-            <a:endParaRPr lang="en-US" sz="1200" dirty="0"/>
-          </a:p>
-        </p:txBody>
-      </p:sp>
-      <p:sp>
-        <p:nvSpPr>
-          <p:cNvPr id="6" name="Text 4"/>
-          <p:cNvSpPr/>
-          <p:nvPr/>
-        </p:nvSpPr>
-        <p:spPr>
-          <a:xfrm>
-            <a:off x="804672" y="2029968"/>
-            <a:ext cx="4870552" cy="3474720"/>
+      <p:pic>
+        <p:nvPicPr>
+          <p:cNvPr id="5" name="Image 0" descr="/tmp/cp_work2/art/mol_germline.png">    </p:cNvPr>
+          <p:cNvPicPr>
+            <a:picLocks noChangeAspect="1"/>
+          </p:cNvPicPr>
+          <p:nvPr/>
+        </p:nvPicPr>
+        <p:blipFill>
+          <a:blip r:embed="rId1"/>
+          <a:stretch>
+            <a:fillRect/>
+          </a:stretch>
+        </p:blipFill>
+        <p:spPr>
+          <a:xfrm>
+            <a:off x="1011784" y="1609344"/>
+            <a:ext cx="10168128" cy="4087368"/>
+          </a:xfrm>
+          <a:prstGeom prst="rect">
+            <a:avLst/>
+          </a:prstGeom>
+        </p:spPr>
+      </p:pic>
+      <p:sp>
+        <p:nvSpPr>
+          <p:cNvPr id="6" name="Text 3"/>
+          <p:cNvSpPr/>
+          <p:nvPr/>
+        </p:nvSpPr>
+        <p:spPr>
+          <a:xfrm>
+            <a:off x="566928" y="5897880"/>
+            <a:ext cx="11057839" cy="365760"/>
           </a:xfrm>
           <a:prstGeom prst="rect">
             <a:avLst/>
@@ -3219,268 +3565,27 @@
           <a:bodyPr wrap="square" lIns="0" tIns="0" rIns="0" bIns="0" rtlCol="0" anchor="t"/>
           <a:lstStyle/>
           <a:p>
-            <a:pPr algn="l" marL="177800" indent="-177800">
-              <a:spcAft>
-                <a:spcPts val="900"/>
-              </a:spcAft>
-              <a:buSzPct val="100000"/>
-              <a:buChar char="•"/>
-            </a:pPr>
-            <a:r>
-              <a:rPr lang="en-US" sz="1250" b="1" dirty="0">
-                <a:solidFill>
-                  <a:srgbClr val="1B2A38"/>
-                </a:solidFill>
-                <a:latin typeface="Calibri" pitchFamily="34" charset="0"/>
-                <a:ea typeface="Calibri" pitchFamily="34" charset="-122"/>
-                <a:cs typeface="Calibri" pitchFamily="34" charset="-120"/>
-              </a:rPr>
-              <a:t>Tumor (somatic) testing finds acquired, treatment-relevant variants; germline testing finds inherited risk.</a:t>
-            </a:r>
-            <a:endParaRPr lang="en-US" sz="1250" dirty="0"/>
-          </a:p>
-          <a:p>
-            <a:pPr algn="l" marL="177800" indent="-177800">
-              <a:spcAft>
-                <a:spcPts val="900"/>
-              </a:spcAft>
-              <a:buSzPct val="100000"/>
-              <a:buChar char="•"/>
-            </a:pPr>
-            <a:r>
-              <a:rPr lang="en-US" sz="1250" dirty="0">
-                <a:solidFill>
-                  <a:srgbClr val="33444F"/>
-                </a:solidFill>
-                <a:latin typeface="Calibri" pitchFamily="34" charset="0"/>
-                <a:ea typeface="Calibri" pitchFamily="34" charset="-122"/>
-                <a:cs typeface="Calibri" pitchFamily="34" charset="-120"/>
-              </a:rPr>
-              <a:t>Tumor-only assays cannot definitively distinguish germline from somatic origin.</a:t>
-            </a:r>
-            <a:endParaRPr lang="en-US" sz="1250" dirty="0"/>
-          </a:p>
-          <a:p>
-            <a:pPr algn="l" marL="177800" indent="-177800">
-              <a:spcAft>
-                <a:spcPts val="900"/>
-              </a:spcAft>
-              <a:buSzPct val="100000"/>
-              <a:buChar char="•"/>
-            </a:pPr>
-            <a:r>
-              <a:rPr lang="en-US" sz="1250" dirty="0">
-                <a:solidFill>
-                  <a:srgbClr val="33444F"/>
-                </a:solidFill>
-                <a:latin typeface="Calibri" pitchFamily="34" charset="0"/>
-                <a:ea typeface="Calibri" pitchFamily="34" charset="-122"/>
-                <a:cs typeface="Calibri" pitchFamily="34" charset="-120"/>
-              </a:rPr>
-              <a:t>High variant allele fractions or certain genes (e.g., BRCA1/2) raise germline suspicion.</a:t>
-            </a:r>
-            <a:endParaRPr lang="en-US" sz="1250" dirty="0"/>
-          </a:p>
-          <a:p>
-            <a:pPr algn="l" marL="177800" indent="-177800">
-              <a:spcAft>
-                <a:spcPts val="900"/>
-              </a:spcAft>
-              <a:buSzPct val="100000"/>
-              <a:buChar char="•"/>
-            </a:pPr>
-            <a:r>
-              <a:rPr lang="en-US" sz="1250" dirty="0">
-                <a:solidFill>
-                  <a:srgbClr val="33444F"/>
-                </a:solidFill>
-                <a:latin typeface="Calibri" pitchFamily="34" charset="0"/>
-                <a:ea typeface="Calibri" pitchFamily="34" charset="-122"/>
-                <a:cs typeface="Calibri" pitchFamily="34" charset="-120"/>
-              </a:rPr>
-              <a:t>Confirmatory germline testing requires consent and counseling.</a:t>
-            </a:r>
-            <a:endParaRPr lang="en-US" sz="1250" dirty="0"/>
-          </a:p>
-        </p:txBody>
-      </p:sp>
-      <p:sp>
-        <p:nvSpPr>
-          <p:cNvPr id="7" name="Shape 5"/>
-          <p:cNvSpPr/>
-          <p:nvPr/>
-        </p:nvSpPr>
-        <p:spPr>
-          <a:xfrm>
-            <a:off x="6278728" y="1517904"/>
-            <a:ext cx="5346040" cy="4114800"/>
-          </a:xfrm>
-          <a:prstGeom prst="roundRect">
-            <a:avLst>
-              <a:gd name="adj" fmla="val 2000"/>
-            </a:avLst>
-          </a:prstGeom>
-          <a:solidFill>
-            <a:srgbClr val="E0F2F4"/>
-          </a:solidFill>
-          <a:ln/>
-          <a:effectLst>
-            <a:outerShdw sx="100000" sy="100000" kx="0" ky="0" algn="bl" rotWithShape="0" blurRad="88900" dist="25400" dir="5400000">
-              <a:srgbClr val="22303C">
-                <a:alpha val="12000"/>
-              </a:srgbClr>
-            </a:outerShdw>
-          </a:effectLst>
-        </p:spPr>
-      </p:sp>
-      <p:sp>
-        <p:nvSpPr>
-          <p:cNvPr id="8" name="Text 6"/>
-          <p:cNvSpPr/>
-          <p:nvPr/>
-        </p:nvSpPr>
-        <p:spPr>
-          <a:xfrm>
-            <a:off x="6516472" y="1682496"/>
-            <a:ext cx="4888840" cy="274320"/>
-          </a:xfrm>
-          <a:prstGeom prst="rect">
-            <a:avLst/>
-          </a:prstGeom>
-          <a:noFill/>
-          <a:ln/>
-        </p:spPr>
-        <p:txBody>
-          <a:bodyPr wrap="square" lIns="0" tIns="0" rIns="0" bIns="0" rtlCol="0" anchor="ctr"/>
-          <a:lstStyle/>
-          <a:p>
-            <a:pPr indent="0" marL="0">
-              <a:buNone/>
-            </a:pPr>
-            <a:r>
-              <a:rPr lang="en-US" sz="1200" b="1" spc="100" kern="0" dirty="0">
-                <a:solidFill>
-                  <a:srgbClr val="005A63"/>
-                </a:solidFill>
-                <a:latin typeface="Calibri" pitchFamily="34" charset="0"/>
-                <a:ea typeface="Calibri" pitchFamily="34" charset="-122"/>
-                <a:cs typeface="Calibri" pitchFamily="34" charset="-120"/>
-              </a:rPr>
-              <a:t>HEREDITARY CANCER BASICS</a:t>
-            </a:r>
-            <a:endParaRPr lang="en-US" sz="1200" dirty="0"/>
-          </a:p>
-        </p:txBody>
-      </p:sp>
-      <p:sp>
-        <p:nvSpPr>
-          <p:cNvPr id="9" name="Text 7"/>
-          <p:cNvSpPr/>
-          <p:nvPr/>
-        </p:nvSpPr>
-        <p:spPr>
-          <a:xfrm>
-            <a:off x="6516472" y="2029968"/>
-            <a:ext cx="4870552" cy="3474720"/>
-          </a:xfrm>
-          <a:prstGeom prst="rect">
-            <a:avLst/>
-          </a:prstGeom>
-          <a:noFill/>
-          <a:ln/>
-        </p:spPr>
-        <p:txBody>
-          <a:bodyPr wrap="square" lIns="0" tIns="0" rIns="0" bIns="0" rtlCol="0" anchor="t"/>
-          <a:lstStyle/>
-          <a:p>
-            <a:pPr algn="l" marL="177800" indent="-177800">
-              <a:spcAft>
-                <a:spcPts val="900"/>
-              </a:spcAft>
-              <a:buSzPct val="100000"/>
-              <a:buChar char="•"/>
-            </a:pPr>
-            <a:r>
-              <a:rPr lang="en-US" sz="1250" b="1" dirty="0">
-                <a:solidFill>
-                  <a:srgbClr val="1B2A38"/>
-                </a:solidFill>
-                <a:latin typeface="Calibri" pitchFamily="34" charset="0"/>
-                <a:ea typeface="Calibri" pitchFamily="34" charset="-122"/>
-                <a:cs typeface="Calibri" pitchFamily="34" charset="-120"/>
-              </a:rPr>
-              <a:t>Syndromes: hereditary breast/ovarian (BRCA1/2), Lynch (mismatch repair), Li-Fraumeni (TP53), etc.</a:t>
-            </a:r>
-            <a:endParaRPr lang="en-US" sz="1250" dirty="0"/>
-          </a:p>
-          <a:p>
-            <a:pPr algn="l" marL="177800" indent="-177800">
-              <a:spcAft>
-                <a:spcPts val="900"/>
-              </a:spcAft>
-              <a:buSzPct val="100000"/>
-              <a:buChar char="•"/>
-            </a:pPr>
-            <a:r>
-              <a:rPr lang="en-US" sz="1250" dirty="0">
-                <a:solidFill>
-                  <a:srgbClr val="33444F"/>
-                </a:solidFill>
-                <a:latin typeface="Calibri" pitchFamily="34" charset="0"/>
-                <a:ea typeface="Calibri" pitchFamily="34" charset="-122"/>
-                <a:cs typeface="Calibri" pitchFamily="34" charset="-120"/>
-              </a:rPr>
-              <a:t>Identifying a germline variant has implications for the patient and family.</a:t>
-            </a:r>
-            <a:endParaRPr lang="en-US" sz="1250" dirty="0"/>
-          </a:p>
-          <a:p>
-            <a:pPr algn="l" marL="177800" indent="-177800">
-              <a:spcAft>
-                <a:spcPts val="900"/>
-              </a:spcAft>
-              <a:buSzPct val="100000"/>
-              <a:buChar char="•"/>
-            </a:pPr>
-            <a:r>
-              <a:rPr lang="en-US" sz="1250" dirty="0">
-                <a:solidFill>
-                  <a:srgbClr val="33444F"/>
-                </a:solidFill>
-                <a:latin typeface="Calibri" pitchFamily="34" charset="0"/>
-                <a:ea typeface="Calibri" pitchFamily="34" charset="-122"/>
-                <a:cs typeface="Calibri" pitchFamily="34" charset="-120"/>
-              </a:rPr>
-              <a:t>Refer to genetic counseling for germline findings.</a:t>
-            </a:r>
-            <a:endParaRPr lang="en-US" sz="1250" dirty="0"/>
-          </a:p>
-          <a:p>
-            <a:pPr algn="l" marL="177800" indent="-177800">
-              <a:spcAft>
-                <a:spcPts val="900"/>
-              </a:spcAft>
-              <a:buSzPct val="100000"/>
-              <a:buChar char="•"/>
-            </a:pPr>
-            <a:r>
-              <a:rPr lang="en-US" sz="1250" dirty="0">
-                <a:solidFill>
-                  <a:srgbClr val="33444F"/>
-                </a:solidFill>
-                <a:latin typeface="Calibri" pitchFamily="34" charset="0"/>
-                <a:ea typeface="Calibri" pitchFamily="34" charset="-122"/>
-                <a:cs typeface="Calibri" pitchFamily="34" charset="-120"/>
-              </a:rPr>
-              <a:t>Distinguish primary indication from secondary findings.</a:t>
-            </a:r>
-            <a:endParaRPr lang="en-US" sz="1250" dirty="0"/>
-          </a:p>
-        </p:txBody>
-      </p:sp>
-      <p:sp>
-        <p:nvSpPr>
-          <p:cNvPr id="10" name="Text 8"/>
+            <a:pPr algn="ctr" indent="0" marL="0">
+              <a:buNone/>
+            </a:pPr>
+            <a:r>
+              <a:rPr lang="en-US" sz="1150" i="1" dirty="0">
+                <a:solidFill>
+                  <a:srgbClr val="6B7B8A"/>
+                </a:solidFill>
+                <a:latin typeface="Calibri" pitchFamily="34" charset="0"/>
+                <a:ea typeface="Calibri" pitchFamily="34" charset="-122"/>
+                <a:cs typeface="Calibri" pitchFamily="34" charset="-120"/>
+              </a:rPr>
+              <a:t>Original schematic. Sample type, VAF, and clinical use differ; a ~50% VAF in a relevant gene should prompt germline confirmation.</a:t>
+            </a:r>
+            <a:endParaRPr lang="en-US" sz="1150" dirty="0"/>
+          </a:p>
+        </p:txBody>
+      </p:sp>
+      <p:sp>
+        <p:nvSpPr>
+          <p:cNvPr id="7" name="Text 4"/>
           <p:cNvSpPr/>
           <p:nvPr/>
         </p:nvSpPr>
@@ -3519,7 +3624,7 @@
       </p:sp>
       <p:sp>
         <p:nvSpPr>
-          <p:cNvPr id="11" name="Text 9"/>
+          <p:cNvPr id="8" name="Text 5"/>
           <p:cNvSpPr/>
           <p:nvPr/>
         </p:nvSpPr>
@@ -3649,7 +3754,7 @@
                 <a:ea typeface="Calibri" pitchFamily="34" charset="-122"/>
                 <a:cs typeface="Calibri" pitchFamily="34" charset="-120"/>
               </a:rPr>
-              <a:t>MOLECULAR &amp; CYTOGENETICS   ·   SIGNATURES</a:t>
+              <a:t>MOLECULAR &amp; CYTOGENETICS   ·   GERMLINE</a:t>
             </a:r>
             <a:endParaRPr lang="en-US" sz="1100" dirty="0"/>
           </a:p>
@@ -3688,7 +3793,7 @@
                 <a:ea typeface="Calibri" pitchFamily="34" charset="-122"/>
                 <a:cs typeface="Calibri" pitchFamily="34" charset="-120"/>
               </a:rPr>
-              <a:t>Liquid Biopsy, MSI, and TMB</a:t>
+              <a:t>Hereditary Risk &amp; Consent</a:t>
             </a:r>
             <a:endParaRPr lang="en-US" sz="3000" dirty="0"/>
           </a:p>
@@ -3756,7 +3861,7 @@
                 <a:ea typeface="Calibri" pitchFamily="34" charset="-122"/>
                 <a:cs typeface="Calibri" pitchFamily="34" charset="-120"/>
               </a:rPr>
-              <a:t>LIQUID BIOPSY (CTDNA)</a:t>
+              <a:t>WHEN GERMLINE MATTERS</a:t>
             </a:r>
             <a:endParaRPr lang="en-US" sz="1200" dirty="0"/>
           </a:p>
@@ -3799,7 +3904,7 @@
                 <a:ea typeface="Calibri" pitchFamily="34" charset="-122"/>
                 <a:cs typeface="Calibri" pitchFamily="34" charset="-120"/>
               </a:rPr>
-              <a:t>Detects circulating tumor DNA in plasma — useful when tissue is inadequate or for monitoring.</a:t>
+              <a:t>Hereditary syndromes (e.g., BRCA1/2, Lynch) carry risk for the patient and relatives.</a:t>
             </a:r>
             <a:endParaRPr lang="en-US" sz="1250" dirty="0"/>
           </a:p>
@@ -3820,7 +3925,7 @@
                 <a:ea typeface="Calibri" pitchFamily="34" charset="-122"/>
                 <a:cs typeface="Calibri" pitchFamily="34" charset="-120"/>
               </a:rPr>
-              <a:t>Low tumor shedding can cause false negatives; a negative does not exclude a mutation.</a:t>
+              <a:t>Germline results inform screening and prevention.</a:t>
             </a:r>
             <a:endParaRPr lang="en-US" sz="1250" dirty="0"/>
           </a:p>
@@ -3841,7 +3946,7 @@
                 <a:ea typeface="Calibri" pitchFamily="34" charset="-122"/>
                 <a:cs typeface="Calibri" pitchFamily="34" charset="-120"/>
               </a:rPr>
-              <a:t>Useful for detecting resistance mutations and tracking response.</a:t>
+              <a:t>Require informed consent and genetic counseling.</a:t>
             </a:r>
             <a:endParaRPr lang="en-US" sz="1250" dirty="0"/>
           </a:p>
@@ -3862,7 +3967,7 @@
                 <a:ea typeface="Calibri" pitchFamily="34" charset="-122"/>
                 <a:cs typeface="Calibri" pitchFamily="34" charset="-120"/>
               </a:rPr>
-              <a:t>Clonal hematopoiesis can confound interpretation.</a:t>
+              <a:t>Distinct reporting from somatic findings.</a:t>
             </a:r>
             <a:endParaRPr lang="en-US" sz="1250" dirty="0"/>
           </a:p>
@@ -3885,7 +3990,7 @@
             </a:avLst>
           </a:prstGeom>
           <a:solidFill>
-            <a:srgbClr val="E0F2F4"/>
+            <a:srgbClr val="DDF0EF"/>
           </a:solidFill>
           <a:ln/>
           <a:effectLst>
@@ -3930,7 +4035,7 @@
                 <a:ea typeface="Calibri" pitchFamily="34" charset="-122"/>
                 <a:cs typeface="Calibri" pitchFamily="34" charset="-120"/>
               </a:rPr>
-              <a:t>MSI AND TMB</a:t>
+              <a:t>INCIDENTAL GERMLINE</a:t>
             </a:r>
             <a:endParaRPr lang="en-US" sz="1200" dirty="0"/>
           </a:p>
@@ -3973,7 +4078,7 @@
                 <a:ea typeface="Calibri" pitchFamily="34" charset="-122"/>
                 <a:cs typeface="Calibri" pitchFamily="34" charset="-120"/>
               </a:rPr>
-              <a:t>Microsatellite instability / mismatch-repair deficiency predicts immunotherapy response and flags Lynch syndrome.</a:t>
+              <a:t>Tumor-only testing can incidentally suggest a germline variant (high VAF in a predisposition gene).</a:t>
             </a:r>
             <a:endParaRPr lang="en-US" sz="1250" dirty="0"/>
           </a:p>
@@ -3994,7 +4099,7 @@
                 <a:ea typeface="Calibri" pitchFamily="34" charset="-122"/>
                 <a:cs typeface="Calibri" pitchFamily="34" charset="-120"/>
               </a:rPr>
-              <a:t>Tumor mutational burden is an immunotherapy biomarker in some contexts.</a:t>
+              <a:t>Confirm in normal tissue before attributing inheritance.</a:t>
             </a:r>
             <a:endParaRPr lang="en-US" sz="1250" dirty="0"/>
           </a:p>
@@ -4015,7 +4120,7 @@
                 <a:ea typeface="Calibri" pitchFamily="34" charset="-122"/>
                 <a:cs typeface="Calibri" pitchFamily="34" charset="-120"/>
               </a:rPr>
-              <a:t>Methods: PCR (MSI), IHC (MMR proteins), or NGS.</a:t>
+              <a:t>Refer for counseling.</a:t>
             </a:r>
             <a:endParaRPr lang="en-US" sz="1250" dirty="0"/>
           </a:p>
@@ -4036,7 +4141,7 @@
                 <a:ea typeface="Calibri" pitchFamily="34" charset="-122"/>
                 <a:cs typeface="Calibri" pitchFamily="34" charset="-120"/>
               </a:rPr>
-              <a:t>Interpret thresholds per validated assay and tumor type.</a:t>
+              <a:t>Have a policy for secondary findings.</a:t>
             </a:r>
             <a:endParaRPr lang="en-US" sz="1250" dirty="0"/>
           </a:p>
@@ -4159,6 +4264,570 @@
 <file path=ppt/slides/slide12.xml><?xml version="1.0" encoding="utf-8"?>
 <p:sld xmlns:a="http://schemas.openxmlformats.org/drawingml/2006/main" xmlns:r="http://schemas.openxmlformats.org/officeDocument/2006/relationships" xmlns:p="http://schemas.openxmlformats.org/presentationml/2006/main">
   <p:cSld name="Slide 12">
+    <p:bg>
+      <p:bgPr>
+        <a:solidFill>
+          <a:srgbClr val="FFFFFF"/>
+        </a:solidFill>
+      </p:bgPr>
+    </p:bg>
+    <p:spTree>
+      <p:nvGrpSpPr>
+        <p:cNvPr id="1" name=""/>
+        <p:cNvGrpSpPr/>
+        <p:nvPr/>
+      </p:nvGrpSpPr>
+      <p:grpSpPr>
+        <a:xfrm>
+          <a:off x="0" y="0"/>
+          <a:ext cx="0" cy="0"/>
+          <a:chOff x="0" y="0"/>
+          <a:chExt cx="0" cy="0"/>
+        </a:xfrm>
+      </p:grpSpPr>
+      <p:sp>
+        <p:nvSpPr>
+          <p:cNvPr id="2" name="Text 0"/>
+          <p:cNvSpPr/>
+          <p:nvPr/>
+        </p:nvSpPr>
+        <p:spPr>
+          <a:xfrm>
+            <a:off x="566928" y="329184"/>
+            <a:ext cx="10515600" cy="310896"/>
+          </a:xfrm>
+          <a:prstGeom prst="rect">
+            <a:avLst/>
+          </a:prstGeom>
+          <a:noFill/>
+          <a:ln/>
+        </p:spPr>
+        <p:txBody>
+          <a:bodyPr wrap="square" lIns="0" tIns="0" rIns="0" bIns="0" rtlCol="0" anchor="ctr"/>
+          <a:lstStyle/>
+          <a:p>
+            <a:pPr algn="l" indent="0" marL="0">
+              <a:buNone/>
+            </a:pPr>
+            <a:r>
+              <a:rPr lang="en-US" sz="1100" b="1" spc="150" kern="0" dirty="0">
+                <a:solidFill>
+                  <a:srgbClr val="00838F"/>
+                </a:solidFill>
+                <a:latin typeface="Calibri" pitchFamily="34" charset="0"/>
+                <a:ea typeface="Calibri" pitchFamily="34" charset="-122"/>
+                <a:cs typeface="Calibri" pitchFamily="34" charset="-120"/>
+              </a:rPr>
+              <a:t>MOLECULAR &amp; CYTOGENETICS   ·   LIQUID BIOPSY</a:t>
+            </a:r>
+            <a:endParaRPr lang="en-US" sz="1100" dirty="0"/>
+          </a:p>
+        </p:txBody>
+      </p:sp>
+      <p:sp>
+        <p:nvSpPr>
+          <p:cNvPr id="3" name="Text 1"/>
+          <p:cNvSpPr/>
+          <p:nvPr/>
+        </p:nvSpPr>
+        <p:spPr>
+          <a:xfrm>
+            <a:off x="566928" y="713232"/>
+            <a:ext cx="11064240" cy="749808"/>
+          </a:xfrm>
+          <a:prstGeom prst="rect">
+            <a:avLst/>
+          </a:prstGeom>
+          <a:noFill/>
+          <a:ln/>
+        </p:spPr>
+        <p:txBody>
+          <a:bodyPr wrap="square" lIns="0" tIns="0" rIns="0" bIns="0" rtlCol="0" anchor="ctr"/>
+          <a:lstStyle/>
+          <a:p>
+            <a:pPr algn="l" indent="0" marL="0">
+              <a:buNone/>
+            </a:pPr>
+            <a:r>
+              <a:rPr lang="en-US" sz="3000" b="1" dirty="0">
+                <a:solidFill>
+                  <a:srgbClr val="0E3A5F"/>
+                </a:solidFill>
+                <a:latin typeface="Calibri" pitchFamily="34" charset="0"/>
+                <a:ea typeface="Calibri" pitchFamily="34" charset="-122"/>
+                <a:cs typeface="Calibri" pitchFamily="34" charset="-120"/>
+              </a:rPr>
+              <a:t>Circulating Tumor DNA</a:t>
+            </a:r>
+            <a:endParaRPr lang="en-US" sz="3000" dirty="0"/>
+          </a:p>
+        </p:txBody>
+      </p:sp>
+      <p:sp>
+        <p:nvSpPr>
+          <p:cNvPr id="4" name="Shape 2"/>
+          <p:cNvSpPr/>
+          <p:nvPr/>
+        </p:nvSpPr>
+        <p:spPr>
+          <a:xfrm>
+            <a:off x="566928" y="1517904"/>
+            <a:ext cx="5346040" cy="4114800"/>
+          </a:xfrm>
+          <a:prstGeom prst="roundRect">
+            <a:avLst>
+              <a:gd name="adj" fmla="val 2000"/>
+            </a:avLst>
+          </a:prstGeom>
+          <a:solidFill>
+            <a:srgbClr val="E0F2F4"/>
+          </a:solidFill>
+          <a:ln/>
+          <a:effectLst>
+            <a:outerShdw sx="100000" sy="100000" kx="0" ky="0" algn="bl" rotWithShape="0" blurRad="88900" dist="25400" dir="5400000">
+              <a:srgbClr val="22303C">
+                <a:alpha val="12000"/>
+              </a:srgbClr>
+            </a:outerShdw>
+          </a:effectLst>
+        </p:spPr>
+      </p:sp>
+      <p:sp>
+        <p:nvSpPr>
+          <p:cNvPr id="5" name="Text 3"/>
+          <p:cNvSpPr/>
+          <p:nvPr/>
+        </p:nvSpPr>
+        <p:spPr>
+          <a:xfrm>
+            <a:off x="804672" y="1682496"/>
+            <a:ext cx="4888840" cy="274320"/>
+          </a:xfrm>
+          <a:prstGeom prst="rect">
+            <a:avLst/>
+          </a:prstGeom>
+          <a:noFill/>
+          <a:ln/>
+        </p:spPr>
+        <p:txBody>
+          <a:bodyPr wrap="square" lIns="0" tIns="0" rIns="0" bIns="0" rtlCol="0" anchor="ctr"/>
+          <a:lstStyle/>
+          <a:p>
+            <a:pPr indent="0" marL="0">
+              <a:buNone/>
+            </a:pPr>
+            <a:r>
+              <a:rPr lang="en-US" sz="1200" b="1" spc="100" kern="0" dirty="0">
+                <a:solidFill>
+                  <a:srgbClr val="005A63"/>
+                </a:solidFill>
+                <a:latin typeface="Calibri" pitchFamily="34" charset="0"/>
+                <a:ea typeface="Calibri" pitchFamily="34" charset="-122"/>
+                <a:cs typeface="Calibri" pitchFamily="34" charset="-120"/>
+              </a:rPr>
+              <a:t>USES</a:t>
+            </a:r>
+            <a:endParaRPr lang="en-US" sz="1200" dirty="0"/>
+          </a:p>
+        </p:txBody>
+      </p:sp>
+      <p:sp>
+        <p:nvSpPr>
+          <p:cNvPr id="6" name="Text 4"/>
+          <p:cNvSpPr/>
+          <p:nvPr/>
+        </p:nvSpPr>
+        <p:spPr>
+          <a:xfrm>
+            <a:off x="804672" y="2029968"/>
+            <a:ext cx="4870552" cy="3474720"/>
+          </a:xfrm>
+          <a:prstGeom prst="rect">
+            <a:avLst/>
+          </a:prstGeom>
+          <a:noFill/>
+          <a:ln/>
+        </p:spPr>
+        <p:txBody>
+          <a:bodyPr wrap="square" lIns="0" tIns="0" rIns="0" bIns="0" rtlCol="0" anchor="t"/>
+          <a:lstStyle/>
+          <a:p>
+            <a:pPr algn="l" marL="177800" indent="-177800">
+              <a:spcAft>
+                <a:spcPts val="900"/>
+              </a:spcAft>
+              <a:buSzPct val="100000"/>
+              <a:buChar char="•"/>
+            </a:pPr>
+            <a:r>
+              <a:rPr lang="en-US" sz="1250" b="1" dirty="0">
+                <a:solidFill>
+                  <a:srgbClr val="1B2A38"/>
+                </a:solidFill>
+                <a:latin typeface="Calibri" pitchFamily="34" charset="0"/>
+                <a:ea typeface="Calibri" pitchFamily="34" charset="-122"/>
+                <a:cs typeface="Calibri" pitchFamily="34" charset="-120"/>
+              </a:rPr>
+              <a:t>cfDNA can detect actionable mutations when tissue is insufficient.</a:t>
+            </a:r>
+            <a:endParaRPr lang="en-US" sz="1250" dirty="0"/>
+          </a:p>
+          <a:p>
+            <a:pPr algn="l" marL="177800" indent="-177800">
+              <a:spcAft>
+                <a:spcPts val="900"/>
+              </a:spcAft>
+              <a:buSzPct val="100000"/>
+              <a:buChar char="•"/>
+            </a:pPr>
+            <a:r>
+              <a:rPr lang="en-US" sz="1250" dirty="0">
+                <a:solidFill>
+                  <a:srgbClr val="33444F"/>
+                </a:solidFill>
+                <a:latin typeface="Calibri" pitchFamily="34" charset="0"/>
+                <a:ea typeface="Calibri" pitchFamily="34" charset="-122"/>
+                <a:cs typeface="Calibri" pitchFamily="34" charset="-120"/>
+              </a:rPr>
+              <a:t>Useful for monitoring response and resistance.</a:t>
+            </a:r>
+            <a:endParaRPr lang="en-US" sz="1250" dirty="0"/>
+          </a:p>
+          <a:p>
+            <a:pPr algn="l" marL="177800" indent="-177800">
+              <a:spcAft>
+                <a:spcPts val="900"/>
+              </a:spcAft>
+              <a:buSzPct val="100000"/>
+              <a:buChar char="•"/>
+            </a:pPr>
+            <a:r>
+              <a:rPr lang="en-US" sz="1250" dirty="0">
+                <a:solidFill>
+                  <a:srgbClr val="33444F"/>
+                </a:solidFill>
+                <a:latin typeface="Calibri" pitchFamily="34" charset="0"/>
+                <a:ea typeface="Calibri" pitchFamily="34" charset="-122"/>
+                <a:cs typeface="Calibri" pitchFamily="34" charset="-120"/>
+              </a:rPr>
+              <a:t>Minimally invasive, repeatable.</a:t>
+            </a:r>
+            <a:endParaRPr lang="en-US" sz="1250" dirty="0"/>
+          </a:p>
+          <a:p>
+            <a:pPr algn="l" marL="177800" indent="-177800">
+              <a:spcAft>
+                <a:spcPts val="900"/>
+              </a:spcAft>
+              <a:buSzPct val="100000"/>
+              <a:buChar char="•"/>
+            </a:pPr>
+            <a:r>
+              <a:rPr lang="en-US" sz="1250" dirty="0">
+                <a:solidFill>
+                  <a:srgbClr val="33444F"/>
+                </a:solidFill>
+                <a:latin typeface="Calibri" pitchFamily="34" charset="0"/>
+                <a:ea typeface="Calibri" pitchFamily="34" charset="-122"/>
+                <a:cs typeface="Calibri" pitchFamily="34" charset="-120"/>
+              </a:rPr>
+              <a:t>Detects some resistance mutations early.</a:t>
+            </a:r>
+            <a:endParaRPr lang="en-US" sz="1250" dirty="0"/>
+          </a:p>
+        </p:txBody>
+      </p:sp>
+      <p:sp>
+        <p:nvSpPr>
+          <p:cNvPr id="7" name="Shape 5"/>
+          <p:cNvSpPr/>
+          <p:nvPr/>
+        </p:nvSpPr>
+        <p:spPr>
+          <a:xfrm>
+            <a:off x="6278728" y="1517904"/>
+            <a:ext cx="5346040" cy="4114800"/>
+          </a:xfrm>
+          <a:prstGeom prst="roundRect">
+            <a:avLst>
+              <a:gd name="adj" fmla="val 2000"/>
+            </a:avLst>
+          </a:prstGeom>
+          <a:solidFill>
+            <a:srgbClr val="DDF0EF"/>
+          </a:solidFill>
+          <a:ln/>
+          <a:effectLst>
+            <a:outerShdw sx="100000" sy="100000" kx="0" ky="0" algn="bl" rotWithShape="0" blurRad="88900" dist="25400" dir="5400000">
+              <a:srgbClr val="22303C">
+                <a:alpha val="12000"/>
+              </a:srgbClr>
+            </a:outerShdw>
+          </a:effectLst>
+        </p:spPr>
+      </p:sp>
+      <p:sp>
+        <p:nvSpPr>
+          <p:cNvPr id="8" name="Text 6"/>
+          <p:cNvSpPr/>
+          <p:nvPr/>
+        </p:nvSpPr>
+        <p:spPr>
+          <a:xfrm>
+            <a:off x="6516472" y="1682496"/>
+            <a:ext cx="4888840" cy="274320"/>
+          </a:xfrm>
+          <a:prstGeom prst="rect">
+            <a:avLst/>
+          </a:prstGeom>
+          <a:noFill/>
+          <a:ln/>
+        </p:spPr>
+        <p:txBody>
+          <a:bodyPr wrap="square" lIns="0" tIns="0" rIns="0" bIns="0" rtlCol="0" anchor="ctr"/>
+          <a:lstStyle/>
+          <a:p>
+            <a:pPr indent="0" marL="0">
+              <a:buNone/>
+            </a:pPr>
+            <a:r>
+              <a:rPr lang="en-US" sz="1200" b="1" spc="100" kern="0" dirty="0">
+                <a:solidFill>
+                  <a:srgbClr val="005A63"/>
+                </a:solidFill>
+                <a:latin typeface="Calibri" pitchFamily="34" charset="0"/>
+                <a:ea typeface="Calibri" pitchFamily="34" charset="-122"/>
+                <a:cs typeface="Calibri" pitchFamily="34" charset="-120"/>
+              </a:rPr>
+              <a:t>LIMITS</a:t>
+            </a:r>
+            <a:endParaRPr lang="en-US" sz="1200" dirty="0"/>
+          </a:p>
+        </p:txBody>
+      </p:sp>
+      <p:sp>
+        <p:nvSpPr>
+          <p:cNvPr id="9" name="Text 7"/>
+          <p:cNvSpPr/>
+          <p:nvPr/>
+        </p:nvSpPr>
+        <p:spPr>
+          <a:xfrm>
+            <a:off x="6516472" y="2029968"/>
+            <a:ext cx="4870552" cy="3474720"/>
+          </a:xfrm>
+          <a:prstGeom prst="rect">
+            <a:avLst/>
+          </a:prstGeom>
+          <a:noFill/>
+          <a:ln/>
+        </p:spPr>
+        <p:txBody>
+          <a:bodyPr wrap="square" lIns="0" tIns="0" rIns="0" bIns="0" rtlCol="0" anchor="t"/>
+          <a:lstStyle/>
+          <a:p>
+            <a:pPr algn="l" marL="177800" indent="-177800">
+              <a:spcAft>
+                <a:spcPts val="900"/>
+              </a:spcAft>
+              <a:buSzPct val="100000"/>
+              <a:buChar char="•"/>
+            </a:pPr>
+            <a:r>
+              <a:rPr lang="en-US" sz="1250" b="1" dirty="0">
+                <a:solidFill>
+                  <a:srgbClr val="1B2A38"/>
+                </a:solidFill>
+                <a:latin typeface="Calibri" pitchFamily="34" charset="0"/>
+                <a:ea typeface="Calibri" pitchFamily="34" charset="-122"/>
+                <a:cs typeface="Calibri" pitchFamily="34" charset="-120"/>
+              </a:rPr>
+              <a:t>Lower sensitivity than tissue — a negative result does not exclude a mutation.</a:t>
+            </a:r>
+            <a:endParaRPr lang="en-US" sz="1250" dirty="0"/>
+          </a:p>
+          <a:p>
+            <a:pPr algn="l" marL="177800" indent="-177800">
+              <a:spcAft>
+                <a:spcPts val="900"/>
+              </a:spcAft>
+              <a:buSzPct val="100000"/>
+              <a:buChar char="•"/>
+            </a:pPr>
+            <a:r>
+              <a:rPr lang="en-US" sz="1250" dirty="0">
+                <a:solidFill>
+                  <a:srgbClr val="33444F"/>
+                </a:solidFill>
+                <a:latin typeface="Calibri" pitchFamily="34" charset="0"/>
+                <a:ea typeface="Calibri" pitchFamily="34" charset="-122"/>
+                <a:cs typeface="Calibri" pitchFamily="34" charset="-120"/>
+              </a:rPr>
+              <a:t>Clonal hematopoiesis can confound interpretation.</a:t>
+            </a:r>
+            <a:endParaRPr lang="en-US" sz="1250" dirty="0"/>
+          </a:p>
+          <a:p>
+            <a:pPr algn="l" marL="177800" indent="-177800">
+              <a:spcAft>
+                <a:spcPts val="900"/>
+              </a:spcAft>
+              <a:buSzPct val="100000"/>
+              <a:buChar char="•"/>
+            </a:pPr>
+            <a:r>
+              <a:rPr lang="en-US" sz="1250" dirty="0">
+                <a:solidFill>
+                  <a:srgbClr val="33444F"/>
+                </a:solidFill>
+                <a:latin typeface="Calibri" pitchFamily="34" charset="0"/>
+                <a:ea typeface="Calibri" pitchFamily="34" charset="-122"/>
+                <a:cs typeface="Calibri" pitchFamily="34" charset="-120"/>
+              </a:rPr>
+              <a:t>Low tumor shedding reduces yield.</a:t>
+            </a:r>
+            <a:endParaRPr lang="en-US" sz="1250" dirty="0"/>
+          </a:p>
+          <a:p>
+            <a:pPr algn="l" marL="177800" indent="-177800">
+              <a:spcAft>
+                <a:spcPts val="900"/>
+              </a:spcAft>
+              <a:buSzPct val="100000"/>
+              <a:buChar char="•"/>
+            </a:pPr>
+            <a:r>
+              <a:rPr lang="en-US" sz="1250" dirty="0">
+                <a:solidFill>
+                  <a:srgbClr val="33444F"/>
+                </a:solidFill>
+                <a:latin typeface="Calibri" pitchFamily="34" charset="0"/>
+                <a:ea typeface="Calibri" pitchFamily="34" charset="-122"/>
+                <a:cs typeface="Calibri" pitchFamily="34" charset="-120"/>
+              </a:rPr>
+              <a:t>Confirm key results when feasible.</a:t>
+            </a:r>
+            <a:endParaRPr lang="en-US" sz="1250" dirty="0"/>
+          </a:p>
+        </p:txBody>
+      </p:sp>
+      <p:sp>
+        <p:nvSpPr>
+          <p:cNvPr id="10" name="Text 8"/>
+          <p:cNvSpPr/>
+          <p:nvPr/>
+        </p:nvSpPr>
+        <p:spPr>
+          <a:xfrm>
+            <a:off x="566928" y="6473952"/>
+            <a:ext cx="7772400" cy="274320"/>
+          </a:xfrm>
+          <a:prstGeom prst="rect">
+            <a:avLst/>
+          </a:prstGeom>
+          <a:noFill/>
+          <a:ln/>
+        </p:spPr>
+        <p:txBody>
+          <a:bodyPr wrap="square" lIns="0" tIns="0" rIns="0" bIns="0" rtlCol="0" anchor="ctr"/>
+          <a:lstStyle/>
+          <a:p>
+            <a:pPr algn="l" indent="0" marL="0">
+              <a:buNone/>
+            </a:pPr>
+            <a:r>
+              <a:rPr lang="en-US" sz="850" dirty="0">
+                <a:solidFill>
+                  <a:srgbClr val="9AA8B4"/>
+                </a:solidFill>
+                <a:latin typeface="Calibri" pitchFamily="34" charset="0"/>
+                <a:ea typeface="Calibri" pitchFamily="34" charset="-122"/>
+                <a:cs typeface="Calibri" pitchFamily="34" charset="-120"/>
+              </a:rPr>
+              <a:t>Makassed General Hospital  ·  Department of Laboratory Medicine</a:t>
+            </a:r>
+            <a:endParaRPr lang="en-US" sz="850" dirty="0"/>
+          </a:p>
+        </p:txBody>
+      </p:sp>
+      <p:sp>
+        <p:nvSpPr>
+          <p:cNvPr id="11" name="Text 9"/>
+          <p:cNvSpPr/>
+          <p:nvPr/>
+        </p:nvSpPr>
+        <p:spPr>
+          <a:xfrm>
+            <a:off x="9814255" y="6473952"/>
+            <a:ext cx="1828800" cy="274320"/>
+          </a:xfrm>
+          <a:prstGeom prst="rect">
+            <a:avLst/>
+          </a:prstGeom>
+          <a:noFill/>
+          <a:ln/>
+        </p:spPr>
+        <p:txBody>
+          <a:bodyPr wrap="square" lIns="0" tIns="0" rIns="0" bIns="0" rtlCol="0" anchor="ctr"/>
+          <a:lstStyle/>
+          <a:p>
+            <a:pPr algn="r" indent="0" marL="0">
+              <a:buNone/>
+            </a:pPr>
+            <a:r>
+              <a:rPr lang="en-US" sz="850" dirty="0">
+                <a:solidFill>
+                  <a:srgbClr val="9AA8B4"/>
+                </a:solidFill>
+                <a:latin typeface="Calibri" pitchFamily="34" charset="0"/>
+                <a:ea typeface="Calibri" pitchFamily="34" charset="-122"/>
+                <a:cs typeface="Calibri" pitchFamily="34" charset="-120"/>
+              </a:rPr>
+              <a:t>CP Lecture Series</a:t>
+            </a:r>
+            <a:pPr algn="r" indent="0" marL="0">
+              <a:buNone/>
+            </a:pPr>
+            <a:r>
+              <a:rPr lang="en-US" sz="850" dirty="0">
+                <a:solidFill>
+                  <a:srgbClr val="DCE4EC"/>
+                </a:solidFill>
+                <a:latin typeface="Calibri" pitchFamily="34" charset="0"/>
+                <a:ea typeface="Calibri" pitchFamily="34" charset="-122"/>
+                <a:cs typeface="Calibri" pitchFamily="34" charset="-120"/>
+              </a:rPr>
+              <a:t>   ·   </a:t>
+            </a:r>
+            <a:pPr algn="r" indent="0" marL="0">
+              <a:buNone/>
+            </a:pPr>
+            <a:r>
+              <a:rPr lang="en-US" sz="850" b="1" dirty="0">
+                <a:solidFill>
+                  <a:srgbClr val="00838F"/>
+                </a:solidFill>
+                <a:latin typeface="Calibri" pitchFamily="34" charset="0"/>
+                <a:ea typeface="Calibri" pitchFamily="34" charset="-122"/>
+                <a:cs typeface="Calibri" pitchFamily="34" charset="-120"/>
+              </a:rPr>
+              <a:t>10</a:t>
+            </a:r>
+            <a:endParaRPr lang="en-US" sz="850" dirty="0"/>
+          </a:p>
+        </p:txBody>
+      </p:sp>
+    </p:spTree>
+  </p:cSld>
+  <p:clrMapOvr>
+    <a:masterClrMapping/>
+  </p:clrMapOvr>
+</p:sld>
+</file>
+
+<file path=ppt/slides/slide13.xml><?xml version="1.0" encoding="utf-8"?>
+<p:sld xmlns:a="http://schemas.openxmlformats.org/drawingml/2006/main" xmlns:r="http://schemas.openxmlformats.org/officeDocument/2006/relationships" xmlns:p="http://schemas.openxmlformats.org/presentationml/2006/main">
+  <p:cSld name="Slide 13">
     <p:bg>
       <p:bgPr>
         <a:solidFill>
@@ -4338,439 +5007,6 @@
               <a:t>Cases &amp; Board Review</a:t>
             </a:r>
             <a:endParaRPr lang="en-US" sz="3800" dirty="0"/>
-          </a:p>
-        </p:txBody>
-      </p:sp>
-    </p:spTree>
-  </p:cSld>
-  <p:clrMapOvr>
-    <a:masterClrMapping/>
-  </p:clrMapOvr>
-</p:sld>
-</file>
-
-<file path=ppt/slides/slide13.xml><?xml version="1.0" encoding="utf-8"?>
-<p:sld xmlns:a="http://schemas.openxmlformats.org/drawingml/2006/main" xmlns:r="http://schemas.openxmlformats.org/officeDocument/2006/relationships" xmlns:p="http://schemas.openxmlformats.org/presentationml/2006/main">
-  <p:cSld name="Slide 13">
-    <p:bg>
-      <p:bgPr>
-        <a:solidFill>
-          <a:srgbClr val="FFFFFF"/>
-        </a:solidFill>
-      </p:bgPr>
-    </p:bg>
-    <p:spTree>
-      <p:nvGrpSpPr>
-        <p:cNvPr id="1" name=""/>
-        <p:cNvGrpSpPr/>
-        <p:nvPr/>
-      </p:nvGrpSpPr>
-      <p:grpSpPr>
-        <a:xfrm>
-          <a:off x="0" y="0"/>
-          <a:ext cx="0" cy="0"/>
-          <a:chOff x="0" y="0"/>
-          <a:chExt cx="0" cy="0"/>
-        </a:xfrm>
-      </p:grpSpPr>
-      <p:sp>
-        <p:nvSpPr>
-          <p:cNvPr id="2" name="Text 0"/>
-          <p:cNvSpPr/>
-          <p:nvPr/>
-        </p:nvSpPr>
-        <p:spPr>
-          <a:xfrm>
-            <a:off x="566928" y="329184"/>
-            <a:ext cx="10515600" cy="310896"/>
-          </a:xfrm>
-          <a:prstGeom prst="rect">
-            <a:avLst/>
-          </a:prstGeom>
-          <a:noFill/>
-          <a:ln/>
-        </p:spPr>
-        <p:txBody>
-          <a:bodyPr wrap="square" lIns="0" tIns="0" rIns="0" bIns="0" rtlCol="0" anchor="ctr"/>
-          <a:lstStyle/>
-          <a:p>
-            <a:pPr algn="l" indent="0" marL="0">
-              <a:buNone/>
-            </a:pPr>
-            <a:r>
-              <a:rPr lang="en-US" sz="1100" b="1" spc="150" kern="0" dirty="0">
-                <a:solidFill>
-                  <a:srgbClr val="00838F"/>
-                </a:solidFill>
-                <a:latin typeface="Calibri" pitchFamily="34" charset="0"/>
-                <a:ea typeface="Calibri" pitchFamily="34" charset="-122"/>
-                <a:cs typeface="Calibri" pitchFamily="34" charset="-120"/>
-              </a:rPr>
-              <a:t>MOLECULAR &amp; CYTOGENETICS   ·   CASE 1</a:t>
-            </a:r>
-            <a:endParaRPr lang="en-US" sz="1100" dirty="0"/>
-          </a:p>
-        </p:txBody>
-      </p:sp>
-      <p:sp>
-        <p:nvSpPr>
-          <p:cNvPr id="3" name="Text 1"/>
-          <p:cNvSpPr/>
-          <p:nvPr/>
-        </p:nvSpPr>
-        <p:spPr>
-          <a:xfrm>
-            <a:off x="566928" y="713232"/>
-            <a:ext cx="11064240" cy="749808"/>
-          </a:xfrm>
-          <a:prstGeom prst="rect">
-            <a:avLst/>
-          </a:prstGeom>
-          <a:noFill/>
-          <a:ln/>
-        </p:spPr>
-        <p:txBody>
-          <a:bodyPr wrap="square" lIns="0" tIns="0" rIns="0" bIns="0" rtlCol="0" anchor="ctr"/>
-          <a:lstStyle/>
-          <a:p>
-            <a:pPr algn="l" indent="0" marL="0">
-              <a:buNone/>
-            </a:pPr>
-            <a:r>
-              <a:rPr lang="en-US" sz="3000" b="1" dirty="0">
-                <a:solidFill>
-                  <a:srgbClr val="0E3A5F"/>
-                </a:solidFill>
-                <a:latin typeface="Calibri" pitchFamily="34" charset="0"/>
-                <a:ea typeface="Calibri" pitchFamily="34" charset="-122"/>
-                <a:cs typeface="Calibri" pitchFamily="34" charset="-120"/>
-              </a:rPr>
-              <a:t>Case 1</a:t>
-            </a:r>
-            <a:endParaRPr lang="en-US" sz="3000" dirty="0"/>
-          </a:p>
-        </p:txBody>
-      </p:sp>
-      <p:sp>
-        <p:nvSpPr>
-          <p:cNvPr id="4" name="Shape 2"/>
-          <p:cNvSpPr/>
-          <p:nvPr/>
-        </p:nvSpPr>
-        <p:spPr>
-          <a:xfrm>
-            <a:off x="566928" y="1517904"/>
-            <a:ext cx="11057839" cy="2788920"/>
-          </a:xfrm>
-          <a:prstGeom prst="roundRect">
-            <a:avLst>
-              <a:gd name="adj" fmla="val 2951"/>
-            </a:avLst>
-          </a:prstGeom>
-          <a:solidFill>
-            <a:srgbClr val="E0F2F4"/>
-          </a:solidFill>
-          <a:ln/>
-          <a:effectLst>
-            <a:outerShdw sx="100000" sy="100000" kx="0" ky="0" algn="bl" rotWithShape="0" blurRad="88900" dist="25400" dir="5400000">
-              <a:srgbClr val="22303C">
-                <a:alpha val="12000"/>
-              </a:srgbClr>
-            </a:outerShdw>
-          </a:effectLst>
-        </p:spPr>
-      </p:sp>
-      <p:sp>
-        <p:nvSpPr>
-          <p:cNvPr id="5" name="Text 3"/>
-          <p:cNvSpPr/>
-          <p:nvPr/>
-        </p:nvSpPr>
-        <p:spPr>
-          <a:xfrm>
-            <a:off x="841248" y="1700784"/>
-            <a:ext cx="5486400" cy="292608"/>
-          </a:xfrm>
-          <a:prstGeom prst="rect">
-            <a:avLst/>
-          </a:prstGeom>
-          <a:noFill/>
-          <a:ln/>
-        </p:spPr>
-        <p:txBody>
-          <a:bodyPr wrap="square" lIns="0" tIns="0" rIns="0" bIns="0" rtlCol="0" anchor="ctr"/>
-          <a:lstStyle/>
-          <a:p>
-            <a:pPr indent="0" marL="0">
-              <a:buNone/>
-            </a:pPr>
-            <a:r>
-              <a:rPr lang="en-US" sz="1100" b="1" spc="150" kern="0" dirty="0">
-                <a:solidFill>
-                  <a:srgbClr val="00838F"/>
-                </a:solidFill>
-                <a:latin typeface="Calibri" pitchFamily="34" charset="0"/>
-                <a:ea typeface="Calibri" pitchFamily="34" charset="-122"/>
-                <a:cs typeface="Calibri" pitchFamily="34" charset="-120"/>
-              </a:rPr>
-              <a:t>CLINICAL VIGNETTE</a:t>
-            </a:r>
-            <a:endParaRPr lang="en-US" sz="1100" dirty="0"/>
-          </a:p>
-        </p:txBody>
-      </p:sp>
-      <p:sp>
-        <p:nvSpPr>
-          <p:cNvPr id="6" name="Text 4"/>
-          <p:cNvSpPr/>
-          <p:nvPr/>
-        </p:nvSpPr>
-        <p:spPr>
-          <a:xfrm>
-            <a:off x="841248" y="2029968"/>
-            <a:ext cx="10509199" cy="2148840"/>
-          </a:xfrm>
-          <a:prstGeom prst="rect">
-            <a:avLst/>
-          </a:prstGeom>
-          <a:noFill/>
-          <a:ln/>
-        </p:spPr>
-        <p:txBody>
-          <a:bodyPr wrap="square" lIns="0" tIns="0" rIns="0" bIns="0" rtlCol="0" anchor="t"/>
-          <a:lstStyle/>
-          <a:p>
-            <a:pPr algn="l" indent="0" marL="0">
-              <a:lnSpc>
-                <a:spcPct val="108000"/>
-              </a:lnSpc>
-              <a:buNone/>
-            </a:pPr>
-            <a:r>
-              <a:rPr lang="en-US" sz="1450" dirty="0">
-                <a:solidFill>
-                  <a:srgbClr val="33444F"/>
-                </a:solidFill>
-                <a:latin typeface="Calibri" pitchFamily="34" charset="0"/>
-                <a:ea typeface="Calibri" pitchFamily="34" charset="-122"/>
-                <a:cs typeface="Calibri" pitchFamily="34" charset="-120"/>
-              </a:rPr>
-              <a:t>A lung adenocarcinoma NGS panel is reported as 'negative' for actionable variants, but the pathology note records only ~10% tumor cellularity on a small biopsy.</a:t>
-            </a:r>
-            <a:endParaRPr lang="en-US" sz="1450" dirty="0"/>
-          </a:p>
-        </p:txBody>
-      </p:sp>
-      <p:sp>
-        <p:nvSpPr>
-          <p:cNvPr id="7" name="Shape 5"/>
-          <p:cNvSpPr/>
-          <p:nvPr/>
-        </p:nvSpPr>
-        <p:spPr>
-          <a:xfrm>
-            <a:off x="566928" y="4553712"/>
-            <a:ext cx="11057839" cy="1325880"/>
-          </a:xfrm>
-          <a:prstGeom prst="roundRect">
-            <a:avLst>
-              <a:gd name="adj" fmla="val 6207"/>
-            </a:avLst>
-          </a:prstGeom>
-          <a:solidFill>
-            <a:srgbClr val="0E3A5F"/>
-          </a:solidFill>
-          <a:ln/>
-          <a:effectLst>
-            <a:outerShdw sx="100000" sy="100000" kx="0" ky="0" algn="bl" rotWithShape="0" blurRad="88900" dist="25400" dir="5400000">
-              <a:srgbClr val="22303C">
-                <a:alpha val="12000"/>
-              </a:srgbClr>
-            </a:outerShdw>
-          </a:effectLst>
-        </p:spPr>
-      </p:sp>
-      <p:sp>
-        <p:nvSpPr>
-          <p:cNvPr id="8" name="Text 6"/>
-          <p:cNvSpPr/>
-          <p:nvPr/>
-        </p:nvSpPr>
-        <p:spPr>
-          <a:xfrm>
-            <a:off x="822960" y="4681728"/>
-            <a:ext cx="640080" cy="960120"/>
-          </a:xfrm>
-          <a:prstGeom prst="rect">
-            <a:avLst/>
-          </a:prstGeom>
-          <a:noFill/>
-          <a:ln/>
-        </p:spPr>
-        <p:txBody>
-          <a:bodyPr wrap="square" lIns="0" tIns="0" rIns="0" bIns="0" rtlCol="0" anchor="ctr"/>
-          <a:lstStyle/>
-          <a:p>
-            <a:pPr algn="ctr" indent="0" marL="0">
-              <a:buNone/>
-            </a:pPr>
-            <a:r>
-              <a:rPr lang="en-US" sz="4000" b="1" dirty="0">
-                <a:solidFill>
-                  <a:srgbClr val="00838F"/>
-                </a:solidFill>
-                <a:latin typeface="Calibri" pitchFamily="34" charset="0"/>
-                <a:ea typeface="Calibri" pitchFamily="34" charset="-122"/>
-                <a:cs typeface="Calibri" pitchFamily="34" charset="-120"/>
-              </a:rPr>
-              <a:t>?</a:t>
-            </a:r>
-            <a:endParaRPr lang="en-US" sz="4000" dirty="0"/>
-          </a:p>
-        </p:txBody>
-      </p:sp>
-      <p:sp>
-        <p:nvSpPr>
-          <p:cNvPr id="9" name="Text 7"/>
-          <p:cNvSpPr/>
-          <p:nvPr/>
-        </p:nvSpPr>
-        <p:spPr>
-          <a:xfrm>
-            <a:off x="1618488" y="4553712"/>
-            <a:ext cx="9686239" cy="1325880"/>
-          </a:xfrm>
-          <a:prstGeom prst="rect">
-            <a:avLst/>
-          </a:prstGeom>
-          <a:noFill/>
-          <a:ln/>
-        </p:spPr>
-        <p:txBody>
-          <a:bodyPr wrap="square" lIns="0" tIns="0" rIns="0" bIns="0" rtlCol="0" anchor="ctr"/>
-          <a:lstStyle/>
-          <a:p>
-            <a:pPr algn="l" indent="0" marL="0">
-              <a:buNone/>
-            </a:pPr>
-            <a:r>
-              <a:rPr lang="en-US" sz="1500" b="1" dirty="0">
-                <a:solidFill>
-                  <a:srgbClr val="FFFFFF"/>
-                </a:solidFill>
-                <a:latin typeface="Calibri" pitchFamily="34" charset="0"/>
-                <a:ea typeface="Calibri" pitchFamily="34" charset="-122"/>
-                <a:cs typeface="Calibri" pitchFamily="34" charset="-120"/>
-              </a:rPr>
-              <a:t>How confident are you in the negative result, and what should happen?</a:t>
-            </a:r>
-            <a:endParaRPr lang="en-US" sz="1500" dirty="0"/>
-          </a:p>
-        </p:txBody>
-      </p:sp>
-      <p:sp>
-        <p:nvSpPr>
-          <p:cNvPr id="10" name="Text 8"/>
-          <p:cNvSpPr/>
-          <p:nvPr/>
-        </p:nvSpPr>
-        <p:spPr>
-          <a:xfrm>
-            <a:off x="566928" y="6473952"/>
-            <a:ext cx="7772400" cy="274320"/>
-          </a:xfrm>
-          <a:prstGeom prst="rect">
-            <a:avLst/>
-          </a:prstGeom>
-          <a:noFill/>
-          <a:ln/>
-        </p:spPr>
-        <p:txBody>
-          <a:bodyPr wrap="square" lIns="0" tIns="0" rIns="0" bIns="0" rtlCol="0" anchor="ctr"/>
-          <a:lstStyle/>
-          <a:p>
-            <a:pPr algn="l" indent="0" marL="0">
-              <a:buNone/>
-            </a:pPr>
-            <a:r>
-              <a:rPr lang="en-US" sz="850" dirty="0">
-                <a:solidFill>
-                  <a:srgbClr val="9AA8B4"/>
-                </a:solidFill>
-                <a:latin typeface="Calibri" pitchFamily="34" charset="0"/>
-                <a:ea typeface="Calibri" pitchFamily="34" charset="-122"/>
-                <a:cs typeface="Calibri" pitchFamily="34" charset="-120"/>
-              </a:rPr>
-              <a:t>Makassed General Hospital  ·  Department of Laboratory Medicine</a:t>
-            </a:r>
-            <a:endParaRPr lang="en-US" sz="850" dirty="0"/>
-          </a:p>
-        </p:txBody>
-      </p:sp>
-      <p:sp>
-        <p:nvSpPr>
-          <p:cNvPr id="11" name="Text 9"/>
-          <p:cNvSpPr/>
-          <p:nvPr/>
-        </p:nvSpPr>
-        <p:spPr>
-          <a:xfrm>
-            <a:off x="9814255" y="6473952"/>
-            <a:ext cx="1828800" cy="274320"/>
-          </a:xfrm>
-          <a:prstGeom prst="rect">
-            <a:avLst/>
-          </a:prstGeom>
-          <a:noFill/>
-          <a:ln/>
-        </p:spPr>
-        <p:txBody>
-          <a:bodyPr wrap="square" lIns="0" tIns="0" rIns="0" bIns="0" rtlCol="0" anchor="ctr"/>
-          <a:lstStyle/>
-          <a:p>
-            <a:pPr algn="r" indent="0" marL="0">
-              <a:buNone/>
-            </a:pPr>
-            <a:r>
-              <a:rPr lang="en-US" sz="850" dirty="0">
-                <a:solidFill>
-                  <a:srgbClr val="9AA8B4"/>
-                </a:solidFill>
-                <a:latin typeface="Calibri" pitchFamily="34" charset="0"/>
-                <a:ea typeface="Calibri" pitchFamily="34" charset="-122"/>
-                <a:cs typeface="Calibri" pitchFamily="34" charset="-120"/>
-              </a:rPr>
-              <a:t>CP Lecture Series</a:t>
-            </a:r>
-            <a:pPr algn="r" indent="0" marL="0">
-              <a:buNone/>
-            </a:pPr>
-            <a:r>
-              <a:rPr lang="en-US" sz="850" dirty="0">
-                <a:solidFill>
-                  <a:srgbClr val="DCE4EC"/>
-                </a:solidFill>
-                <a:latin typeface="Calibri" pitchFamily="34" charset="0"/>
-                <a:ea typeface="Calibri" pitchFamily="34" charset="-122"/>
-                <a:cs typeface="Calibri" pitchFamily="34" charset="-120"/>
-              </a:rPr>
-              <a:t>   ·   </a:t>
-            </a:r>
-            <a:pPr algn="r" indent="0" marL="0">
-              <a:buNone/>
-            </a:pPr>
-            <a:r>
-              <a:rPr lang="en-US" sz="850" b="1" dirty="0">
-                <a:solidFill>
-                  <a:srgbClr val="00838F"/>
-                </a:solidFill>
-                <a:latin typeface="Calibri" pitchFamily="34" charset="0"/>
-                <a:ea typeface="Calibri" pitchFamily="34" charset="-122"/>
-                <a:cs typeface="Calibri" pitchFamily="34" charset="-120"/>
-              </a:rPr>
-              <a:t>10</a:t>
-            </a:r>
-            <a:endParaRPr lang="en-US" sz="850" dirty="0"/>
           </a:p>
         </p:txBody>
       </p:sp>
@@ -4839,7 +5075,7 @@
                 <a:ea typeface="Calibri" pitchFamily="34" charset="-122"/>
                 <a:cs typeface="Calibri" pitchFamily="34" charset="-120"/>
               </a:rPr>
-              <a:t>MOLECULAR &amp; CYTOGENETICS   ·   CASE 1  ·  RESOLUTION</a:t>
+              <a:t>MOLECULAR &amp; CYTOGENETICS   ·   CASE 1</a:t>
             </a:r>
             <a:endParaRPr lang="en-US" sz="1100" dirty="0"/>
           </a:p>
@@ -4878,7 +5114,7 @@
                 <a:ea typeface="Calibri" pitchFamily="34" charset="-122"/>
                 <a:cs typeface="Calibri" pitchFamily="34" charset="-120"/>
               </a:rPr>
-              <a:t>Case 1: Low Tumor Fraction</a:t>
+              <a:t>Case 1</a:t>
             </a:r>
             <a:endParaRPr lang="en-US" sz="3000" dirty="0"/>
           </a:p>
@@ -4886,124 +5122,18 @@
       </p:sp>
       <p:sp>
         <p:nvSpPr>
-          <p:cNvPr id="4" name="Text 2"/>
-          <p:cNvSpPr/>
-          <p:nvPr/>
-        </p:nvSpPr>
-        <p:spPr>
-          <a:xfrm>
-            <a:off x="566928" y="1554480"/>
-            <a:ext cx="6413547" cy="4023360"/>
-          </a:xfrm>
-          <a:prstGeom prst="rect">
-            <a:avLst/>
-          </a:prstGeom>
-          <a:noFill/>
-          <a:ln/>
-        </p:spPr>
-        <p:txBody>
-          <a:bodyPr wrap="square" lIns="0" tIns="0" rIns="0" bIns="0" rtlCol="0" anchor="t"/>
-          <a:lstStyle/>
-          <a:p>
-            <a:pPr algn="l" marL="177800" indent="-177800">
-              <a:spcAft>
-                <a:spcPts val="900"/>
-              </a:spcAft>
-              <a:buSzPct val="100000"/>
-              <a:buChar char="•"/>
-            </a:pPr>
-            <a:r>
-              <a:rPr lang="en-US" sz="1400" b="1" dirty="0">
-                <a:solidFill>
-                  <a:srgbClr val="1B2A38"/>
-                </a:solidFill>
-                <a:latin typeface="Calibri" pitchFamily="34" charset="0"/>
-                <a:ea typeface="Calibri" pitchFamily="34" charset="-122"/>
-                <a:cs typeface="Calibri" pitchFamily="34" charset="-120"/>
-              </a:rPr>
-              <a:t>A 'negative' result at very low tumor fraction may be a false negative from insufficient tumor input.</a:t>
-            </a:r>
-            <a:endParaRPr lang="en-US" sz="1400" dirty="0"/>
-          </a:p>
-          <a:p>
-            <a:pPr algn="l" marL="177800" indent="-177800">
-              <a:spcAft>
-                <a:spcPts val="900"/>
-              </a:spcAft>
-              <a:buSzPct val="100000"/>
-              <a:buChar char="•"/>
-            </a:pPr>
-            <a:r>
-              <a:rPr lang="en-US" sz="1400" dirty="0">
-                <a:solidFill>
-                  <a:srgbClr val="33444F"/>
-                </a:solidFill>
-                <a:latin typeface="Calibri" pitchFamily="34" charset="0"/>
-                <a:ea typeface="Calibri" pitchFamily="34" charset="-122"/>
-                <a:cs typeface="Calibri" pitchFamily="34" charset="-120"/>
-              </a:rPr>
-              <a:t>Report the tumor cellularity and the assay’s limit of detection.</a:t>
-            </a:r>
-            <a:endParaRPr lang="en-US" sz="1400" dirty="0"/>
-          </a:p>
-          <a:p>
-            <a:pPr algn="l" marL="177800" indent="-177800">
-              <a:spcAft>
-                <a:spcPts val="900"/>
-              </a:spcAft>
-              <a:buSzPct val="100000"/>
-              <a:buChar char="•"/>
-            </a:pPr>
-            <a:r>
-              <a:rPr lang="en-US" sz="1400" dirty="0">
-                <a:solidFill>
-                  <a:srgbClr val="33444F"/>
-                </a:solidFill>
-                <a:latin typeface="Calibri" pitchFamily="34" charset="0"/>
-                <a:ea typeface="Calibri" pitchFamily="34" charset="-122"/>
-                <a:cs typeface="Calibri" pitchFamily="34" charset="-120"/>
-              </a:rPr>
-              <a:t>Consider macrodissection, a different block, or liquid biopsy.</a:t>
-            </a:r>
-            <a:endParaRPr lang="en-US" sz="1400" dirty="0"/>
-          </a:p>
-          <a:p>
-            <a:pPr algn="l" marL="177800" indent="-177800">
-              <a:spcAft>
-                <a:spcPts val="900"/>
-              </a:spcAft>
-              <a:buSzPct val="100000"/>
-              <a:buChar char="•"/>
-            </a:pPr>
-            <a:r>
-              <a:rPr lang="en-US" sz="1400" dirty="0">
-                <a:solidFill>
-                  <a:srgbClr val="33444F"/>
-                </a:solidFill>
-                <a:latin typeface="Calibri" pitchFamily="34" charset="0"/>
-                <a:ea typeface="Calibri" pitchFamily="34" charset="-122"/>
-                <a:cs typeface="Calibri" pitchFamily="34" charset="-120"/>
-              </a:rPr>
-              <a:t>Do not exclude a targetable mutation on an inadequate sample.</a:t>
-            </a:r>
-            <a:endParaRPr lang="en-US" sz="1400" dirty="0"/>
-          </a:p>
-        </p:txBody>
-      </p:sp>
-      <p:sp>
-        <p:nvSpPr>
-          <p:cNvPr id="5" name="Shape 3"/>
-          <p:cNvSpPr/>
-          <p:nvPr/>
-        </p:nvSpPr>
-        <p:spPr>
-          <a:xfrm>
-            <a:off x="7422788" y="1554480"/>
-            <a:ext cx="4201979" cy="3977640"/>
+          <p:cNvPr id="4" name="Shape 2"/>
+          <p:cNvSpPr/>
+          <p:nvPr/>
+        </p:nvSpPr>
+        <p:spPr>
+          <a:xfrm>
+            <a:off x="566928" y="1517904"/>
+            <a:ext cx="11057839" cy="2788920"/>
           </a:xfrm>
           <a:prstGeom prst="roundRect">
             <a:avLst>
-              <a:gd name="adj" fmla="val 2069"/>
+              <a:gd name="adj" fmla="val 2951"/>
             </a:avLst>
           </a:prstGeom>
           <a:solidFill>
@@ -5021,53 +5151,53 @@
       </p:sp>
       <p:sp>
         <p:nvSpPr>
+          <p:cNvPr id="5" name="Text 3"/>
+          <p:cNvSpPr/>
+          <p:nvPr/>
+        </p:nvSpPr>
+        <p:spPr>
+          <a:xfrm>
+            <a:off x="841248" y="1700784"/>
+            <a:ext cx="5486400" cy="292608"/>
+          </a:xfrm>
+          <a:prstGeom prst="rect">
+            <a:avLst/>
+          </a:prstGeom>
+          <a:noFill/>
+          <a:ln/>
+        </p:spPr>
+        <p:txBody>
+          <a:bodyPr wrap="square" lIns="0" tIns="0" rIns="0" bIns="0" rtlCol="0" anchor="ctr"/>
+          <a:lstStyle/>
+          <a:p>
+            <a:pPr indent="0" marL="0">
+              <a:buNone/>
+            </a:pPr>
+            <a:r>
+              <a:rPr lang="en-US" sz="1100" b="1" spc="150" kern="0" dirty="0">
+                <a:solidFill>
+                  <a:srgbClr val="00838F"/>
+                </a:solidFill>
+                <a:latin typeface="Calibri" pitchFamily="34" charset="0"/>
+                <a:ea typeface="Calibri" pitchFamily="34" charset="-122"/>
+                <a:cs typeface="Calibri" pitchFamily="34" charset="-120"/>
+              </a:rPr>
+              <a:t>CLINICAL VIGNETTE</a:t>
+            </a:r>
+            <a:endParaRPr lang="en-US" sz="1100" dirty="0"/>
+          </a:p>
+        </p:txBody>
+      </p:sp>
+      <p:sp>
+        <p:nvSpPr>
           <p:cNvPr id="6" name="Text 4"/>
           <p:cNvSpPr/>
           <p:nvPr/>
         </p:nvSpPr>
         <p:spPr>
           <a:xfrm>
-            <a:off x="7660532" y="1755648"/>
-            <a:ext cx="3744779" cy="310896"/>
-          </a:xfrm>
-          <a:prstGeom prst="rect">
-            <a:avLst/>
-          </a:prstGeom>
-          <a:noFill/>
-          <a:ln/>
-        </p:spPr>
-        <p:txBody>
-          <a:bodyPr wrap="square" lIns="0" tIns="0" rIns="0" bIns="0" rtlCol="0" anchor="ctr"/>
-          <a:lstStyle/>
-          <a:p>
-            <a:pPr indent="0" marL="0">
-              <a:buNone/>
-            </a:pPr>
-            <a:r>
-              <a:rPr lang="en-US" sz="1100" b="1" spc="140" kern="0" dirty="0">
-                <a:solidFill>
-                  <a:srgbClr val="00838F"/>
-                </a:solidFill>
-                <a:latin typeface="Calibri" pitchFamily="34" charset="0"/>
-                <a:ea typeface="Calibri" pitchFamily="34" charset="-122"/>
-                <a:cs typeface="Calibri" pitchFamily="34" charset="-120"/>
-              </a:rPr>
-              <a:t>TEACHING POINT</a:t>
-            </a:r>
-            <a:endParaRPr lang="en-US" sz="1100" dirty="0"/>
-          </a:p>
-        </p:txBody>
-      </p:sp>
-      <p:sp>
-        <p:nvSpPr>
-          <p:cNvPr id="7" name="Text 5"/>
-          <p:cNvSpPr/>
-          <p:nvPr/>
-        </p:nvSpPr>
-        <p:spPr>
-          <a:xfrm>
-            <a:off x="7660532" y="2121408"/>
-            <a:ext cx="3726491" cy="3291840"/>
+            <a:off x="841248" y="2029968"/>
+            <a:ext cx="10509199" cy="2148840"/>
           </a:xfrm>
           <a:prstGeom prst="rect">
             <a:avLst/>
@@ -5081,12 +5211,12 @@
           <a:p>
             <a:pPr algn="l" indent="0" marL="0">
               <a:lnSpc>
-                <a:spcPct val="110000"/>
+                <a:spcPct val="108000"/>
               </a:lnSpc>
               <a:buNone/>
             </a:pPr>
             <a:r>
-              <a:rPr lang="en-US" sz="1350" dirty="0">
+              <a:rPr lang="en-US" sz="1450" dirty="0">
                 <a:solidFill>
                   <a:srgbClr val="33444F"/>
                 </a:solidFill>
@@ -5094,15 +5224,122 @@
                 <a:ea typeface="Calibri" pitchFamily="34" charset="-122"/>
                 <a:cs typeface="Calibri" pitchFamily="34" charset="-120"/>
               </a:rPr>
-              <a:t>Always interpret a negative tumor NGS in light of tumor fraction; a low-cellularity 'negative' may need re-testing or ctDNA.</a:t>
-            </a:r>
-            <a:endParaRPr lang="en-US" sz="1350" dirty="0"/>
-          </a:p>
-        </p:txBody>
+              <a:t>A metastatic colorectal cancer is KRAS-mutated.</a:t>
+            </a:r>
+            <a:endParaRPr lang="en-US" sz="1450" dirty="0"/>
+          </a:p>
+        </p:txBody>
+      </p:sp>
+      <p:sp>
+        <p:nvSpPr>
+          <p:cNvPr id="7" name="Shape 5"/>
+          <p:cNvSpPr/>
+          <p:nvPr/>
+        </p:nvSpPr>
+        <p:spPr>
+          <a:xfrm>
+            <a:off x="566928" y="4553712"/>
+            <a:ext cx="11057839" cy="1325880"/>
+          </a:xfrm>
+          <a:prstGeom prst="roundRect">
+            <a:avLst>
+              <a:gd name="adj" fmla="val 6207"/>
+            </a:avLst>
+          </a:prstGeom>
+          <a:solidFill>
+            <a:srgbClr val="0E3A5F"/>
+          </a:solidFill>
+          <a:ln/>
+          <a:effectLst>
+            <a:outerShdw sx="100000" sy="100000" kx="0" ky="0" algn="bl" rotWithShape="0" blurRad="88900" dist="25400" dir="5400000">
+              <a:srgbClr val="22303C">
+                <a:alpha val="12000"/>
+              </a:srgbClr>
+            </a:outerShdw>
+          </a:effectLst>
+        </p:spPr>
       </p:sp>
       <p:sp>
         <p:nvSpPr>
           <p:cNvPr id="8" name="Text 6"/>
+          <p:cNvSpPr/>
+          <p:nvPr/>
+        </p:nvSpPr>
+        <p:spPr>
+          <a:xfrm>
+            <a:off x="822960" y="4681728"/>
+            <a:ext cx="640080" cy="960120"/>
+          </a:xfrm>
+          <a:prstGeom prst="rect">
+            <a:avLst/>
+          </a:prstGeom>
+          <a:noFill/>
+          <a:ln/>
+        </p:spPr>
+        <p:txBody>
+          <a:bodyPr wrap="square" lIns="0" tIns="0" rIns="0" bIns="0" rtlCol="0" anchor="ctr"/>
+          <a:lstStyle/>
+          <a:p>
+            <a:pPr algn="ctr" indent="0" marL="0">
+              <a:buNone/>
+            </a:pPr>
+            <a:r>
+              <a:rPr lang="en-US" sz="4000" b="1" dirty="0">
+                <a:solidFill>
+                  <a:srgbClr val="00838F"/>
+                </a:solidFill>
+                <a:latin typeface="Calibri" pitchFamily="34" charset="0"/>
+                <a:ea typeface="Calibri" pitchFamily="34" charset="-122"/>
+                <a:cs typeface="Calibri" pitchFamily="34" charset="-120"/>
+              </a:rPr>
+              <a:t>?</a:t>
+            </a:r>
+            <a:endParaRPr lang="en-US" sz="4000" dirty="0"/>
+          </a:p>
+        </p:txBody>
+      </p:sp>
+      <p:sp>
+        <p:nvSpPr>
+          <p:cNvPr id="9" name="Text 7"/>
+          <p:cNvSpPr/>
+          <p:nvPr/>
+        </p:nvSpPr>
+        <p:spPr>
+          <a:xfrm>
+            <a:off x="1618488" y="4553712"/>
+            <a:ext cx="9686239" cy="1325880"/>
+          </a:xfrm>
+          <a:prstGeom prst="rect">
+            <a:avLst/>
+          </a:prstGeom>
+          <a:noFill/>
+          <a:ln/>
+        </p:spPr>
+        <p:txBody>
+          <a:bodyPr wrap="square" lIns="0" tIns="0" rIns="0" bIns="0" rtlCol="0" anchor="ctr"/>
+          <a:lstStyle/>
+          <a:p>
+            <a:pPr algn="l" indent="0" marL="0">
+              <a:buNone/>
+            </a:pPr>
+            <a:r>
+              <a:rPr lang="en-US" sz="1500" b="1" dirty="0">
+                <a:solidFill>
+                  <a:srgbClr val="FFFFFF"/>
+                </a:solidFill>
+                <a:latin typeface="Calibri" pitchFamily="34" charset="0"/>
+                <a:ea typeface="Calibri" pitchFamily="34" charset="-122"/>
+                <a:cs typeface="Calibri" pitchFamily="34" charset="-120"/>
+              </a:rPr>
+              <a:t>What does this predict about anti-EGFR therapy?</a:t>
+            </a:r>
+            <a:endParaRPr lang="en-US" sz="1500" dirty="0"/>
+          </a:p>
+        </p:txBody>
+      </p:sp>
+      <p:sp>
+        <p:nvSpPr>
+          <p:cNvPr id="10" name="Text 8"/>
           <p:cNvSpPr/>
           <p:nvPr/>
         </p:nvSpPr>
@@ -5141,7 +5378,7 @@
       </p:sp>
       <p:sp>
         <p:nvSpPr>
-          <p:cNvPr id="9" name="Text 7"/>
+          <p:cNvPr id="11" name="Text 9"/>
           <p:cNvSpPr/>
           <p:nvPr/>
         </p:nvSpPr>
@@ -5271,7 +5508,7 @@
                 <a:ea typeface="Calibri" pitchFamily="34" charset="-122"/>
                 <a:cs typeface="Calibri" pitchFamily="34" charset="-120"/>
               </a:rPr>
-              <a:t>MOLECULAR &amp; CYTOGENETICS   ·   CASE 2</a:t>
+              <a:t>MOLECULAR &amp; CYTOGENETICS   ·   CASE 1  ·  RESOLUTION</a:t>
             </a:r>
             <a:endParaRPr lang="en-US" sz="1100" dirty="0"/>
           </a:p>
@@ -5310,7 +5547,7 @@
                 <a:ea typeface="Calibri" pitchFamily="34" charset="-122"/>
                 <a:cs typeface="Calibri" pitchFamily="34" charset="-120"/>
               </a:rPr>
-              <a:t>Case 2</a:t>
+              <a:t>Case 1: KRAS and Anti-EGFR Resistance</a:t>
             </a:r>
             <a:endParaRPr lang="en-US" sz="3000" dirty="0"/>
           </a:p>
@@ -5318,18 +5555,124 @@
       </p:sp>
       <p:sp>
         <p:nvSpPr>
-          <p:cNvPr id="4" name="Shape 2"/>
-          <p:cNvSpPr/>
-          <p:nvPr/>
-        </p:nvSpPr>
-        <p:spPr>
-          <a:xfrm>
-            <a:off x="566928" y="1517904"/>
-            <a:ext cx="11057839" cy="2788920"/>
+          <p:cNvPr id="4" name="Text 2"/>
+          <p:cNvSpPr/>
+          <p:nvPr/>
+        </p:nvSpPr>
+        <p:spPr>
+          <a:xfrm>
+            <a:off x="566928" y="1554480"/>
+            <a:ext cx="6413547" cy="4023360"/>
+          </a:xfrm>
+          <a:prstGeom prst="rect">
+            <a:avLst/>
+          </a:prstGeom>
+          <a:noFill/>
+          <a:ln/>
+        </p:spPr>
+        <p:txBody>
+          <a:bodyPr wrap="square" lIns="0" tIns="0" rIns="0" bIns="0" rtlCol="0" anchor="t"/>
+          <a:lstStyle/>
+          <a:p>
+            <a:pPr algn="l" marL="177800" indent="-177800">
+              <a:spcAft>
+                <a:spcPts val="900"/>
+              </a:spcAft>
+              <a:buSzPct val="100000"/>
+              <a:buChar char="•"/>
+            </a:pPr>
+            <a:r>
+              <a:rPr lang="en-US" sz="1400" b="1" dirty="0">
+                <a:solidFill>
+                  <a:srgbClr val="1B2A38"/>
+                </a:solidFill>
+                <a:latin typeface="Calibri" pitchFamily="34" charset="0"/>
+                <a:ea typeface="Calibri" pitchFamily="34" charset="-122"/>
+                <a:cs typeface="Calibri" pitchFamily="34" charset="-120"/>
+              </a:rPr>
+              <a:t>KRAS (or NRAS) mutation predicts resistance to anti-EGFR antibody therapy in colorectal cancer.</a:t>
+            </a:r>
+            <a:endParaRPr lang="en-US" sz="1400" dirty="0"/>
+          </a:p>
+          <a:p>
+            <a:pPr algn="l" marL="177800" indent="-177800">
+              <a:spcAft>
+                <a:spcPts val="900"/>
+              </a:spcAft>
+              <a:buSzPct val="100000"/>
+              <a:buChar char="•"/>
+            </a:pPr>
+            <a:r>
+              <a:rPr lang="en-US" sz="1400" dirty="0">
+                <a:solidFill>
+                  <a:srgbClr val="33444F"/>
+                </a:solidFill>
+                <a:latin typeface="Calibri" pitchFamily="34" charset="0"/>
+                <a:ea typeface="Calibri" pitchFamily="34" charset="-122"/>
+                <a:cs typeface="Calibri" pitchFamily="34" charset="-120"/>
+              </a:rPr>
+              <a:t>It is a negative predictive biomarker.</a:t>
+            </a:r>
+            <a:endParaRPr lang="en-US" sz="1400" dirty="0"/>
+          </a:p>
+          <a:p>
+            <a:pPr algn="l" marL="177800" indent="-177800">
+              <a:spcAft>
+                <a:spcPts val="900"/>
+              </a:spcAft>
+              <a:buSzPct val="100000"/>
+              <a:buChar char="•"/>
+            </a:pPr>
+            <a:r>
+              <a:rPr lang="en-US" sz="1400" dirty="0">
+                <a:solidFill>
+                  <a:srgbClr val="33444F"/>
+                </a:solidFill>
+                <a:latin typeface="Calibri" pitchFamily="34" charset="0"/>
+                <a:ea typeface="Calibri" pitchFamily="34" charset="-122"/>
+                <a:cs typeface="Calibri" pitchFamily="34" charset="-120"/>
+              </a:rPr>
+              <a:t>Testing prevents ineffective, costly treatment.</a:t>
+            </a:r>
+            <a:endParaRPr lang="en-US" sz="1400" dirty="0"/>
+          </a:p>
+          <a:p>
+            <a:pPr algn="l" marL="177800" indent="-177800">
+              <a:spcAft>
+                <a:spcPts val="900"/>
+              </a:spcAft>
+              <a:buSzPct val="100000"/>
+              <a:buChar char="•"/>
+            </a:pPr>
+            <a:r>
+              <a:rPr lang="en-US" sz="1400" dirty="0">
+                <a:solidFill>
+                  <a:srgbClr val="33444F"/>
+                </a:solidFill>
+                <a:latin typeface="Calibri" pitchFamily="34" charset="0"/>
+                <a:ea typeface="Calibri" pitchFamily="34" charset="-122"/>
+                <a:cs typeface="Calibri" pitchFamily="34" charset="-120"/>
+              </a:rPr>
+              <a:t>Guides alternative therapy choices.</a:t>
+            </a:r>
+            <a:endParaRPr lang="en-US" sz="1400" dirty="0"/>
+          </a:p>
+        </p:txBody>
+      </p:sp>
+      <p:sp>
+        <p:nvSpPr>
+          <p:cNvPr id="5" name="Shape 3"/>
+          <p:cNvSpPr/>
+          <p:nvPr/>
+        </p:nvSpPr>
+        <p:spPr>
+          <a:xfrm>
+            <a:off x="7422788" y="1554480"/>
+            <a:ext cx="4201979" cy="3977640"/>
           </a:xfrm>
           <a:prstGeom prst="roundRect">
             <a:avLst>
-              <a:gd name="adj" fmla="val 2951"/>
+              <a:gd name="adj" fmla="val 2069"/>
             </a:avLst>
           </a:prstGeom>
           <a:solidFill>
@@ -5347,14 +5690,14 @@
       </p:sp>
       <p:sp>
         <p:nvSpPr>
-          <p:cNvPr id="5" name="Text 3"/>
-          <p:cNvSpPr/>
-          <p:nvPr/>
-        </p:nvSpPr>
-        <p:spPr>
-          <a:xfrm>
-            <a:off x="841248" y="1700784"/>
-            <a:ext cx="5486400" cy="292608"/>
+          <p:cNvPr id="6" name="Text 4"/>
+          <p:cNvSpPr/>
+          <p:nvPr/>
+        </p:nvSpPr>
+        <p:spPr>
+          <a:xfrm>
+            <a:off x="7660532" y="1755648"/>
+            <a:ext cx="3744779" cy="310896"/>
           </a:xfrm>
           <a:prstGeom prst="rect">
             <a:avLst/>
@@ -5370,7 +5713,7 @@
               <a:buNone/>
             </a:pPr>
             <a:r>
-              <a:rPr lang="en-US" sz="1100" b="1" spc="150" kern="0" dirty="0">
+              <a:rPr lang="en-US" sz="1100" b="1" spc="140" kern="0" dirty="0">
                 <a:solidFill>
                   <a:srgbClr val="00838F"/>
                 </a:solidFill>
@@ -5378,7 +5721,7 @@
                 <a:ea typeface="Calibri" pitchFamily="34" charset="-122"/>
                 <a:cs typeface="Calibri" pitchFamily="34" charset="-120"/>
               </a:rPr>
-              <a:t>CLINICAL VIGNETTE</a:t>
+              <a:t>TEACHING POINT</a:t>
             </a:r>
             <a:endParaRPr lang="en-US" sz="1100" dirty="0"/>
           </a:p>
@@ -5386,14 +5729,14 @@
       </p:sp>
       <p:sp>
         <p:nvSpPr>
-          <p:cNvPr id="6" name="Text 4"/>
-          <p:cNvSpPr/>
-          <p:nvPr/>
-        </p:nvSpPr>
-        <p:spPr>
-          <a:xfrm>
-            <a:off x="841248" y="2029968"/>
-            <a:ext cx="10509199" cy="2148840"/>
+          <p:cNvPr id="7" name="Text 5"/>
+          <p:cNvSpPr/>
+          <p:nvPr/>
+        </p:nvSpPr>
+        <p:spPr>
+          <a:xfrm>
+            <a:off x="7660532" y="2121408"/>
+            <a:ext cx="3726491" cy="3291840"/>
           </a:xfrm>
           <a:prstGeom prst="rect">
             <a:avLst/>
@@ -5407,12 +5750,12 @@
           <a:p>
             <a:pPr algn="l" indent="0" marL="0">
               <a:lnSpc>
-                <a:spcPct val="108000"/>
+                <a:spcPct val="110000"/>
               </a:lnSpc>
               <a:buNone/>
             </a:pPr>
             <a:r>
-              <a:rPr lang="en-US" sz="1450" dirty="0">
+              <a:rPr lang="en-US" sz="1350" dirty="0">
                 <a:solidFill>
                   <a:srgbClr val="33444F"/>
                 </a:solidFill>
@@ -5420,122 +5763,15 @@
                 <a:ea typeface="Calibri" pitchFamily="34" charset="-122"/>
                 <a:cs typeface="Calibri" pitchFamily="34" charset="-120"/>
               </a:rPr>
-              <a:t>Tumor sequencing in a young patient with breast cancer reveals a pathogenic BRCA1 variant at ~50% allele fraction. The clinician asks whether this is hereditary.</a:t>
-            </a:r>
-            <a:endParaRPr lang="en-US" sz="1450" dirty="0"/>
-          </a:p>
-        </p:txBody>
-      </p:sp>
-      <p:sp>
-        <p:nvSpPr>
-          <p:cNvPr id="7" name="Shape 5"/>
-          <p:cNvSpPr/>
-          <p:nvPr/>
-        </p:nvSpPr>
-        <p:spPr>
-          <a:xfrm>
-            <a:off x="566928" y="4553712"/>
-            <a:ext cx="11057839" cy="1325880"/>
-          </a:xfrm>
-          <a:prstGeom prst="roundRect">
-            <a:avLst>
-              <a:gd name="adj" fmla="val 6207"/>
-            </a:avLst>
-          </a:prstGeom>
-          <a:solidFill>
-            <a:srgbClr val="0E3A5F"/>
-          </a:solidFill>
-          <a:ln/>
-          <a:effectLst>
-            <a:outerShdw sx="100000" sy="100000" kx="0" ky="0" algn="bl" rotWithShape="0" blurRad="88900" dist="25400" dir="5400000">
-              <a:srgbClr val="22303C">
-                <a:alpha val="12000"/>
-              </a:srgbClr>
-            </a:outerShdw>
-          </a:effectLst>
-        </p:spPr>
+              <a:t>Predictive biomarkers can indicate resistance: KRAS/NRAS mutation tells you anti-EGFR therapy will not work.</a:t>
+            </a:r>
+            <a:endParaRPr lang="en-US" sz="1350" dirty="0"/>
+          </a:p>
+        </p:txBody>
       </p:sp>
       <p:sp>
         <p:nvSpPr>
           <p:cNvPr id="8" name="Text 6"/>
-          <p:cNvSpPr/>
-          <p:nvPr/>
-        </p:nvSpPr>
-        <p:spPr>
-          <a:xfrm>
-            <a:off x="822960" y="4681728"/>
-            <a:ext cx="640080" cy="960120"/>
-          </a:xfrm>
-          <a:prstGeom prst="rect">
-            <a:avLst/>
-          </a:prstGeom>
-          <a:noFill/>
-          <a:ln/>
-        </p:spPr>
-        <p:txBody>
-          <a:bodyPr wrap="square" lIns="0" tIns="0" rIns="0" bIns="0" rtlCol="0" anchor="ctr"/>
-          <a:lstStyle/>
-          <a:p>
-            <a:pPr algn="ctr" indent="0" marL="0">
-              <a:buNone/>
-            </a:pPr>
-            <a:r>
-              <a:rPr lang="en-US" sz="4000" b="1" dirty="0">
-                <a:solidFill>
-                  <a:srgbClr val="00838F"/>
-                </a:solidFill>
-                <a:latin typeface="Calibri" pitchFamily="34" charset="0"/>
-                <a:ea typeface="Calibri" pitchFamily="34" charset="-122"/>
-                <a:cs typeface="Calibri" pitchFamily="34" charset="-120"/>
-              </a:rPr>
-              <a:t>?</a:t>
-            </a:r>
-            <a:endParaRPr lang="en-US" sz="4000" dirty="0"/>
-          </a:p>
-        </p:txBody>
-      </p:sp>
-      <p:sp>
-        <p:nvSpPr>
-          <p:cNvPr id="9" name="Text 7"/>
-          <p:cNvSpPr/>
-          <p:nvPr/>
-        </p:nvSpPr>
-        <p:spPr>
-          <a:xfrm>
-            <a:off x="1618488" y="4553712"/>
-            <a:ext cx="9686239" cy="1325880"/>
-          </a:xfrm>
-          <a:prstGeom prst="rect">
-            <a:avLst/>
-          </a:prstGeom>
-          <a:noFill/>
-          <a:ln/>
-        </p:spPr>
-        <p:txBody>
-          <a:bodyPr wrap="square" lIns="0" tIns="0" rIns="0" bIns="0" rtlCol="0" anchor="ctr"/>
-          <a:lstStyle/>
-          <a:p>
-            <a:pPr algn="l" indent="0" marL="0">
-              <a:buNone/>
-            </a:pPr>
-            <a:r>
-              <a:rPr lang="en-US" sz="1500" b="1" dirty="0">
-                <a:solidFill>
-                  <a:srgbClr val="FFFFFF"/>
-                </a:solidFill>
-                <a:latin typeface="Calibri" pitchFamily="34" charset="0"/>
-                <a:ea typeface="Calibri" pitchFamily="34" charset="-122"/>
-                <a:cs typeface="Calibri" pitchFamily="34" charset="-120"/>
-              </a:rPr>
-              <a:t>What does the allele fraction suggest, and what is the next step?</a:t>
-            </a:r>
-            <a:endParaRPr lang="en-US" sz="1500" dirty="0"/>
-          </a:p>
-        </p:txBody>
-      </p:sp>
-      <p:sp>
-        <p:nvSpPr>
-          <p:cNvPr id="10" name="Text 8"/>
           <p:cNvSpPr/>
           <p:nvPr/>
         </p:nvSpPr>
@@ -5574,7 +5810,7 @@
       </p:sp>
       <p:sp>
         <p:nvSpPr>
-          <p:cNvPr id="11" name="Text 9"/>
+          <p:cNvPr id="9" name="Text 7"/>
           <p:cNvSpPr/>
           <p:nvPr/>
         </p:nvSpPr>
@@ -5704,7 +5940,7 @@
                 <a:ea typeface="Calibri" pitchFamily="34" charset="-122"/>
                 <a:cs typeface="Calibri" pitchFamily="34" charset="-120"/>
               </a:rPr>
-              <a:t>MOLECULAR &amp; CYTOGENETICS   ·   CASE 2  ·  RESOLUTION</a:t>
+              <a:t>MOLECULAR &amp; CYTOGENETICS   ·   CASE 2</a:t>
             </a:r>
             <a:endParaRPr lang="en-US" sz="1100" dirty="0"/>
           </a:p>
@@ -5743,7 +5979,7 @@
                 <a:ea typeface="Calibri" pitchFamily="34" charset="-122"/>
                 <a:cs typeface="Calibri" pitchFamily="34" charset="-120"/>
               </a:rPr>
-              <a:t>Case 2: Possible Germline BRCA1</a:t>
+              <a:t>Case 2</a:t>
             </a:r>
             <a:endParaRPr lang="en-US" sz="3000" dirty="0"/>
           </a:p>
@@ -5751,124 +5987,18 @@
       </p:sp>
       <p:sp>
         <p:nvSpPr>
-          <p:cNvPr id="4" name="Text 2"/>
-          <p:cNvSpPr/>
-          <p:nvPr/>
-        </p:nvSpPr>
-        <p:spPr>
-          <a:xfrm>
-            <a:off x="566928" y="1554480"/>
-            <a:ext cx="6413547" cy="4023360"/>
-          </a:xfrm>
-          <a:prstGeom prst="rect">
-            <a:avLst/>
-          </a:prstGeom>
-          <a:noFill/>
-          <a:ln/>
-        </p:spPr>
-        <p:txBody>
-          <a:bodyPr wrap="square" lIns="0" tIns="0" rIns="0" bIns="0" rtlCol="0" anchor="t"/>
-          <a:lstStyle/>
-          <a:p>
-            <a:pPr algn="l" marL="177800" indent="-177800">
-              <a:spcAft>
-                <a:spcPts val="900"/>
-              </a:spcAft>
-              <a:buSzPct val="100000"/>
-              <a:buChar char="•"/>
-            </a:pPr>
-            <a:r>
-              <a:rPr lang="en-US" sz="1400" b="1" dirty="0">
-                <a:solidFill>
-                  <a:srgbClr val="1B2A38"/>
-                </a:solidFill>
-                <a:latin typeface="Calibri" pitchFamily="34" charset="0"/>
-                <a:ea typeface="Calibri" pitchFamily="34" charset="-122"/>
-                <a:cs typeface="Calibri" pitchFamily="34" charset="-120"/>
-              </a:rPr>
-              <a:t>A ~50% (heterozygous) allele fraction of a BRCA1 pathogenic variant raises suspicion for a GERMLINE origin.</a:t>
-            </a:r>
-            <a:endParaRPr lang="en-US" sz="1400" dirty="0"/>
-          </a:p>
-          <a:p>
-            <a:pPr algn="l" marL="177800" indent="-177800">
-              <a:spcAft>
-                <a:spcPts val="900"/>
-              </a:spcAft>
-              <a:buSzPct val="100000"/>
-              <a:buChar char="•"/>
-            </a:pPr>
-            <a:r>
-              <a:rPr lang="en-US" sz="1400" dirty="0">
-                <a:solidFill>
-                  <a:srgbClr val="33444F"/>
-                </a:solidFill>
-                <a:latin typeface="Calibri" pitchFamily="34" charset="0"/>
-                <a:ea typeface="Calibri" pitchFamily="34" charset="-122"/>
-                <a:cs typeface="Calibri" pitchFamily="34" charset="-120"/>
-              </a:rPr>
-              <a:t>Tumor-only testing cannot confirm germline status.</a:t>
-            </a:r>
-            <a:endParaRPr lang="en-US" sz="1400" dirty="0"/>
-          </a:p>
-          <a:p>
-            <a:pPr algn="l" marL="177800" indent="-177800">
-              <a:spcAft>
-                <a:spcPts val="900"/>
-              </a:spcAft>
-              <a:buSzPct val="100000"/>
-              <a:buChar char="•"/>
-            </a:pPr>
-            <a:r>
-              <a:rPr lang="en-US" sz="1400" dirty="0">
-                <a:solidFill>
-                  <a:srgbClr val="33444F"/>
-                </a:solidFill>
-                <a:latin typeface="Calibri" pitchFamily="34" charset="0"/>
-                <a:ea typeface="Calibri" pitchFamily="34" charset="-122"/>
-                <a:cs typeface="Calibri" pitchFamily="34" charset="-120"/>
-              </a:rPr>
-              <a:t>Order confirmatory germline testing with consent and genetic counseling.</a:t>
-            </a:r>
-            <a:endParaRPr lang="en-US" sz="1400" dirty="0"/>
-          </a:p>
-          <a:p>
-            <a:pPr algn="l" marL="177800" indent="-177800">
-              <a:spcAft>
-                <a:spcPts val="900"/>
-              </a:spcAft>
-              <a:buSzPct val="100000"/>
-              <a:buChar char="•"/>
-            </a:pPr>
-            <a:r>
-              <a:rPr lang="en-US" sz="1400" dirty="0">
-                <a:solidFill>
-                  <a:srgbClr val="33444F"/>
-                </a:solidFill>
-                <a:latin typeface="Calibri" pitchFamily="34" charset="0"/>
-                <a:ea typeface="Calibri" pitchFamily="34" charset="-122"/>
-                <a:cs typeface="Calibri" pitchFamily="34" charset="-120"/>
-              </a:rPr>
-              <a:t>A germline finding has major implications for the patient and family.</a:t>
-            </a:r>
-            <a:endParaRPr lang="en-US" sz="1400" dirty="0"/>
-          </a:p>
-        </p:txBody>
-      </p:sp>
-      <p:sp>
-        <p:nvSpPr>
-          <p:cNvPr id="5" name="Shape 3"/>
-          <p:cNvSpPr/>
-          <p:nvPr/>
-        </p:nvSpPr>
-        <p:spPr>
-          <a:xfrm>
-            <a:off x="7422788" y="1554480"/>
-            <a:ext cx="4201979" cy="3977640"/>
+          <p:cNvPr id="4" name="Shape 2"/>
+          <p:cNvSpPr/>
+          <p:nvPr/>
+        </p:nvSpPr>
+        <p:spPr>
+          <a:xfrm>
+            <a:off x="566928" y="1517904"/>
+            <a:ext cx="11057839" cy="2788920"/>
           </a:xfrm>
           <a:prstGeom prst="roundRect">
             <a:avLst>
-              <a:gd name="adj" fmla="val 2069"/>
+              <a:gd name="adj" fmla="val 2951"/>
             </a:avLst>
           </a:prstGeom>
           <a:solidFill>
@@ -5886,53 +6016,53 @@
       </p:sp>
       <p:sp>
         <p:nvSpPr>
+          <p:cNvPr id="5" name="Text 3"/>
+          <p:cNvSpPr/>
+          <p:nvPr/>
+        </p:nvSpPr>
+        <p:spPr>
+          <a:xfrm>
+            <a:off x="841248" y="1700784"/>
+            <a:ext cx="5486400" cy="292608"/>
+          </a:xfrm>
+          <a:prstGeom prst="rect">
+            <a:avLst/>
+          </a:prstGeom>
+          <a:noFill/>
+          <a:ln/>
+        </p:spPr>
+        <p:txBody>
+          <a:bodyPr wrap="square" lIns="0" tIns="0" rIns="0" bIns="0" rtlCol="0" anchor="ctr"/>
+          <a:lstStyle/>
+          <a:p>
+            <a:pPr indent="0" marL="0">
+              <a:buNone/>
+            </a:pPr>
+            <a:r>
+              <a:rPr lang="en-US" sz="1100" b="1" spc="150" kern="0" dirty="0">
+                <a:solidFill>
+                  <a:srgbClr val="00838F"/>
+                </a:solidFill>
+                <a:latin typeface="Calibri" pitchFamily="34" charset="0"/>
+                <a:ea typeface="Calibri" pitchFamily="34" charset="-122"/>
+                <a:cs typeface="Calibri" pitchFamily="34" charset="-120"/>
+              </a:rPr>
+              <a:t>CLINICAL VIGNETTE</a:t>
+            </a:r>
+            <a:endParaRPr lang="en-US" sz="1100" dirty="0"/>
+          </a:p>
+        </p:txBody>
+      </p:sp>
+      <p:sp>
+        <p:nvSpPr>
           <p:cNvPr id="6" name="Text 4"/>
           <p:cNvSpPr/>
           <p:nvPr/>
         </p:nvSpPr>
         <p:spPr>
           <a:xfrm>
-            <a:off x="7660532" y="1755648"/>
-            <a:ext cx="3744779" cy="310896"/>
-          </a:xfrm>
-          <a:prstGeom prst="rect">
-            <a:avLst/>
-          </a:prstGeom>
-          <a:noFill/>
-          <a:ln/>
-        </p:spPr>
-        <p:txBody>
-          <a:bodyPr wrap="square" lIns="0" tIns="0" rIns="0" bIns="0" rtlCol="0" anchor="ctr"/>
-          <a:lstStyle/>
-          <a:p>
-            <a:pPr indent="0" marL="0">
-              <a:buNone/>
-            </a:pPr>
-            <a:r>
-              <a:rPr lang="en-US" sz="1100" b="1" spc="140" kern="0" dirty="0">
-                <a:solidFill>
-                  <a:srgbClr val="00838F"/>
-                </a:solidFill>
-                <a:latin typeface="Calibri" pitchFamily="34" charset="0"/>
-                <a:ea typeface="Calibri" pitchFamily="34" charset="-122"/>
-                <a:cs typeface="Calibri" pitchFamily="34" charset="-120"/>
-              </a:rPr>
-              <a:t>TEACHING POINT</a:t>
-            </a:r>
-            <a:endParaRPr lang="en-US" sz="1100" dirty="0"/>
-          </a:p>
-        </p:txBody>
-      </p:sp>
-      <p:sp>
-        <p:nvSpPr>
-          <p:cNvPr id="7" name="Text 5"/>
-          <p:cNvSpPr/>
-          <p:nvPr/>
-        </p:nvSpPr>
-        <p:spPr>
-          <a:xfrm>
-            <a:off x="7660532" y="2121408"/>
-            <a:ext cx="3726491" cy="3291840"/>
+            <a:off x="841248" y="2029968"/>
+            <a:ext cx="10509199" cy="2148840"/>
           </a:xfrm>
           <a:prstGeom prst="rect">
             <a:avLst/>
@@ -5946,12 +6076,12 @@
           <a:p>
             <a:pPr algn="l" indent="0" marL="0">
               <a:lnSpc>
-                <a:spcPct val="110000"/>
+                <a:spcPct val="108000"/>
               </a:lnSpc>
               <a:buNone/>
             </a:pPr>
             <a:r>
-              <a:rPr lang="en-US" sz="1350" dirty="0">
+              <a:rPr lang="en-US" sz="1450" dirty="0">
                 <a:solidFill>
                   <a:srgbClr val="33444F"/>
                 </a:solidFill>
@@ -5959,15 +6089,122 @@
                 <a:ea typeface="Calibri" pitchFamily="34" charset="-122"/>
                 <a:cs typeface="Calibri" pitchFamily="34" charset="-120"/>
               </a:rPr>
-              <a:t>Pathogenic variants in hereditary-cancer genes at heterozygous allele fractions warrant confirmatory germline testing and counseling.</a:t>
-            </a:r>
-            <a:endParaRPr lang="en-US" sz="1350" dirty="0"/>
-          </a:p>
-        </p:txBody>
+              <a:t>Tumor profiling in a young patient shows MMR deficiency; MSI-high is confirmed.</a:t>
+            </a:r>
+            <a:endParaRPr lang="en-US" sz="1450" dirty="0"/>
+          </a:p>
+        </p:txBody>
+      </p:sp>
+      <p:sp>
+        <p:nvSpPr>
+          <p:cNvPr id="7" name="Shape 5"/>
+          <p:cNvSpPr/>
+          <p:nvPr/>
+        </p:nvSpPr>
+        <p:spPr>
+          <a:xfrm>
+            <a:off x="566928" y="4553712"/>
+            <a:ext cx="11057839" cy="1325880"/>
+          </a:xfrm>
+          <a:prstGeom prst="roundRect">
+            <a:avLst>
+              <a:gd name="adj" fmla="val 6207"/>
+            </a:avLst>
+          </a:prstGeom>
+          <a:solidFill>
+            <a:srgbClr val="0E3A5F"/>
+          </a:solidFill>
+          <a:ln/>
+          <a:effectLst>
+            <a:outerShdw sx="100000" sy="100000" kx="0" ky="0" algn="bl" rotWithShape="0" blurRad="88900" dist="25400" dir="5400000">
+              <a:srgbClr val="22303C">
+                <a:alpha val="12000"/>
+              </a:srgbClr>
+            </a:outerShdw>
+          </a:effectLst>
+        </p:spPr>
       </p:sp>
       <p:sp>
         <p:nvSpPr>
           <p:cNvPr id="8" name="Text 6"/>
+          <p:cNvSpPr/>
+          <p:nvPr/>
+        </p:nvSpPr>
+        <p:spPr>
+          <a:xfrm>
+            <a:off x="822960" y="4681728"/>
+            <a:ext cx="640080" cy="960120"/>
+          </a:xfrm>
+          <a:prstGeom prst="rect">
+            <a:avLst/>
+          </a:prstGeom>
+          <a:noFill/>
+          <a:ln/>
+        </p:spPr>
+        <p:txBody>
+          <a:bodyPr wrap="square" lIns="0" tIns="0" rIns="0" bIns="0" rtlCol="0" anchor="ctr"/>
+          <a:lstStyle/>
+          <a:p>
+            <a:pPr algn="ctr" indent="0" marL="0">
+              <a:buNone/>
+            </a:pPr>
+            <a:r>
+              <a:rPr lang="en-US" sz="4000" b="1" dirty="0">
+                <a:solidFill>
+                  <a:srgbClr val="00838F"/>
+                </a:solidFill>
+                <a:latin typeface="Calibri" pitchFamily="34" charset="0"/>
+                <a:ea typeface="Calibri" pitchFamily="34" charset="-122"/>
+                <a:cs typeface="Calibri" pitchFamily="34" charset="-120"/>
+              </a:rPr>
+              <a:t>?</a:t>
+            </a:r>
+            <a:endParaRPr lang="en-US" sz="4000" dirty="0"/>
+          </a:p>
+        </p:txBody>
+      </p:sp>
+      <p:sp>
+        <p:nvSpPr>
+          <p:cNvPr id="9" name="Text 7"/>
+          <p:cNvSpPr/>
+          <p:nvPr/>
+        </p:nvSpPr>
+        <p:spPr>
+          <a:xfrm>
+            <a:off x="1618488" y="4553712"/>
+            <a:ext cx="9686239" cy="1325880"/>
+          </a:xfrm>
+          <a:prstGeom prst="rect">
+            <a:avLst/>
+          </a:prstGeom>
+          <a:noFill/>
+          <a:ln/>
+        </p:spPr>
+        <p:txBody>
+          <a:bodyPr wrap="square" lIns="0" tIns="0" rIns="0" bIns="0" rtlCol="0" anchor="ctr"/>
+          <a:lstStyle/>
+          <a:p>
+            <a:pPr algn="l" indent="0" marL="0">
+              <a:buNone/>
+            </a:pPr>
+            <a:r>
+              <a:rPr lang="en-US" sz="1500" b="1" dirty="0">
+                <a:solidFill>
+                  <a:srgbClr val="FFFFFF"/>
+                </a:solidFill>
+                <a:latin typeface="Calibri" pitchFamily="34" charset="0"/>
+                <a:ea typeface="Calibri" pitchFamily="34" charset="-122"/>
+                <a:cs typeface="Calibri" pitchFamily="34" charset="-120"/>
+              </a:rPr>
+              <a:t>What two implications follow?</a:t>
+            </a:r>
+            <a:endParaRPr lang="en-US" sz="1500" dirty="0"/>
+          </a:p>
+        </p:txBody>
+      </p:sp>
+      <p:sp>
+        <p:nvSpPr>
+          <p:cNvPr id="10" name="Text 8"/>
           <p:cNvSpPr/>
           <p:nvPr/>
         </p:nvSpPr>
@@ -6006,7 +6243,7 @@
       </p:sp>
       <p:sp>
         <p:nvSpPr>
-          <p:cNvPr id="9" name="Text 7"/>
+          <p:cNvPr id="11" name="Text 9"/>
           <p:cNvSpPr/>
           <p:nvPr/>
         </p:nvSpPr>
@@ -6136,7 +6373,7 @@
                 <a:ea typeface="Calibri" pitchFamily="34" charset="-122"/>
                 <a:cs typeface="Calibri" pitchFamily="34" charset="-120"/>
               </a:rPr>
-              <a:t>MOLECULAR &amp; CYTOGENETICS   ·   BOARD REVIEW  ·  Q1</a:t>
+              <a:t>MOLECULAR &amp; CYTOGENETICS   ·   CASE 2  ·  RESOLUTION</a:t>
             </a:r>
             <a:endParaRPr lang="en-US" sz="1100" dirty="0"/>
           </a:p>
@@ -6167,7 +6404,7 @@
               <a:buNone/>
             </a:pPr>
             <a:r>
-              <a:rPr lang="en-US" sz="2600" b="1" dirty="0">
+              <a:rPr lang="en-US" sz="3000" b="1" dirty="0">
                 <a:solidFill>
                   <a:srgbClr val="0E3A5F"/>
                 </a:solidFill>
@@ -6175,9 +6412,9 @@
                 <a:ea typeface="Calibri" pitchFamily="34" charset="-122"/>
                 <a:cs typeface="Calibri" pitchFamily="34" charset="-120"/>
               </a:rPr>
-              <a:t>Board-Style Review</a:t>
-            </a:r>
-            <a:endParaRPr lang="en-US" sz="2600" dirty="0"/>
+              <a:t>Case 2: MSI-High / MMR Deficiency</a:t>
+            </a:r>
+            <a:endParaRPr lang="en-US" sz="3000" dirty="0"/>
           </a:p>
         </p:txBody>
       </p:sp>
@@ -6189,8 +6426,8 @@
         </p:nvSpPr>
         <p:spPr>
           <a:xfrm>
-            <a:off x="566928" y="1417320"/>
-            <a:ext cx="11057839" cy="914400"/>
+            <a:off x="566928" y="1554480"/>
+            <a:ext cx="6413547" cy="4023360"/>
           </a:xfrm>
           <a:prstGeom prst="rect">
             <a:avLst/>
@@ -6202,14 +6439,15 @@
           <a:bodyPr wrap="square" lIns="0" tIns="0" rIns="0" bIns="0" rtlCol="0" anchor="t"/>
           <a:lstStyle/>
           <a:p>
-            <a:pPr algn="l" indent="0" marL="0">
-              <a:lnSpc>
-                <a:spcPct val="105000"/>
-              </a:lnSpc>
-              <a:buNone/>
-            </a:pPr>
-            <a:r>
-              <a:rPr lang="en-US" sz="1450" b="1" dirty="0">
+            <a:pPr algn="l" marL="177800" indent="-177800">
+              <a:spcAft>
+                <a:spcPts val="900"/>
+              </a:spcAft>
+              <a:buSzPct val="100000"/>
+              <a:buChar char="•"/>
+            </a:pPr>
+            <a:r>
+              <a:rPr lang="en-US" sz="1400" b="1" dirty="0">
                 <a:solidFill>
                   <a:srgbClr val="1B2A38"/>
                 </a:solidFill>
@@ -6217,41 +6455,20 @@
                 <a:ea typeface="Calibri" pitchFamily="34" charset="-122"/>
                 <a:cs typeface="Calibri" pitchFamily="34" charset="-120"/>
               </a:rPr>
-              <a:t>A 'negative' tumor NGS result on a specimen with 10% tumor cellularity should be interpreted as:</a:t>
-            </a:r>
-            <a:endParaRPr lang="en-US" sz="1450" dirty="0"/>
-          </a:p>
-        </p:txBody>
-      </p:sp>
-      <p:sp>
-        <p:nvSpPr>
-          <p:cNvPr id="5" name="Text 3"/>
-          <p:cNvSpPr/>
-          <p:nvPr/>
-        </p:nvSpPr>
-        <p:spPr>
-          <a:xfrm>
-            <a:off x="658368" y="2395728"/>
-            <a:ext cx="6192390" cy="3017520"/>
-          </a:xfrm>
-          <a:prstGeom prst="rect">
-            <a:avLst/>
-          </a:prstGeom>
-          <a:noFill/>
-          <a:ln/>
-        </p:spPr>
-        <p:txBody>
-          <a:bodyPr wrap="square" lIns="0" tIns="0" rIns="0" bIns="0" rtlCol="0" anchor="t"/>
-          <a:lstStyle/>
-          <a:p>
-            <a:pPr algn="l" indent="0" marL="0">
+              <a:t>MSI-high/MMR-deficient tumors may respond to immunotherapy and may signal Lynch syndrome.</a:t>
+            </a:r>
+            <a:endParaRPr lang="en-US" sz="1400" dirty="0"/>
+          </a:p>
+          <a:p>
+            <a:pPr algn="l" marL="177800" indent="-177800">
               <a:spcAft>
-                <a:spcPts val="600"/>
+                <a:spcPts val="900"/>
               </a:spcAft>
-              <a:buNone/>
-            </a:pPr>
-            <a:r>
-              <a:rPr lang="en-US" sz="1350" dirty="0">
+              <a:buSzPct val="100000"/>
+              <a:buChar char="•"/>
+            </a:pPr>
+            <a:r>
+              <a:rPr lang="en-US" sz="1400" dirty="0">
                 <a:solidFill>
                   <a:srgbClr val="33444F"/>
                 </a:solidFill>
@@ -6259,39 +6476,41 @@
                 <a:ea typeface="Calibri" pitchFamily="34" charset="-122"/>
                 <a:cs typeface="Calibri" pitchFamily="34" charset="-120"/>
               </a:rPr>
-              <a:t>A. Definitely no mutation present</a:t>
-            </a:r>
-            <a:endParaRPr lang="en-US" sz="1350" dirty="0"/>
-          </a:p>
-          <a:p>
-            <a:pPr algn="l" indent="0" marL="0">
+              <a:t>This links a somatic finding to possible germline risk.</a:t>
+            </a:r>
+            <a:endParaRPr lang="en-US" sz="1400" dirty="0"/>
+          </a:p>
+          <a:p>
+            <a:pPr algn="l" marL="177800" indent="-177800">
               <a:spcAft>
-                <a:spcPts val="600"/>
+                <a:spcPts val="900"/>
               </a:spcAft>
-              <a:buNone/>
-            </a:pPr>
-            <a:r>
-              <a:rPr lang="en-US" sz="1350" b="1" dirty="0">
-                <a:solidFill>
-                  <a:srgbClr val="005A63"/>
-                </a:solidFill>
-                <a:latin typeface="Calibri" pitchFamily="34" charset="0"/>
-                <a:ea typeface="Calibri" pitchFamily="34" charset="-122"/>
-                <a:cs typeface="Calibri" pitchFamily="34" charset="-120"/>
-              </a:rPr>
-              <a:t>B. Possibly a false negative due to low tumor fraction</a:t>
-            </a:r>
-            <a:endParaRPr lang="en-US" sz="1350" dirty="0"/>
-          </a:p>
-          <a:p>
-            <a:pPr algn="l" indent="0" marL="0">
+              <a:buSzPct val="100000"/>
+              <a:buChar char="•"/>
+            </a:pPr>
+            <a:r>
+              <a:rPr lang="en-US" sz="1400" dirty="0">
+                <a:solidFill>
+                  <a:srgbClr val="33444F"/>
+                </a:solidFill>
+                <a:latin typeface="Calibri" pitchFamily="34" charset="0"/>
+                <a:ea typeface="Calibri" pitchFamily="34" charset="-122"/>
+                <a:cs typeface="Calibri" pitchFamily="34" charset="-120"/>
+              </a:rPr>
+              <a:t>Refer for germline evaluation and counseling.</a:t>
+            </a:r>
+            <a:endParaRPr lang="en-US" sz="1400" dirty="0"/>
+          </a:p>
+          <a:p>
+            <a:pPr algn="l" marL="177800" indent="-177800">
               <a:spcAft>
-                <a:spcPts val="600"/>
+                <a:spcPts val="900"/>
               </a:spcAft>
-              <a:buNone/>
-            </a:pPr>
-            <a:r>
-              <a:rPr lang="en-US" sz="1350" dirty="0">
+              <a:buSzPct val="100000"/>
+              <a:buChar char="•"/>
+            </a:pPr>
+            <a:r>
+              <a:rPr lang="en-US" sz="1400" dirty="0">
                 <a:solidFill>
                   <a:srgbClr val="33444F"/>
                 </a:solidFill>
@@ -6299,66 +6518,26 @@
                 <a:ea typeface="Calibri" pitchFamily="34" charset="-122"/>
                 <a:cs typeface="Calibri" pitchFamily="34" charset="-120"/>
               </a:rPr>
-              <a:t>C. Proof of benign disease</a:t>
-            </a:r>
-            <a:endParaRPr lang="en-US" sz="1350" dirty="0"/>
-          </a:p>
-          <a:p>
-            <a:pPr algn="l" indent="0" marL="0">
-              <a:spcAft>
-                <a:spcPts val="600"/>
-              </a:spcAft>
-              <a:buNone/>
-            </a:pPr>
-            <a:r>
-              <a:rPr lang="en-US" sz="1350" dirty="0">
-                <a:solidFill>
-                  <a:srgbClr val="33444F"/>
-                </a:solidFill>
-                <a:latin typeface="Calibri" pitchFamily="34" charset="0"/>
-                <a:ea typeface="Calibri" pitchFamily="34" charset="-122"/>
-                <a:cs typeface="Calibri" pitchFamily="34" charset="-120"/>
-              </a:rPr>
-              <a:t>D. A germline result</a:t>
-            </a:r>
-            <a:endParaRPr lang="en-US" sz="1350" dirty="0"/>
-          </a:p>
-          <a:p>
-            <a:pPr algn="l" indent="0" marL="0">
-              <a:spcAft>
-                <a:spcPts val="600"/>
-              </a:spcAft>
-              <a:buNone/>
-            </a:pPr>
-            <a:r>
-              <a:rPr lang="en-US" sz="1350" dirty="0">
-                <a:solidFill>
-                  <a:srgbClr val="33444F"/>
-                </a:solidFill>
-                <a:latin typeface="Calibri" pitchFamily="34" charset="0"/>
-                <a:ea typeface="Calibri" pitchFamily="34" charset="-122"/>
-                <a:cs typeface="Calibri" pitchFamily="34" charset="-120"/>
-              </a:rPr>
-              <a:t>E. A contamination artifact</a:t>
-            </a:r>
-            <a:endParaRPr lang="en-US" sz="1350" dirty="0"/>
-          </a:p>
-        </p:txBody>
-      </p:sp>
-      <p:sp>
-        <p:nvSpPr>
-          <p:cNvPr id="6" name="Shape 4"/>
-          <p:cNvSpPr/>
-          <p:nvPr/>
-        </p:nvSpPr>
-        <p:spPr>
-          <a:xfrm>
-            <a:off x="7201632" y="2395728"/>
-            <a:ext cx="4423136" cy="3246120"/>
+              <a:t>Both therapeutic and hereditary implications apply.</a:t>
+            </a:r>
+            <a:endParaRPr lang="en-US" sz="1400" dirty="0"/>
+          </a:p>
+        </p:txBody>
+      </p:sp>
+      <p:sp>
+        <p:nvSpPr>
+          <p:cNvPr id="5" name="Shape 3"/>
+          <p:cNvSpPr/>
+          <p:nvPr/>
+        </p:nvSpPr>
+        <p:spPr>
+          <a:xfrm>
+            <a:off x="7422788" y="1554480"/>
+            <a:ext cx="4201979" cy="3977640"/>
           </a:xfrm>
           <a:prstGeom prst="roundRect">
             <a:avLst>
-              <a:gd name="adj" fmla="val 2535"/>
+              <a:gd name="adj" fmla="val 2069"/>
             </a:avLst>
           </a:prstGeom>
           <a:solidFill>
@@ -6376,67 +6555,53 @@
       </p:sp>
       <p:sp>
         <p:nvSpPr>
+          <p:cNvPr id="6" name="Text 4"/>
+          <p:cNvSpPr/>
+          <p:nvPr/>
+        </p:nvSpPr>
+        <p:spPr>
+          <a:xfrm>
+            <a:off x="7660532" y="1755648"/>
+            <a:ext cx="3744779" cy="310896"/>
+          </a:xfrm>
+          <a:prstGeom prst="rect">
+            <a:avLst/>
+          </a:prstGeom>
+          <a:noFill/>
+          <a:ln/>
+        </p:spPr>
+        <p:txBody>
+          <a:bodyPr wrap="square" lIns="0" tIns="0" rIns="0" bIns="0" rtlCol="0" anchor="ctr"/>
+          <a:lstStyle/>
+          <a:p>
+            <a:pPr indent="0" marL="0">
+              <a:buNone/>
+            </a:pPr>
+            <a:r>
+              <a:rPr lang="en-US" sz="1100" b="1" spc="140" kern="0" dirty="0">
+                <a:solidFill>
+                  <a:srgbClr val="00838F"/>
+                </a:solidFill>
+                <a:latin typeface="Calibri" pitchFamily="34" charset="0"/>
+                <a:ea typeface="Calibri" pitchFamily="34" charset="-122"/>
+                <a:cs typeface="Calibri" pitchFamily="34" charset="-120"/>
+              </a:rPr>
+              <a:t>TEACHING POINT</a:t>
+            </a:r>
+            <a:endParaRPr lang="en-US" sz="1100" dirty="0"/>
+          </a:p>
+        </p:txBody>
+      </p:sp>
+      <p:sp>
+        <p:nvSpPr>
           <p:cNvPr id="7" name="Text 5"/>
           <p:cNvSpPr/>
           <p:nvPr/>
         </p:nvSpPr>
         <p:spPr>
           <a:xfrm>
-            <a:off x="7439376" y="2578608"/>
-            <a:ext cx="3965936" cy="457200"/>
-          </a:xfrm>
-          <a:prstGeom prst="rect">
-            <a:avLst/>
-          </a:prstGeom>
-          <a:noFill/>
-          <a:ln/>
-        </p:spPr>
-        <p:txBody>
-          <a:bodyPr wrap="square" lIns="0" tIns="0" rIns="0" bIns="0" rtlCol="0" anchor="ctr"/>
-          <a:lstStyle/>
-          <a:p>
-            <a:pPr indent="0" marL="0">
-              <a:buNone/>
-            </a:pPr>
-            <a:r>
-              <a:rPr lang="en-US" sz="1500" b="1" dirty="0">
-                <a:solidFill>
-                  <a:srgbClr val="00838F"/>
-                </a:solidFill>
-                <a:latin typeface="Calibri" pitchFamily="34" charset="0"/>
-                <a:ea typeface="Calibri" pitchFamily="34" charset="-122"/>
-                <a:cs typeface="Calibri" pitchFamily="34" charset="-120"/>
-              </a:rPr>
-              <a:t>ANSWER  </a:t>
-            </a:r>
-            <a:pPr indent="0" marL="0">
-              <a:buNone/>
-            </a:pPr>
-            <a:r>
-              <a:rPr lang="en-US" sz="1500" b="1" dirty="0">
-                <a:solidFill>
-                  <a:srgbClr val="1B2A38"/>
-                </a:solidFill>
-                <a:latin typeface="Calibri" pitchFamily="34" charset="0"/>
-                <a:ea typeface="Calibri" pitchFamily="34" charset="-122"/>
-                <a:cs typeface="Calibri" pitchFamily="34" charset="-120"/>
-              </a:rPr>
-              <a:t>B — Possible false negative (low tumor fraction)</a:t>
-            </a:r>
-            <a:endParaRPr lang="en-US" sz="1500" dirty="0"/>
-          </a:p>
-        </p:txBody>
-      </p:sp>
-      <p:sp>
-        <p:nvSpPr>
-          <p:cNvPr id="8" name="Text 6"/>
-          <p:cNvSpPr/>
-          <p:nvPr/>
-        </p:nvSpPr>
-        <p:spPr>
-          <a:xfrm>
-            <a:off x="7439376" y="3127248"/>
-            <a:ext cx="3947648" cy="2377440"/>
+            <a:off x="7660532" y="2121408"/>
+            <a:ext cx="3726491" cy="3291840"/>
           </a:xfrm>
           <a:prstGeom prst="rect">
             <a:avLst/>
@@ -6450,12 +6615,12 @@
           <a:p>
             <a:pPr algn="l" indent="0" marL="0">
               <a:lnSpc>
-                <a:spcPct val="108000"/>
+                <a:spcPct val="110000"/>
               </a:lnSpc>
               <a:buNone/>
             </a:pPr>
             <a:r>
-              <a:rPr lang="en-US" sz="1250" dirty="0">
+              <a:rPr lang="en-US" sz="1350" dirty="0">
                 <a:solidFill>
                   <a:srgbClr val="33444F"/>
                 </a:solidFill>
@@ -6463,15 +6628,15 @@
                 <a:ea typeface="Calibri" pitchFamily="34" charset="-122"/>
                 <a:cs typeface="Calibri" pitchFamily="34" charset="-120"/>
               </a:rPr>
-              <a:t>Sensitivity depends on tumor fraction; a low-cellularity sample can miss true variants. Report cellularity/LoD and consider re-testing or ctDNA.</a:t>
-            </a:r>
-            <a:endParaRPr lang="en-US" sz="1250" dirty="0"/>
-          </a:p>
-        </p:txBody>
-      </p:sp>
-      <p:sp>
-        <p:nvSpPr>
-          <p:cNvPr id="9" name="Text 7"/>
+              <a:t>MSI-high/MMR-deficient results carry dual meaning — immunotherapy responsiveness and a prompt to evaluate for Lynch syndrome.</a:t>
+            </a:r>
+            <a:endParaRPr lang="en-US" sz="1350" dirty="0"/>
+          </a:p>
+        </p:txBody>
+      </p:sp>
+      <p:sp>
+        <p:nvSpPr>
+          <p:cNvPr id="8" name="Text 6"/>
           <p:cNvSpPr/>
           <p:nvPr/>
         </p:nvSpPr>
@@ -6510,7 +6675,7 @@
       </p:sp>
       <p:sp>
         <p:nvSpPr>
-          <p:cNvPr id="10" name="Text 8"/>
+          <p:cNvPr id="9" name="Text 7"/>
           <p:cNvSpPr/>
           <p:nvPr/>
         </p:nvSpPr>
@@ -6640,7 +6805,7 @@
                 <a:ea typeface="Calibri" pitchFamily="34" charset="-122"/>
                 <a:cs typeface="Calibri" pitchFamily="34" charset="-120"/>
               </a:rPr>
-              <a:t>MOLECULAR &amp; CYTOGENETICS   ·   BOARD REVIEW  ·  Q2</a:t>
+              <a:t>MOLECULAR &amp; CYTOGENETICS   ·   CASE 3</a:t>
             </a:r>
             <a:endParaRPr lang="en-US" sz="1100" dirty="0"/>
           </a:p>
@@ -6671,7 +6836,7 @@
               <a:buNone/>
             </a:pPr>
             <a:r>
-              <a:rPr lang="en-US" sz="2600" b="1" dirty="0">
+              <a:rPr lang="en-US" sz="3000" b="1" dirty="0">
                 <a:solidFill>
                   <a:srgbClr val="0E3A5F"/>
                 </a:solidFill>
@@ -6679,190 +6844,26 @@
                 <a:ea typeface="Calibri" pitchFamily="34" charset="-122"/>
                 <a:cs typeface="Calibri" pitchFamily="34" charset="-120"/>
               </a:rPr>
-              <a:t>Board-Style Review</a:t>
-            </a:r>
-            <a:endParaRPr lang="en-US" sz="2600" dirty="0"/>
-          </a:p>
-        </p:txBody>
-      </p:sp>
-      <p:sp>
-        <p:nvSpPr>
-          <p:cNvPr id="4" name="Text 2"/>
-          <p:cNvSpPr/>
-          <p:nvPr/>
-        </p:nvSpPr>
-        <p:spPr>
-          <a:xfrm>
-            <a:off x="566928" y="1417320"/>
-            <a:ext cx="11057839" cy="914400"/>
-          </a:xfrm>
-          <a:prstGeom prst="rect">
-            <a:avLst/>
-          </a:prstGeom>
-          <a:noFill/>
-          <a:ln/>
-        </p:spPr>
-        <p:txBody>
-          <a:bodyPr wrap="square" lIns="0" tIns="0" rIns="0" bIns="0" rtlCol="0" anchor="t"/>
-          <a:lstStyle/>
-          <a:p>
-            <a:pPr algn="l" indent="0" marL="0">
-              <a:lnSpc>
-                <a:spcPct val="105000"/>
-              </a:lnSpc>
-              <a:buNone/>
-            </a:pPr>
-            <a:r>
-              <a:rPr lang="en-US" sz="1450" b="1" dirty="0">
-                <a:solidFill>
-                  <a:srgbClr val="1B2A38"/>
-                </a:solidFill>
-                <a:latin typeface="Calibri" pitchFamily="34" charset="0"/>
-                <a:ea typeface="Calibri" pitchFamily="34" charset="-122"/>
-                <a:cs typeface="Calibri" pitchFamily="34" charset="-120"/>
-              </a:rPr>
-              <a:t>Microsatellite instability / mismatch-repair deficiency is clinically important because it:</a:t>
-            </a:r>
-            <a:endParaRPr lang="en-US" sz="1450" dirty="0"/>
-          </a:p>
-        </p:txBody>
-      </p:sp>
-      <p:sp>
-        <p:nvSpPr>
-          <p:cNvPr id="5" name="Text 3"/>
-          <p:cNvSpPr/>
-          <p:nvPr/>
-        </p:nvSpPr>
-        <p:spPr>
-          <a:xfrm>
-            <a:off x="658368" y="2395728"/>
-            <a:ext cx="6192390" cy="3017520"/>
-          </a:xfrm>
-          <a:prstGeom prst="rect">
-            <a:avLst/>
-          </a:prstGeom>
-          <a:noFill/>
-          <a:ln/>
-        </p:spPr>
-        <p:txBody>
-          <a:bodyPr wrap="square" lIns="0" tIns="0" rIns="0" bIns="0" rtlCol="0" anchor="t"/>
-          <a:lstStyle/>
-          <a:p>
-            <a:pPr algn="l" indent="0" marL="0">
-              <a:spcAft>
-                <a:spcPts val="600"/>
-              </a:spcAft>
-              <a:buNone/>
-            </a:pPr>
-            <a:r>
-              <a:rPr lang="en-US" sz="1350" dirty="0">
-                <a:solidFill>
-                  <a:srgbClr val="33444F"/>
-                </a:solidFill>
-                <a:latin typeface="Calibri" pitchFamily="34" charset="0"/>
-                <a:ea typeface="Calibri" pitchFamily="34" charset="-122"/>
-                <a:cs typeface="Calibri" pitchFamily="34" charset="-120"/>
-              </a:rPr>
-              <a:t>A. Excludes immunotherapy</a:t>
-            </a:r>
-            <a:endParaRPr lang="en-US" sz="1350" dirty="0"/>
-          </a:p>
-          <a:p>
-            <a:pPr algn="l" indent="0" marL="0">
-              <a:spcAft>
-                <a:spcPts val="600"/>
-              </a:spcAft>
-              <a:buNone/>
-            </a:pPr>
-            <a:r>
-              <a:rPr lang="en-US" sz="1350" b="1" dirty="0">
-                <a:solidFill>
-                  <a:srgbClr val="005A63"/>
-                </a:solidFill>
-                <a:latin typeface="Calibri" pitchFamily="34" charset="0"/>
-                <a:ea typeface="Calibri" pitchFamily="34" charset="-122"/>
-                <a:cs typeface="Calibri" pitchFamily="34" charset="-120"/>
-              </a:rPr>
-              <a:t>B. Predicts immunotherapy response and can flag Lynch syndrome</a:t>
-            </a:r>
-            <a:endParaRPr lang="en-US" sz="1350" dirty="0"/>
-          </a:p>
-          <a:p>
-            <a:pPr algn="l" indent="0" marL="0">
-              <a:spcAft>
-                <a:spcPts val="600"/>
-              </a:spcAft>
-              <a:buNone/>
-            </a:pPr>
-            <a:r>
-              <a:rPr lang="en-US" sz="1350" dirty="0">
-                <a:solidFill>
-                  <a:srgbClr val="33444F"/>
-                </a:solidFill>
-                <a:latin typeface="Calibri" pitchFamily="34" charset="0"/>
-                <a:ea typeface="Calibri" pitchFamily="34" charset="-122"/>
-                <a:cs typeface="Calibri" pitchFamily="34" charset="-120"/>
-              </a:rPr>
-              <a:t>C. Is only prognostic</a:t>
-            </a:r>
-            <a:endParaRPr lang="en-US" sz="1350" dirty="0"/>
-          </a:p>
-          <a:p>
-            <a:pPr algn="l" indent="0" marL="0">
-              <a:spcAft>
-                <a:spcPts val="600"/>
-              </a:spcAft>
-              <a:buNone/>
-            </a:pPr>
-            <a:r>
-              <a:rPr lang="en-US" sz="1350" dirty="0">
-                <a:solidFill>
-                  <a:srgbClr val="33444F"/>
-                </a:solidFill>
-                <a:latin typeface="Calibri" pitchFamily="34" charset="0"/>
-                <a:ea typeface="Calibri" pitchFamily="34" charset="-122"/>
-                <a:cs typeface="Calibri" pitchFamily="34" charset="-120"/>
-              </a:rPr>
-              <a:t>D. Indicates germline TP53</a:t>
-            </a:r>
-            <a:endParaRPr lang="en-US" sz="1350" dirty="0"/>
-          </a:p>
-          <a:p>
-            <a:pPr algn="l" indent="0" marL="0">
-              <a:spcAft>
-                <a:spcPts val="600"/>
-              </a:spcAft>
-              <a:buNone/>
-            </a:pPr>
-            <a:r>
-              <a:rPr lang="en-US" sz="1350" dirty="0">
-                <a:solidFill>
-                  <a:srgbClr val="33444F"/>
-                </a:solidFill>
-                <a:latin typeface="Calibri" pitchFamily="34" charset="0"/>
-                <a:ea typeface="Calibri" pitchFamily="34" charset="-122"/>
-                <a:cs typeface="Calibri" pitchFamily="34" charset="-120"/>
-              </a:rPr>
-              <a:t>E. Has no actionability</a:t>
-            </a:r>
-            <a:endParaRPr lang="en-US" sz="1350" dirty="0"/>
-          </a:p>
-        </p:txBody>
-      </p:sp>
-      <p:sp>
-        <p:nvSpPr>
-          <p:cNvPr id="6" name="Shape 4"/>
-          <p:cNvSpPr/>
-          <p:nvPr/>
-        </p:nvSpPr>
-        <p:spPr>
-          <a:xfrm>
-            <a:off x="7201632" y="2395728"/>
-            <a:ext cx="4423136" cy="3246120"/>
+              <a:t>Case 3</a:t>
+            </a:r>
+            <a:endParaRPr lang="en-US" sz="3000" dirty="0"/>
+          </a:p>
+        </p:txBody>
+      </p:sp>
+      <p:sp>
+        <p:nvSpPr>
+          <p:cNvPr id="4" name="Shape 2"/>
+          <p:cNvSpPr/>
+          <p:nvPr/>
+        </p:nvSpPr>
+        <p:spPr>
+          <a:xfrm>
+            <a:off x="566928" y="1517904"/>
+            <a:ext cx="11057839" cy="2788920"/>
           </a:xfrm>
           <a:prstGeom prst="roundRect">
             <a:avLst>
-              <a:gd name="adj" fmla="val 2535"/>
+              <a:gd name="adj" fmla="val 2951"/>
             </a:avLst>
           </a:prstGeom>
           <a:solidFill>
@@ -6880,14 +6881,14 @@
       </p:sp>
       <p:sp>
         <p:nvSpPr>
-          <p:cNvPr id="7" name="Text 5"/>
-          <p:cNvSpPr/>
-          <p:nvPr/>
-        </p:nvSpPr>
-        <p:spPr>
-          <a:xfrm>
-            <a:off x="7439376" y="2578608"/>
-            <a:ext cx="3965936" cy="457200"/>
+          <p:cNvPr id="5" name="Text 3"/>
+          <p:cNvSpPr/>
+          <p:nvPr/>
+        </p:nvSpPr>
+        <p:spPr>
+          <a:xfrm>
+            <a:off x="841248" y="1700784"/>
+            <a:ext cx="5486400" cy="292608"/>
           </a:xfrm>
           <a:prstGeom prst="rect">
             <a:avLst/>
@@ -6903,7 +6904,7 @@
               <a:buNone/>
             </a:pPr>
             <a:r>
-              <a:rPr lang="en-US" sz="1500" b="1" dirty="0">
+              <a:rPr lang="en-US" sz="1100" b="1" spc="150" kern="0" dirty="0">
                 <a:solidFill>
                   <a:srgbClr val="00838F"/>
                 </a:solidFill>
@@ -6911,36 +6912,22 @@
                 <a:ea typeface="Calibri" pitchFamily="34" charset="-122"/>
                 <a:cs typeface="Calibri" pitchFamily="34" charset="-120"/>
               </a:rPr>
-              <a:t>ANSWER  </a:t>
-            </a:r>
-            <a:pPr indent="0" marL="0">
-              <a:buNone/>
-            </a:pPr>
-            <a:r>
-              <a:rPr lang="en-US" sz="1500" b="1" dirty="0">
-                <a:solidFill>
-                  <a:srgbClr val="1B2A38"/>
-                </a:solidFill>
-                <a:latin typeface="Calibri" pitchFamily="34" charset="0"/>
-                <a:ea typeface="Calibri" pitchFamily="34" charset="-122"/>
-                <a:cs typeface="Calibri" pitchFamily="34" charset="-120"/>
-              </a:rPr>
-              <a:t>B — Predicts immunotherapy response; flags Lynch</a:t>
-            </a:r>
-            <a:endParaRPr lang="en-US" sz="1500" dirty="0"/>
-          </a:p>
-        </p:txBody>
-      </p:sp>
-      <p:sp>
-        <p:nvSpPr>
-          <p:cNvPr id="8" name="Text 6"/>
-          <p:cNvSpPr/>
-          <p:nvPr/>
-        </p:nvSpPr>
-        <p:spPr>
-          <a:xfrm>
-            <a:off x="7439376" y="3127248"/>
-            <a:ext cx="3947648" cy="2377440"/>
+              <a:t>CLINICAL VIGNETTE</a:t>
+            </a:r>
+            <a:endParaRPr lang="en-US" sz="1100" dirty="0"/>
+          </a:p>
+        </p:txBody>
+      </p:sp>
+      <p:sp>
+        <p:nvSpPr>
+          <p:cNvPr id="6" name="Text 4"/>
+          <p:cNvSpPr/>
+          <p:nvPr/>
+        </p:nvSpPr>
+        <p:spPr>
+          <a:xfrm>
+            <a:off x="841248" y="2029968"/>
+            <a:ext cx="10509199" cy="2148840"/>
           </a:xfrm>
           <a:prstGeom prst="rect">
             <a:avLst/>
@@ -6959,7 +6946,7 @@
               <a:buNone/>
             </a:pPr>
             <a:r>
-              <a:rPr lang="en-US" sz="1250" dirty="0">
+              <a:rPr lang="en-US" sz="1450" dirty="0">
                 <a:solidFill>
                   <a:srgbClr val="33444F"/>
                 </a:solidFill>
@@ -6967,15 +6954,122 @@
                 <a:ea typeface="Calibri" pitchFamily="34" charset="-122"/>
                 <a:cs typeface="Calibri" pitchFamily="34" charset="-120"/>
               </a:rPr>
-              <a:t>MSI-high/dMMR tumors respond to immune checkpoint inhibitors and may indicate Lynch syndrome, prompting germline evaluation.</a:t>
-            </a:r>
-            <a:endParaRPr lang="en-US" sz="1250" dirty="0"/>
+              <a:t>A cfDNA (liquid biopsy) panel is negative in a patient with a small-volume tumor, but suspicion of a targetable mutation remains.</a:t>
+            </a:r>
+            <a:endParaRPr lang="en-US" sz="1450" dirty="0"/>
+          </a:p>
+        </p:txBody>
+      </p:sp>
+      <p:sp>
+        <p:nvSpPr>
+          <p:cNvPr id="7" name="Shape 5"/>
+          <p:cNvSpPr/>
+          <p:nvPr/>
+        </p:nvSpPr>
+        <p:spPr>
+          <a:xfrm>
+            <a:off x="566928" y="4553712"/>
+            <a:ext cx="11057839" cy="1325880"/>
+          </a:xfrm>
+          <a:prstGeom prst="roundRect">
+            <a:avLst>
+              <a:gd name="adj" fmla="val 6207"/>
+            </a:avLst>
+          </a:prstGeom>
+          <a:solidFill>
+            <a:srgbClr val="0E3A5F"/>
+          </a:solidFill>
+          <a:ln/>
+          <a:effectLst>
+            <a:outerShdw sx="100000" sy="100000" kx="0" ky="0" algn="bl" rotWithShape="0" blurRad="88900" dist="25400" dir="5400000">
+              <a:srgbClr val="22303C">
+                <a:alpha val="12000"/>
+              </a:srgbClr>
+            </a:outerShdw>
+          </a:effectLst>
+        </p:spPr>
+      </p:sp>
+      <p:sp>
+        <p:nvSpPr>
+          <p:cNvPr id="8" name="Text 6"/>
+          <p:cNvSpPr/>
+          <p:nvPr/>
+        </p:nvSpPr>
+        <p:spPr>
+          <a:xfrm>
+            <a:off x="822960" y="4681728"/>
+            <a:ext cx="640080" cy="960120"/>
+          </a:xfrm>
+          <a:prstGeom prst="rect">
+            <a:avLst/>
+          </a:prstGeom>
+          <a:noFill/>
+          <a:ln/>
+        </p:spPr>
+        <p:txBody>
+          <a:bodyPr wrap="square" lIns="0" tIns="0" rIns="0" bIns="0" rtlCol="0" anchor="ctr"/>
+          <a:lstStyle/>
+          <a:p>
+            <a:pPr algn="ctr" indent="0" marL="0">
+              <a:buNone/>
+            </a:pPr>
+            <a:r>
+              <a:rPr lang="en-US" sz="4000" b="1" dirty="0">
+                <a:solidFill>
+                  <a:srgbClr val="00838F"/>
+                </a:solidFill>
+                <a:latin typeface="Calibri" pitchFamily="34" charset="0"/>
+                <a:ea typeface="Calibri" pitchFamily="34" charset="-122"/>
+                <a:cs typeface="Calibri" pitchFamily="34" charset="-120"/>
+              </a:rPr>
+              <a:t>?</a:t>
+            </a:r>
+            <a:endParaRPr lang="en-US" sz="4000" dirty="0"/>
           </a:p>
         </p:txBody>
       </p:sp>
       <p:sp>
         <p:nvSpPr>
           <p:cNvPr id="9" name="Text 7"/>
+          <p:cNvSpPr/>
+          <p:nvPr/>
+        </p:nvSpPr>
+        <p:spPr>
+          <a:xfrm>
+            <a:off x="1618488" y="4553712"/>
+            <a:ext cx="9686239" cy="1325880"/>
+          </a:xfrm>
+          <a:prstGeom prst="rect">
+            <a:avLst/>
+          </a:prstGeom>
+          <a:noFill/>
+          <a:ln/>
+        </p:spPr>
+        <p:txBody>
+          <a:bodyPr wrap="square" lIns="0" tIns="0" rIns="0" bIns="0" rtlCol="0" anchor="ctr"/>
+          <a:lstStyle/>
+          <a:p>
+            <a:pPr algn="l" indent="0" marL="0">
+              <a:buNone/>
+            </a:pPr>
+            <a:r>
+              <a:rPr lang="en-US" sz="1500" b="1" dirty="0">
+                <a:solidFill>
+                  <a:srgbClr val="FFFFFF"/>
+                </a:solidFill>
+                <a:latin typeface="Calibri" pitchFamily="34" charset="0"/>
+                <a:ea typeface="Calibri" pitchFamily="34" charset="-122"/>
+                <a:cs typeface="Calibri" pitchFamily="34" charset="-120"/>
+              </a:rPr>
+              <a:t>How should the negative result be interpreted?</a:t>
+            </a:r>
+            <a:endParaRPr lang="en-US" sz="1500" dirty="0"/>
+          </a:p>
+        </p:txBody>
+      </p:sp>
+      <p:sp>
+        <p:nvSpPr>
+          <p:cNvPr id="10" name="Text 8"/>
           <p:cNvSpPr/>
           <p:nvPr/>
         </p:nvSpPr>
@@ -7014,7 +7108,7 @@
       </p:sp>
       <p:sp>
         <p:nvSpPr>
-          <p:cNvPr id="10" name="Text 8"/>
+          <p:cNvPr id="11" name="Text 9"/>
           <p:cNvSpPr/>
           <p:nvPr/>
         </p:nvSpPr>
@@ -7144,7 +7238,7 @@
                 <a:ea typeface="Calibri" pitchFamily="34" charset="-122"/>
                 <a:cs typeface="Calibri" pitchFamily="34" charset="-120"/>
               </a:rPr>
-              <a:t>MOLECULAR &amp; CYTOGENETICS   ·   BOARD REVIEW  ·  Q3</a:t>
+              <a:t>MOLECULAR &amp; CYTOGENETICS   ·   CASE 3  ·  RESOLUTION</a:t>
             </a:r>
             <a:endParaRPr lang="en-US" sz="1100" dirty="0"/>
           </a:p>
@@ -7175,7 +7269,7 @@
               <a:buNone/>
             </a:pPr>
             <a:r>
-              <a:rPr lang="en-US" sz="2600" b="1" dirty="0">
+              <a:rPr lang="en-US" sz="3000" b="1" dirty="0">
                 <a:solidFill>
                   <a:srgbClr val="0E3A5F"/>
                 </a:solidFill>
@@ -7183,9 +7277,9 @@
                 <a:ea typeface="Calibri" pitchFamily="34" charset="-122"/>
                 <a:cs typeface="Calibri" pitchFamily="34" charset="-120"/>
               </a:rPr>
-              <a:t>Board-Style Review</a:t>
-            </a:r>
-            <a:endParaRPr lang="en-US" sz="2600" dirty="0"/>
+              <a:t>Case 3: Negative Liquid Biopsy</a:t>
+            </a:r>
+            <a:endParaRPr lang="en-US" sz="3000" dirty="0"/>
           </a:p>
         </p:txBody>
       </p:sp>
@@ -7197,8 +7291,8 @@
         </p:nvSpPr>
         <p:spPr>
           <a:xfrm>
-            <a:off x="566928" y="1417320"/>
-            <a:ext cx="11057839" cy="914400"/>
+            <a:off x="566928" y="1554480"/>
+            <a:ext cx="6413547" cy="4023360"/>
           </a:xfrm>
           <a:prstGeom prst="rect">
             <a:avLst/>
@@ -7210,14 +7304,15 @@
           <a:bodyPr wrap="square" lIns="0" tIns="0" rIns="0" bIns="0" rtlCol="0" anchor="t"/>
           <a:lstStyle/>
           <a:p>
-            <a:pPr algn="l" indent="0" marL="0">
-              <a:lnSpc>
-                <a:spcPct val="105000"/>
-              </a:lnSpc>
-              <a:buNone/>
-            </a:pPr>
-            <a:r>
-              <a:rPr lang="en-US" sz="1450" b="1" dirty="0">
+            <a:pPr algn="l" marL="177800" indent="-177800">
+              <a:spcAft>
+                <a:spcPts val="900"/>
+              </a:spcAft>
+              <a:buSzPct val="100000"/>
+              <a:buChar char="•"/>
+            </a:pPr>
+            <a:r>
+              <a:rPr lang="en-US" sz="1400" b="1" dirty="0">
                 <a:solidFill>
                   <a:srgbClr val="1B2A38"/>
                 </a:solidFill>
@@ -7225,41 +7320,20 @@
                 <a:ea typeface="Calibri" pitchFamily="34" charset="-122"/>
                 <a:cs typeface="Calibri" pitchFamily="34" charset="-120"/>
               </a:rPr>
-              <a:t>A limitation of plasma circulating-tumor-DNA (liquid biopsy) testing is:</a:t>
-            </a:r>
-            <a:endParaRPr lang="en-US" sz="1450" dirty="0"/>
-          </a:p>
-        </p:txBody>
-      </p:sp>
-      <p:sp>
-        <p:nvSpPr>
-          <p:cNvPr id="5" name="Text 3"/>
-          <p:cNvSpPr/>
-          <p:nvPr/>
-        </p:nvSpPr>
-        <p:spPr>
-          <a:xfrm>
-            <a:off x="658368" y="2395728"/>
-            <a:ext cx="6192390" cy="3017520"/>
-          </a:xfrm>
-          <a:prstGeom prst="rect">
-            <a:avLst/>
-          </a:prstGeom>
-          <a:noFill/>
-          <a:ln/>
-        </p:spPr>
-        <p:txBody>
-          <a:bodyPr wrap="square" lIns="0" tIns="0" rIns="0" bIns="0" rtlCol="0" anchor="t"/>
-          <a:lstStyle/>
-          <a:p>
-            <a:pPr algn="l" indent="0" marL="0">
+              <a:t>A negative cfDNA result does not exclude a mutation — low tumor shedding reduces sensitivity.</a:t>
+            </a:r>
+            <a:endParaRPr lang="en-US" sz="1400" dirty="0"/>
+          </a:p>
+          <a:p>
+            <a:pPr algn="l" marL="177800" indent="-177800">
               <a:spcAft>
-                <a:spcPts val="600"/>
+                <a:spcPts val="900"/>
               </a:spcAft>
-              <a:buNone/>
-            </a:pPr>
-            <a:r>
-              <a:rPr lang="en-US" sz="1350" dirty="0">
+              <a:buSzPct val="100000"/>
+              <a:buChar char="•"/>
+            </a:pPr>
+            <a:r>
+              <a:rPr lang="en-US" sz="1400" dirty="0">
                 <a:solidFill>
                   <a:srgbClr val="33444F"/>
                 </a:solidFill>
@@ -7267,39 +7341,41 @@
                 <a:ea typeface="Calibri" pitchFamily="34" charset="-122"/>
                 <a:cs typeface="Calibri" pitchFamily="34" charset="-120"/>
               </a:rPr>
-              <a:t>A. It cannot detect any mutations</a:t>
-            </a:r>
-            <a:endParaRPr lang="en-US" sz="1350" dirty="0"/>
-          </a:p>
-          <a:p>
-            <a:pPr algn="l" indent="0" marL="0">
+              <a:t>Tissue testing may be needed for confirmation.</a:t>
+            </a:r>
+            <a:endParaRPr lang="en-US" sz="1400" dirty="0"/>
+          </a:p>
+          <a:p>
+            <a:pPr algn="l" marL="177800" indent="-177800">
               <a:spcAft>
-                <a:spcPts val="600"/>
+                <a:spcPts val="900"/>
               </a:spcAft>
-              <a:buNone/>
-            </a:pPr>
-            <a:r>
-              <a:rPr lang="en-US" sz="1350" b="1" dirty="0">
-                <a:solidFill>
-                  <a:srgbClr val="005A63"/>
-                </a:solidFill>
-                <a:latin typeface="Calibri" pitchFamily="34" charset="0"/>
-                <a:ea typeface="Calibri" pitchFamily="34" charset="-122"/>
-                <a:cs typeface="Calibri" pitchFamily="34" charset="-120"/>
-              </a:rPr>
-              <a:t>B. A negative result does not exclude a mutation (low shedding)</a:t>
-            </a:r>
-            <a:endParaRPr lang="en-US" sz="1350" dirty="0"/>
-          </a:p>
-          <a:p>
-            <a:pPr algn="l" indent="0" marL="0">
+              <a:buSzPct val="100000"/>
+              <a:buChar char="•"/>
+            </a:pPr>
+            <a:r>
+              <a:rPr lang="en-US" sz="1400" dirty="0">
+                <a:solidFill>
+                  <a:srgbClr val="33444F"/>
+                </a:solidFill>
+                <a:latin typeface="Calibri" pitchFamily="34" charset="0"/>
+                <a:ea typeface="Calibri" pitchFamily="34" charset="-122"/>
+                <a:cs typeface="Calibri" pitchFamily="34" charset="-120"/>
+              </a:rPr>
+              <a:t>Consider tumor burden and shedding.</a:t>
+            </a:r>
+            <a:endParaRPr lang="en-US" sz="1400" dirty="0"/>
+          </a:p>
+          <a:p>
+            <a:pPr algn="l" marL="177800" indent="-177800">
               <a:spcAft>
-                <a:spcPts val="600"/>
+                <a:spcPts val="900"/>
               </a:spcAft>
-              <a:buNone/>
-            </a:pPr>
-            <a:r>
-              <a:rPr lang="en-US" sz="1350" dirty="0">
+              <a:buSzPct val="100000"/>
+              <a:buChar char="•"/>
+            </a:pPr>
+            <a:r>
+              <a:rPr lang="en-US" sz="1400" dirty="0">
                 <a:solidFill>
                   <a:srgbClr val="33444F"/>
                 </a:solidFill>
@@ -7307,66 +7383,26 @@
                 <a:ea typeface="Calibri" pitchFamily="34" charset="-122"/>
                 <a:cs typeface="Calibri" pitchFamily="34" charset="-120"/>
               </a:rPr>
-              <a:t>C. It requires dividing cells</a:t>
-            </a:r>
-            <a:endParaRPr lang="en-US" sz="1350" dirty="0"/>
-          </a:p>
-          <a:p>
-            <a:pPr algn="l" indent="0" marL="0">
-              <a:spcAft>
-                <a:spcPts val="600"/>
-              </a:spcAft>
-              <a:buNone/>
-            </a:pPr>
-            <a:r>
-              <a:rPr lang="en-US" sz="1350" dirty="0">
-                <a:solidFill>
-                  <a:srgbClr val="33444F"/>
-                </a:solidFill>
-                <a:latin typeface="Calibri" pitchFamily="34" charset="0"/>
-                <a:ea typeface="Calibri" pitchFamily="34" charset="-122"/>
-                <a:cs typeface="Calibri" pitchFamily="34" charset="-120"/>
-              </a:rPr>
-              <a:t>D. It only detects germline variants</a:t>
-            </a:r>
-            <a:endParaRPr lang="en-US" sz="1350" dirty="0"/>
-          </a:p>
-          <a:p>
-            <a:pPr algn="l" indent="0" marL="0">
-              <a:spcAft>
-                <a:spcPts val="600"/>
-              </a:spcAft>
-              <a:buNone/>
-            </a:pPr>
-            <a:r>
-              <a:rPr lang="en-US" sz="1350" dirty="0">
-                <a:solidFill>
-                  <a:srgbClr val="33444F"/>
-                </a:solidFill>
-                <a:latin typeface="Calibri" pitchFamily="34" charset="0"/>
-                <a:ea typeface="Calibri" pitchFamily="34" charset="-122"/>
-                <a:cs typeface="Calibri" pitchFamily="34" charset="-120"/>
-              </a:rPr>
-              <a:t>E. It needs a karyotype</a:t>
-            </a:r>
-            <a:endParaRPr lang="en-US" sz="1350" dirty="0"/>
-          </a:p>
-        </p:txBody>
-      </p:sp>
-      <p:sp>
-        <p:nvSpPr>
-          <p:cNvPr id="6" name="Shape 4"/>
-          <p:cNvSpPr/>
-          <p:nvPr/>
-        </p:nvSpPr>
-        <p:spPr>
-          <a:xfrm>
-            <a:off x="7201632" y="2395728"/>
-            <a:ext cx="4423136" cy="3246120"/>
+              <a:t>Correlate with the clinical picture.</a:t>
+            </a:r>
+            <a:endParaRPr lang="en-US" sz="1400" dirty="0"/>
+          </a:p>
+        </p:txBody>
+      </p:sp>
+      <p:sp>
+        <p:nvSpPr>
+          <p:cNvPr id="5" name="Shape 3"/>
+          <p:cNvSpPr/>
+          <p:nvPr/>
+        </p:nvSpPr>
+        <p:spPr>
+          <a:xfrm>
+            <a:off x="7422788" y="1554480"/>
+            <a:ext cx="4201979" cy="3977640"/>
           </a:xfrm>
           <a:prstGeom prst="roundRect">
             <a:avLst>
-              <a:gd name="adj" fmla="val 2535"/>
+              <a:gd name="adj" fmla="val 2069"/>
             </a:avLst>
           </a:prstGeom>
           <a:solidFill>
@@ -7384,67 +7420,53 @@
       </p:sp>
       <p:sp>
         <p:nvSpPr>
+          <p:cNvPr id="6" name="Text 4"/>
+          <p:cNvSpPr/>
+          <p:nvPr/>
+        </p:nvSpPr>
+        <p:spPr>
+          <a:xfrm>
+            <a:off x="7660532" y="1755648"/>
+            <a:ext cx="3744779" cy="310896"/>
+          </a:xfrm>
+          <a:prstGeom prst="rect">
+            <a:avLst/>
+          </a:prstGeom>
+          <a:noFill/>
+          <a:ln/>
+        </p:spPr>
+        <p:txBody>
+          <a:bodyPr wrap="square" lIns="0" tIns="0" rIns="0" bIns="0" rtlCol="0" anchor="ctr"/>
+          <a:lstStyle/>
+          <a:p>
+            <a:pPr indent="0" marL="0">
+              <a:buNone/>
+            </a:pPr>
+            <a:r>
+              <a:rPr lang="en-US" sz="1100" b="1" spc="140" kern="0" dirty="0">
+                <a:solidFill>
+                  <a:srgbClr val="00838F"/>
+                </a:solidFill>
+                <a:latin typeface="Calibri" pitchFamily="34" charset="0"/>
+                <a:ea typeface="Calibri" pitchFamily="34" charset="-122"/>
+                <a:cs typeface="Calibri" pitchFamily="34" charset="-120"/>
+              </a:rPr>
+              <a:t>TEACHING POINT</a:t>
+            </a:r>
+            <a:endParaRPr lang="en-US" sz="1100" dirty="0"/>
+          </a:p>
+        </p:txBody>
+      </p:sp>
+      <p:sp>
+        <p:nvSpPr>
           <p:cNvPr id="7" name="Text 5"/>
           <p:cNvSpPr/>
           <p:nvPr/>
         </p:nvSpPr>
         <p:spPr>
           <a:xfrm>
-            <a:off x="7439376" y="2578608"/>
-            <a:ext cx="3965936" cy="457200"/>
-          </a:xfrm>
-          <a:prstGeom prst="rect">
-            <a:avLst/>
-          </a:prstGeom>
-          <a:noFill/>
-          <a:ln/>
-        </p:spPr>
-        <p:txBody>
-          <a:bodyPr wrap="square" lIns="0" tIns="0" rIns="0" bIns="0" rtlCol="0" anchor="ctr"/>
-          <a:lstStyle/>
-          <a:p>
-            <a:pPr indent="0" marL="0">
-              <a:buNone/>
-            </a:pPr>
-            <a:r>
-              <a:rPr lang="en-US" sz="1500" b="1" dirty="0">
-                <a:solidFill>
-                  <a:srgbClr val="00838F"/>
-                </a:solidFill>
-                <a:latin typeface="Calibri" pitchFamily="34" charset="0"/>
-                <a:ea typeface="Calibri" pitchFamily="34" charset="-122"/>
-                <a:cs typeface="Calibri" pitchFamily="34" charset="-120"/>
-              </a:rPr>
-              <a:t>ANSWER  </a:t>
-            </a:r>
-            <a:pPr indent="0" marL="0">
-              <a:buNone/>
-            </a:pPr>
-            <a:r>
-              <a:rPr lang="en-US" sz="1500" b="1" dirty="0">
-                <a:solidFill>
-                  <a:srgbClr val="1B2A38"/>
-                </a:solidFill>
-                <a:latin typeface="Calibri" pitchFamily="34" charset="0"/>
-                <a:ea typeface="Calibri" pitchFamily="34" charset="-122"/>
-                <a:cs typeface="Calibri" pitchFamily="34" charset="-120"/>
-              </a:rPr>
-              <a:t>B — Negative doesn’t exclude (low shedding)</a:t>
-            </a:r>
-            <a:endParaRPr lang="en-US" sz="1500" dirty="0"/>
-          </a:p>
-        </p:txBody>
-      </p:sp>
-      <p:sp>
-        <p:nvSpPr>
-          <p:cNvPr id="8" name="Text 6"/>
-          <p:cNvSpPr/>
-          <p:nvPr/>
-        </p:nvSpPr>
-        <p:spPr>
-          <a:xfrm>
-            <a:off x="7439376" y="3127248"/>
-            <a:ext cx="3947648" cy="2377440"/>
+            <a:off x="7660532" y="2121408"/>
+            <a:ext cx="3726491" cy="3291840"/>
           </a:xfrm>
           <a:prstGeom prst="rect">
             <a:avLst/>
@@ -7458,12 +7480,12 @@
           <a:p>
             <a:pPr algn="l" indent="0" marL="0">
               <a:lnSpc>
-                <a:spcPct val="108000"/>
+                <a:spcPct val="110000"/>
               </a:lnSpc>
               <a:buNone/>
             </a:pPr>
             <a:r>
-              <a:rPr lang="en-US" sz="1250" dirty="0">
+              <a:rPr lang="en-US" sz="1350" dirty="0">
                 <a:solidFill>
                   <a:srgbClr val="33444F"/>
                 </a:solidFill>
@@ -7471,15 +7493,15 @@
                 <a:ea typeface="Calibri" pitchFamily="34" charset="-122"/>
                 <a:cs typeface="Calibri" pitchFamily="34" charset="-120"/>
               </a:rPr>
-              <a:t>Tumors vary in DNA shedding; a negative ctDNA result can be a false negative, and clonal hematopoiesis can confound interpretation.</a:t>
-            </a:r>
-            <a:endParaRPr lang="en-US" sz="1250" dirty="0"/>
-          </a:p>
-        </p:txBody>
-      </p:sp>
-      <p:sp>
-        <p:nvSpPr>
-          <p:cNvPr id="9" name="Text 7"/>
+              <a:t>Liquid biopsy is specific but less sensitive — a negative cfDNA result should be confirmed on tissue when suspicion is high.</a:t>
+            </a:r>
+            <a:endParaRPr lang="en-US" sz="1350" dirty="0"/>
+          </a:p>
+        </p:txBody>
+      </p:sp>
+      <p:sp>
+        <p:nvSpPr>
+          <p:cNvPr id="8" name="Text 6"/>
           <p:cNvSpPr/>
           <p:nvPr/>
         </p:nvSpPr>
@@ -7518,7 +7540,7 @@
       </p:sp>
       <p:sp>
         <p:nvSpPr>
-          <p:cNvPr id="10" name="Text 8"/>
+          <p:cNvPr id="9" name="Text 7"/>
           <p:cNvSpPr/>
           <p:nvPr/>
         </p:nvSpPr>
@@ -7755,7 +7777,7 @@
                 <a:ea typeface="Calibri" pitchFamily="34" charset="-122"/>
                 <a:cs typeface="Calibri" pitchFamily="34" charset="-120"/>
               </a:rPr>
-              <a:t>CDx</a:t>
+              <a:t>Targeted</a:t>
             </a:r>
             <a:endParaRPr lang="en-US" sz="3600" dirty="0"/>
           </a:p>
@@ -7794,7 +7816,7 @@
                 <a:ea typeface="Calibri" pitchFamily="34" charset="-122"/>
                 <a:cs typeface="Calibri" pitchFamily="34" charset="-120"/>
               </a:rPr>
-              <a:t>Companion diagnostics pair a test with a specific therapy</a:t>
+              <a:t>Biomarkers match patients to targeted therapy</a:t>
             </a:r>
             <a:endParaRPr lang="en-US" sz="1150" dirty="0"/>
           </a:p>
@@ -7862,7 +7884,7 @@
                 <a:ea typeface="Calibri" pitchFamily="34" charset="-122"/>
                 <a:cs typeface="Calibri" pitchFamily="34" charset="-120"/>
               </a:rPr>
-              <a:t>Tissue</a:t>
+              <a:t>Somatic≠germline</a:t>
             </a:r>
             <a:endParaRPr lang="en-US" sz="3600" dirty="0"/>
           </a:p>
@@ -7901,7 +7923,7 @@
                 <a:ea typeface="Calibri" pitchFamily="34" charset="-122"/>
                 <a:cs typeface="Calibri" pitchFamily="34" charset="-120"/>
               </a:rPr>
-              <a:t>Tumor fraction and fixation make or break a result</a:t>
+              <a:t>Tumor findings can reveal inherited risk</a:t>
             </a:r>
             <a:endParaRPr lang="en-US" sz="1150" dirty="0"/>
           </a:p>
@@ -7969,7 +7991,7 @@
                 <a:ea typeface="Calibri" pitchFamily="34" charset="-122"/>
                 <a:cs typeface="Calibri" pitchFamily="34" charset="-120"/>
               </a:rPr>
-              <a:t>Germline</a:t>
+              <a:t>Consent</a:t>
             </a:r>
             <a:endParaRPr lang="en-US" sz="3600" dirty="0"/>
           </a:p>
@@ -8008,7 +8030,7 @@
                 <a:ea typeface="Calibri" pitchFamily="34" charset="-122"/>
                 <a:cs typeface="Calibri" pitchFamily="34" charset="-120"/>
               </a:rPr>
-              <a:t>A tumor finding can carry hereditary implications</a:t>
+              <a:t>Germline testing carries family implications</a:t>
             </a:r>
             <a:endParaRPr lang="en-US" sz="1150" dirty="0"/>
           </a:p>
@@ -8079,7 +8101,7 @@
                 <a:ea typeface="Calibri" pitchFamily="34" charset="-122"/>
                 <a:cs typeface="Calibri" pitchFamily="34" charset="-120"/>
               </a:rPr>
-              <a:t>Solid-tumor molecular testing links biomarkers to targeted therapy, while germline testing identifies hereditary risk. Both demand attention to tissue adequacy, the somatic-versus-germline distinction, and clear reporting.</a:t>
+              <a:t>Solid-tumor molecular testing pairs patients with targeted and immunotherapies, while germline testing addresses heritable cancer risk. The two intersect when tumor sequencing uncovers a possible inherited variant.</a:t>
             </a:r>
             <a:endParaRPr lang="en-US" sz="1450" dirty="0"/>
           </a:p>
@@ -8122,7 +8144,7 @@
                 <a:ea typeface="Calibri" pitchFamily="34" charset="-122"/>
                 <a:cs typeface="Calibri" pitchFamily="34" charset="-120"/>
               </a:rPr>
-              <a:t>Preanalytics (fixation, tumor content) and the somatic/germline distinction determine whether a solid-tumor result is valid and complete.</a:t>
+              <a:t>Somatic profiling guides therapy; germline testing guides inherited risk — and a tumor result can cross into germline territory.</a:t>
             </a:r>
             <a:endParaRPr lang="en-US" sz="1300" dirty="0"/>
           </a:p>
@@ -8248,7 +8270,7 @@
     <p:bg>
       <p:bgPr>
         <a:solidFill>
-          <a:srgbClr val="0A2A45"/>
+          <a:srgbClr val="FFFFFF"/>
         </a:solidFill>
       </p:bgPr>
     </p:bg>
@@ -8275,7 +8297,7 @@
         <p:spPr>
           <a:xfrm>
             <a:off x="566928" y="329184"/>
-            <a:ext cx="10058400" cy="310896"/>
+            <a:ext cx="10515600" cy="310896"/>
           </a:xfrm>
           <a:prstGeom prst="rect">
             <a:avLst/>
@@ -8287,7 +8309,7 @@
           <a:bodyPr wrap="square" lIns="0" tIns="0" rIns="0" bIns="0" rtlCol="0" anchor="ctr"/>
           <a:lstStyle/>
           <a:p>
-            <a:pPr indent="0" marL="0">
+            <a:pPr algn="l" indent="0" marL="0">
               <a:buNone/>
             </a:pPr>
             <a:r>
@@ -8299,7 +8321,7 @@
                 <a:ea typeface="Calibri" pitchFamily="34" charset="-122"/>
                 <a:cs typeface="Calibri" pitchFamily="34" charset="-120"/>
               </a:rPr>
-              <a:t>MOLECULAR &amp; CYTOGENETICS</a:t>
+              <a:t>MOLECULAR &amp; CYTOGENETICS   ·   BOARD REVIEW  ·  Q1</a:t>
             </a:r>
             <a:endParaRPr lang="en-US" sz="1100" dirty="0"/>
           </a:p>
@@ -8313,8 +8335,8 @@
         </p:nvSpPr>
         <p:spPr>
           <a:xfrm>
-            <a:off x="566928" y="676656"/>
-            <a:ext cx="10972800" cy="749808"/>
+            <a:off x="566928" y="713232"/>
+            <a:ext cx="11064240" cy="749808"/>
           </a:xfrm>
           <a:prstGeom prst="rect">
             <a:avLst/>
@@ -8326,62 +8348,206 @@
           <a:bodyPr wrap="square" lIns="0" tIns="0" rIns="0" bIns="0" rtlCol="0" anchor="ctr"/>
           <a:lstStyle/>
           <a:p>
-            <a:pPr indent="0" marL="0">
-              <a:buNone/>
-            </a:pPr>
-            <a:r>
-              <a:rPr lang="en-US" sz="3000" b="1" dirty="0">
-                <a:solidFill>
-                  <a:srgbClr val="FFFFFF"/>
-                </a:solidFill>
-                <a:latin typeface="Calibri" pitchFamily="34" charset="0"/>
-                <a:ea typeface="Calibri" pitchFamily="34" charset="-122"/>
-                <a:cs typeface="Calibri" pitchFamily="34" charset="-120"/>
-              </a:rPr>
-              <a:t>Key Take-Home Points</a:t>
-            </a:r>
-            <a:endParaRPr lang="en-US" sz="3000" dirty="0"/>
-          </a:p>
-        </p:txBody>
-      </p:sp>
-      <p:sp>
-        <p:nvSpPr>
-          <p:cNvPr id="4" name="Shape 2"/>
-          <p:cNvSpPr/>
-          <p:nvPr/>
-        </p:nvSpPr>
-        <p:spPr>
-          <a:xfrm>
-            <a:off x="566928" y="1517904"/>
-            <a:ext cx="11057839" cy="841248"/>
+            <a:pPr algn="l" indent="0" marL="0">
+              <a:buNone/>
+            </a:pPr>
+            <a:r>
+              <a:rPr lang="en-US" sz="2600" b="1" dirty="0">
+                <a:solidFill>
+                  <a:srgbClr val="0E3A5F"/>
+                </a:solidFill>
+                <a:latin typeface="Calibri" pitchFamily="34" charset="0"/>
+                <a:ea typeface="Calibri" pitchFamily="34" charset="-122"/>
+                <a:cs typeface="Calibri" pitchFamily="34" charset="-120"/>
+              </a:rPr>
+              <a:t>Board-Style Review</a:t>
+            </a:r>
+            <a:endParaRPr lang="en-US" sz="2600" dirty="0"/>
+          </a:p>
+        </p:txBody>
+      </p:sp>
+      <p:sp>
+        <p:nvSpPr>
+          <p:cNvPr id="4" name="Text 2"/>
+          <p:cNvSpPr/>
+          <p:nvPr/>
+        </p:nvSpPr>
+        <p:spPr>
+          <a:xfrm>
+            <a:off x="566928" y="1417320"/>
+            <a:ext cx="11057839" cy="914400"/>
+          </a:xfrm>
+          <a:prstGeom prst="rect">
+            <a:avLst/>
+          </a:prstGeom>
+          <a:noFill/>
+          <a:ln/>
+        </p:spPr>
+        <p:txBody>
+          <a:bodyPr wrap="square" lIns="0" tIns="0" rIns="0" bIns="0" rtlCol="0" anchor="t"/>
+          <a:lstStyle/>
+          <a:p>
+            <a:pPr algn="l" indent="0" marL="0">
+              <a:lnSpc>
+                <a:spcPct val="105000"/>
+              </a:lnSpc>
+              <a:buNone/>
+            </a:pPr>
+            <a:r>
+              <a:rPr lang="en-US" sz="1450" b="1" dirty="0">
+                <a:solidFill>
+                  <a:srgbClr val="1B2A38"/>
+                </a:solidFill>
+                <a:latin typeface="Calibri" pitchFamily="34" charset="0"/>
+                <a:ea typeface="Calibri" pitchFamily="34" charset="-122"/>
+                <a:cs typeface="Calibri" pitchFamily="34" charset="-120"/>
+              </a:rPr>
+              <a:t>A KRAS mutation in colorectal cancer is a:</a:t>
+            </a:r>
+            <a:endParaRPr lang="en-US" sz="1450" dirty="0"/>
+          </a:p>
+        </p:txBody>
+      </p:sp>
+      <p:sp>
+        <p:nvSpPr>
+          <p:cNvPr id="5" name="Text 3"/>
+          <p:cNvSpPr/>
+          <p:nvPr/>
+        </p:nvSpPr>
+        <p:spPr>
+          <a:xfrm>
+            <a:off x="658368" y="2395728"/>
+            <a:ext cx="6192390" cy="3017520"/>
+          </a:xfrm>
+          <a:prstGeom prst="rect">
+            <a:avLst/>
+          </a:prstGeom>
+          <a:noFill/>
+          <a:ln/>
+        </p:spPr>
+        <p:txBody>
+          <a:bodyPr wrap="square" lIns="0" tIns="0" rIns="0" bIns="0" rtlCol="0" anchor="t"/>
+          <a:lstStyle/>
+          <a:p>
+            <a:pPr algn="l" indent="0" marL="0">
+              <a:spcAft>
+                <a:spcPts val="600"/>
+              </a:spcAft>
+              <a:buNone/>
+            </a:pPr>
+            <a:r>
+              <a:rPr lang="en-US" sz="1350" dirty="0">
+                <a:solidFill>
+                  <a:srgbClr val="33444F"/>
+                </a:solidFill>
+                <a:latin typeface="Calibri" pitchFamily="34" charset="0"/>
+                <a:ea typeface="Calibri" pitchFamily="34" charset="-122"/>
+                <a:cs typeface="Calibri" pitchFamily="34" charset="-120"/>
+              </a:rPr>
+              <a:t>A. Positive predictive marker for anti-EGFR therapy</a:t>
+            </a:r>
+            <a:endParaRPr lang="en-US" sz="1350" dirty="0"/>
+          </a:p>
+          <a:p>
+            <a:pPr algn="l" indent="0" marL="0">
+              <a:spcAft>
+                <a:spcPts val="600"/>
+              </a:spcAft>
+              <a:buNone/>
+            </a:pPr>
+            <a:r>
+              <a:rPr lang="en-US" sz="1350" b="1" dirty="0">
+                <a:solidFill>
+                  <a:srgbClr val="005A63"/>
+                </a:solidFill>
+                <a:latin typeface="Calibri" pitchFamily="34" charset="0"/>
+                <a:ea typeface="Calibri" pitchFamily="34" charset="-122"/>
+                <a:cs typeface="Calibri" pitchFamily="34" charset="-120"/>
+              </a:rPr>
+              <a:t>B. Negative predictive marker (resistance) for anti-EGFR therapy</a:t>
+            </a:r>
+            <a:endParaRPr lang="en-US" sz="1350" dirty="0"/>
+          </a:p>
+          <a:p>
+            <a:pPr algn="l" indent="0" marL="0">
+              <a:spcAft>
+                <a:spcPts val="600"/>
+              </a:spcAft>
+              <a:buNone/>
+            </a:pPr>
+            <a:r>
+              <a:rPr lang="en-US" sz="1350" dirty="0">
+                <a:solidFill>
+                  <a:srgbClr val="33444F"/>
+                </a:solidFill>
+                <a:latin typeface="Calibri" pitchFamily="34" charset="0"/>
+                <a:ea typeface="Calibri" pitchFamily="34" charset="-122"/>
+                <a:cs typeface="Calibri" pitchFamily="34" charset="-120"/>
+              </a:rPr>
+              <a:t>C. Germline-only finding</a:t>
+            </a:r>
+            <a:endParaRPr lang="en-US" sz="1350" dirty="0"/>
+          </a:p>
+          <a:p>
+            <a:pPr algn="l" indent="0" marL="0">
+              <a:spcAft>
+                <a:spcPts val="600"/>
+              </a:spcAft>
+              <a:buNone/>
+            </a:pPr>
+            <a:r>
+              <a:rPr lang="en-US" sz="1350" dirty="0">
+                <a:solidFill>
+                  <a:srgbClr val="33444F"/>
+                </a:solidFill>
+                <a:latin typeface="Calibri" pitchFamily="34" charset="0"/>
+                <a:ea typeface="Calibri" pitchFamily="34" charset="-122"/>
+                <a:cs typeface="Calibri" pitchFamily="34" charset="-120"/>
+              </a:rPr>
+              <a:t>D. Marker of MSI</a:t>
+            </a:r>
+            <a:endParaRPr lang="en-US" sz="1350" dirty="0"/>
+          </a:p>
+          <a:p>
+            <a:pPr algn="l" indent="0" marL="0">
+              <a:spcAft>
+                <a:spcPts val="600"/>
+              </a:spcAft>
+              <a:buNone/>
+            </a:pPr>
+            <a:r>
+              <a:rPr lang="en-US" sz="1350" dirty="0">
+                <a:solidFill>
+                  <a:srgbClr val="33444F"/>
+                </a:solidFill>
+                <a:latin typeface="Calibri" pitchFamily="34" charset="0"/>
+                <a:ea typeface="Calibri" pitchFamily="34" charset="-122"/>
+                <a:cs typeface="Calibri" pitchFamily="34" charset="-120"/>
+              </a:rPr>
+              <a:t>E. Prognostic marker only</a:t>
+            </a:r>
+            <a:endParaRPr lang="en-US" sz="1350" dirty="0"/>
+          </a:p>
+        </p:txBody>
+      </p:sp>
+      <p:sp>
+        <p:nvSpPr>
+          <p:cNvPr id="6" name="Shape 4"/>
+          <p:cNvSpPr/>
+          <p:nvPr/>
+        </p:nvSpPr>
+        <p:spPr>
+          <a:xfrm>
+            <a:off x="7201632" y="2395728"/>
+            <a:ext cx="4423136" cy="3246120"/>
           </a:xfrm>
           <a:prstGeom prst="roundRect">
             <a:avLst>
-              <a:gd name="adj" fmla="val 7609"/>
+              <a:gd name="adj" fmla="val 2535"/>
             </a:avLst>
           </a:prstGeom>
           <a:solidFill>
-            <a:srgbClr val="143651"/>
-          </a:solidFill>
-          <a:ln/>
-        </p:spPr>
-      </p:sp>
-      <p:sp>
-        <p:nvSpPr>
-          <p:cNvPr id="5" name="Shape 3"/>
-          <p:cNvSpPr/>
-          <p:nvPr/>
-        </p:nvSpPr>
-        <p:spPr>
-          <a:xfrm>
-            <a:off x="749808" y="1755648"/>
-            <a:ext cx="365760" cy="365760"/>
-          </a:xfrm>
-          <a:prstGeom prst="ellipse">
-            <a:avLst/>
-          </a:prstGeom>
-          <a:solidFill>
-            <a:srgbClr val="00838F"/>
+            <a:srgbClr val="E0F2F4"/>
           </a:solidFill>
           <a:ln/>
           <a:effectLst>
@@ -8395,14 +8561,14 @@
       </p:sp>
       <p:sp>
         <p:nvSpPr>
-          <p:cNvPr id="6" name="Text 4"/>
-          <p:cNvSpPr/>
-          <p:nvPr/>
-        </p:nvSpPr>
-        <p:spPr>
-          <a:xfrm>
-            <a:off x="749808" y="1755648"/>
-            <a:ext cx="365760" cy="365760"/>
+          <p:cNvPr id="7" name="Text 5"/>
+          <p:cNvSpPr/>
+          <p:nvPr/>
+        </p:nvSpPr>
+        <p:spPr>
+          <a:xfrm>
+            <a:off x="7439376" y="2578608"/>
+            <a:ext cx="3965936" cy="457200"/>
           </a:xfrm>
           <a:prstGeom prst="rect">
             <a:avLst/>
@@ -8414,19 +8580,33 @@
           <a:bodyPr wrap="square" lIns="0" tIns="0" rIns="0" bIns="0" rtlCol="0" anchor="ctr"/>
           <a:lstStyle/>
           <a:p>
-            <a:pPr algn="ctr" indent="0" marL="0">
+            <a:pPr indent="0" marL="0">
               <a:buNone/>
             </a:pPr>
             <a:r>
               <a:rPr lang="en-US" sz="1500" b="1" dirty="0">
                 <a:solidFill>
-                  <a:srgbClr val="FFFFFF"/>
-                </a:solidFill>
-                <a:latin typeface="Calibri" pitchFamily="34" charset="0"/>
-                <a:ea typeface="Calibri" pitchFamily="34" charset="-122"/>
-                <a:cs typeface="Calibri" pitchFamily="34" charset="-120"/>
-              </a:rPr>
-              <a:t>1</a:t>
+                  <a:srgbClr val="00838F"/>
+                </a:solidFill>
+                <a:latin typeface="Calibri" pitchFamily="34" charset="0"/>
+                <a:ea typeface="Calibri" pitchFamily="34" charset="-122"/>
+                <a:cs typeface="Calibri" pitchFamily="34" charset="-120"/>
+              </a:rPr>
+              <a:t>ANSWER  </a:t>
+            </a:r>
+            <a:pPr indent="0" marL="0">
+              <a:buNone/>
+            </a:pPr>
+            <a:r>
+              <a:rPr lang="en-US" sz="1500" b="1" dirty="0">
+                <a:solidFill>
+                  <a:srgbClr val="1B2A38"/>
+                </a:solidFill>
+                <a:latin typeface="Calibri" pitchFamily="34" charset="0"/>
+                <a:ea typeface="Calibri" pitchFamily="34" charset="-122"/>
+                <a:cs typeface="Calibri" pitchFamily="34" charset="-120"/>
+              </a:rPr>
+              <a:t>B — Resistance to anti-EGFR</a:t>
             </a:r>
             <a:endParaRPr lang="en-US" sz="1500" dirty="0"/>
           </a:p>
@@ -8434,14 +8614,56 @@
       </p:sp>
       <p:sp>
         <p:nvSpPr>
-          <p:cNvPr id="7" name="Text 5"/>
-          <p:cNvSpPr/>
-          <p:nvPr/>
-        </p:nvSpPr>
-        <p:spPr>
-          <a:xfrm>
-            <a:off x="1280160" y="1517904"/>
-            <a:ext cx="10143439" cy="841248"/>
+          <p:cNvPr id="8" name="Text 6"/>
+          <p:cNvSpPr/>
+          <p:nvPr/>
+        </p:nvSpPr>
+        <p:spPr>
+          <a:xfrm>
+            <a:off x="7439376" y="3127248"/>
+            <a:ext cx="3947648" cy="2377440"/>
+          </a:xfrm>
+          <a:prstGeom prst="rect">
+            <a:avLst/>
+          </a:prstGeom>
+          <a:noFill/>
+          <a:ln/>
+        </p:spPr>
+        <p:txBody>
+          <a:bodyPr wrap="square" lIns="0" tIns="0" rIns="0" bIns="0" rtlCol="0" anchor="t"/>
+          <a:lstStyle/>
+          <a:p>
+            <a:pPr algn="l" indent="0" marL="0">
+              <a:lnSpc>
+                <a:spcPct val="108000"/>
+              </a:lnSpc>
+              <a:buNone/>
+            </a:pPr>
+            <a:r>
+              <a:rPr lang="en-US" sz="1250" dirty="0">
+                <a:solidFill>
+                  <a:srgbClr val="33444F"/>
+                </a:solidFill>
+                <a:latin typeface="Calibri" pitchFamily="34" charset="0"/>
+                <a:ea typeface="Calibri" pitchFamily="34" charset="-122"/>
+                <a:cs typeface="Calibri" pitchFamily="34" charset="-120"/>
+              </a:rPr>
+              <a:t>KRAS/NRAS mutations predict lack of response to anti-EGFR antibodies in colorectal cancer.</a:t>
+            </a:r>
+            <a:endParaRPr lang="en-US" sz="1250" dirty="0"/>
+          </a:p>
+        </p:txBody>
+      </p:sp>
+      <p:sp>
+        <p:nvSpPr>
+          <p:cNvPr id="9" name="Text 7"/>
+          <p:cNvSpPr/>
+          <p:nvPr/>
+        </p:nvSpPr>
+        <p:spPr>
+          <a:xfrm>
+            <a:off x="566928" y="6473952"/>
+            <a:ext cx="7772400" cy="274320"/>
           </a:xfrm>
           <a:prstGeom prst="rect">
             <a:avLst/>
@@ -8457,68 +8679,19 @@
               <a:buNone/>
             </a:pPr>
             <a:r>
-              <a:rPr lang="en-US" sz="1350" dirty="0">
-                <a:solidFill>
-                  <a:srgbClr val="E7EEF4"/>
-                </a:solidFill>
-                <a:latin typeface="Calibri" pitchFamily="34" charset="0"/>
-                <a:ea typeface="Calibri" pitchFamily="34" charset="-122"/>
-                <a:cs typeface="Calibri" pitchFamily="34" charset="-120"/>
-              </a:rPr>
-              <a:t>Companion diagnostics pair a biomarker with a specific therapy; tumor type changes interpretation of the same variant.</a:t>
-            </a:r>
-            <a:endParaRPr lang="en-US" sz="1350" dirty="0"/>
-          </a:p>
-        </p:txBody>
-      </p:sp>
-      <p:sp>
-        <p:nvSpPr>
-          <p:cNvPr id="8" name="Shape 6"/>
-          <p:cNvSpPr/>
-          <p:nvPr/>
-        </p:nvSpPr>
-        <p:spPr>
-          <a:xfrm>
-            <a:off x="566928" y="2505456"/>
-            <a:ext cx="11057839" cy="841248"/>
-          </a:xfrm>
-          <a:prstGeom prst="roundRect">
-            <a:avLst>
-              <a:gd name="adj" fmla="val 7609"/>
-            </a:avLst>
-          </a:prstGeom>
-          <a:solidFill>
-            <a:srgbClr val="143651"/>
-          </a:solidFill>
-          <a:ln/>
-        </p:spPr>
-      </p:sp>
-      <p:sp>
-        <p:nvSpPr>
-          <p:cNvPr id="9" name="Shape 7"/>
-          <p:cNvSpPr/>
-          <p:nvPr/>
-        </p:nvSpPr>
-        <p:spPr>
-          <a:xfrm>
-            <a:off x="749808" y="2743200"/>
-            <a:ext cx="365760" cy="365760"/>
-          </a:xfrm>
-          <a:prstGeom prst="ellipse">
-            <a:avLst/>
-          </a:prstGeom>
-          <a:solidFill>
-            <a:srgbClr val="00838F"/>
-          </a:solidFill>
-          <a:ln/>
-          <a:effectLst>
-            <a:outerShdw sx="100000" sy="100000" kx="0" ky="0" algn="bl" rotWithShape="0" blurRad="88900" dist="25400" dir="5400000">
-              <a:srgbClr val="22303C">
-                <a:alpha val="12000"/>
-              </a:srgbClr>
-            </a:outerShdw>
-          </a:effectLst>
-        </p:spPr>
+              <a:rPr lang="en-US" sz="850" dirty="0">
+                <a:solidFill>
+                  <a:srgbClr val="9AA8B4"/>
+                </a:solidFill>
+                <a:latin typeface="Calibri" pitchFamily="34" charset="0"/>
+                <a:ea typeface="Calibri" pitchFamily="34" charset="-122"/>
+                <a:cs typeface="Calibri" pitchFamily="34" charset="-120"/>
+              </a:rPr>
+              <a:t>Makassed General Hospital  ·  Department of Laboratory Medicine</a:t>
+            </a:r>
+            <a:endParaRPr lang="en-US" sz="850" dirty="0"/>
+          </a:p>
+        </p:txBody>
       </p:sp>
       <p:sp>
         <p:nvSpPr>
@@ -8528,8 +8701,8 @@
         </p:nvSpPr>
         <p:spPr>
           <a:xfrm>
-            <a:off x="749808" y="2743200"/>
-            <a:ext cx="365760" cy="365760"/>
+            <a:off x="9814255" y="6473952"/>
+            <a:ext cx="1828800" cy="274320"/>
           </a:xfrm>
           <a:prstGeom prst="rect">
             <a:avLst/>
@@ -8541,504 +8714,34 @@
           <a:bodyPr wrap="square" lIns="0" tIns="0" rIns="0" bIns="0" rtlCol="0" anchor="ctr"/>
           <a:lstStyle/>
           <a:p>
-            <a:pPr algn="ctr" indent="0" marL="0">
-              <a:buNone/>
-            </a:pPr>
-            <a:r>
-              <a:rPr lang="en-US" sz="1500" b="1" dirty="0">
-                <a:solidFill>
-                  <a:srgbClr val="FFFFFF"/>
-                </a:solidFill>
-                <a:latin typeface="Calibri" pitchFamily="34" charset="0"/>
-                <a:ea typeface="Calibri" pitchFamily="34" charset="-122"/>
-                <a:cs typeface="Calibri" pitchFamily="34" charset="-120"/>
-              </a:rPr>
-              <a:t>2</a:t>
-            </a:r>
-            <a:endParaRPr lang="en-US" sz="1500" dirty="0"/>
-          </a:p>
-        </p:txBody>
-      </p:sp>
-      <p:sp>
-        <p:nvSpPr>
-          <p:cNvPr id="11" name="Text 9"/>
-          <p:cNvSpPr/>
-          <p:nvPr/>
-        </p:nvSpPr>
-        <p:spPr>
-          <a:xfrm>
-            <a:off x="1280160" y="2505456"/>
-            <a:ext cx="10143439" cy="841248"/>
-          </a:xfrm>
-          <a:prstGeom prst="rect">
-            <a:avLst/>
-          </a:prstGeom>
-          <a:noFill/>
-          <a:ln/>
-        </p:spPr>
-        <p:txBody>
-          <a:bodyPr wrap="square" lIns="0" tIns="0" rIns="0" bIns="0" rtlCol="0" anchor="ctr"/>
-          <a:lstStyle/>
-          <a:p>
-            <a:pPr algn="l" indent="0" marL="0">
-              <a:buNone/>
-            </a:pPr>
-            <a:r>
-              <a:rPr lang="en-US" sz="1350" dirty="0">
-                <a:solidFill>
-                  <a:srgbClr val="E7EEF4"/>
-                </a:solidFill>
-                <a:latin typeface="Calibri" pitchFamily="34" charset="0"/>
-                <a:ea typeface="Calibri" pitchFamily="34" charset="-122"/>
-                <a:cs typeface="Calibri" pitchFamily="34" charset="-120"/>
-              </a:rPr>
-              <a:t>Tumor fraction, fixation, and FFPE artifacts determine validity — report cellularity and limit of detection.</a:t>
-            </a:r>
-            <a:endParaRPr lang="en-US" sz="1350" dirty="0"/>
-          </a:p>
-        </p:txBody>
-      </p:sp>
-      <p:sp>
-        <p:nvSpPr>
-          <p:cNvPr id="12" name="Shape 10"/>
-          <p:cNvSpPr/>
-          <p:nvPr/>
-        </p:nvSpPr>
-        <p:spPr>
-          <a:xfrm>
-            <a:off x="566928" y="3493008"/>
-            <a:ext cx="11057839" cy="841248"/>
-          </a:xfrm>
-          <a:prstGeom prst="roundRect">
-            <a:avLst>
-              <a:gd name="adj" fmla="val 7609"/>
-            </a:avLst>
-          </a:prstGeom>
-          <a:solidFill>
-            <a:srgbClr val="143651"/>
-          </a:solidFill>
-          <a:ln/>
-        </p:spPr>
-      </p:sp>
-      <p:sp>
-        <p:nvSpPr>
-          <p:cNvPr id="13" name="Shape 11"/>
-          <p:cNvSpPr/>
-          <p:nvPr/>
-        </p:nvSpPr>
-        <p:spPr>
-          <a:xfrm>
-            <a:off x="749808" y="3730752"/>
-            <a:ext cx="365760" cy="365760"/>
-          </a:xfrm>
-          <a:prstGeom prst="ellipse">
-            <a:avLst/>
-          </a:prstGeom>
-          <a:solidFill>
-            <a:srgbClr val="00838F"/>
-          </a:solidFill>
-          <a:ln/>
-          <a:effectLst>
-            <a:outerShdw sx="100000" sy="100000" kx="0" ky="0" algn="bl" rotWithShape="0" blurRad="88900" dist="25400" dir="5400000">
-              <a:srgbClr val="22303C">
-                <a:alpha val="12000"/>
-              </a:srgbClr>
-            </a:outerShdw>
-          </a:effectLst>
-        </p:spPr>
-      </p:sp>
-      <p:sp>
-        <p:nvSpPr>
-          <p:cNvPr id="14" name="Text 12"/>
-          <p:cNvSpPr/>
-          <p:nvPr/>
-        </p:nvSpPr>
-        <p:spPr>
-          <a:xfrm>
-            <a:off x="749808" y="3730752"/>
-            <a:ext cx="365760" cy="365760"/>
-          </a:xfrm>
-          <a:prstGeom prst="rect">
-            <a:avLst/>
-          </a:prstGeom>
-          <a:noFill/>
-          <a:ln/>
-        </p:spPr>
-        <p:txBody>
-          <a:bodyPr wrap="square" lIns="0" tIns="0" rIns="0" bIns="0" rtlCol="0" anchor="ctr"/>
-          <a:lstStyle/>
-          <a:p>
-            <a:pPr algn="ctr" indent="0" marL="0">
-              <a:buNone/>
-            </a:pPr>
-            <a:r>
-              <a:rPr lang="en-US" sz="1500" b="1" dirty="0">
-                <a:solidFill>
-                  <a:srgbClr val="FFFFFF"/>
-                </a:solidFill>
-                <a:latin typeface="Calibri" pitchFamily="34" charset="0"/>
-                <a:ea typeface="Calibri" pitchFamily="34" charset="-122"/>
-                <a:cs typeface="Calibri" pitchFamily="34" charset="-120"/>
-              </a:rPr>
-              <a:t>3</a:t>
-            </a:r>
-            <a:endParaRPr lang="en-US" sz="1500" dirty="0"/>
-          </a:p>
-        </p:txBody>
-      </p:sp>
-      <p:sp>
-        <p:nvSpPr>
-          <p:cNvPr id="15" name="Text 13"/>
-          <p:cNvSpPr/>
-          <p:nvPr/>
-        </p:nvSpPr>
-        <p:spPr>
-          <a:xfrm>
-            <a:off x="1280160" y="3493008"/>
-            <a:ext cx="10143439" cy="841248"/>
-          </a:xfrm>
-          <a:prstGeom prst="rect">
-            <a:avLst/>
-          </a:prstGeom>
-          <a:noFill/>
-          <a:ln/>
-        </p:spPr>
-        <p:txBody>
-          <a:bodyPr wrap="square" lIns="0" tIns="0" rIns="0" bIns="0" rtlCol="0" anchor="ctr"/>
-          <a:lstStyle/>
-          <a:p>
-            <a:pPr algn="l" indent="0" marL="0">
-              <a:buNone/>
-            </a:pPr>
-            <a:r>
-              <a:rPr lang="en-US" sz="1350" dirty="0">
-                <a:solidFill>
-                  <a:srgbClr val="E7EEF4"/>
-                </a:solidFill>
-                <a:latin typeface="Calibri" pitchFamily="34" charset="0"/>
-                <a:ea typeface="Calibri" pitchFamily="34" charset="-122"/>
-                <a:cs typeface="Calibri" pitchFamily="34" charset="-120"/>
-              </a:rPr>
-              <a:t>Tumor-only testing cannot confirm germline status; suspicious findings (e.g., BRCA at heterozygous VAF) need confirmatory germline testing + counseling.</a:t>
-            </a:r>
-            <a:endParaRPr lang="en-US" sz="1350" dirty="0"/>
-          </a:p>
-        </p:txBody>
-      </p:sp>
-      <p:sp>
-        <p:nvSpPr>
-          <p:cNvPr id="16" name="Shape 14"/>
-          <p:cNvSpPr/>
-          <p:nvPr/>
-        </p:nvSpPr>
-        <p:spPr>
-          <a:xfrm>
-            <a:off x="566928" y="4480560"/>
-            <a:ext cx="11057839" cy="841248"/>
-          </a:xfrm>
-          <a:prstGeom prst="roundRect">
-            <a:avLst>
-              <a:gd name="adj" fmla="val 7609"/>
-            </a:avLst>
-          </a:prstGeom>
-          <a:solidFill>
-            <a:srgbClr val="143651"/>
-          </a:solidFill>
-          <a:ln/>
-        </p:spPr>
-      </p:sp>
-      <p:sp>
-        <p:nvSpPr>
-          <p:cNvPr id="17" name="Shape 15"/>
-          <p:cNvSpPr/>
-          <p:nvPr/>
-        </p:nvSpPr>
-        <p:spPr>
-          <a:xfrm>
-            <a:off x="749808" y="4718304"/>
-            <a:ext cx="365760" cy="365760"/>
-          </a:xfrm>
-          <a:prstGeom prst="ellipse">
-            <a:avLst/>
-          </a:prstGeom>
-          <a:solidFill>
-            <a:srgbClr val="00838F"/>
-          </a:solidFill>
-          <a:ln/>
-          <a:effectLst>
-            <a:outerShdw sx="100000" sy="100000" kx="0" ky="0" algn="bl" rotWithShape="0" blurRad="88900" dist="25400" dir="5400000">
-              <a:srgbClr val="22303C">
-                <a:alpha val="12000"/>
-              </a:srgbClr>
-            </a:outerShdw>
-          </a:effectLst>
-        </p:spPr>
-      </p:sp>
-      <p:sp>
-        <p:nvSpPr>
-          <p:cNvPr id="18" name="Text 16"/>
-          <p:cNvSpPr/>
-          <p:nvPr/>
-        </p:nvSpPr>
-        <p:spPr>
-          <a:xfrm>
-            <a:off x="749808" y="4718304"/>
-            <a:ext cx="365760" cy="365760"/>
-          </a:xfrm>
-          <a:prstGeom prst="rect">
-            <a:avLst/>
-          </a:prstGeom>
-          <a:noFill/>
-          <a:ln/>
-        </p:spPr>
-        <p:txBody>
-          <a:bodyPr wrap="square" lIns="0" tIns="0" rIns="0" bIns="0" rtlCol="0" anchor="ctr"/>
-          <a:lstStyle/>
-          <a:p>
-            <a:pPr algn="ctr" indent="0" marL="0">
-              <a:buNone/>
-            </a:pPr>
-            <a:r>
-              <a:rPr lang="en-US" sz="1500" b="1" dirty="0">
-                <a:solidFill>
-                  <a:srgbClr val="FFFFFF"/>
-                </a:solidFill>
-                <a:latin typeface="Calibri" pitchFamily="34" charset="0"/>
-                <a:ea typeface="Calibri" pitchFamily="34" charset="-122"/>
-                <a:cs typeface="Calibri" pitchFamily="34" charset="-120"/>
-              </a:rPr>
-              <a:t>4</a:t>
-            </a:r>
-            <a:endParaRPr lang="en-US" sz="1500" dirty="0"/>
-          </a:p>
-        </p:txBody>
-      </p:sp>
-      <p:sp>
-        <p:nvSpPr>
-          <p:cNvPr id="19" name="Text 17"/>
-          <p:cNvSpPr/>
-          <p:nvPr/>
-        </p:nvSpPr>
-        <p:spPr>
-          <a:xfrm>
-            <a:off x="1280160" y="4480560"/>
-            <a:ext cx="10143439" cy="841248"/>
-          </a:xfrm>
-          <a:prstGeom prst="rect">
-            <a:avLst/>
-          </a:prstGeom>
-          <a:noFill/>
-          <a:ln/>
-        </p:spPr>
-        <p:txBody>
-          <a:bodyPr wrap="square" lIns="0" tIns="0" rIns="0" bIns="0" rtlCol="0" anchor="ctr"/>
-          <a:lstStyle/>
-          <a:p>
-            <a:pPr algn="l" indent="0" marL="0">
-              <a:buNone/>
-            </a:pPr>
-            <a:r>
-              <a:rPr lang="en-US" sz="1350" dirty="0">
-                <a:solidFill>
-                  <a:srgbClr val="E7EEF4"/>
-                </a:solidFill>
-                <a:latin typeface="Calibri" pitchFamily="34" charset="0"/>
-                <a:ea typeface="Calibri" pitchFamily="34" charset="-122"/>
-                <a:cs typeface="Calibri" pitchFamily="34" charset="-120"/>
-              </a:rPr>
-              <a:t>Liquid biopsy helps when tissue is inadequate or for monitoring, but a negative does not exclude a mutation.</a:t>
-            </a:r>
-            <a:endParaRPr lang="en-US" sz="1350" dirty="0"/>
-          </a:p>
-        </p:txBody>
-      </p:sp>
-      <p:sp>
-        <p:nvSpPr>
-          <p:cNvPr id="20" name="Shape 18"/>
-          <p:cNvSpPr/>
-          <p:nvPr/>
-        </p:nvSpPr>
-        <p:spPr>
-          <a:xfrm>
-            <a:off x="566928" y="5468112"/>
-            <a:ext cx="11057839" cy="841248"/>
-          </a:xfrm>
-          <a:prstGeom prst="roundRect">
-            <a:avLst>
-              <a:gd name="adj" fmla="val 7609"/>
-            </a:avLst>
-          </a:prstGeom>
-          <a:solidFill>
-            <a:srgbClr val="143651"/>
-          </a:solidFill>
-          <a:ln/>
-        </p:spPr>
-      </p:sp>
-      <p:sp>
-        <p:nvSpPr>
-          <p:cNvPr id="21" name="Shape 19"/>
-          <p:cNvSpPr/>
-          <p:nvPr/>
-        </p:nvSpPr>
-        <p:spPr>
-          <a:xfrm>
-            <a:off x="749808" y="5705856"/>
-            <a:ext cx="365760" cy="365760"/>
-          </a:xfrm>
-          <a:prstGeom prst="ellipse">
-            <a:avLst/>
-          </a:prstGeom>
-          <a:solidFill>
-            <a:srgbClr val="00838F"/>
-          </a:solidFill>
-          <a:ln/>
-          <a:effectLst>
-            <a:outerShdw sx="100000" sy="100000" kx="0" ky="0" algn="bl" rotWithShape="0" blurRad="88900" dist="25400" dir="5400000">
-              <a:srgbClr val="22303C">
-                <a:alpha val="12000"/>
-              </a:srgbClr>
-            </a:outerShdw>
-          </a:effectLst>
-        </p:spPr>
-      </p:sp>
-      <p:sp>
-        <p:nvSpPr>
-          <p:cNvPr id="22" name="Text 20"/>
-          <p:cNvSpPr/>
-          <p:nvPr/>
-        </p:nvSpPr>
-        <p:spPr>
-          <a:xfrm>
-            <a:off x="749808" y="5705856"/>
-            <a:ext cx="365760" cy="365760"/>
-          </a:xfrm>
-          <a:prstGeom prst="rect">
-            <a:avLst/>
-          </a:prstGeom>
-          <a:noFill/>
-          <a:ln/>
-        </p:spPr>
-        <p:txBody>
-          <a:bodyPr wrap="square" lIns="0" tIns="0" rIns="0" bIns="0" rtlCol="0" anchor="ctr"/>
-          <a:lstStyle/>
-          <a:p>
-            <a:pPr algn="ctr" indent="0" marL="0">
-              <a:buNone/>
-            </a:pPr>
-            <a:r>
-              <a:rPr lang="en-US" sz="1500" b="1" dirty="0">
-                <a:solidFill>
-                  <a:srgbClr val="FFFFFF"/>
-                </a:solidFill>
-                <a:latin typeface="Calibri" pitchFamily="34" charset="0"/>
-                <a:ea typeface="Calibri" pitchFamily="34" charset="-122"/>
-                <a:cs typeface="Calibri" pitchFamily="34" charset="-120"/>
-              </a:rPr>
-              <a:t>5</a:t>
-            </a:r>
-            <a:endParaRPr lang="en-US" sz="1500" dirty="0"/>
-          </a:p>
-        </p:txBody>
-      </p:sp>
-      <p:sp>
-        <p:nvSpPr>
-          <p:cNvPr id="23" name="Text 21"/>
-          <p:cNvSpPr/>
-          <p:nvPr/>
-        </p:nvSpPr>
-        <p:spPr>
-          <a:xfrm>
-            <a:off x="1280160" y="5468112"/>
-            <a:ext cx="10143439" cy="841248"/>
-          </a:xfrm>
-          <a:prstGeom prst="rect">
-            <a:avLst/>
-          </a:prstGeom>
-          <a:noFill/>
-          <a:ln/>
-        </p:spPr>
-        <p:txBody>
-          <a:bodyPr wrap="square" lIns="0" tIns="0" rIns="0" bIns="0" rtlCol="0" anchor="ctr"/>
-          <a:lstStyle/>
-          <a:p>
-            <a:pPr algn="l" indent="0" marL="0">
-              <a:buNone/>
-            </a:pPr>
-            <a:r>
-              <a:rPr lang="en-US" sz="1350" dirty="0">
-                <a:solidFill>
-                  <a:srgbClr val="E7EEF4"/>
-                </a:solidFill>
-                <a:latin typeface="Calibri" pitchFamily="34" charset="0"/>
-                <a:ea typeface="Calibri" pitchFamily="34" charset="-122"/>
-                <a:cs typeface="Calibri" pitchFamily="34" charset="-120"/>
-              </a:rPr>
-              <a:t>MSI/dMMR and TMB are immunotherapy biomarkers; MSI can flag Lynch syndrome.</a:t>
-            </a:r>
-            <a:endParaRPr lang="en-US" sz="1350" dirty="0"/>
-          </a:p>
-        </p:txBody>
-      </p:sp>
-      <p:sp>
-        <p:nvSpPr>
-          <p:cNvPr id="24" name="Text 22"/>
-          <p:cNvSpPr/>
-          <p:nvPr/>
-        </p:nvSpPr>
-        <p:spPr>
-          <a:xfrm>
-            <a:off x="566928" y="6473952"/>
-            <a:ext cx="8229600" cy="274320"/>
-          </a:xfrm>
-          <a:prstGeom prst="rect">
-            <a:avLst/>
-          </a:prstGeom>
-          <a:noFill/>
-          <a:ln/>
-        </p:spPr>
-        <p:txBody>
-          <a:bodyPr wrap="square" lIns="0" tIns="0" rIns="0" bIns="0" rtlCol="0" anchor="ctr"/>
-          <a:lstStyle/>
-          <a:p>
-            <a:pPr indent="0" marL="0">
+            <a:pPr algn="r" indent="0" marL="0">
               <a:buNone/>
             </a:pPr>
             <a:r>
               <a:rPr lang="en-US" sz="850" dirty="0">
                 <a:solidFill>
-                  <a:srgbClr val="5E7488"/>
-                </a:solidFill>
-                <a:latin typeface="Calibri" pitchFamily="34" charset="0"/>
-                <a:ea typeface="Calibri" pitchFamily="34" charset="-122"/>
-                <a:cs typeface="Calibri" pitchFamily="34" charset="-120"/>
-              </a:rPr>
-              <a:t>Makassed General Hospital  ·  Department of Laboratory Medicine</a:t>
-            </a:r>
-            <a:endParaRPr lang="en-US" sz="850" dirty="0"/>
-          </a:p>
-        </p:txBody>
-      </p:sp>
-      <p:sp>
-        <p:nvSpPr>
-          <p:cNvPr id="25" name="Text 23"/>
-          <p:cNvSpPr/>
-          <p:nvPr/>
-        </p:nvSpPr>
-        <p:spPr>
-          <a:xfrm>
-            <a:off x="11002975" y="6473952"/>
-            <a:ext cx="640080" cy="274320"/>
-          </a:xfrm>
-          <a:prstGeom prst="rect">
-            <a:avLst/>
-          </a:prstGeom>
-          <a:noFill/>
-          <a:ln/>
-        </p:spPr>
-        <p:txBody>
-          <a:bodyPr wrap="square" lIns="0" tIns="0" rIns="0" bIns="0" rtlCol="0" anchor="ctr"/>
-          <a:lstStyle/>
-          <a:p>
+                  <a:srgbClr val="9AA8B4"/>
+                </a:solidFill>
+                <a:latin typeface="Calibri" pitchFamily="34" charset="0"/>
+                <a:ea typeface="Calibri" pitchFamily="34" charset="-122"/>
+                <a:cs typeface="Calibri" pitchFamily="34" charset="-120"/>
+              </a:rPr>
+              <a:t>CP Lecture Series</a:t>
+            </a:r>
+            <a:pPr algn="r" indent="0" marL="0">
+              <a:buNone/>
+            </a:pPr>
+            <a:r>
+              <a:rPr lang="en-US" sz="850" dirty="0">
+                <a:solidFill>
+                  <a:srgbClr val="DCE4EC"/>
+                </a:solidFill>
+                <a:latin typeface="Calibri" pitchFamily="34" charset="0"/>
+                <a:ea typeface="Calibri" pitchFamily="34" charset="-122"/>
+                <a:cs typeface="Calibri" pitchFamily="34" charset="-120"/>
+              </a:rPr>
+              <a:t>   ·   </a:t>
+            </a:r>
             <a:pPr algn="r" indent="0" marL="0">
               <a:buNone/>
             </a:pPr>
@@ -9122,6 +8825,2341 @@
                 <a:ea typeface="Calibri" pitchFamily="34" charset="-122"/>
                 <a:cs typeface="Calibri" pitchFamily="34" charset="-120"/>
               </a:rPr>
+              <a:t>MOLECULAR &amp; CYTOGENETICS   ·   BOARD REVIEW  ·  Q2</a:t>
+            </a:r>
+            <a:endParaRPr lang="en-US" sz="1100" dirty="0"/>
+          </a:p>
+        </p:txBody>
+      </p:sp>
+      <p:sp>
+        <p:nvSpPr>
+          <p:cNvPr id="3" name="Text 1"/>
+          <p:cNvSpPr/>
+          <p:nvPr/>
+        </p:nvSpPr>
+        <p:spPr>
+          <a:xfrm>
+            <a:off x="566928" y="713232"/>
+            <a:ext cx="11064240" cy="749808"/>
+          </a:xfrm>
+          <a:prstGeom prst="rect">
+            <a:avLst/>
+          </a:prstGeom>
+          <a:noFill/>
+          <a:ln/>
+        </p:spPr>
+        <p:txBody>
+          <a:bodyPr wrap="square" lIns="0" tIns="0" rIns="0" bIns="0" rtlCol="0" anchor="ctr"/>
+          <a:lstStyle/>
+          <a:p>
+            <a:pPr algn="l" indent="0" marL="0">
+              <a:buNone/>
+            </a:pPr>
+            <a:r>
+              <a:rPr lang="en-US" sz="2600" b="1" dirty="0">
+                <a:solidFill>
+                  <a:srgbClr val="0E3A5F"/>
+                </a:solidFill>
+                <a:latin typeface="Calibri" pitchFamily="34" charset="0"/>
+                <a:ea typeface="Calibri" pitchFamily="34" charset="-122"/>
+                <a:cs typeface="Calibri" pitchFamily="34" charset="-120"/>
+              </a:rPr>
+              <a:t>Board-Style Review</a:t>
+            </a:r>
+            <a:endParaRPr lang="en-US" sz="2600" dirty="0"/>
+          </a:p>
+        </p:txBody>
+      </p:sp>
+      <p:sp>
+        <p:nvSpPr>
+          <p:cNvPr id="4" name="Text 2"/>
+          <p:cNvSpPr/>
+          <p:nvPr/>
+        </p:nvSpPr>
+        <p:spPr>
+          <a:xfrm>
+            <a:off x="566928" y="1417320"/>
+            <a:ext cx="11057839" cy="914400"/>
+          </a:xfrm>
+          <a:prstGeom prst="rect">
+            <a:avLst/>
+          </a:prstGeom>
+          <a:noFill/>
+          <a:ln/>
+        </p:spPr>
+        <p:txBody>
+          <a:bodyPr wrap="square" lIns="0" tIns="0" rIns="0" bIns="0" rtlCol="0" anchor="t"/>
+          <a:lstStyle/>
+          <a:p>
+            <a:pPr algn="l" indent="0" marL="0">
+              <a:lnSpc>
+                <a:spcPct val="105000"/>
+              </a:lnSpc>
+              <a:buNone/>
+            </a:pPr>
+            <a:r>
+              <a:rPr lang="en-US" sz="1450" b="1" dirty="0">
+                <a:solidFill>
+                  <a:srgbClr val="1B2A38"/>
+                </a:solidFill>
+                <a:latin typeface="Calibri" pitchFamily="34" charset="0"/>
+                <a:ea typeface="Calibri" pitchFamily="34" charset="-122"/>
+                <a:cs typeface="Calibri" pitchFamily="34" charset="-120"/>
+              </a:rPr>
+              <a:t>MSI-high status in a tumor may indicate both immunotherapy responsiveness and:</a:t>
+            </a:r>
+            <a:endParaRPr lang="en-US" sz="1450" dirty="0"/>
+          </a:p>
+        </p:txBody>
+      </p:sp>
+      <p:sp>
+        <p:nvSpPr>
+          <p:cNvPr id="5" name="Text 3"/>
+          <p:cNvSpPr/>
+          <p:nvPr/>
+        </p:nvSpPr>
+        <p:spPr>
+          <a:xfrm>
+            <a:off x="658368" y="2395728"/>
+            <a:ext cx="6192390" cy="3017520"/>
+          </a:xfrm>
+          <a:prstGeom prst="rect">
+            <a:avLst/>
+          </a:prstGeom>
+          <a:noFill/>
+          <a:ln/>
+        </p:spPr>
+        <p:txBody>
+          <a:bodyPr wrap="square" lIns="0" tIns="0" rIns="0" bIns="0" rtlCol="0" anchor="t"/>
+          <a:lstStyle/>
+          <a:p>
+            <a:pPr algn="l" indent="0" marL="0">
+              <a:spcAft>
+                <a:spcPts val="600"/>
+              </a:spcAft>
+              <a:buNone/>
+            </a:pPr>
+            <a:r>
+              <a:rPr lang="en-US" sz="1350" dirty="0">
+                <a:solidFill>
+                  <a:srgbClr val="33444F"/>
+                </a:solidFill>
+                <a:latin typeface="Calibri" pitchFamily="34" charset="0"/>
+                <a:ea typeface="Calibri" pitchFamily="34" charset="-122"/>
+                <a:cs typeface="Calibri" pitchFamily="34" charset="-120"/>
+              </a:rPr>
+              <a:t>A. Resistance to all therapy</a:t>
+            </a:r>
+            <a:endParaRPr lang="en-US" sz="1350" dirty="0"/>
+          </a:p>
+          <a:p>
+            <a:pPr algn="l" indent="0" marL="0">
+              <a:spcAft>
+                <a:spcPts val="600"/>
+              </a:spcAft>
+              <a:buNone/>
+            </a:pPr>
+            <a:r>
+              <a:rPr lang="en-US" sz="1350" b="1" dirty="0">
+                <a:solidFill>
+                  <a:srgbClr val="005A63"/>
+                </a:solidFill>
+                <a:latin typeface="Calibri" pitchFamily="34" charset="0"/>
+                <a:ea typeface="Calibri" pitchFamily="34" charset="-122"/>
+                <a:cs typeface="Calibri" pitchFamily="34" charset="-120"/>
+              </a:rPr>
+              <a:t>B. Possible Lynch syndrome (germline)</a:t>
+            </a:r>
+            <a:endParaRPr lang="en-US" sz="1350" dirty="0"/>
+          </a:p>
+          <a:p>
+            <a:pPr algn="l" indent="0" marL="0">
+              <a:spcAft>
+                <a:spcPts val="600"/>
+              </a:spcAft>
+              <a:buNone/>
+            </a:pPr>
+            <a:r>
+              <a:rPr lang="en-US" sz="1350" dirty="0">
+                <a:solidFill>
+                  <a:srgbClr val="33444F"/>
+                </a:solidFill>
+                <a:latin typeface="Calibri" pitchFamily="34" charset="0"/>
+                <a:ea typeface="Calibri" pitchFamily="34" charset="-122"/>
+                <a:cs typeface="Calibri" pitchFamily="34" charset="-120"/>
+              </a:rPr>
+              <a:t>C. A benign tumor</a:t>
+            </a:r>
+            <a:endParaRPr lang="en-US" sz="1350" dirty="0"/>
+          </a:p>
+          <a:p>
+            <a:pPr algn="l" indent="0" marL="0">
+              <a:spcAft>
+                <a:spcPts val="600"/>
+              </a:spcAft>
+              <a:buNone/>
+            </a:pPr>
+            <a:r>
+              <a:rPr lang="en-US" sz="1350" dirty="0">
+                <a:solidFill>
+                  <a:srgbClr val="33444F"/>
+                </a:solidFill>
+                <a:latin typeface="Calibri" pitchFamily="34" charset="0"/>
+                <a:ea typeface="Calibri" pitchFamily="34" charset="-122"/>
+                <a:cs typeface="Calibri" pitchFamily="34" charset="-120"/>
+              </a:rPr>
+              <a:t>D. Low TMB</a:t>
+            </a:r>
+            <a:endParaRPr lang="en-US" sz="1350" dirty="0"/>
+          </a:p>
+          <a:p>
+            <a:pPr algn="l" indent="0" marL="0">
+              <a:spcAft>
+                <a:spcPts val="600"/>
+              </a:spcAft>
+              <a:buNone/>
+            </a:pPr>
+            <a:r>
+              <a:rPr lang="en-US" sz="1350" dirty="0">
+                <a:solidFill>
+                  <a:srgbClr val="33444F"/>
+                </a:solidFill>
+                <a:latin typeface="Calibri" pitchFamily="34" charset="0"/>
+                <a:ea typeface="Calibri" pitchFamily="34" charset="-122"/>
+                <a:cs typeface="Calibri" pitchFamily="34" charset="-120"/>
+              </a:rPr>
+              <a:t>E. A balanced translocation</a:t>
+            </a:r>
+            <a:endParaRPr lang="en-US" sz="1350" dirty="0"/>
+          </a:p>
+        </p:txBody>
+      </p:sp>
+      <p:sp>
+        <p:nvSpPr>
+          <p:cNvPr id="6" name="Shape 4"/>
+          <p:cNvSpPr/>
+          <p:nvPr/>
+        </p:nvSpPr>
+        <p:spPr>
+          <a:xfrm>
+            <a:off x="7201632" y="2395728"/>
+            <a:ext cx="4423136" cy="3246120"/>
+          </a:xfrm>
+          <a:prstGeom prst="roundRect">
+            <a:avLst>
+              <a:gd name="adj" fmla="val 2535"/>
+            </a:avLst>
+          </a:prstGeom>
+          <a:solidFill>
+            <a:srgbClr val="E0F2F4"/>
+          </a:solidFill>
+          <a:ln/>
+          <a:effectLst>
+            <a:outerShdw sx="100000" sy="100000" kx="0" ky="0" algn="bl" rotWithShape="0" blurRad="88900" dist="25400" dir="5400000">
+              <a:srgbClr val="22303C">
+                <a:alpha val="12000"/>
+              </a:srgbClr>
+            </a:outerShdw>
+          </a:effectLst>
+        </p:spPr>
+      </p:sp>
+      <p:sp>
+        <p:nvSpPr>
+          <p:cNvPr id="7" name="Text 5"/>
+          <p:cNvSpPr/>
+          <p:nvPr/>
+        </p:nvSpPr>
+        <p:spPr>
+          <a:xfrm>
+            <a:off x="7439376" y="2578608"/>
+            <a:ext cx="3965936" cy="457200"/>
+          </a:xfrm>
+          <a:prstGeom prst="rect">
+            <a:avLst/>
+          </a:prstGeom>
+          <a:noFill/>
+          <a:ln/>
+        </p:spPr>
+        <p:txBody>
+          <a:bodyPr wrap="square" lIns="0" tIns="0" rIns="0" bIns="0" rtlCol="0" anchor="ctr"/>
+          <a:lstStyle/>
+          <a:p>
+            <a:pPr indent="0" marL="0">
+              <a:buNone/>
+            </a:pPr>
+            <a:r>
+              <a:rPr lang="en-US" sz="1500" b="1" dirty="0">
+                <a:solidFill>
+                  <a:srgbClr val="00838F"/>
+                </a:solidFill>
+                <a:latin typeface="Calibri" pitchFamily="34" charset="0"/>
+                <a:ea typeface="Calibri" pitchFamily="34" charset="-122"/>
+                <a:cs typeface="Calibri" pitchFamily="34" charset="-120"/>
+              </a:rPr>
+              <a:t>ANSWER  </a:t>
+            </a:r>
+            <a:pPr indent="0" marL="0">
+              <a:buNone/>
+            </a:pPr>
+            <a:r>
+              <a:rPr lang="en-US" sz="1500" b="1" dirty="0">
+                <a:solidFill>
+                  <a:srgbClr val="1B2A38"/>
+                </a:solidFill>
+                <a:latin typeface="Calibri" pitchFamily="34" charset="0"/>
+                <a:ea typeface="Calibri" pitchFamily="34" charset="-122"/>
+                <a:cs typeface="Calibri" pitchFamily="34" charset="-120"/>
+              </a:rPr>
+              <a:t>B — Possible Lynch syndrome</a:t>
+            </a:r>
+            <a:endParaRPr lang="en-US" sz="1500" dirty="0"/>
+          </a:p>
+        </p:txBody>
+      </p:sp>
+      <p:sp>
+        <p:nvSpPr>
+          <p:cNvPr id="8" name="Text 6"/>
+          <p:cNvSpPr/>
+          <p:nvPr/>
+        </p:nvSpPr>
+        <p:spPr>
+          <a:xfrm>
+            <a:off x="7439376" y="3127248"/>
+            <a:ext cx="3947648" cy="2377440"/>
+          </a:xfrm>
+          <a:prstGeom prst="rect">
+            <a:avLst/>
+          </a:prstGeom>
+          <a:noFill/>
+          <a:ln/>
+        </p:spPr>
+        <p:txBody>
+          <a:bodyPr wrap="square" lIns="0" tIns="0" rIns="0" bIns="0" rtlCol="0" anchor="t"/>
+          <a:lstStyle/>
+          <a:p>
+            <a:pPr algn="l" indent="0" marL="0">
+              <a:lnSpc>
+                <a:spcPct val="108000"/>
+              </a:lnSpc>
+              <a:buNone/>
+            </a:pPr>
+            <a:r>
+              <a:rPr lang="en-US" sz="1250" dirty="0">
+                <a:solidFill>
+                  <a:srgbClr val="33444F"/>
+                </a:solidFill>
+                <a:latin typeface="Calibri" pitchFamily="34" charset="0"/>
+                <a:ea typeface="Calibri" pitchFamily="34" charset="-122"/>
+                <a:cs typeface="Calibri" pitchFamily="34" charset="-120"/>
+              </a:rPr>
+              <a:t>MMR deficiency/MSI-high can reflect germline Lynch syndrome and predicts response to immune checkpoint inhibitors.</a:t>
+            </a:r>
+            <a:endParaRPr lang="en-US" sz="1250" dirty="0"/>
+          </a:p>
+        </p:txBody>
+      </p:sp>
+      <p:sp>
+        <p:nvSpPr>
+          <p:cNvPr id="9" name="Text 7"/>
+          <p:cNvSpPr/>
+          <p:nvPr/>
+        </p:nvSpPr>
+        <p:spPr>
+          <a:xfrm>
+            <a:off x="566928" y="6473952"/>
+            <a:ext cx="7772400" cy="274320"/>
+          </a:xfrm>
+          <a:prstGeom prst="rect">
+            <a:avLst/>
+          </a:prstGeom>
+          <a:noFill/>
+          <a:ln/>
+        </p:spPr>
+        <p:txBody>
+          <a:bodyPr wrap="square" lIns="0" tIns="0" rIns="0" bIns="0" rtlCol="0" anchor="ctr"/>
+          <a:lstStyle/>
+          <a:p>
+            <a:pPr algn="l" indent="0" marL="0">
+              <a:buNone/>
+            </a:pPr>
+            <a:r>
+              <a:rPr lang="en-US" sz="850" dirty="0">
+                <a:solidFill>
+                  <a:srgbClr val="9AA8B4"/>
+                </a:solidFill>
+                <a:latin typeface="Calibri" pitchFamily="34" charset="0"/>
+                <a:ea typeface="Calibri" pitchFamily="34" charset="-122"/>
+                <a:cs typeface="Calibri" pitchFamily="34" charset="-120"/>
+              </a:rPr>
+              <a:t>Makassed General Hospital  ·  Department of Laboratory Medicine</a:t>
+            </a:r>
+            <a:endParaRPr lang="en-US" sz="850" dirty="0"/>
+          </a:p>
+        </p:txBody>
+      </p:sp>
+      <p:sp>
+        <p:nvSpPr>
+          <p:cNvPr id="10" name="Text 8"/>
+          <p:cNvSpPr/>
+          <p:nvPr/>
+        </p:nvSpPr>
+        <p:spPr>
+          <a:xfrm>
+            <a:off x="9814255" y="6473952"/>
+            <a:ext cx="1828800" cy="274320"/>
+          </a:xfrm>
+          <a:prstGeom prst="rect">
+            <a:avLst/>
+          </a:prstGeom>
+          <a:noFill/>
+          <a:ln/>
+        </p:spPr>
+        <p:txBody>
+          <a:bodyPr wrap="square" lIns="0" tIns="0" rIns="0" bIns="0" rtlCol="0" anchor="ctr"/>
+          <a:lstStyle/>
+          <a:p>
+            <a:pPr algn="r" indent="0" marL="0">
+              <a:buNone/>
+            </a:pPr>
+            <a:r>
+              <a:rPr lang="en-US" sz="850" dirty="0">
+                <a:solidFill>
+                  <a:srgbClr val="9AA8B4"/>
+                </a:solidFill>
+                <a:latin typeface="Calibri" pitchFamily="34" charset="0"/>
+                <a:ea typeface="Calibri" pitchFamily="34" charset="-122"/>
+                <a:cs typeface="Calibri" pitchFamily="34" charset="-120"/>
+              </a:rPr>
+              <a:t>CP Lecture Series</a:t>
+            </a:r>
+            <a:pPr algn="r" indent="0" marL="0">
+              <a:buNone/>
+            </a:pPr>
+            <a:r>
+              <a:rPr lang="en-US" sz="850" dirty="0">
+                <a:solidFill>
+                  <a:srgbClr val="DCE4EC"/>
+                </a:solidFill>
+                <a:latin typeface="Calibri" pitchFamily="34" charset="0"/>
+                <a:ea typeface="Calibri" pitchFamily="34" charset="-122"/>
+                <a:cs typeface="Calibri" pitchFamily="34" charset="-120"/>
+              </a:rPr>
+              <a:t>   ·   </a:t>
+            </a:r>
+            <a:pPr algn="r" indent="0" marL="0">
+              <a:buNone/>
+            </a:pPr>
+            <a:r>
+              <a:rPr lang="en-US" sz="850" b="1" dirty="0">
+                <a:solidFill>
+                  <a:srgbClr val="00838F"/>
+                </a:solidFill>
+                <a:latin typeface="Calibri" pitchFamily="34" charset="0"/>
+                <a:ea typeface="Calibri" pitchFamily="34" charset="-122"/>
+                <a:cs typeface="Calibri" pitchFamily="34" charset="-120"/>
+              </a:rPr>
+              <a:t>18</a:t>
+            </a:r>
+            <a:endParaRPr lang="en-US" sz="850" dirty="0"/>
+          </a:p>
+        </p:txBody>
+      </p:sp>
+    </p:spTree>
+  </p:cSld>
+  <p:clrMapOvr>
+    <a:masterClrMapping/>
+  </p:clrMapOvr>
+</p:sld>
+</file>
+
+<file path=ppt/slides/slide22.xml><?xml version="1.0" encoding="utf-8"?>
+<p:sld xmlns:a="http://schemas.openxmlformats.org/drawingml/2006/main" xmlns:r="http://schemas.openxmlformats.org/officeDocument/2006/relationships" xmlns:p="http://schemas.openxmlformats.org/presentationml/2006/main">
+  <p:cSld name="Slide 22">
+    <p:bg>
+      <p:bgPr>
+        <a:solidFill>
+          <a:srgbClr val="FFFFFF"/>
+        </a:solidFill>
+      </p:bgPr>
+    </p:bg>
+    <p:spTree>
+      <p:nvGrpSpPr>
+        <p:cNvPr id="1" name=""/>
+        <p:cNvGrpSpPr/>
+        <p:nvPr/>
+      </p:nvGrpSpPr>
+      <p:grpSpPr>
+        <a:xfrm>
+          <a:off x="0" y="0"/>
+          <a:ext cx="0" cy="0"/>
+          <a:chOff x="0" y="0"/>
+          <a:chExt cx="0" cy="0"/>
+        </a:xfrm>
+      </p:grpSpPr>
+      <p:sp>
+        <p:nvSpPr>
+          <p:cNvPr id="2" name="Text 0"/>
+          <p:cNvSpPr/>
+          <p:nvPr/>
+        </p:nvSpPr>
+        <p:spPr>
+          <a:xfrm>
+            <a:off x="566928" y="329184"/>
+            <a:ext cx="10515600" cy="310896"/>
+          </a:xfrm>
+          <a:prstGeom prst="rect">
+            <a:avLst/>
+          </a:prstGeom>
+          <a:noFill/>
+          <a:ln/>
+        </p:spPr>
+        <p:txBody>
+          <a:bodyPr wrap="square" lIns="0" tIns="0" rIns="0" bIns="0" rtlCol="0" anchor="ctr"/>
+          <a:lstStyle/>
+          <a:p>
+            <a:pPr algn="l" indent="0" marL="0">
+              <a:buNone/>
+            </a:pPr>
+            <a:r>
+              <a:rPr lang="en-US" sz="1100" b="1" spc="150" kern="0" dirty="0">
+                <a:solidFill>
+                  <a:srgbClr val="00838F"/>
+                </a:solidFill>
+                <a:latin typeface="Calibri" pitchFamily="34" charset="0"/>
+                <a:ea typeface="Calibri" pitchFamily="34" charset="-122"/>
+                <a:cs typeface="Calibri" pitchFamily="34" charset="-120"/>
+              </a:rPr>
+              <a:t>MOLECULAR &amp; CYTOGENETICS   ·   BOARD REVIEW  ·  Q3</a:t>
+            </a:r>
+            <a:endParaRPr lang="en-US" sz="1100" dirty="0"/>
+          </a:p>
+        </p:txBody>
+      </p:sp>
+      <p:sp>
+        <p:nvSpPr>
+          <p:cNvPr id="3" name="Text 1"/>
+          <p:cNvSpPr/>
+          <p:nvPr/>
+        </p:nvSpPr>
+        <p:spPr>
+          <a:xfrm>
+            <a:off x="566928" y="713232"/>
+            <a:ext cx="11064240" cy="749808"/>
+          </a:xfrm>
+          <a:prstGeom prst="rect">
+            <a:avLst/>
+          </a:prstGeom>
+          <a:noFill/>
+          <a:ln/>
+        </p:spPr>
+        <p:txBody>
+          <a:bodyPr wrap="square" lIns="0" tIns="0" rIns="0" bIns="0" rtlCol="0" anchor="ctr"/>
+          <a:lstStyle/>
+          <a:p>
+            <a:pPr algn="l" indent="0" marL="0">
+              <a:buNone/>
+            </a:pPr>
+            <a:r>
+              <a:rPr lang="en-US" sz="2600" b="1" dirty="0">
+                <a:solidFill>
+                  <a:srgbClr val="0E3A5F"/>
+                </a:solidFill>
+                <a:latin typeface="Calibri" pitchFamily="34" charset="0"/>
+                <a:ea typeface="Calibri" pitchFamily="34" charset="-122"/>
+                <a:cs typeface="Calibri" pitchFamily="34" charset="-120"/>
+              </a:rPr>
+              <a:t>Board-Style Review</a:t>
+            </a:r>
+            <a:endParaRPr lang="en-US" sz="2600" dirty="0"/>
+          </a:p>
+        </p:txBody>
+      </p:sp>
+      <p:sp>
+        <p:nvSpPr>
+          <p:cNvPr id="4" name="Text 2"/>
+          <p:cNvSpPr/>
+          <p:nvPr/>
+        </p:nvSpPr>
+        <p:spPr>
+          <a:xfrm>
+            <a:off x="566928" y="1417320"/>
+            <a:ext cx="11057839" cy="914400"/>
+          </a:xfrm>
+          <a:prstGeom prst="rect">
+            <a:avLst/>
+          </a:prstGeom>
+          <a:noFill/>
+          <a:ln/>
+        </p:spPr>
+        <p:txBody>
+          <a:bodyPr wrap="square" lIns="0" tIns="0" rIns="0" bIns="0" rtlCol="0" anchor="t"/>
+          <a:lstStyle/>
+          <a:p>
+            <a:pPr algn="l" indent="0" marL="0">
+              <a:lnSpc>
+                <a:spcPct val="105000"/>
+              </a:lnSpc>
+              <a:buNone/>
+            </a:pPr>
+            <a:r>
+              <a:rPr lang="en-US" sz="1450" b="1" dirty="0">
+                <a:solidFill>
+                  <a:srgbClr val="1B2A38"/>
+                </a:solidFill>
+                <a:latin typeface="Calibri" pitchFamily="34" charset="0"/>
+                <a:ea typeface="Calibri" pitchFamily="34" charset="-122"/>
+                <a:cs typeface="Calibri" pitchFamily="34" charset="-120"/>
+              </a:rPr>
+              <a:t>A tumor variant at ~50% VAF in BRCA1 should prompt:</a:t>
+            </a:r>
+            <a:endParaRPr lang="en-US" sz="1450" dirty="0"/>
+          </a:p>
+        </p:txBody>
+      </p:sp>
+      <p:sp>
+        <p:nvSpPr>
+          <p:cNvPr id="5" name="Text 3"/>
+          <p:cNvSpPr/>
+          <p:nvPr/>
+        </p:nvSpPr>
+        <p:spPr>
+          <a:xfrm>
+            <a:off x="658368" y="2395728"/>
+            <a:ext cx="6192390" cy="3017520"/>
+          </a:xfrm>
+          <a:prstGeom prst="rect">
+            <a:avLst/>
+          </a:prstGeom>
+          <a:noFill/>
+          <a:ln/>
+        </p:spPr>
+        <p:txBody>
+          <a:bodyPr wrap="square" lIns="0" tIns="0" rIns="0" bIns="0" rtlCol="0" anchor="t"/>
+          <a:lstStyle/>
+          <a:p>
+            <a:pPr algn="l" indent="0" marL="0">
+              <a:spcAft>
+                <a:spcPts val="600"/>
+              </a:spcAft>
+              <a:buNone/>
+            </a:pPr>
+            <a:r>
+              <a:rPr lang="en-US" sz="1350" dirty="0">
+                <a:solidFill>
+                  <a:srgbClr val="33444F"/>
+                </a:solidFill>
+                <a:latin typeface="Calibri" pitchFamily="34" charset="0"/>
+                <a:ea typeface="Calibri" pitchFamily="34" charset="-122"/>
+                <a:cs typeface="Calibri" pitchFamily="34" charset="-120"/>
+              </a:rPr>
+              <a:t>A. Reporting as somatic only</a:t>
+            </a:r>
+            <a:endParaRPr lang="en-US" sz="1350" dirty="0"/>
+          </a:p>
+          <a:p>
+            <a:pPr algn="l" indent="0" marL="0">
+              <a:spcAft>
+                <a:spcPts val="600"/>
+              </a:spcAft>
+              <a:buNone/>
+            </a:pPr>
+            <a:r>
+              <a:rPr lang="en-US" sz="1350" b="1" dirty="0">
+                <a:solidFill>
+                  <a:srgbClr val="005A63"/>
+                </a:solidFill>
+                <a:latin typeface="Calibri" pitchFamily="34" charset="0"/>
+                <a:ea typeface="Calibri" pitchFamily="34" charset="-122"/>
+                <a:cs typeface="Calibri" pitchFamily="34" charset="-120"/>
+              </a:rPr>
+              <a:t>B. Germline confirmation with consent and counseling</a:t>
+            </a:r>
+            <a:endParaRPr lang="en-US" sz="1350" dirty="0"/>
+          </a:p>
+          <a:p>
+            <a:pPr algn="l" indent="0" marL="0">
+              <a:spcAft>
+                <a:spcPts val="600"/>
+              </a:spcAft>
+              <a:buNone/>
+            </a:pPr>
+            <a:r>
+              <a:rPr lang="en-US" sz="1350" dirty="0">
+                <a:solidFill>
+                  <a:srgbClr val="33444F"/>
+                </a:solidFill>
+                <a:latin typeface="Calibri" pitchFamily="34" charset="0"/>
+                <a:ea typeface="Calibri" pitchFamily="34" charset="-122"/>
+                <a:cs typeface="Calibri" pitchFamily="34" charset="-120"/>
+              </a:rPr>
+              <a:t>C. No action</a:t>
+            </a:r>
+            <a:endParaRPr lang="en-US" sz="1350" dirty="0"/>
+          </a:p>
+          <a:p>
+            <a:pPr algn="l" indent="0" marL="0">
+              <a:spcAft>
+                <a:spcPts val="600"/>
+              </a:spcAft>
+              <a:buNone/>
+            </a:pPr>
+            <a:r>
+              <a:rPr lang="en-US" sz="1350" dirty="0">
+                <a:solidFill>
+                  <a:srgbClr val="33444F"/>
+                </a:solidFill>
+                <a:latin typeface="Calibri" pitchFamily="34" charset="0"/>
+                <a:ea typeface="Calibri" pitchFamily="34" charset="-122"/>
+                <a:cs typeface="Calibri" pitchFamily="34" charset="-120"/>
+              </a:rPr>
+              <a:t>D. Immediate diagnosis of hereditary cancer</a:t>
+            </a:r>
+            <a:endParaRPr lang="en-US" sz="1350" dirty="0"/>
+          </a:p>
+          <a:p>
+            <a:pPr algn="l" indent="0" marL="0">
+              <a:spcAft>
+                <a:spcPts val="600"/>
+              </a:spcAft>
+              <a:buNone/>
+            </a:pPr>
+            <a:r>
+              <a:rPr lang="en-US" sz="1350" dirty="0">
+                <a:solidFill>
+                  <a:srgbClr val="33444F"/>
+                </a:solidFill>
+                <a:latin typeface="Calibri" pitchFamily="34" charset="0"/>
+                <a:ea typeface="Calibri" pitchFamily="34" charset="-122"/>
+                <a:cs typeface="Calibri" pitchFamily="34" charset="-120"/>
+              </a:rPr>
+              <a:t>E. Repeat tumor testing only</a:t>
+            </a:r>
+            <a:endParaRPr lang="en-US" sz="1350" dirty="0"/>
+          </a:p>
+        </p:txBody>
+      </p:sp>
+      <p:sp>
+        <p:nvSpPr>
+          <p:cNvPr id="6" name="Shape 4"/>
+          <p:cNvSpPr/>
+          <p:nvPr/>
+        </p:nvSpPr>
+        <p:spPr>
+          <a:xfrm>
+            <a:off x="7201632" y="2395728"/>
+            <a:ext cx="4423136" cy="3246120"/>
+          </a:xfrm>
+          <a:prstGeom prst="roundRect">
+            <a:avLst>
+              <a:gd name="adj" fmla="val 2535"/>
+            </a:avLst>
+          </a:prstGeom>
+          <a:solidFill>
+            <a:srgbClr val="E0F2F4"/>
+          </a:solidFill>
+          <a:ln/>
+          <a:effectLst>
+            <a:outerShdw sx="100000" sy="100000" kx="0" ky="0" algn="bl" rotWithShape="0" blurRad="88900" dist="25400" dir="5400000">
+              <a:srgbClr val="22303C">
+                <a:alpha val="12000"/>
+              </a:srgbClr>
+            </a:outerShdw>
+          </a:effectLst>
+        </p:spPr>
+      </p:sp>
+      <p:sp>
+        <p:nvSpPr>
+          <p:cNvPr id="7" name="Text 5"/>
+          <p:cNvSpPr/>
+          <p:nvPr/>
+        </p:nvSpPr>
+        <p:spPr>
+          <a:xfrm>
+            <a:off x="7439376" y="2578608"/>
+            <a:ext cx="3965936" cy="457200"/>
+          </a:xfrm>
+          <a:prstGeom prst="rect">
+            <a:avLst/>
+          </a:prstGeom>
+          <a:noFill/>
+          <a:ln/>
+        </p:spPr>
+        <p:txBody>
+          <a:bodyPr wrap="square" lIns="0" tIns="0" rIns="0" bIns="0" rtlCol="0" anchor="ctr"/>
+          <a:lstStyle/>
+          <a:p>
+            <a:pPr indent="0" marL="0">
+              <a:buNone/>
+            </a:pPr>
+            <a:r>
+              <a:rPr lang="en-US" sz="1500" b="1" dirty="0">
+                <a:solidFill>
+                  <a:srgbClr val="00838F"/>
+                </a:solidFill>
+                <a:latin typeface="Calibri" pitchFamily="34" charset="0"/>
+                <a:ea typeface="Calibri" pitchFamily="34" charset="-122"/>
+                <a:cs typeface="Calibri" pitchFamily="34" charset="-120"/>
+              </a:rPr>
+              <a:t>ANSWER  </a:t>
+            </a:r>
+            <a:pPr indent="0" marL="0">
+              <a:buNone/>
+            </a:pPr>
+            <a:r>
+              <a:rPr lang="en-US" sz="1500" b="1" dirty="0">
+                <a:solidFill>
+                  <a:srgbClr val="1B2A38"/>
+                </a:solidFill>
+                <a:latin typeface="Calibri" pitchFamily="34" charset="0"/>
+                <a:ea typeface="Calibri" pitchFamily="34" charset="-122"/>
+                <a:cs typeface="Calibri" pitchFamily="34" charset="-120"/>
+              </a:rPr>
+              <a:t>B — Germline confirmation/counseling</a:t>
+            </a:r>
+            <a:endParaRPr lang="en-US" sz="1500" dirty="0"/>
+          </a:p>
+        </p:txBody>
+      </p:sp>
+      <p:sp>
+        <p:nvSpPr>
+          <p:cNvPr id="8" name="Text 6"/>
+          <p:cNvSpPr/>
+          <p:nvPr/>
+        </p:nvSpPr>
+        <p:spPr>
+          <a:xfrm>
+            <a:off x="7439376" y="3127248"/>
+            <a:ext cx="3947648" cy="2377440"/>
+          </a:xfrm>
+          <a:prstGeom prst="rect">
+            <a:avLst/>
+          </a:prstGeom>
+          <a:noFill/>
+          <a:ln/>
+        </p:spPr>
+        <p:txBody>
+          <a:bodyPr wrap="square" lIns="0" tIns="0" rIns="0" bIns="0" rtlCol="0" anchor="t"/>
+          <a:lstStyle/>
+          <a:p>
+            <a:pPr algn="l" indent="0" marL="0">
+              <a:lnSpc>
+                <a:spcPct val="108000"/>
+              </a:lnSpc>
+              <a:buNone/>
+            </a:pPr>
+            <a:r>
+              <a:rPr lang="en-US" sz="1250" dirty="0">
+                <a:solidFill>
+                  <a:srgbClr val="33444F"/>
+                </a:solidFill>
+                <a:latin typeface="Calibri" pitchFamily="34" charset="0"/>
+                <a:ea typeface="Calibri" pitchFamily="34" charset="-122"/>
+                <a:cs typeface="Calibri" pitchFamily="34" charset="-120"/>
+              </a:rPr>
+              <a:t>A ~50% VAF in a predisposition gene may be germline; confirm in normal tissue with appropriate consent and counseling.</a:t>
+            </a:r>
+            <a:endParaRPr lang="en-US" sz="1250" dirty="0"/>
+          </a:p>
+        </p:txBody>
+      </p:sp>
+      <p:sp>
+        <p:nvSpPr>
+          <p:cNvPr id="9" name="Text 7"/>
+          <p:cNvSpPr/>
+          <p:nvPr/>
+        </p:nvSpPr>
+        <p:spPr>
+          <a:xfrm>
+            <a:off x="566928" y="6473952"/>
+            <a:ext cx="7772400" cy="274320"/>
+          </a:xfrm>
+          <a:prstGeom prst="rect">
+            <a:avLst/>
+          </a:prstGeom>
+          <a:noFill/>
+          <a:ln/>
+        </p:spPr>
+        <p:txBody>
+          <a:bodyPr wrap="square" lIns="0" tIns="0" rIns="0" bIns="0" rtlCol="0" anchor="ctr"/>
+          <a:lstStyle/>
+          <a:p>
+            <a:pPr algn="l" indent="0" marL="0">
+              <a:buNone/>
+            </a:pPr>
+            <a:r>
+              <a:rPr lang="en-US" sz="850" dirty="0">
+                <a:solidFill>
+                  <a:srgbClr val="9AA8B4"/>
+                </a:solidFill>
+                <a:latin typeface="Calibri" pitchFamily="34" charset="0"/>
+                <a:ea typeface="Calibri" pitchFamily="34" charset="-122"/>
+                <a:cs typeface="Calibri" pitchFamily="34" charset="-120"/>
+              </a:rPr>
+              <a:t>Makassed General Hospital  ·  Department of Laboratory Medicine</a:t>
+            </a:r>
+            <a:endParaRPr lang="en-US" sz="850" dirty="0"/>
+          </a:p>
+        </p:txBody>
+      </p:sp>
+      <p:sp>
+        <p:nvSpPr>
+          <p:cNvPr id="10" name="Text 8"/>
+          <p:cNvSpPr/>
+          <p:nvPr/>
+        </p:nvSpPr>
+        <p:spPr>
+          <a:xfrm>
+            <a:off x="9814255" y="6473952"/>
+            <a:ext cx="1828800" cy="274320"/>
+          </a:xfrm>
+          <a:prstGeom prst="rect">
+            <a:avLst/>
+          </a:prstGeom>
+          <a:noFill/>
+          <a:ln/>
+        </p:spPr>
+        <p:txBody>
+          <a:bodyPr wrap="square" lIns="0" tIns="0" rIns="0" bIns="0" rtlCol="0" anchor="ctr"/>
+          <a:lstStyle/>
+          <a:p>
+            <a:pPr algn="r" indent="0" marL="0">
+              <a:buNone/>
+            </a:pPr>
+            <a:r>
+              <a:rPr lang="en-US" sz="850" dirty="0">
+                <a:solidFill>
+                  <a:srgbClr val="9AA8B4"/>
+                </a:solidFill>
+                <a:latin typeface="Calibri" pitchFamily="34" charset="0"/>
+                <a:ea typeface="Calibri" pitchFamily="34" charset="-122"/>
+                <a:cs typeface="Calibri" pitchFamily="34" charset="-120"/>
+              </a:rPr>
+              <a:t>CP Lecture Series</a:t>
+            </a:r>
+            <a:pPr algn="r" indent="0" marL="0">
+              <a:buNone/>
+            </a:pPr>
+            <a:r>
+              <a:rPr lang="en-US" sz="850" dirty="0">
+                <a:solidFill>
+                  <a:srgbClr val="DCE4EC"/>
+                </a:solidFill>
+                <a:latin typeface="Calibri" pitchFamily="34" charset="0"/>
+                <a:ea typeface="Calibri" pitchFamily="34" charset="-122"/>
+                <a:cs typeface="Calibri" pitchFamily="34" charset="-120"/>
+              </a:rPr>
+              <a:t>   ·   </a:t>
+            </a:r>
+            <a:pPr algn="r" indent="0" marL="0">
+              <a:buNone/>
+            </a:pPr>
+            <a:r>
+              <a:rPr lang="en-US" sz="850" b="1" dirty="0">
+                <a:solidFill>
+                  <a:srgbClr val="00838F"/>
+                </a:solidFill>
+                <a:latin typeface="Calibri" pitchFamily="34" charset="0"/>
+                <a:ea typeface="Calibri" pitchFamily="34" charset="-122"/>
+                <a:cs typeface="Calibri" pitchFamily="34" charset="-120"/>
+              </a:rPr>
+              <a:t>19</a:t>
+            </a:r>
+            <a:endParaRPr lang="en-US" sz="850" dirty="0"/>
+          </a:p>
+        </p:txBody>
+      </p:sp>
+    </p:spTree>
+  </p:cSld>
+  <p:clrMapOvr>
+    <a:masterClrMapping/>
+  </p:clrMapOvr>
+</p:sld>
+</file>
+
+<file path=ppt/slides/slide23.xml><?xml version="1.0" encoding="utf-8"?>
+<p:sld xmlns:a="http://schemas.openxmlformats.org/drawingml/2006/main" xmlns:r="http://schemas.openxmlformats.org/officeDocument/2006/relationships" xmlns:p="http://schemas.openxmlformats.org/presentationml/2006/main">
+  <p:cSld name="Slide 23">
+    <p:bg>
+      <p:bgPr>
+        <a:solidFill>
+          <a:srgbClr val="FFFFFF"/>
+        </a:solidFill>
+      </p:bgPr>
+    </p:bg>
+    <p:spTree>
+      <p:nvGrpSpPr>
+        <p:cNvPr id="1" name=""/>
+        <p:cNvGrpSpPr/>
+        <p:nvPr/>
+      </p:nvGrpSpPr>
+      <p:grpSpPr>
+        <a:xfrm>
+          <a:off x="0" y="0"/>
+          <a:ext cx="0" cy="0"/>
+          <a:chOff x="0" y="0"/>
+          <a:chExt cx="0" cy="0"/>
+        </a:xfrm>
+      </p:grpSpPr>
+      <p:sp>
+        <p:nvSpPr>
+          <p:cNvPr id="2" name="Text 0"/>
+          <p:cNvSpPr/>
+          <p:nvPr/>
+        </p:nvSpPr>
+        <p:spPr>
+          <a:xfrm>
+            <a:off x="566928" y="329184"/>
+            <a:ext cx="10515600" cy="310896"/>
+          </a:xfrm>
+          <a:prstGeom prst="rect">
+            <a:avLst/>
+          </a:prstGeom>
+          <a:noFill/>
+          <a:ln/>
+        </p:spPr>
+        <p:txBody>
+          <a:bodyPr wrap="square" lIns="0" tIns="0" rIns="0" bIns="0" rtlCol="0" anchor="ctr"/>
+          <a:lstStyle/>
+          <a:p>
+            <a:pPr algn="l" indent="0" marL="0">
+              <a:buNone/>
+            </a:pPr>
+            <a:r>
+              <a:rPr lang="en-US" sz="1100" b="1" spc="150" kern="0" dirty="0">
+                <a:solidFill>
+                  <a:srgbClr val="00838F"/>
+                </a:solidFill>
+                <a:latin typeface="Calibri" pitchFamily="34" charset="0"/>
+                <a:ea typeface="Calibri" pitchFamily="34" charset="-122"/>
+                <a:cs typeface="Calibri" pitchFamily="34" charset="-120"/>
+              </a:rPr>
+              <a:t>MOLECULAR &amp; CYTOGENETICS   ·   BOARD REVIEW  ·  Q4</a:t>
+            </a:r>
+            <a:endParaRPr lang="en-US" sz="1100" dirty="0"/>
+          </a:p>
+        </p:txBody>
+      </p:sp>
+      <p:sp>
+        <p:nvSpPr>
+          <p:cNvPr id="3" name="Text 1"/>
+          <p:cNvSpPr/>
+          <p:nvPr/>
+        </p:nvSpPr>
+        <p:spPr>
+          <a:xfrm>
+            <a:off x="566928" y="713232"/>
+            <a:ext cx="11064240" cy="749808"/>
+          </a:xfrm>
+          <a:prstGeom prst="rect">
+            <a:avLst/>
+          </a:prstGeom>
+          <a:noFill/>
+          <a:ln/>
+        </p:spPr>
+        <p:txBody>
+          <a:bodyPr wrap="square" lIns="0" tIns="0" rIns="0" bIns="0" rtlCol="0" anchor="ctr"/>
+          <a:lstStyle/>
+          <a:p>
+            <a:pPr algn="l" indent="0" marL="0">
+              <a:buNone/>
+            </a:pPr>
+            <a:r>
+              <a:rPr lang="en-US" sz="2600" b="1" dirty="0">
+                <a:solidFill>
+                  <a:srgbClr val="0E3A5F"/>
+                </a:solidFill>
+                <a:latin typeface="Calibri" pitchFamily="34" charset="0"/>
+                <a:ea typeface="Calibri" pitchFamily="34" charset="-122"/>
+                <a:cs typeface="Calibri" pitchFamily="34" charset="-120"/>
+              </a:rPr>
+              <a:t>Board-Style Review</a:t>
+            </a:r>
+            <a:endParaRPr lang="en-US" sz="2600" dirty="0"/>
+          </a:p>
+        </p:txBody>
+      </p:sp>
+      <p:sp>
+        <p:nvSpPr>
+          <p:cNvPr id="4" name="Text 2"/>
+          <p:cNvSpPr/>
+          <p:nvPr/>
+        </p:nvSpPr>
+        <p:spPr>
+          <a:xfrm>
+            <a:off x="566928" y="1417320"/>
+            <a:ext cx="11057839" cy="914400"/>
+          </a:xfrm>
+          <a:prstGeom prst="rect">
+            <a:avLst/>
+          </a:prstGeom>
+          <a:noFill/>
+          <a:ln/>
+        </p:spPr>
+        <p:txBody>
+          <a:bodyPr wrap="square" lIns="0" tIns="0" rIns="0" bIns="0" rtlCol="0" anchor="t"/>
+          <a:lstStyle/>
+          <a:p>
+            <a:pPr algn="l" indent="0" marL="0">
+              <a:lnSpc>
+                <a:spcPct val="105000"/>
+              </a:lnSpc>
+              <a:buNone/>
+            </a:pPr>
+            <a:r>
+              <a:rPr lang="en-US" sz="1450" b="1" dirty="0">
+                <a:solidFill>
+                  <a:srgbClr val="1B2A38"/>
+                </a:solidFill>
+                <a:latin typeface="Calibri" pitchFamily="34" charset="0"/>
+                <a:ea typeface="Calibri" pitchFamily="34" charset="-122"/>
+                <a:cs typeface="Calibri" pitchFamily="34" charset="-120"/>
+              </a:rPr>
+              <a:t>A key limitation of cfDNA (liquid biopsy) testing is:</a:t>
+            </a:r>
+            <a:endParaRPr lang="en-US" sz="1450" dirty="0"/>
+          </a:p>
+        </p:txBody>
+      </p:sp>
+      <p:sp>
+        <p:nvSpPr>
+          <p:cNvPr id="5" name="Text 3"/>
+          <p:cNvSpPr/>
+          <p:nvPr/>
+        </p:nvSpPr>
+        <p:spPr>
+          <a:xfrm>
+            <a:off x="658368" y="2395728"/>
+            <a:ext cx="6192390" cy="3017520"/>
+          </a:xfrm>
+          <a:prstGeom prst="rect">
+            <a:avLst/>
+          </a:prstGeom>
+          <a:noFill/>
+          <a:ln/>
+        </p:spPr>
+        <p:txBody>
+          <a:bodyPr wrap="square" lIns="0" tIns="0" rIns="0" bIns="0" rtlCol="0" anchor="t"/>
+          <a:lstStyle/>
+          <a:p>
+            <a:pPr algn="l" indent="0" marL="0">
+              <a:spcAft>
+                <a:spcPts val="600"/>
+              </a:spcAft>
+              <a:buNone/>
+            </a:pPr>
+            <a:r>
+              <a:rPr lang="en-US" sz="1350" dirty="0">
+                <a:solidFill>
+                  <a:srgbClr val="33444F"/>
+                </a:solidFill>
+                <a:latin typeface="Calibri" pitchFamily="34" charset="0"/>
+                <a:ea typeface="Calibri" pitchFamily="34" charset="-122"/>
+                <a:cs typeface="Calibri" pitchFamily="34" charset="-120"/>
+              </a:rPr>
+              <a:t>A. It is more sensitive than tissue</a:t>
+            </a:r>
+            <a:endParaRPr lang="en-US" sz="1350" dirty="0"/>
+          </a:p>
+          <a:p>
+            <a:pPr algn="l" indent="0" marL="0">
+              <a:spcAft>
+                <a:spcPts val="600"/>
+              </a:spcAft>
+              <a:buNone/>
+            </a:pPr>
+            <a:r>
+              <a:rPr lang="en-US" sz="1350" b="1" dirty="0">
+                <a:solidFill>
+                  <a:srgbClr val="005A63"/>
+                </a:solidFill>
+                <a:latin typeface="Calibri" pitchFamily="34" charset="0"/>
+                <a:ea typeface="Calibri" pitchFamily="34" charset="-122"/>
+                <a:cs typeface="Calibri" pitchFamily="34" charset="-120"/>
+              </a:rPr>
+              <a:t>B. A negative result does not exclude a mutation</a:t>
+            </a:r>
+            <a:endParaRPr lang="en-US" sz="1350" dirty="0"/>
+          </a:p>
+          <a:p>
+            <a:pPr algn="l" indent="0" marL="0">
+              <a:spcAft>
+                <a:spcPts val="600"/>
+              </a:spcAft>
+              <a:buNone/>
+            </a:pPr>
+            <a:r>
+              <a:rPr lang="en-US" sz="1350" dirty="0">
+                <a:solidFill>
+                  <a:srgbClr val="33444F"/>
+                </a:solidFill>
+                <a:latin typeface="Calibri" pitchFamily="34" charset="0"/>
+                <a:ea typeface="Calibri" pitchFamily="34" charset="-122"/>
+                <a:cs typeface="Calibri" pitchFamily="34" charset="-120"/>
+              </a:rPr>
+              <a:t>C. It cannot detect any mutations</a:t>
+            </a:r>
+            <a:endParaRPr lang="en-US" sz="1350" dirty="0"/>
+          </a:p>
+          <a:p>
+            <a:pPr algn="l" indent="0" marL="0">
+              <a:spcAft>
+                <a:spcPts val="600"/>
+              </a:spcAft>
+              <a:buNone/>
+            </a:pPr>
+            <a:r>
+              <a:rPr lang="en-US" sz="1350" dirty="0">
+                <a:solidFill>
+                  <a:srgbClr val="33444F"/>
+                </a:solidFill>
+                <a:latin typeface="Calibri" pitchFamily="34" charset="0"/>
+                <a:ea typeface="Calibri" pitchFamily="34" charset="-122"/>
+                <a:cs typeface="Calibri" pitchFamily="34" charset="-120"/>
+              </a:rPr>
+              <a:t>D. It requires surgery</a:t>
+            </a:r>
+            <a:endParaRPr lang="en-US" sz="1350" dirty="0"/>
+          </a:p>
+          <a:p>
+            <a:pPr algn="l" indent="0" marL="0">
+              <a:spcAft>
+                <a:spcPts val="600"/>
+              </a:spcAft>
+              <a:buNone/>
+            </a:pPr>
+            <a:r>
+              <a:rPr lang="en-US" sz="1350" dirty="0">
+                <a:solidFill>
+                  <a:srgbClr val="33444F"/>
+                </a:solidFill>
+                <a:latin typeface="Calibri" pitchFamily="34" charset="0"/>
+                <a:ea typeface="Calibri" pitchFamily="34" charset="-122"/>
+                <a:cs typeface="Calibri" pitchFamily="34" charset="-120"/>
+              </a:rPr>
+              <a:t>E. It detects only germline variants</a:t>
+            </a:r>
+            <a:endParaRPr lang="en-US" sz="1350" dirty="0"/>
+          </a:p>
+        </p:txBody>
+      </p:sp>
+      <p:sp>
+        <p:nvSpPr>
+          <p:cNvPr id="6" name="Shape 4"/>
+          <p:cNvSpPr/>
+          <p:nvPr/>
+        </p:nvSpPr>
+        <p:spPr>
+          <a:xfrm>
+            <a:off x="7201632" y="2395728"/>
+            <a:ext cx="4423136" cy="3246120"/>
+          </a:xfrm>
+          <a:prstGeom prst="roundRect">
+            <a:avLst>
+              <a:gd name="adj" fmla="val 2535"/>
+            </a:avLst>
+          </a:prstGeom>
+          <a:solidFill>
+            <a:srgbClr val="E0F2F4"/>
+          </a:solidFill>
+          <a:ln/>
+          <a:effectLst>
+            <a:outerShdw sx="100000" sy="100000" kx="0" ky="0" algn="bl" rotWithShape="0" blurRad="88900" dist="25400" dir="5400000">
+              <a:srgbClr val="22303C">
+                <a:alpha val="12000"/>
+              </a:srgbClr>
+            </a:outerShdw>
+          </a:effectLst>
+        </p:spPr>
+      </p:sp>
+      <p:sp>
+        <p:nvSpPr>
+          <p:cNvPr id="7" name="Text 5"/>
+          <p:cNvSpPr/>
+          <p:nvPr/>
+        </p:nvSpPr>
+        <p:spPr>
+          <a:xfrm>
+            <a:off x="7439376" y="2578608"/>
+            <a:ext cx="3965936" cy="457200"/>
+          </a:xfrm>
+          <a:prstGeom prst="rect">
+            <a:avLst/>
+          </a:prstGeom>
+          <a:noFill/>
+          <a:ln/>
+        </p:spPr>
+        <p:txBody>
+          <a:bodyPr wrap="square" lIns="0" tIns="0" rIns="0" bIns="0" rtlCol="0" anchor="ctr"/>
+          <a:lstStyle/>
+          <a:p>
+            <a:pPr indent="0" marL="0">
+              <a:buNone/>
+            </a:pPr>
+            <a:r>
+              <a:rPr lang="en-US" sz="1500" b="1" dirty="0">
+                <a:solidFill>
+                  <a:srgbClr val="00838F"/>
+                </a:solidFill>
+                <a:latin typeface="Calibri" pitchFamily="34" charset="0"/>
+                <a:ea typeface="Calibri" pitchFamily="34" charset="-122"/>
+                <a:cs typeface="Calibri" pitchFamily="34" charset="-120"/>
+              </a:rPr>
+              <a:t>ANSWER  </a:t>
+            </a:r>
+            <a:pPr indent="0" marL="0">
+              <a:buNone/>
+            </a:pPr>
+            <a:r>
+              <a:rPr lang="en-US" sz="1500" b="1" dirty="0">
+                <a:solidFill>
+                  <a:srgbClr val="1B2A38"/>
+                </a:solidFill>
+                <a:latin typeface="Calibri" pitchFamily="34" charset="0"/>
+                <a:ea typeface="Calibri" pitchFamily="34" charset="-122"/>
+                <a:cs typeface="Calibri" pitchFamily="34" charset="-120"/>
+              </a:rPr>
+              <a:t>B — Negative does not exclude</a:t>
+            </a:r>
+            <a:endParaRPr lang="en-US" sz="1500" dirty="0"/>
+          </a:p>
+        </p:txBody>
+      </p:sp>
+      <p:sp>
+        <p:nvSpPr>
+          <p:cNvPr id="8" name="Text 6"/>
+          <p:cNvSpPr/>
+          <p:nvPr/>
+        </p:nvSpPr>
+        <p:spPr>
+          <a:xfrm>
+            <a:off x="7439376" y="3127248"/>
+            <a:ext cx="3947648" cy="2377440"/>
+          </a:xfrm>
+          <a:prstGeom prst="rect">
+            <a:avLst/>
+          </a:prstGeom>
+          <a:noFill/>
+          <a:ln/>
+        </p:spPr>
+        <p:txBody>
+          <a:bodyPr wrap="square" lIns="0" tIns="0" rIns="0" bIns="0" rtlCol="0" anchor="t"/>
+          <a:lstStyle/>
+          <a:p>
+            <a:pPr algn="l" indent="0" marL="0">
+              <a:lnSpc>
+                <a:spcPct val="108000"/>
+              </a:lnSpc>
+              <a:buNone/>
+            </a:pPr>
+            <a:r>
+              <a:rPr lang="en-US" sz="1250" dirty="0">
+                <a:solidFill>
+                  <a:srgbClr val="33444F"/>
+                </a:solidFill>
+                <a:latin typeface="Calibri" pitchFamily="34" charset="0"/>
+                <a:ea typeface="Calibri" pitchFamily="34" charset="-122"/>
+                <a:cs typeface="Calibri" pitchFamily="34" charset="-120"/>
+              </a:rPr>
+              <a:t>Low tumor shedding limits sensitivity; negative cfDNA results may require tissue confirmation.</a:t>
+            </a:r>
+            <a:endParaRPr lang="en-US" sz="1250" dirty="0"/>
+          </a:p>
+        </p:txBody>
+      </p:sp>
+      <p:sp>
+        <p:nvSpPr>
+          <p:cNvPr id="9" name="Text 7"/>
+          <p:cNvSpPr/>
+          <p:nvPr/>
+        </p:nvSpPr>
+        <p:spPr>
+          <a:xfrm>
+            <a:off x="566928" y="6473952"/>
+            <a:ext cx="7772400" cy="274320"/>
+          </a:xfrm>
+          <a:prstGeom prst="rect">
+            <a:avLst/>
+          </a:prstGeom>
+          <a:noFill/>
+          <a:ln/>
+        </p:spPr>
+        <p:txBody>
+          <a:bodyPr wrap="square" lIns="0" tIns="0" rIns="0" bIns="0" rtlCol="0" anchor="ctr"/>
+          <a:lstStyle/>
+          <a:p>
+            <a:pPr algn="l" indent="0" marL="0">
+              <a:buNone/>
+            </a:pPr>
+            <a:r>
+              <a:rPr lang="en-US" sz="850" dirty="0">
+                <a:solidFill>
+                  <a:srgbClr val="9AA8B4"/>
+                </a:solidFill>
+                <a:latin typeface="Calibri" pitchFamily="34" charset="0"/>
+                <a:ea typeface="Calibri" pitchFamily="34" charset="-122"/>
+                <a:cs typeface="Calibri" pitchFamily="34" charset="-120"/>
+              </a:rPr>
+              <a:t>Makassed General Hospital  ·  Department of Laboratory Medicine</a:t>
+            </a:r>
+            <a:endParaRPr lang="en-US" sz="850" dirty="0"/>
+          </a:p>
+        </p:txBody>
+      </p:sp>
+      <p:sp>
+        <p:nvSpPr>
+          <p:cNvPr id="10" name="Text 8"/>
+          <p:cNvSpPr/>
+          <p:nvPr/>
+        </p:nvSpPr>
+        <p:spPr>
+          <a:xfrm>
+            <a:off x="9814255" y="6473952"/>
+            <a:ext cx="1828800" cy="274320"/>
+          </a:xfrm>
+          <a:prstGeom prst="rect">
+            <a:avLst/>
+          </a:prstGeom>
+          <a:noFill/>
+          <a:ln/>
+        </p:spPr>
+        <p:txBody>
+          <a:bodyPr wrap="square" lIns="0" tIns="0" rIns="0" bIns="0" rtlCol="0" anchor="ctr"/>
+          <a:lstStyle/>
+          <a:p>
+            <a:pPr algn="r" indent="0" marL="0">
+              <a:buNone/>
+            </a:pPr>
+            <a:r>
+              <a:rPr lang="en-US" sz="850" dirty="0">
+                <a:solidFill>
+                  <a:srgbClr val="9AA8B4"/>
+                </a:solidFill>
+                <a:latin typeface="Calibri" pitchFamily="34" charset="0"/>
+                <a:ea typeface="Calibri" pitchFamily="34" charset="-122"/>
+                <a:cs typeface="Calibri" pitchFamily="34" charset="-120"/>
+              </a:rPr>
+              <a:t>CP Lecture Series</a:t>
+            </a:r>
+            <a:pPr algn="r" indent="0" marL="0">
+              <a:buNone/>
+            </a:pPr>
+            <a:r>
+              <a:rPr lang="en-US" sz="850" dirty="0">
+                <a:solidFill>
+                  <a:srgbClr val="DCE4EC"/>
+                </a:solidFill>
+                <a:latin typeface="Calibri" pitchFamily="34" charset="0"/>
+                <a:ea typeface="Calibri" pitchFamily="34" charset="-122"/>
+                <a:cs typeface="Calibri" pitchFamily="34" charset="-120"/>
+              </a:rPr>
+              <a:t>   ·   </a:t>
+            </a:r>
+            <a:pPr algn="r" indent="0" marL="0">
+              <a:buNone/>
+            </a:pPr>
+            <a:r>
+              <a:rPr lang="en-US" sz="850" b="1" dirty="0">
+                <a:solidFill>
+                  <a:srgbClr val="00838F"/>
+                </a:solidFill>
+                <a:latin typeface="Calibri" pitchFamily="34" charset="0"/>
+                <a:ea typeface="Calibri" pitchFamily="34" charset="-122"/>
+                <a:cs typeface="Calibri" pitchFamily="34" charset="-120"/>
+              </a:rPr>
+              <a:t>20</a:t>
+            </a:r>
+            <a:endParaRPr lang="en-US" sz="850" dirty="0"/>
+          </a:p>
+        </p:txBody>
+      </p:sp>
+    </p:spTree>
+  </p:cSld>
+  <p:clrMapOvr>
+    <a:masterClrMapping/>
+  </p:clrMapOvr>
+</p:sld>
+</file>
+
+<file path=ppt/slides/slide24.xml><?xml version="1.0" encoding="utf-8"?>
+<p:sld xmlns:a="http://schemas.openxmlformats.org/drawingml/2006/main" xmlns:r="http://schemas.openxmlformats.org/officeDocument/2006/relationships" xmlns:p="http://schemas.openxmlformats.org/presentationml/2006/main">
+  <p:cSld name="Slide 24">
+    <p:bg>
+      <p:bgPr>
+        <a:solidFill>
+          <a:srgbClr val="0A2A45"/>
+        </a:solidFill>
+      </p:bgPr>
+    </p:bg>
+    <p:spTree>
+      <p:nvGrpSpPr>
+        <p:cNvPr id="1" name=""/>
+        <p:cNvGrpSpPr/>
+        <p:nvPr/>
+      </p:nvGrpSpPr>
+      <p:grpSpPr>
+        <a:xfrm>
+          <a:off x="0" y="0"/>
+          <a:ext cx="0" cy="0"/>
+          <a:chOff x="0" y="0"/>
+          <a:chExt cx="0" cy="0"/>
+        </a:xfrm>
+      </p:grpSpPr>
+      <p:sp>
+        <p:nvSpPr>
+          <p:cNvPr id="2" name="Text 0"/>
+          <p:cNvSpPr/>
+          <p:nvPr/>
+        </p:nvSpPr>
+        <p:spPr>
+          <a:xfrm>
+            <a:off x="566928" y="329184"/>
+            <a:ext cx="10058400" cy="310896"/>
+          </a:xfrm>
+          <a:prstGeom prst="rect">
+            <a:avLst/>
+          </a:prstGeom>
+          <a:noFill/>
+          <a:ln/>
+        </p:spPr>
+        <p:txBody>
+          <a:bodyPr wrap="square" lIns="0" tIns="0" rIns="0" bIns="0" rtlCol="0" anchor="ctr"/>
+          <a:lstStyle/>
+          <a:p>
+            <a:pPr indent="0" marL="0">
+              <a:buNone/>
+            </a:pPr>
+            <a:r>
+              <a:rPr lang="en-US" sz="1100" b="1" spc="150" kern="0" dirty="0">
+                <a:solidFill>
+                  <a:srgbClr val="00838F"/>
+                </a:solidFill>
+                <a:latin typeface="Calibri" pitchFamily="34" charset="0"/>
+                <a:ea typeface="Calibri" pitchFamily="34" charset="-122"/>
+                <a:cs typeface="Calibri" pitchFamily="34" charset="-120"/>
+              </a:rPr>
+              <a:t>MOLECULAR &amp; CYTOGENETICS</a:t>
+            </a:r>
+            <a:endParaRPr lang="en-US" sz="1100" dirty="0"/>
+          </a:p>
+        </p:txBody>
+      </p:sp>
+      <p:sp>
+        <p:nvSpPr>
+          <p:cNvPr id="3" name="Text 1"/>
+          <p:cNvSpPr/>
+          <p:nvPr/>
+        </p:nvSpPr>
+        <p:spPr>
+          <a:xfrm>
+            <a:off x="566928" y="676656"/>
+            <a:ext cx="10972800" cy="749808"/>
+          </a:xfrm>
+          <a:prstGeom prst="rect">
+            <a:avLst/>
+          </a:prstGeom>
+          <a:noFill/>
+          <a:ln/>
+        </p:spPr>
+        <p:txBody>
+          <a:bodyPr wrap="square" lIns="0" tIns="0" rIns="0" bIns="0" rtlCol="0" anchor="ctr"/>
+          <a:lstStyle/>
+          <a:p>
+            <a:pPr indent="0" marL="0">
+              <a:buNone/>
+            </a:pPr>
+            <a:r>
+              <a:rPr lang="en-US" sz="3000" b="1" dirty="0">
+                <a:solidFill>
+                  <a:srgbClr val="FFFFFF"/>
+                </a:solidFill>
+                <a:latin typeface="Calibri" pitchFamily="34" charset="0"/>
+                <a:ea typeface="Calibri" pitchFamily="34" charset="-122"/>
+                <a:cs typeface="Calibri" pitchFamily="34" charset="-120"/>
+              </a:rPr>
+              <a:t>Key Take-Home Points</a:t>
+            </a:r>
+            <a:endParaRPr lang="en-US" sz="3000" dirty="0"/>
+          </a:p>
+        </p:txBody>
+      </p:sp>
+      <p:sp>
+        <p:nvSpPr>
+          <p:cNvPr id="4" name="Shape 2"/>
+          <p:cNvSpPr/>
+          <p:nvPr/>
+        </p:nvSpPr>
+        <p:spPr>
+          <a:xfrm>
+            <a:off x="566928" y="1517904"/>
+            <a:ext cx="11057839" cy="841248"/>
+          </a:xfrm>
+          <a:prstGeom prst="roundRect">
+            <a:avLst>
+              <a:gd name="adj" fmla="val 7609"/>
+            </a:avLst>
+          </a:prstGeom>
+          <a:solidFill>
+            <a:srgbClr val="143651"/>
+          </a:solidFill>
+          <a:ln/>
+        </p:spPr>
+      </p:sp>
+      <p:sp>
+        <p:nvSpPr>
+          <p:cNvPr id="5" name="Shape 3"/>
+          <p:cNvSpPr/>
+          <p:nvPr/>
+        </p:nvSpPr>
+        <p:spPr>
+          <a:xfrm>
+            <a:off x="749808" y="1755648"/>
+            <a:ext cx="365760" cy="365760"/>
+          </a:xfrm>
+          <a:prstGeom prst="ellipse">
+            <a:avLst/>
+          </a:prstGeom>
+          <a:solidFill>
+            <a:srgbClr val="00838F"/>
+          </a:solidFill>
+          <a:ln/>
+          <a:effectLst>
+            <a:outerShdw sx="100000" sy="100000" kx="0" ky="0" algn="bl" rotWithShape="0" blurRad="88900" dist="25400" dir="5400000">
+              <a:srgbClr val="22303C">
+                <a:alpha val="12000"/>
+              </a:srgbClr>
+            </a:outerShdw>
+          </a:effectLst>
+        </p:spPr>
+      </p:sp>
+      <p:sp>
+        <p:nvSpPr>
+          <p:cNvPr id="6" name="Text 4"/>
+          <p:cNvSpPr/>
+          <p:nvPr/>
+        </p:nvSpPr>
+        <p:spPr>
+          <a:xfrm>
+            <a:off x="749808" y="1755648"/>
+            <a:ext cx="365760" cy="365760"/>
+          </a:xfrm>
+          <a:prstGeom prst="rect">
+            <a:avLst/>
+          </a:prstGeom>
+          <a:noFill/>
+          <a:ln/>
+        </p:spPr>
+        <p:txBody>
+          <a:bodyPr wrap="square" lIns="0" tIns="0" rIns="0" bIns="0" rtlCol="0" anchor="ctr"/>
+          <a:lstStyle/>
+          <a:p>
+            <a:pPr algn="ctr" indent="0" marL="0">
+              <a:buNone/>
+            </a:pPr>
+            <a:r>
+              <a:rPr lang="en-US" sz="1500" b="1" dirty="0">
+                <a:solidFill>
+                  <a:srgbClr val="FFFFFF"/>
+                </a:solidFill>
+                <a:latin typeface="Calibri" pitchFamily="34" charset="0"/>
+                <a:ea typeface="Calibri" pitchFamily="34" charset="-122"/>
+                <a:cs typeface="Calibri" pitchFamily="34" charset="-120"/>
+              </a:rPr>
+              <a:t>1</a:t>
+            </a:r>
+            <a:endParaRPr lang="en-US" sz="1500" dirty="0"/>
+          </a:p>
+        </p:txBody>
+      </p:sp>
+      <p:sp>
+        <p:nvSpPr>
+          <p:cNvPr id="7" name="Text 5"/>
+          <p:cNvSpPr/>
+          <p:nvPr/>
+        </p:nvSpPr>
+        <p:spPr>
+          <a:xfrm>
+            <a:off x="1280160" y="1517904"/>
+            <a:ext cx="10143439" cy="841248"/>
+          </a:xfrm>
+          <a:prstGeom prst="rect">
+            <a:avLst/>
+          </a:prstGeom>
+          <a:noFill/>
+          <a:ln/>
+        </p:spPr>
+        <p:txBody>
+          <a:bodyPr wrap="square" lIns="0" tIns="0" rIns="0" bIns="0" rtlCol="0" anchor="ctr"/>
+          <a:lstStyle/>
+          <a:p>
+            <a:pPr algn="l" indent="0" marL="0">
+              <a:buNone/>
+            </a:pPr>
+            <a:r>
+              <a:rPr lang="en-US" sz="1350" dirty="0">
+                <a:solidFill>
+                  <a:srgbClr val="E7EEF4"/>
+                </a:solidFill>
+                <a:latin typeface="Calibri" pitchFamily="34" charset="0"/>
+                <a:ea typeface="Calibri" pitchFamily="34" charset="-122"/>
+                <a:cs typeface="Calibri" pitchFamily="34" charset="-120"/>
+              </a:rPr>
+              <a:t>Companion diagnostics match patients to targeted therapy; some markers (KRAS/NRAS) predict resistance.</a:t>
+            </a:r>
+            <a:endParaRPr lang="en-US" sz="1350" dirty="0"/>
+          </a:p>
+        </p:txBody>
+      </p:sp>
+      <p:sp>
+        <p:nvSpPr>
+          <p:cNvPr id="8" name="Shape 6"/>
+          <p:cNvSpPr/>
+          <p:nvPr/>
+        </p:nvSpPr>
+        <p:spPr>
+          <a:xfrm>
+            <a:off x="566928" y="2505456"/>
+            <a:ext cx="11057839" cy="841248"/>
+          </a:xfrm>
+          <a:prstGeom prst="roundRect">
+            <a:avLst>
+              <a:gd name="adj" fmla="val 7609"/>
+            </a:avLst>
+          </a:prstGeom>
+          <a:solidFill>
+            <a:srgbClr val="143651"/>
+          </a:solidFill>
+          <a:ln/>
+        </p:spPr>
+      </p:sp>
+      <p:sp>
+        <p:nvSpPr>
+          <p:cNvPr id="9" name="Shape 7"/>
+          <p:cNvSpPr/>
+          <p:nvPr/>
+        </p:nvSpPr>
+        <p:spPr>
+          <a:xfrm>
+            <a:off x="749808" y="2743200"/>
+            <a:ext cx="365760" cy="365760"/>
+          </a:xfrm>
+          <a:prstGeom prst="ellipse">
+            <a:avLst/>
+          </a:prstGeom>
+          <a:solidFill>
+            <a:srgbClr val="00838F"/>
+          </a:solidFill>
+          <a:ln/>
+          <a:effectLst>
+            <a:outerShdw sx="100000" sy="100000" kx="0" ky="0" algn="bl" rotWithShape="0" blurRad="88900" dist="25400" dir="5400000">
+              <a:srgbClr val="22303C">
+                <a:alpha val="12000"/>
+              </a:srgbClr>
+            </a:outerShdw>
+          </a:effectLst>
+        </p:spPr>
+      </p:sp>
+      <p:sp>
+        <p:nvSpPr>
+          <p:cNvPr id="10" name="Text 8"/>
+          <p:cNvSpPr/>
+          <p:nvPr/>
+        </p:nvSpPr>
+        <p:spPr>
+          <a:xfrm>
+            <a:off x="749808" y="2743200"/>
+            <a:ext cx="365760" cy="365760"/>
+          </a:xfrm>
+          <a:prstGeom prst="rect">
+            <a:avLst/>
+          </a:prstGeom>
+          <a:noFill/>
+          <a:ln/>
+        </p:spPr>
+        <p:txBody>
+          <a:bodyPr wrap="square" lIns="0" tIns="0" rIns="0" bIns="0" rtlCol="0" anchor="ctr"/>
+          <a:lstStyle/>
+          <a:p>
+            <a:pPr algn="ctr" indent="0" marL="0">
+              <a:buNone/>
+            </a:pPr>
+            <a:r>
+              <a:rPr lang="en-US" sz="1500" b="1" dirty="0">
+                <a:solidFill>
+                  <a:srgbClr val="FFFFFF"/>
+                </a:solidFill>
+                <a:latin typeface="Calibri" pitchFamily="34" charset="0"/>
+                <a:ea typeface="Calibri" pitchFamily="34" charset="-122"/>
+                <a:cs typeface="Calibri" pitchFamily="34" charset="-120"/>
+              </a:rPr>
+              <a:t>2</a:t>
+            </a:r>
+            <a:endParaRPr lang="en-US" sz="1500" dirty="0"/>
+          </a:p>
+        </p:txBody>
+      </p:sp>
+      <p:sp>
+        <p:nvSpPr>
+          <p:cNvPr id="11" name="Text 9"/>
+          <p:cNvSpPr/>
+          <p:nvPr/>
+        </p:nvSpPr>
+        <p:spPr>
+          <a:xfrm>
+            <a:off x="1280160" y="2505456"/>
+            <a:ext cx="10143439" cy="841248"/>
+          </a:xfrm>
+          <a:prstGeom prst="rect">
+            <a:avLst/>
+          </a:prstGeom>
+          <a:noFill/>
+          <a:ln/>
+        </p:spPr>
+        <p:txBody>
+          <a:bodyPr wrap="square" lIns="0" tIns="0" rIns="0" bIns="0" rtlCol="0" anchor="ctr"/>
+          <a:lstStyle/>
+          <a:p>
+            <a:pPr algn="l" indent="0" marL="0">
+              <a:buNone/>
+            </a:pPr>
+            <a:r>
+              <a:rPr lang="en-US" sz="1350" dirty="0">
+                <a:solidFill>
+                  <a:srgbClr val="E7EEF4"/>
+                </a:solidFill>
+                <a:latin typeface="Calibri" pitchFamily="34" charset="0"/>
+                <a:ea typeface="Calibri" pitchFamily="34" charset="-122"/>
+                <a:cs typeface="Calibri" pitchFamily="34" charset="-120"/>
+              </a:rPr>
+              <a:t>Know high-yield solid-tumor markers (EGFR, ALK/ROS1, BRAF, HER2) and immunotherapy markers (MSI/MMR, TMB).</a:t>
+            </a:r>
+            <a:endParaRPr lang="en-US" sz="1350" dirty="0"/>
+          </a:p>
+        </p:txBody>
+      </p:sp>
+      <p:sp>
+        <p:nvSpPr>
+          <p:cNvPr id="12" name="Shape 10"/>
+          <p:cNvSpPr/>
+          <p:nvPr/>
+        </p:nvSpPr>
+        <p:spPr>
+          <a:xfrm>
+            <a:off x="566928" y="3493008"/>
+            <a:ext cx="11057839" cy="841248"/>
+          </a:xfrm>
+          <a:prstGeom prst="roundRect">
+            <a:avLst>
+              <a:gd name="adj" fmla="val 7609"/>
+            </a:avLst>
+          </a:prstGeom>
+          <a:solidFill>
+            <a:srgbClr val="143651"/>
+          </a:solidFill>
+          <a:ln/>
+        </p:spPr>
+      </p:sp>
+      <p:sp>
+        <p:nvSpPr>
+          <p:cNvPr id="13" name="Shape 11"/>
+          <p:cNvSpPr/>
+          <p:nvPr/>
+        </p:nvSpPr>
+        <p:spPr>
+          <a:xfrm>
+            <a:off x="749808" y="3730752"/>
+            <a:ext cx="365760" cy="365760"/>
+          </a:xfrm>
+          <a:prstGeom prst="ellipse">
+            <a:avLst/>
+          </a:prstGeom>
+          <a:solidFill>
+            <a:srgbClr val="00838F"/>
+          </a:solidFill>
+          <a:ln/>
+          <a:effectLst>
+            <a:outerShdw sx="100000" sy="100000" kx="0" ky="0" algn="bl" rotWithShape="0" blurRad="88900" dist="25400" dir="5400000">
+              <a:srgbClr val="22303C">
+                <a:alpha val="12000"/>
+              </a:srgbClr>
+            </a:outerShdw>
+          </a:effectLst>
+        </p:spPr>
+      </p:sp>
+      <p:sp>
+        <p:nvSpPr>
+          <p:cNvPr id="14" name="Text 12"/>
+          <p:cNvSpPr/>
+          <p:nvPr/>
+        </p:nvSpPr>
+        <p:spPr>
+          <a:xfrm>
+            <a:off x="749808" y="3730752"/>
+            <a:ext cx="365760" cy="365760"/>
+          </a:xfrm>
+          <a:prstGeom prst="rect">
+            <a:avLst/>
+          </a:prstGeom>
+          <a:noFill/>
+          <a:ln/>
+        </p:spPr>
+        <p:txBody>
+          <a:bodyPr wrap="square" lIns="0" tIns="0" rIns="0" bIns="0" rtlCol="0" anchor="ctr"/>
+          <a:lstStyle/>
+          <a:p>
+            <a:pPr algn="ctr" indent="0" marL="0">
+              <a:buNone/>
+            </a:pPr>
+            <a:r>
+              <a:rPr lang="en-US" sz="1500" b="1" dirty="0">
+                <a:solidFill>
+                  <a:srgbClr val="FFFFFF"/>
+                </a:solidFill>
+                <a:latin typeface="Calibri" pitchFamily="34" charset="0"/>
+                <a:ea typeface="Calibri" pitchFamily="34" charset="-122"/>
+                <a:cs typeface="Calibri" pitchFamily="34" charset="-120"/>
+              </a:rPr>
+              <a:t>3</a:t>
+            </a:r>
+            <a:endParaRPr lang="en-US" sz="1500" dirty="0"/>
+          </a:p>
+        </p:txBody>
+      </p:sp>
+      <p:sp>
+        <p:nvSpPr>
+          <p:cNvPr id="15" name="Text 13"/>
+          <p:cNvSpPr/>
+          <p:nvPr/>
+        </p:nvSpPr>
+        <p:spPr>
+          <a:xfrm>
+            <a:off x="1280160" y="3493008"/>
+            <a:ext cx="10143439" cy="841248"/>
+          </a:xfrm>
+          <a:prstGeom prst="rect">
+            <a:avLst/>
+          </a:prstGeom>
+          <a:noFill/>
+          <a:ln/>
+        </p:spPr>
+        <p:txBody>
+          <a:bodyPr wrap="square" lIns="0" tIns="0" rIns="0" bIns="0" rtlCol="0" anchor="ctr"/>
+          <a:lstStyle/>
+          <a:p>
+            <a:pPr algn="l" indent="0" marL="0">
+              <a:buNone/>
+            </a:pPr>
+            <a:r>
+              <a:rPr lang="en-US" sz="1350" dirty="0">
+                <a:solidFill>
+                  <a:srgbClr val="E7EEF4"/>
+                </a:solidFill>
+                <a:latin typeface="Calibri" pitchFamily="34" charset="0"/>
+                <a:ea typeface="Calibri" pitchFamily="34" charset="-122"/>
+                <a:cs typeface="Calibri" pitchFamily="34" charset="-120"/>
+              </a:rPr>
+              <a:t>MSI-high/MMR deficiency predicts immunotherapy response and can signal Lynch syndrome (germline link).</a:t>
+            </a:r>
+            <a:endParaRPr lang="en-US" sz="1350" dirty="0"/>
+          </a:p>
+        </p:txBody>
+      </p:sp>
+      <p:sp>
+        <p:nvSpPr>
+          <p:cNvPr id="16" name="Shape 14"/>
+          <p:cNvSpPr/>
+          <p:nvPr/>
+        </p:nvSpPr>
+        <p:spPr>
+          <a:xfrm>
+            <a:off x="566928" y="4480560"/>
+            <a:ext cx="11057839" cy="841248"/>
+          </a:xfrm>
+          <a:prstGeom prst="roundRect">
+            <a:avLst>
+              <a:gd name="adj" fmla="val 7609"/>
+            </a:avLst>
+          </a:prstGeom>
+          <a:solidFill>
+            <a:srgbClr val="143651"/>
+          </a:solidFill>
+          <a:ln/>
+        </p:spPr>
+      </p:sp>
+      <p:sp>
+        <p:nvSpPr>
+          <p:cNvPr id="17" name="Shape 15"/>
+          <p:cNvSpPr/>
+          <p:nvPr/>
+        </p:nvSpPr>
+        <p:spPr>
+          <a:xfrm>
+            <a:off x="749808" y="4718304"/>
+            <a:ext cx="365760" cy="365760"/>
+          </a:xfrm>
+          <a:prstGeom prst="ellipse">
+            <a:avLst/>
+          </a:prstGeom>
+          <a:solidFill>
+            <a:srgbClr val="00838F"/>
+          </a:solidFill>
+          <a:ln/>
+          <a:effectLst>
+            <a:outerShdw sx="100000" sy="100000" kx="0" ky="0" algn="bl" rotWithShape="0" blurRad="88900" dist="25400" dir="5400000">
+              <a:srgbClr val="22303C">
+                <a:alpha val="12000"/>
+              </a:srgbClr>
+            </a:outerShdw>
+          </a:effectLst>
+        </p:spPr>
+      </p:sp>
+      <p:sp>
+        <p:nvSpPr>
+          <p:cNvPr id="18" name="Text 16"/>
+          <p:cNvSpPr/>
+          <p:nvPr/>
+        </p:nvSpPr>
+        <p:spPr>
+          <a:xfrm>
+            <a:off x="749808" y="4718304"/>
+            <a:ext cx="365760" cy="365760"/>
+          </a:xfrm>
+          <a:prstGeom prst="rect">
+            <a:avLst/>
+          </a:prstGeom>
+          <a:noFill/>
+          <a:ln/>
+        </p:spPr>
+        <p:txBody>
+          <a:bodyPr wrap="square" lIns="0" tIns="0" rIns="0" bIns="0" rtlCol="0" anchor="ctr"/>
+          <a:lstStyle/>
+          <a:p>
+            <a:pPr algn="ctr" indent="0" marL="0">
+              <a:buNone/>
+            </a:pPr>
+            <a:r>
+              <a:rPr lang="en-US" sz="1500" b="1" dirty="0">
+                <a:solidFill>
+                  <a:srgbClr val="FFFFFF"/>
+                </a:solidFill>
+                <a:latin typeface="Calibri" pitchFamily="34" charset="0"/>
+                <a:ea typeface="Calibri" pitchFamily="34" charset="-122"/>
+                <a:cs typeface="Calibri" pitchFamily="34" charset="-120"/>
+              </a:rPr>
+              <a:t>4</a:t>
+            </a:r>
+            <a:endParaRPr lang="en-US" sz="1500" dirty="0"/>
+          </a:p>
+        </p:txBody>
+      </p:sp>
+      <p:sp>
+        <p:nvSpPr>
+          <p:cNvPr id="19" name="Text 17"/>
+          <p:cNvSpPr/>
+          <p:nvPr/>
+        </p:nvSpPr>
+        <p:spPr>
+          <a:xfrm>
+            <a:off x="1280160" y="4480560"/>
+            <a:ext cx="10143439" cy="841248"/>
+          </a:xfrm>
+          <a:prstGeom prst="rect">
+            <a:avLst/>
+          </a:prstGeom>
+          <a:noFill/>
+          <a:ln/>
+        </p:spPr>
+        <p:txBody>
+          <a:bodyPr wrap="square" lIns="0" tIns="0" rIns="0" bIns="0" rtlCol="0" anchor="ctr"/>
+          <a:lstStyle/>
+          <a:p>
+            <a:pPr algn="l" indent="0" marL="0">
+              <a:buNone/>
+            </a:pPr>
+            <a:r>
+              <a:rPr lang="en-US" sz="1350" dirty="0">
+                <a:solidFill>
+                  <a:srgbClr val="E7EEF4"/>
+                </a:solidFill>
+                <a:latin typeface="Calibri" pitchFamily="34" charset="0"/>
+                <a:ea typeface="Calibri" pitchFamily="34" charset="-122"/>
+                <a:cs typeface="Calibri" pitchFamily="34" charset="-120"/>
+              </a:rPr>
+              <a:t>Distinguish somatic from germline by sample, VAF, and context; a ~50% VAF in a predisposition gene needs germline confirmation and counseling.</a:t>
+            </a:r>
+            <a:endParaRPr lang="en-US" sz="1350" dirty="0"/>
+          </a:p>
+        </p:txBody>
+      </p:sp>
+      <p:sp>
+        <p:nvSpPr>
+          <p:cNvPr id="20" name="Shape 18"/>
+          <p:cNvSpPr/>
+          <p:nvPr/>
+        </p:nvSpPr>
+        <p:spPr>
+          <a:xfrm>
+            <a:off x="566928" y="5468112"/>
+            <a:ext cx="11057839" cy="841248"/>
+          </a:xfrm>
+          <a:prstGeom prst="roundRect">
+            <a:avLst>
+              <a:gd name="adj" fmla="val 7609"/>
+            </a:avLst>
+          </a:prstGeom>
+          <a:solidFill>
+            <a:srgbClr val="143651"/>
+          </a:solidFill>
+          <a:ln/>
+        </p:spPr>
+      </p:sp>
+      <p:sp>
+        <p:nvSpPr>
+          <p:cNvPr id="21" name="Shape 19"/>
+          <p:cNvSpPr/>
+          <p:nvPr/>
+        </p:nvSpPr>
+        <p:spPr>
+          <a:xfrm>
+            <a:off x="749808" y="5705856"/>
+            <a:ext cx="365760" cy="365760"/>
+          </a:xfrm>
+          <a:prstGeom prst="ellipse">
+            <a:avLst/>
+          </a:prstGeom>
+          <a:solidFill>
+            <a:srgbClr val="00838F"/>
+          </a:solidFill>
+          <a:ln/>
+          <a:effectLst>
+            <a:outerShdw sx="100000" sy="100000" kx="0" ky="0" algn="bl" rotWithShape="0" blurRad="88900" dist="25400" dir="5400000">
+              <a:srgbClr val="22303C">
+                <a:alpha val="12000"/>
+              </a:srgbClr>
+            </a:outerShdw>
+          </a:effectLst>
+        </p:spPr>
+      </p:sp>
+      <p:sp>
+        <p:nvSpPr>
+          <p:cNvPr id="22" name="Text 20"/>
+          <p:cNvSpPr/>
+          <p:nvPr/>
+        </p:nvSpPr>
+        <p:spPr>
+          <a:xfrm>
+            <a:off x="749808" y="5705856"/>
+            <a:ext cx="365760" cy="365760"/>
+          </a:xfrm>
+          <a:prstGeom prst="rect">
+            <a:avLst/>
+          </a:prstGeom>
+          <a:noFill/>
+          <a:ln/>
+        </p:spPr>
+        <p:txBody>
+          <a:bodyPr wrap="square" lIns="0" tIns="0" rIns="0" bIns="0" rtlCol="0" anchor="ctr"/>
+          <a:lstStyle/>
+          <a:p>
+            <a:pPr algn="ctr" indent="0" marL="0">
+              <a:buNone/>
+            </a:pPr>
+            <a:r>
+              <a:rPr lang="en-US" sz="1500" b="1" dirty="0">
+                <a:solidFill>
+                  <a:srgbClr val="FFFFFF"/>
+                </a:solidFill>
+                <a:latin typeface="Calibri" pitchFamily="34" charset="0"/>
+                <a:ea typeface="Calibri" pitchFamily="34" charset="-122"/>
+                <a:cs typeface="Calibri" pitchFamily="34" charset="-120"/>
+              </a:rPr>
+              <a:t>5</a:t>
+            </a:r>
+            <a:endParaRPr lang="en-US" sz="1500" dirty="0"/>
+          </a:p>
+        </p:txBody>
+      </p:sp>
+      <p:sp>
+        <p:nvSpPr>
+          <p:cNvPr id="23" name="Text 21"/>
+          <p:cNvSpPr/>
+          <p:nvPr/>
+        </p:nvSpPr>
+        <p:spPr>
+          <a:xfrm>
+            <a:off x="1280160" y="5468112"/>
+            <a:ext cx="10143439" cy="841248"/>
+          </a:xfrm>
+          <a:prstGeom prst="rect">
+            <a:avLst/>
+          </a:prstGeom>
+          <a:noFill/>
+          <a:ln/>
+        </p:spPr>
+        <p:txBody>
+          <a:bodyPr wrap="square" lIns="0" tIns="0" rIns="0" bIns="0" rtlCol="0" anchor="ctr"/>
+          <a:lstStyle/>
+          <a:p>
+            <a:pPr algn="l" indent="0" marL="0">
+              <a:buNone/>
+            </a:pPr>
+            <a:r>
+              <a:rPr lang="en-US" sz="1350" dirty="0">
+                <a:solidFill>
+                  <a:srgbClr val="E7EEF4"/>
+                </a:solidFill>
+                <a:latin typeface="Calibri" pitchFamily="34" charset="0"/>
+                <a:ea typeface="Calibri" pitchFamily="34" charset="-122"/>
+                <a:cs typeface="Calibri" pitchFamily="34" charset="-120"/>
+              </a:rPr>
+              <a:t>Liquid biopsy (cfDNA) is useful but less sensitive — a negative result does not exclude a mutation.</a:t>
+            </a:r>
+            <a:endParaRPr lang="en-US" sz="1350" dirty="0"/>
+          </a:p>
+        </p:txBody>
+      </p:sp>
+      <p:sp>
+        <p:nvSpPr>
+          <p:cNvPr id="24" name="Text 22"/>
+          <p:cNvSpPr/>
+          <p:nvPr/>
+        </p:nvSpPr>
+        <p:spPr>
+          <a:xfrm>
+            <a:off x="566928" y="6473952"/>
+            <a:ext cx="8229600" cy="274320"/>
+          </a:xfrm>
+          <a:prstGeom prst="rect">
+            <a:avLst/>
+          </a:prstGeom>
+          <a:noFill/>
+          <a:ln/>
+        </p:spPr>
+        <p:txBody>
+          <a:bodyPr wrap="square" lIns="0" tIns="0" rIns="0" bIns="0" rtlCol="0" anchor="ctr"/>
+          <a:lstStyle/>
+          <a:p>
+            <a:pPr indent="0" marL="0">
+              <a:buNone/>
+            </a:pPr>
+            <a:r>
+              <a:rPr lang="en-US" sz="850" dirty="0">
+                <a:solidFill>
+                  <a:srgbClr val="5E7488"/>
+                </a:solidFill>
+                <a:latin typeface="Calibri" pitchFamily="34" charset="0"/>
+                <a:ea typeface="Calibri" pitchFamily="34" charset="-122"/>
+                <a:cs typeface="Calibri" pitchFamily="34" charset="-120"/>
+              </a:rPr>
+              <a:t>Makassed General Hospital  ·  Department of Laboratory Medicine</a:t>
+            </a:r>
+            <a:endParaRPr lang="en-US" sz="850" dirty="0"/>
+          </a:p>
+        </p:txBody>
+      </p:sp>
+      <p:sp>
+        <p:nvSpPr>
+          <p:cNvPr id="25" name="Text 23"/>
+          <p:cNvSpPr/>
+          <p:nvPr/>
+        </p:nvSpPr>
+        <p:spPr>
+          <a:xfrm>
+            <a:off x="11002975" y="6473952"/>
+            <a:ext cx="640080" cy="274320"/>
+          </a:xfrm>
+          <a:prstGeom prst="rect">
+            <a:avLst/>
+          </a:prstGeom>
+          <a:noFill/>
+          <a:ln/>
+        </p:spPr>
+        <p:txBody>
+          <a:bodyPr wrap="square" lIns="0" tIns="0" rIns="0" bIns="0" rtlCol="0" anchor="ctr"/>
+          <a:lstStyle/>
+          <a:p>
+            <a:pPr algn="r" indent="0" marL="0">
+              <a:buNone/>
+            </a:pPr>
+            <a:r>
+              <a:rPr lang="en-US" sz="850" b="1" dirty="0">
+                <a:solidFill>
+                  <a:srgbClr val="00838F"/>
+                </a:solidFill>
+                <a:latin typeface="Calibri" pitchFamily="34" charset="0"/>
+                <a:ea typeface="Calibri" pitchFamily="34" charset="-122"/>
+                <a:cs typeface="Calibri" pitchFamily="34" charset="-120"/>
+              </a:rPr>
+              <a:t>21</a:t>
+            </a:r>
+            <a:endParaRPr lang="en-US" sz="850" dirty="0"/>
+          </a:p>
+        </p:txBody>
+      </p:sp>
+    </p:spTree>
+  </p:cSld>
+  <p:clrMapOvr>
+    <a:masterClrMapping/>
+  </p:clrMapOvr>
+</p:sld>
+</file>
+
+<file path=ppt/slides/slide25.xml><?xml version="1.0" encoding="utf-8"?>
+<p:sld xmlns:a="http://schemas.openxmlformats.org/drawingml/2006/main" xmlns:r="http://schemas.openxmlformats.org/officeDocument/2006/relationships" xmlns:p="http://schemas.openxmlformats.org/presentationml/2006/main">
+  <p:cSld name="Slide 25">
+    <p:bg>
+      <p:bgPr>
+        <a:solidFill>
+          <a:srgbClr val="FFFFFF"/>
+        </a:solidFill>
+      </p:bgPr>
+    </p:bg>
+    <p:spTree>
+      <p:nvGrpSpPr>
+        <p:cNvPr id="1" name=""/>
+        <p:cNvGrpSpPr/>
+        <p:nvPr/>
+      </p:nvGrpSpPr>
+      <p:grpSpPr>
+        <a:xfrm>
+          <a:off x="0" y="0"/>
+          <a:ext cx="0" cy="0"/>
+          <a:chOff x="0" y="0"/>
+          <a:chExt cx="0" cy="0"/>
+        </a:xfrm>
+      </p:grpSpPr>
+      <p:sp>
+        <p:nvSpPr>
+          <p:cNvPr id="2" name="Text 0"/>
+          <p:cNvSpPr/>
+          <p:nvPr/>
+        </p:nvSpPr>
+        <p:spPr>
+          <a:xfrm>
+            <a:off x="566928" y="329184"/>
+            <a:ext cx="10515600" cy="310896"/>
+          </a:xfrm>
+          <a:prstGeom prst="rect">
+            <a:avLst/>
+          </a:prstGeom>
+          <a:noFill/>
+          <a:ln/>
+        </p:spPr>
+        <p:txBody>
+          <a:bodyPr wrap="square" lIns="0" tIns="0" rIns="0" bIns="0" rtlCol="0" anchor="ctr"/>
+          <a:lstStyle/>
+          <a:p>
+            <a:pPr algn="l" indent="0" marL="0">
+              <a:buNone/>
+            </a:pPr>
+            <a:r>
+              <a:rPr lang="en-US" sz="1100" b="1" spc="150" kern="0" dirty="0">
+                <a:solidFill>
+                  <a:srgbClr val="00838F"/>
+                </a:solidFill>
+                <a:latin typeface="Calibri" pitchFamily="34" charset="0"/>
+                <a:ea typeface="Calibri" pitchFamily="34" charset="-122"/>
+                <a:cs typeface="Calibri" pitchFamily="34" charset="-120"/>
+              </a:rPr>
               <a:t>MOLECULAR &amp; CYTOGENETICS   ·   REFERENCES &amp; FURTHER READING</a:t>
             </a:r>
             <a:endParaRPr lang="en-US" sz="1100" dirty="0"/>
@@ -9203,7 +11241,7 @@
                 <a:ea typeface="Calibri" pitchFamily="34" charset="-122"/>
                 <a:cs typeface="Calibri" pitchFamily="34" charset="-120"/>
               </a:rPr>
-              <a:t>1.   Li MM, et al. AMP/ASCO/CAP somatic variant interpretation standards. J Mol Diagn. 2017.</a:t>
+              <a:t>1.   Li MM, et al. AMP/ASCO/CAP somatic variant interpretation. J Mol Diagn. 2017.</a:t>
             </a:r>
             <a:endParaRPr lang="en-US" sz="1150" dirty="0"/>
           </a:p>
@@ -9223,7 +11261,7 @@
                 <a:ea typeface="Calibri" pitchFamily="34" charset="-122"/>
                 <a:cs typeface="Calibri" pitchFamily="34" charset="-120"/>
               </a:rPr>
-              <a:t>2.   Lindeman NI, et al. Molecular testing guideline for lung cancer (CAP/IASLC/AMP).</a:t>
+              <a:t>2.   NCCN biomarker testing guidance (by tumor type).</a:t>
             </a:r>
             <a:endParaRPr lang="en-US" sz="1150" dirty="0"/>
           </a:p>
@@ -9243,7 +11281,7 @@
                 <a:ea typeface="Calibri" pitchFamily="34" charset="-122"/>
                 <a:cs typeface="Calibri" pitchFamily="34" charset="-120"/>
               </a:rPr>
-              <a:t>3.   Sepulveda AR, et al. Molecular biomarkers for colorectal cancer (CAP/AMP/ASCP).</a:t>
+              <a:t>3.   Merker JD, et al. Circulating tumor DNA (ASCO/CAP review). J Clin Oncol.</a:t>
             </a:r>
             <a:endParaRPr lang="en-US" sz="1150" dirty="0"/>
           </a:p>
@@ -9263,7 +11301,7 @@
                 <a:ea typeface="Calibri" pitchFamily="34" charset="-122"/>
                 <a:cs typeface="Calibri" pitchFamily="34" charset="-120"/>
               </a:rPr>
-              <a:t>4.   NCCN / ACMG hereditary cancer testing guidance.</a:t>
+              <a:t>4.   Leonard DGB. Molecular Pathology in Clinical Practice, 2nd ed.</a:t>
             </a:r>
             <a:endParaRPr lang="en-US" sz="1150" dirty="0"/>
           </a:p>
@@ -9369,7 +11407,7 @@
                 <a:ea typeface="Calibri" pitchFamily="34" charset="-122"/>
                 <a:cs typeface="Calibri" pitchFamily="34" charset="-120"/>
               </a:rPr>
-              <a:t>18</a:t>
+              <a:t>22</a:t>
             </a:r>
             <a:endParaRPr lang="en-US" sz="850" dirty="0"/>
           </a:p>
@@ -9613,7 +11651,7 @@
                 <a:ea typeface="Calibri" pitchFamily="34" charset="-122"/>
                 <a:cs typeface="Calibri" pitchFamily="34" charset="-120"/>
               </a:rPr>
-              <a:t>Describe companion diagnostics and targeted-therapy markers.</a:t>
+              <a:t>Describe companion diagnostics and predictive biomarkers.</a:t>
             </a:r>
             <a:endParaRPr lang="en-US" sz="1350" dirty="0"/>
           </a:p>
@@ -9747,7 +11785,7 @@
                 <a:ea typeface="Calibri" pitchFamily="34" charset="-122"/>
                 <a:cs typeface="Calibri" pitchFamily="34" charset="-120"/>
               </a:rPr>
-              <a:t>Outline hereditary cancer testing basics.</a:t>
+              <a:t>Interpret common solid-tumor markers (e.g., EGFR, KRAS, BRAF, ALK, MSI/TMB).</a:t>
             </a:r>
             <a:endParaRPr lang="en-US" sz="1350" dirty="0"/>
           </a:p>
@@ -9881,7 +11919,7 @@
                 <a:ea typeface="Calibri" pitchFamily="34" charset="-122"/>
                 <a:cs typeface="Calibri" pitchFamily="34" charset="-120"/>
               </a:rPr>
-              <a:t>Address tissue adequacy and preanalytic concerns.</a:t>
+              <a:t>Distinguish somatic from germline findings.</a:t>
             </a:r>
             <a:endParaRPr lang="en-US" sz="1350" dirty="0"/>
           </a:p>
@@ -10015,7 +12053,7 @@
                 <a:ea typeface="Calibri" pitchFamily="34" charset="-122"/>
                 <a:cs typeface="Calibri" pitchFamily="34" charset="-120"/>
               </a:rPr>
-              <a:t>Distinguish tumor profiling from germline testing.</a:t>
+              <a:t>Explain liquid biopsy (cfDNA) uses and limits.</a:t>
             </a:r>
             <a:endParaRPr lang="en-US" sz="1350" dirty="0"/>
           </a:p>
@@ -10149,7 +12187,7 @@
                 <a:ea typeface="Calibri" pitchFamily="34" charset="-122"/>
                 <a:cs typeface="Calibri" pitchFamily="34" charset="-120"/>
               </a:rPr>
-              <a:t>Introduce liquid biopsy and circulating tumor DNA.</a:t>
+              <a:t>State consent and counseling needs for germline testing.</a:t>
             </a:r>
             <a:endParaRPr lang="en-US" sz="1350" dirty="0"/>
           </a:p>
@@ -10283,7 +12321,7 @@
                 <a:ea typeface="Calibri" pitchFamily="34" charset="-122"/>
                 <a:cs typeface="Calibri" pitchFamily="34" charset="-120"/>
               </a:rPr>
-              <a:t>Interpret microsatellite instability and tumor mutational burden.</a:t>
+              <a:t>Recognize incidental germline findings from tumor testing.</a:t>
             </a:r>
             <a:endParaRPr lang="en-US" sz="1350" dirty="0"/>
           </a:p>
@@ -10647,7 +12685,7 @@
                 <a:ea typeface="Calibri" pitchFamily="34" charset="-122"/>
                 <a:cs typeface="Calibri" pitchFamily="34" charset="-120"/>
               </a:rPr>
-              <a:t>   —  biomarker-to-therapy pairing</a:t>
+              <a:t>   —  predictive biomarkers</a:t>
             </a:r>
             <a:endParaRPr lang="en-US" sz="1400" dirty="0"/>
           </a:p>
@@ -10774,7 +12812,7 @@
                 <a:ea typeface="Calibri" pitchFamily="34" charset="-122"/>
                 <a:cs typeface="Calibri" pitchFamily="34" charset="-120"/>
               </a:rPr>
-              <a:t>Tissue &amp; preanalytics</a:t>
+              <a:t>Tumor markers</a:t>
             </a:r>
             <a:pPr algn="l" indent="0" marL="0">
               <a:buNone/>
@@ -10788,7 +12826,7 @@
                 <a:ea typeface="Calibri" pitchFamily="34" charset="-122"/>
                 <a:cs typeface="Calibri" pitchFamily="34" charset="-120"/>
               </a:rPr>
-              <a:t>   —  fixation, tumor fraction</a:t>
+              <a:t>   —  targetable alterations, MSI/TMB</a:t>
             </a:r>
             <a:endParaRPr lang="en-US" sz="1400" dirty="0"/>
           </a:p>
@@ -10922,7 +12960,7 @@
                 <a:ea typeface="Calibri" pitchFamily="34" charset="-122"/>
                 <a:cs typeface="Calibri" pitchFamily="34" charset="-120"/>
               </a:rPr>
-              <a:t>Germline &amp; hereditary cancer</a:t>
+              <a:t>Somatic vs germline</a:t>
             </a:r>
             <a:pPr algn="l" indent="0" marL="0">
               <a:buNone/>
@@ -10936,7 +12974,7 @@
                 <a:ea typeface="Calibri" pitchFamily="34" charset="-122"/>
                 <a:cs typeface="Calibri" pitchFamily="34" charset="-120"/>
               </a:rPr>
-              <a:t>   —  somatic vs germline</a:t>
+              <a:t>   —  VAF and confirmation</a:t>
             </a:r>
             <a:endParaRPr lang="en-US" sz="1400" dirty="0"/>
           </a:p>
@@ -11063,7 +13101,7 @@
                 <a:ea typeface="Calibri" pitchFamily="34" charset="-122"/>
                 <a:cs typeface="Calibri" pitchFamily="34" charset="-120"/>
               </a:rPr>
-              <a:t>Liquid biopsy &amp; signatures</a:t>
+              <a:t>Liquid biopsy</a:t>
             </a:r>
             <a:pPr algn="l" indent="0" marL="0">
               <a:buNone/>
@@ -11077,7 +13115,7 @@
                 <a:ea typeface="Calibri" pitchFamily="34" charset="-122"/>
                 <a:cs typeface="Calibri" pitchFamily="34" charset="-120"/>
               </a:rPr>
-              <a:t>   —  ctDNA, MSI, TMB</a:t>
+              <a:t>   —  cfDNA uses/limits</a:t>
             </a:r>
             <a:endParaRPr lang="en-US" sz="1400" dirty="0"/>
           </a:p>
@@ -11211,7 +13249,7 @@
                 <a:ea typeface="Calibri" pitchFamily="34" charset="-122"/>
                 <a:cs typeface="Calibri" pitchFamily="34" charset="-120"/>
               </a:rPr>
-              <a:t>Cases &amp; board</a:t>
+              <a:t>Cases &amp; board review</a:t>
             </a:r>
             <a:endParaRPr lang="en-US" sz="1400" dirty="0"/>
           </a:p>
@@ -11510,7 +13548,7 @@
                 <a:ea typeface="Calibri" pitchFamily="34" charset="-122"/>
                 <a:cs typeface="Calibri" pitchFamily="34" charset="-120"/>
               </a:rPr>
-              <a:t>Companion Diagnostics &amp; Tissue</a:t>
+              <a:t>Companion Diagnostics &amp; Tumor Markers</a:t>
             </a:r>
             <a:endParaRPr lang="en-US" sz="3800" dirty="0"/>
           </a:p>
@@ -11581,7 +13619,7 @@
                 <a:ea typeface="Calibri" pitchFamily="34" charset="-122"/>
                 <a:cs typeface="Calibri" pitchFamily="34" charset="-120"/>
               </a:rPr>
-              <a:t>MOLECULAR &amp; CYTOGENETICS   ·   COMPANION DIAGNOSTICS</a:t>
+              <a:t>MOLECULAR &amp; CYTOGENETICS   ·   COMPANION DX</a:t>
             </a:r>
             <a:endParaRPr lang="en-US" sz="1100" dirty="0"/>
           </a:p>
@@ -11620,7 +13658,7 @@
                 <a:ea typeface="Calibri" pitchFamily="34" charset="-122"/>
                 <a:cs typeface="Calibri" pitchFamily="34" charset="-120"/>
               </a:rPr>
-              <a:t>Pairing Biomarkers with Therapy</a:t>
+              <a:t>Matching Patients to Therapy</a:t>
             </a:r>
             <a:endParaRPr lang="en-US" sz="3000" dirty="0"/>
           </a:p>
@@ -11688,7 +13726,7 @@
                 <a:ea typeface="Calibri" pitchFamily="34" charset="-122"/>
                 <a:cs typeface="Calibri" pitchFamily="34" charset="-120"/>
               </a:rPr>
-              <a:t>THE CONCEPT</a:t>
+              <a:t>PREDICTIVE BIOMARKERS</a:t>
             </a:r>
             <a:endParaRPr lang="en-US" sz="1200" dirty="0"/>
           </a:p>
@@ -11731,7 +13769,7 @@
                 <a:ea typeface="Calibri" pitchFamily="34" charset="-122"/>
                 <a:cs typeface="Calibri" pitchFamily="34" charset="-120"/>
               </a:rPr>
-              <a:t>A companion diagnostic identifies patients likely to benefit (or be harmed by) a specific therapy.</a:t>
+              <a:t>Companion diagnostics identify patients likely to respond to a specific therapy.</a:t>
             </a:r>
             <a:endParaRPr lang="en-US" sz="1250" dirty="0"/>
           </a:p>
@@ -11752,7 +13790,7 @@
                 <a:ea typeface="Calibri" pitchFamily="34" charset="-122"/>
                 <a:cs typeface="Calibri" pitchFamily="34" charset="-120"/>
               </a:rPr>
-              <a:t>Examples: EGFR mutations (lung), BRAF V600E (melanoma/colon), HER2 amplification (breast/gastric), KRAS/NRAS for anti-EGFR eligibility.</a:t>
+              <a:t>Predictive (response) vs prognostic (outcome) markers differ.</a:t>
             </a:r>
             <a:endParaRPr lang="en-US" sz="1250" dirty="0"/>
           </a:p>
@@ -11773,7 +13811,7 @@
                 <a:ea typeface="Calibri" pitchFamily="34" charset="-122"/>
                 <a:cs typeface="Calibri" pitchFamily="34" charset="-120"/>
               </a:rPr>
-              <a:t>Predictive (response) vs prognostic (outcome) biomarkers.</a:t>
+              <a:t>Some markers indicate resistance (e.g., KRAS for anti-EGFR).</a:t>
             </a:r>
             <a:endParaRPr lang="en-US" sz="1250" dirty="0"/>
           </a:p>
@@ -11794,7 +13832,7 @@
                 <a:ea typeface="Calibri" pitchFamily="34" charset="-122"/>
                 <a:cs typeface="Calibri" pitchFamily="34" charset="-120"/>
               </a:rPr>
-              <a:t>Method may be NGS, PCR, FISH, or IHC depending on the marker.</a:t>
+              <a:t>Testing must match the approved assay/context.</a:t>
             </a:r>
             <a:endParaRPr lang="en-US" sz="1250" dirty="0"/>
           </a:p>
@@ -11817,7 +13855,7 @@
             </a:avLst>
           </a:prstGeom>
           <a:solidFill>
-            <a:srgbClr val="E0F2F4"/>
+            <a:srgbClr val="DDF0EF"/>
           </a:solidFill>
           <a:ln/>
           <a:effectLst>
@@ -11862,7 +13900,7 @@
                 <a:ea typeface="Calibri" pitchFamily="34" charset="-122"/>
                 <a:cs typeface="Calibri" pitchFamily="34" charset="-120"/>
               </a:rPr>
-              <a:t>REPORTING FOR ACTION</a:t>
+              <a:t>EXAMPLES</a:t>
             </a:r>
             <a:endParaRPr lang="en-US" sz="1200" dirty="0"/>
           </a:p>
@@ -11905,7 +13943,7 @@
                 <a:ea typeface="Calibri" pitchFamily="34" charset="-122"/>
                 <a:cs typeface="Calibri" pitchFamily="34" charset="-120"/>
               </a:rPr>
-              <a:t>State the biomarker, method, and therapeutic implication clearly.</a:t>
+              <a:t>EGFR (lung) → EGFR inhibitors; ALK/ROS1 fusions → targeted agents.</a:t>
             </a:r>
             <a:endParaRPr lang="en-US" sz="1250" dirty="0"/>
           </a:p>
@@ -11926,7 +13964,7 @@
                 <a:ea typeface="Calibri" pitchFamily="34" charset="-122"/>
                 <a:cs typeface="Calibri" pitchFamily="34" charset="-120"/>
               </a:rPr>
-              <a:t>Note negative results that exclude a therapy (e.g., RAS mutation → anti-EGFR unlikely to help).</a:t>
+              <a:t>BRAF V600E → BRAF/MEK inhibitors.</a:t>
             </a:r>
             <a:endParaRPr lang="en-US" sz="1250" dirty="0"/>
           </a:p>
@@ -11947,7 +13985,7 @@
                 <a:ea typeface="Calibri" pitchFamily="34" charset="-122"/>
                 <a:cs typeface="Calibri" pitchFamily="34" charset="-120"/>
               </a:rPr>
-              <a:t>Tumor type changes interpretation of the same variant.</a:t>
+              <a:t>HER2 amplification → anti-HER2 therapy.</a:t>
             </a:r>
             <a:endParaRPr lang="en-US" sz="1250" dirty="0"/>
           </a:p>
@@ -11968,7 +14006,7 @@
                 <a:ea typeface="Calibri" pitchFamily="34" charset="-122"/>
                 <a:cs typeface="Calibri" pitchFamily="34" charset="-120"/>
               </a:rPr>
-              <a:t>Align with regulatory-approved CDx where required.</a:t>
+              <a:t>KRAS/NRAS mutation → anti-EGFR resistance in colorectal cancer.</a:t>
             </a:r>
             <a:endParaRPr lang="en-US" sz="1250" dirty="0"/>
           </a:p>
@@ -12145,7 +14183,7 @@
                 <a:ea typeface="Calibri" pitchFamily="34" charset="-122"/>
                 <a:cs typeface="Calibri" pitchFamily="34" charset="-120"/>
               </a:rPr>
-              <a:t>MOLECULAR &amp; CYTOGENETICS   ·   WORKFLOW</a:t>
+              <a:t>MOLECULAR &amp; CYTOGENETICS   ·   IMMUNOTHERAPY</a:t>
             </a:r>
             <a:endParaRPr lang="en-US" sz="1100" dirty="0"/>
           </a:p>
@@ -12184,7 +14222,7 @@
                 <a:ea typeface="Calibri" pitchFamily="34" charset="-122"/>
                 <a:cs typeface="Calibri" pitchFamily="34" charset="-120"/>
               </a:rPr>
-              <a:t>Sequencing Solid Tumors</a:t>
+              <a:t>MSI, MMR &amp; Tumor Mutational Burden</a:t>
             </a:r>
             <a:endParaRPr lang="en-US" sz="3000" dirty="0"/>
           </a:p>
@@ -12198,23 +14236,18 @@
         </p:nvSpPr>
         <p:spPr>
           <a:xfrm>
-            <a:off x="1066648" y="1481328"/>
-            <a:ext cx="10058400" cy="3483864"/>
+            <a:off x="566928" y="1517904"/>
+            <a:ext cx="5346040" cy="4114800"/>
           </a:xfrm>
           <a:prstGeom prst="roundRect">
             <a:avLst>
-              <a:gd name="adj" fmla="val 2362"/>
+              <a:gd name="adj" fmla="val 2000"/>
             </a:avLst>
           </a:prstGeom>
           <a:solidFill>
-            <a:srgbClr val="FFFFFF"/>
+            <a:srgbClr val="E0F2F4"/>
           </a:solidFill>
-          <a:ln w="12700">
-            <a:solidFill>
-              <a:srgbClr val="DCE4EC"/>
-            </a:solidFill>
-            <a:prstDash val="solid"/>
-          </a:ln>
+          <a:ln/>
           <a:effectLst>
             <a:outerShdw sx="100000" sy="100000" kx="0" ky="0" algn="bl" rotWithShape="0" blurRad="88900" dist="25400" dir="5400000">
               <a:srgbClr val="22303C">
@@ -12224,40 +14257,55 @@
           </a:effectLst>
         </p:spPr>
       </p:sp>
-      <p:pic>
-        <p:nvPicPr>
-          <p:cNvPr id="5" name="Image 0" descr="/tmp/cp_work2/art/mol_ngs.png">    </p:cNvPr>
-          <p:cNvPicPr>
-            <a:picLocks noChangeAspect="1"/>
-          </p:cNvPicPr>
-          <p:nvPr/>
-        </p:nvPicPr>
-        <p:blipFill>
-          <a:blip r:embed="rId1"/>
-          <a:stretch>
-            <a:fillRect/>
-          </a:stretch>
-        </p:blipFill>
-        <p:spPr>
-          <a:xfrm>
-            <a:off x="1194664" y="1609344"/>
-            <a:ext cx="9802368" cy="3227832"/>
-          </a:xfrm>
-          <a:prstGeom prst="rect">
-            <a:avLst/>
-          </a:prstGeom>
-        </p:spPr>
-      </p:pic>
-      <p:sp>
-        <p:nvSpPr>
-          <p:cNvPr id="6" name="Text 3"/>
-          <p:cNvSpPr/>
-          <p:nvPr/>
-        </p:nvSpPr>
-        <p:spPr>
-          <a:xfrm>
-            <a:off x="566928" y="5038344"/>
-            <a:ext cx="11057839" cy="365760"/>
+      <p:sp>
+        <p:nvSpPr>
+          <p:cNvPr id="5" name="Text 3"/>
+          <p:cNvSpPr/>
+          <p:nvPr/>
+        </p:nvSpPr>
+        <p:spPr>
+          <a:xfrm>
+            <a:off x="804672" y="1682496"/>
+            <a:ext cx="4888840" cy="274320"/>
+          </a:xfrm>
+          <a:prstGeom prst="rect">
+            <a:avLst/>
+          </a:prstGeom>
+          <a:noFill/>
+          <a:ln/>
+        </p:spPr>
+        <p:txBody>
+          <a:bodyPr wrap="square" lIns="0" tIns="0" rIns="0" bIns="0" rtlCol="0" anchor="ctr"/>
+          <a:lstStyle/>
+          <a:p>
+            <a:pPr indent="0" marL="0">
+              <a:buNone/>
+            </a:pPr>
+            <a:r>
+              <a:rPr lang="en-US" sz="1200" b="1" spc="100" kern="0" dirty="0">
+                <a:solidFill>
+                  <a:srgbClr val="005A63"/>
+                </a:solidFill>
+                <a:latin typeface="Calibri" pitchFamily="34" charset="0"/>
+                <a:ea typeface="Calibri" pitchFamily="34" charset="-122"/>
+                <a:cs typeface="Calibri" pitchFamily="34" charset="-120"/>
+              </a:rPr>
+              <a:t>MSI / MMR</a:t>
+            </a:r>
+            <a:endParaRPr lang="en-US" sz="1200" dirty="0"/>
+          </a:p>
+        </p:txBody>
+      </p:sp>
+      <p:sp>
+        <p:nvSpPr>
+          <p:cNvPr id="6" name="Text 4"/>
+          <p:cNvSpPr/>
+          <p:nvPr/>
+        </p:nvSpPr>
+        <p:spPr>
+          <a:xfrm>
+            <a:off x="804672" y="2029968"/>
+            <a:ext cx="4870552" cy="3474720"/>
           </a:xfrm>
           <a:prstGeom prst="rect">
             <a:avLst/>
@@ -12269,27 +14317,268 @@
           <a:bodyPr wrap="square" lIns="0" tIns="0" rIns="0" bIns="0" rtlCol="0" anchor="t"/>
           <a:lstStyle/>
           <a:p>
-            <a:pPr algn="ctr" indent="0" marL="0">
-              <a:buNone/>
-            </a:pPr>
-            <a:r>
-              <a:rPr lang="en-US" sz="1150" i="1" dirty="0">
-                <a:solidFill>
-                  <a:srgbClr val="6B7B8A"/>
-                </a:solidFill>
-                <a:latin typeface="Calibri" pitchFamily="34" charset="0"/>
-                <a:ea typeface="Calibri" pitchFamily="34" charset="-122"/>
-                <a:cs typeface="Calibri" pitchFamily="34" charset="-120"/>
-              </a:rPr>
-              <a:t>Original schematic. Tumor NGS depends on adequate tumor fraction and a validated pipeline; report coverage limitations.</a:t>
-            </a:r>
-            <a:endParaRPr lang="en-US" sz="1150" dirty="0"/>
-          </a:p>
-        </p:txBody>
-      </p:sp>
-      <p:sp>
-        <p:nvSpPr>
-          <p:cNvPr id="7" name="Text 4"/>
+            <a:pPr algn="l" marL="177800" indent="-177800">
+              <a:spcAft>
+                <a:spcPts val="900"/>
+              </a:spcAft>
+              <a:buSzPct val="100000"/>
+              <a:buChar char="•"/>
+            </a:pPr>
+            <a:r>
+              <a:rPr lang="en-US" sz="1250" b="1" dirty="0">
+                <a:solidFill>
+                  <a:srgbClr val="1B2A38"/>
+                </a:solidFill>
+                <a:latin typeface="Calibri" pitchFamily="34" charset="0"/>
+                <a:ea typeface="Calibri" pitchFamily="34" charset="-122"/>
+                <a:cs typeface="Calibri" pitchFamily="34" charset="-120"/>
+              </a:rPr>
+              <a:t>Microsatellite instability / mismatch-repair deficiency predicts immunotherapy response.</a:t>
+            </a:r>
+            <a:endParaRPr lang="en-US" sz="1250" dirty="0"/>
+          </a:p>
+          <a:p>
+            <a:pPr algn="l" marL="177800" indent="-177800">
+              <a:spcAft>
+                <a:spcPts val="900"/>
+              </a:spcAft>
+              <a:buSzPct val="100000"/>
+              <a:buChar char="•"/>
+            </a:pPr>
+            <a:r>
+              <a:rPr lang="en-US" sz="1250" dirty="0">
+                <a:solidFill>
+                  <a:srgbClr val="33444F"/>
+                </a:solidFill>
+                <a:latin typeface="Calibri" pitchFamily="34" charset="0"/>
+                <a:ea typeface="Calibri" pitchFamily="34" charset="-122"/>
+                <a:cs typeface="Calibri" pitchFamily="34" charset="-120"/>
+              </a:rPr>
+              <a:t>Also screens for Lynch syndrome — a germline link.</a:t>
+            </a:r>
+            <a:endParaRPr lang="en-US" sz="1250" dirty="0"/>
+          </a:p>
+          <a:p>
+            <a:pPr algn="l" marL="177800" indent="-177800">
+              <a:spcAft>
+                <a:spcPts val="900"/>
+              </a:spcAft>
+              <a:buSzPct val="100000"/>
+              <a:buChar char="•"/>
+            </a:pPr>
+            <a:r>
+              <a:rPr lang="en-US" sz="1250" dirty="0">
+                <a:solidFill>
+                  <a:srgbClr val="33444F"/>
+                </a:solidFill>
+                <a:latin typeface="Calibri" pitchFamily="34" charset="0"/>
+                <a:ea typeface="Calibri" pitchFamily="34" charset="-122"/>
+                <a:cs typeface="Calibri" pitchFamily="34" charset="-120"/>
+              </a:rPr>
+              <a:t>Detected by PCR (MSI), IHC (MMR proteins), or NGS.</a:t>
+            </a:r>
+            <a:endParaRPr lang="en-US" sz="1250" dirty="0"/>
+          </a:p>
+          <a:p>
+            <a:pPr algn="l" marL="177800" indent="-177800">
+              <a:spcAft>
+                <a:spcPts val="900"/>
+              </a:spcAft>
+              <a:buSzPct val="100000"/>
+              <a:buChar char="•"/>
+            </a:pPr>
+            <a:r>
+              <a:rPr lang="en-US" sz="1250" dirty="0">
+                <a:solidFill>
+                  <a:srgbClr val="33444F"/>
+                </a:solidFill>
+                <a:latin typeface="Calibri" pitchFamily="34" charset="0"/>
+                <a:ea typeface="Calibri" pitchFamily="34" charset="-122"/>
+                <a:cs typeface="Calibri" pitchFamily="34" charset="-120"/>
+              </a:rPr>
+              <a:t>Abnormal MMR may prompt germline evaluation.</a:t>
+            </a:r>
+            <a:endParaRPr lang="en-US" sz="1250" dirty="0"/>
+          </a:p>
+        </p:txBody>
+      </p:sp>
+      <p:sp>
+        <p:nvSpPr>
+          <p:cNvPr id="7" name="Shape 5"/>
+          <p:cNvSpPr/>
+          <p:nvPr/>
+        </p:nvSpPr>
+        <p:spPr>
+          <a:xfrm>
+            <a:off x="6278728" y="1517904"/>
+            <a:ext cx="5346040" cy="4114800"/>
+          </a:xfrm>
+          <a:prstGeom prst="roundRect">
+            <a:avLst>
+              <a:gd name="adj" fmla="val 2000"/>
+            </a:avLst>
+          </a:prstGeom>
+          <a:solidFill>
+            <a:srgbClr val="DDF0EF"/>
+          </a:solidFill>
+          <a:ln/>
+          <a:effectLst>
+            <a:outerShdw sx="100000" sy="100000" kx="0" ky="0" algn="bl" rotWithShape="0" blurRad="88900" dist="25400" dir="5400000">
+              <a:srgbClr val="22303C">
+                <a:alpha val="12000"/>
+              </a:srgbClr>
+            </a:outerShdw>
+          </a:effectLst>
+        </p:spPr>
+      </p:sp>
+      <p:sp>
+        <p:nvSpPr>
+          <p:cNvPr id="8" name="Text 6"/>
+          <p:cNvSpPr/>
+          <p:nvPr/>
+        </p:nvSpPr>
+        <p:spPr>
+          <a:xfrm>
+            <a:off x="6516472" y="1682496"/>
+            <a:ext cx="4888840" cy="274320"/>
+          </a:xfrm>
+          <a:prstGeom prst="rect">
+            <a:avLst/>
+          </a:prstGeom>
+          <a:noFill/>
+          <a:ln/>
+        </p:spPr>
+        <p:txBody>
+          <a:bodyPr wrap="square" lIns="0" tIns="0" rIns="0" bIns="0" rtlCol="0" anchor="ctr"/>
+          <a:lstStyle/>
+          <a:p>
+            <a:pPr indent="0" marL="0">
+              <a:buNone/>
+            </a:pPr>
+            <a:r>
+              <a:rPr lang="en-US" sz="1200" b="1" spc="100" kern="0" dirty="0">
+                <a:solidFill>
+                  <a:srgbClr val="005A63"/>
+                </a:solidFill>
+                <a:latin typeface="Calibri" pitchFamily="34" charset="0"/>
+                <a:ea typeface="Calibri" pitchFamily="34" charset="-122"/>
+                <a:cs typeface="Calibri" pitchFamily="34" charset="-120"/>
+              </a:rPr>
+              <a:t>TUMOR MUTATIONAL BURDEN</a:t>
+            </a:r>
+            <a:endParaRPr lang="en-US" sz="1200" dirty="0"/>
+          </a:p>
+        </p:txBody>
+      </p:sp>
+      <p:sp>
+        <p:nvSpPr>
+          <p:cNvPr id="9" name="Text 7"/>
+          <p:cNvSpPr/>
+          <p:nvPr/>
+        </p:nvSpPr>
+        <p:spPr>
+          <a:xfrm>
+            <a:off x="6516472" y="2029968"/>
+            <a:ext cx="4870552" cy="3474720"/>
+          </a:xfrm>
+          <a:prstGeom prst="rect">
+            <a:avLst/>
+          </a:prstGeom>
+          <a:noFill/>
+          <a:ln/>
+        </p:spPr>
+        <p:txBody>
+          <a:bodyPr wrap="square" lIns="0" tIns="0" rIns="0" bIns="0" rtlCol="0" anchor="t"/>
+          <a:lstStyle/>
+          <a:p>
+            <a:pPr algn="l" marL="177800" indent="-177800">
+              <a:spcAft>
+                <a:spcPts val="900"/>
+              </a:spcAft>
+              <a:buSzPct val="100000"/>
+              <a:buChar char="•"/>
+            </a:pPr>
+            <a:r>
+              <a:rPr lang="en-US" sz="1250" b="1" dirty="0">
+                <a:solidFill>
+                  <a:srgbClr val="1B2A38"/>
+                </a:solidFill>
+                <a:latin typeface="Calibri" pitchFamily="34" charset="0"/>
+                <a:ea typeface="Calibri" pitchFamily="34" charset="-122"/>
+                <a:cs typeface="Calibri" pitchFamily="34" charset="-120"/>
+              </a:rPr>
+              <a:t>High TMB can predict immunotherapy benefit in some contexts.</a:t>
+            </a:r>
+            <a:endParaRPr lang="en-US" sz="1250" dirty="0"/>
+          </a:p>
+          <a:p>
+            <a:pPr algn="l" marL="177800" indent="-177800">
+              <a:spcAft>
+                <a:spcPts val="900"/>
+              </a:spcAft>
+              <a:buSzPct val="100000"/>
+              <a:buChar char="•"/>
+            </a:pPr>
+            <a:r>
+              <a:rPr lang="en-US" sz="1250" dirty="0">
+                <a:solidFill>
+                  <a:srgbClr val="33444F"/>
+                </a:solidFill>
+                <a:latin typeface="Calibri" pitchFamily="34" charset="0"/>
+                <a:ea typeface="Calibri" pitchFamily="34" charset="-122"/>
+                <a:cs typeface="Calibri" pitchFamily="34" charset="-120"/>
+              </a:rPr>
+              <a:t>Assay and threshold dependent.</a:t>
+            </a:r>
+            <a:endParaRPr lang="en-US" sz="1250" dirty="0"/>
+          </a:p>
+          <a:p>
+            <a:pPr algn="l" marL="177800" indent="-177800">
+              <a:spcAft>
+                <a:spcPts val="900"/>
+              </a:spcAft>
+              <a:buSzPct val="100000"/>
+              <a:buChar char="•"/>
+            </a:pPr>
+            <a:r>
+              <a:rPr lang="en-US" sz="1250" dirty="0">
+                <a:solidFill>
+                  <a:srgbClr val="33444F"/>
+                </a:solidFill>
+                <a:latin typeface="Calibri" pitchFamily="34" charset="0"/>
+                <a:ea typeface="Calibri" pitchFamily="34" charset="-122"/>
+                <a:cs typeface="Calibri" pitchFamily="34" charset="-120"/>
+              </a:rPr>
+              <a:t>Interpret with tumor type and other markers.</a:t>
+            </a:r>
+            <a:endParaRPr lang="en-US" sz="1250" dirty="0"/>
+          </a:p>
+          <a:p>
+            <a:pPr algn="l" marL="177800" indent="-177800">
+              <a:spcAft>
+                <a:spcPts val="900"/>
+              </a:spcAft>
+              <a:buSzPct val="100000"/>
+              <a:buChar char="•"/>
+            </a:pPr>
+            <a:r>
+              <a:rPr lang="en-US" sz="1250" dirty="0">
+                <a:solidFill>
+                  <a:srgbClr val="33444F"/>
+                </a:solidFill>
+                <a:latin typeface="Calibri" pitchFamily="34" charset="0"/>
+                <a:ea typeface="Calibri" pitchFamily="34" charset="-122"/>
+                <a:cs typeface="Calibri" pitchFamily="34" charset="-120"/>
+              </a:rPr>
+              <a:t>Part of broader genomic profiling.</a:t>
+            </a:r>
+            <a:endParaRPr lang="en-US" sz="1250" dirty="0"/>
+          </a:p>
+        </p:txBody>
+      </p:sp>
+      <p:sp>
+        <p:nvSpPr>
+          <p:cNvPr id="10" name="Text 8"/>
           <p:cNvSpPr/>
           <p:nvPr/>
         </p:nvSpPr>
@@ -12328,7 +14617,7 @@
       </p:sp>
       <p:sp>
         <p:nvSpPr>
-          <p:cNvPr id="8" name="Text 5"/>
+          <p:cNvPr id="11" name="Text 9"/>
           <p:cNvSpPr/>
           <p:nvPr/>
         </p:nvSpPr>
@@ -12458,7 +14747,7 @@
                 <a:ea typeface="Calibri" pitchFamily="34" charset="-122"/>
                 <a:cs typeface="Calibri" pitchFamily="34" charset="-120"/>
               </a:rPr>
-              <a:t>MOLECULAR &amp; CYTOGENETICS   ·   PREANALYTICS</a:t>
+              <a:t>MOLECULAR &amp; CYTOGENETICS   ·   CYTOGENETICS</a:t>
             </a:r>
             <a:endParaRPr lang="en-US" sz="1100" dirty="0"/>
           </a:p>
@@ -12497,7 +14786,7 @@
                 <a:ea typeface="Calibri" pitchFamily="34" charset="-122"/>
                 <a:cs typeface="Calibri" pitchFamily="34" charset="-120"/>
               </a:rPr>
-              <a:t>Tissue Adequacy and Fixation</a:t>
+              <a:t>Copy Number and Structural Methods</a:t>
             </a:r>
             <a:endParaRPr lang="en-US" sz="3000" dirty="0"/>
           </a:p>
@@ -12511,18 +14800,23 @@
         </p:nvSpPr>
         <p:spPr>
           <a:xfrm>
-            <a:off x="566928" y="1517904"/>
-            <a:ext cx="5346040" cy="4114800"/>
+            <a:off x="883768" y="1481328"/>
+            <a:ext cx="10424160" cy="4507992"/>
           </a:xfrm>
           <a:prstGeom prst="roundRect">
             <a:avLst>
-              <a:gd name="adj" fmla="val 2000"/>
+              <a:gd name="adj" fmla="val 1826"/>
             </a:avLst>
           </a:prstGeom>
           <a:solidFill>
-            <a:srgbClr val="E0F2F4"/>
+            <a:srgbClr val="FFFFFF"/>
           </a:solidFill>
-          <a:ln/>
+          <a:ln w="12700">
+            <a:solidFill>
+              <a:srgbClr val="DCE4EC"/>
+            </a:solidFill>
+            <a:prstDash val="solid"/>
+          </a:ln>
           <a:effectLst>
             <a:outerShdw sx="100000" sy="100000" kx="0" ky="0" algn="bl" rotWithShape="0" blurRad="88900" dist="25400" dir="5400000">
               <a:srgbClr val="22303C">
@@ -12532,55 +14826,40 @@
           </a:effectLst>
         </p:spPr>
       </p:sp>
-      <p:sp>
-        <p:nvSpPr>
-          <p:cNvPr id="5" name="Text 3"/>
-          <p:cNvSpPr/>
-          <p:nvPr/>
-        </p:nvSpPr>
-        <p:spPr>
-          <a:xfrm>
-            <a:off x="804672" y="1682496"/>
-            <a:ext cx="4888840" cy="274320"/>
-          </a:xfrm>
-          <a:prstGeom prst="rect">
-            <a:avLst/>
-          </a:prstGeom>
-          <a:noFill/>
-          <a:ln/>
-        </p:spPr>
-        <p:txBody>
-          <a:bodyPr wrap="square" lIns="0" tIns="0" rIns="0" bIns="0" rtlCol="0" anchor="ctr"/>
-          <a:lstStyle/>
-          <a:p>
-            <a:pPr indent="0" marL="0">
-              <a:buNone/>
-            </a:pPr>
-            <a:r>
-              <a:rPr lang="en-US" sz="1200" b="1" spc="100" kern="0" dirty="0">
-                <a:solidFill>
-                  <a:srgbClr val="005A63"/>
-                </a:solidFill>
-                <a:latin typeface="Calibri" pitchFamily="34" charset="0"/>
-                <a:ea typeface="Calibri" pitchFamily="34" charset="-122"/>
-                <a:cs typeface="Calibri" pitchFamily="34" charset="-120"/>
-              </a:rPr>
-              <a:t>WHAT DEGRADES RESULTS</a:t>
-            </a:r>
-            <a:endParaRPr lang="en-US" sz="1200" dirty="0"/>
-          </a:p>
-        </p:txBody>
-      </p:sp>
-      <p:sp>
-        <p:nvSpPr>
-          <p:cNvPr id="6" name="Text 4"/>
-          <p:cNvSpPr/>
-          <p:nvPr/>
-        </p:nvSpPr>
-        <p:spPr>
-          <a:xfrm>
-            <a:off x="804672" y="2029968"/>
-            <a:ext cx="4870552" cy="3474720"/>
+      <p:pic>
+        <p:nvPicPr>
+          <p:cNvPr id="5" name="Image 0" descr="/tmp/cp_work2/art/mol_cyto.png">    </p:cNvPr>
+          <p:cNvPicPr>
+            <a:picLocks noChangeAspect="1"/>
+          </p:cNvPicPr>
+          <p:nvPr/>
+        </p:nvPicPr>
+        <p:blipFill>
+          <a:blip r:embed="rId1"/>
+          <a:stretch>
+            <a:fillRect/>
+          </a:stretch>
+        </p:blipFill>
+        <p:spPr>
+          <a:xfrm>
+            <a:off x="1011784" y="1609344"/>
+            <a:ext cx="10168128" cy="4251960"/>
+          </a:xfrm>
+          <a:prstGeom prst="rect">
+            <a:avLst/>
+          </a:prstGeom>
+        </p:spPr>
+      </p:pic>
+      <p:sp>
+        <p:nvSpPr>
+          <p:cNvPr id="6" name="Text 3"/>
+          <p:cNvSpPr/>
+          <p:nvPr/>
+        </p:nvSpPr>
+        <p:spPr>
+          <a:xfrm>
+            <a:off x="566928" y="6062472"/>
+            <a:ext cx="11057839" cy="365760"/>
           </a:xfrm>
           <a:prstGeom prst="rect">
             <a:avLst/>
@@ -12592,268 +14871,27 @@
           <a:bodyPr wrap="square" lIns="0" tIns="0" rIns="0" bIns="0" rtlCol="0" anchor="t"/>
           <a:lstStyle/>
           <a:p>
-            <a:pPr algn="l" marL="177800" indent="-177800">
-              <a:spcAft>
-                <a:spcPts val="900"/>
-              </a:spcAft>
-              <a:buSzPct val="100000"/>
-              <a:buChar char="•"/>
-            </a:pPr>
-            <a:r>
-              <a:rPr lang="en-US" sz="1250" b="1" dirty="0">
-                <a:solidFill>
-                  <a:srgbClr val="1B2A38"/>
-                </a:solidFill>
-                <a:latin typeface="Calibri" pitchFamily="34" charset="0"/>
-                <a:ea typeface="Calibri" pitchFamily="34" charset="-122"/>
-                <a:cs typeface="Calibri" pitchFamily="34" charset="-120"/>
-              </a:rPr>
-              <a:t>Low tumor fraction lowers sensitivity — a 'negative' may be a sampling problem.</a:t>
-            </a:r>
-            <a:endParaRPr lang="en-US" sz="1250" dirty="0"/>
-          </a:p>
-          <a:p>
-            <a:pPr algn="l" marL="177800" indent="-177800">
-              <a:spcAft>
-                <a:spcPts val="900"/>
-              </a:spcAft>
-              <a:buSzPct val="100000"/>
-              <a:buChar char="•"/>
-            </a:pPr>
-            <a:r>
-              <a:rPr lang="en-US" sz="1250" dirty="0">
-                <a:solidFill>
-                  <a:srgbClr val="33444F"/>
-                </a:solidFill>
-                <a:latin typeface="Calibri" pitchFamily="34" charset="0"/>
-                <a:ea typeface="Calibri" pitchFamily="34" charset="-122"/>
-                <a:cs typeface="Calibri" pitchFamily="34" charset="-120"/>
-              </a:rPr>
-              <a:t>Prolonged or acidic fixation and decalcification fragment nucleic acids.</a:t>
-            </a:r>
-            <a:endParaRPr lang="en-US" sz="1250" dirty="0"/>
-          </a:p>
-          <a:p>
-            <a:pPr algn="l" marL="177800" indent="-177800">
-              <a:spcAft>
-                <a:spcPts val="900"/>
-              </a:spcAft>
-              <a:buSzPct val="100000"/>
-              <a:buChar char="•"/>
-            </a:pPr>
-            <a:r>
-              <a:rPr lang="en-US" sz="1250" dirty="0">
-                <a:solidFill>
-                  <a:srgbClr val="33444F"/>
-                </a:solidFill>
-                <a:latin typeface="Calibri" pitchFamily="34" charset="0"/>
-                <a:ea typeface="Calibri" pitchFamily="34" charset="-122"/>
-                <a:cs typeface="Calibri" pitchFamily="34" charset="-120"/>
-              </a:rPr>
-              <a:t>FFPE introduces artifacts (deamination) — interpret low-level C&gt;T calls cautiously.</a:t>
-            </a:r>
-            <a:endParaRPr lang="en-US" sz="1250" dirty="0"/>
-          </a:p>
-          <a:p>
-            <a:pPr algn="l" marL="177800" indent="-177800">
-              <a:spcAft>
-                <a:spcPts val="900"/>
-              </a:spcAft>
-              <a:buSzPct val="100000"/>
-              <a:buChar char="•"/>
-            </a:pPr>
-            <a:r>
-              <a:rPr lang="en-US" sz="1250" dirty="0">
-                <a:solidFill>
-                  <a:srgbClr val="33444F"/>
-                </a:solidFill>
-                <a:latin typeface="Calibri" pitchFamily="34" charset="0"/>
-                <a:ea typeface="Calibri" pitchFamily="34" charset="-122"/>
-                <a:cs typeface="Calibri" pitchFamily="34" charset="-120"/>
-              </a:rPr>
-              <a:t>Necrotic or scant samples may be insufficient.</a:t>
-            </a:r>
-            <a:endParaRPr lang="en-US" sz="1250" dirty="0"/>
-          </a:p>
-        </p:txBody>
-      </p:sp>
-      <p:sp>
-        <p:nvSpPr>
-          <p:cNvPr id="7" name="Shape 5"/>
-          <p:cNvSpPr/>
-          <p:nvPr/>
-        </p:nvSpPr>
-        <p:spPr>
-          <a:xfrm>
-            <a:off x="6278728" y="1517904"/>
-            <a:ext cx="5346040" cy="4114800"/>
-          </a:xfrm>
-          <a:prstGeom prst="roundRect">
-            <a:avLst>
-              <a:gd name="adj" fmla="val 2000"/>
-            </a:avLst>
-          </a:prstGeom>
-          <a:solidFill>
-            <a:srgbClr val="E0F2F4"/>
-          </a:solidFill>
-          <a:ln/>
-          <a:effectLst>
-            <a:outerShdw sx="100000" sy="100000" kx="0" ky="0" algn="bl" rotWithShape="0" blurRad="88900" dist="25400" dir="5400000">
-              <a:srgbClr val="22303C">
-                <a:alpha val="12000"/>
-              </a:srgbClr>
-            </a:outerShdw>
-          </a:effectLst>
-        </p:spPr>
-      </p:sp>
-      <p:sp>
-        <p:nvSpPr>
-          <p:cNvPr id="8" name="Text 6"/>
-          <p:cNvSpPr/>
-          <p:nvPr/>
-        </p:nvSpPr>
-        <p:spPr>
-          <a:xfrm>
-            <a:off x="6516472" y="1682496"/>
-            <a:ext cx="4888840" cy="274320"/>
-          </a:xfrm>
-          <a:prstGeom prst="rect">
-            <a:avLst/>
-          </a:prstGeom>
-          <a:noFill/>
-          <a:ln/>
-        </p:spPr>
-        <p:txBody>
-          <a:bodyPr wrap="square" lIns="0" tIns="0" rIns="0" bIns="0" rtlCol="0" anchor="ctr"/>
-          <a:lstStyle/>
-          <a:p>
-            <a:pPr indent="0" marL="0">
-              <a:buNone/>
-            </a:pPr>
-            <a:r>
-              <a:rPr lang="en-US" sz="1200" b="1" spc="100" kern="0" dirty="0">
-                <a:solidFill>
-                  <a:srgbClr val="005A63"/>
-                </a:solidFill>
-                <a:latin typeface="Calibri" pitchFamily="34" charset="0"/>
-                <a:ea typeface="Calibri" pitchFamily="34" charset="-122"/>
-                <a:cs typeface="Calibri" pitchFamily="34" charset="-120"/>
-              </a:rPr>
-              <a:t>BEST PRACTICES</a:t>
-            </a:r>
-            <a:endParaRPr lang="en-US" sz="1200" dirty="0"/>
-          </a:p>
-        </p:txBody>
-      </p:sp>
-      <p:sp>
-        <p:nvSpPr>
-          <p:cNvPr id="9" name="Text 7"/>
-          <p:cNvSpPr/>
-          <p:nvPr/>
-        </p:nvSpPr>
-        <p:spPr>
-          <a:xfrm>
-            <a:off x="6516472" y="2029968"/>
-            <a:ext cx="4870552" cy="3474720"/>
-          </a:xfrm>
-          <a:prstGeom prst="rect">
-            <a:avLst/>
-          </a:prstGeom>
-          <a:noFill/>
-          <a:ln/>
-        </p:spPr>
-        <p:txBody>
-          <a:bodyPr wrap="square" lIns="0" tIns="0" rIns="0" bIns="0" rtlCol="0" anchor="t"/>
-          <a:lstStyle/>
-          <a:p>
-            <a:pPr algn="l" marL="177800" indent="-177800">
-              <a:spcAft>
-                <a:spcPts val="900"/>
-              </a:spcAft>
-              <a:buSzPct val="100000"/>
-              <a:buChar char="•"/>
-            </a:pPr>
-            <a:r>
-              <a:rPr lang="en-US" sz="1250" b="1" dirty="0">
-                <a:solidFill>
-                  <a:srgbClr val="1B2A38"/>
-                </a:solidFill>
-                <a:latin typeface="Calibri" pitchFamily="34" charset="0"/>
-                <a:ea typeface="Calibri" pitchFamily="34" charset="-122"/>
-                <a:cs typeface="Calibri" pitchFamily="34" charset="-120"/>
-              </a:rPr>
-              <a:t>Assess and report tumor cellularity; consider macrodissection to enrich tumor.</a:t>
-            </a:r>
-            <a:endParaRPr lang="en-US" sz="1250" dirty="0"/>
-          </a:p>
-          <a:p>
-            <a:pPr algn="l" marL="177800" indent="-177800">
-              <a:spcAft>
-                <a:spcPts val="900"/>
-              </a:spcAft>
-              <a:buSzPct val="100000"/>
-              <a:buChar char="•"/>
-            </a:pPr>
-            <a:r>
-              <a:rPr lang="en-US" sz="1250" dirty="0">
-                <a:solidFill>
-                  <a:srgbClr val="33444F"/>
-                </a:solidFill>
-                <a:latin typeface="Calibri" pitchFamily="34" charset="0"/>
-                <a:ea typeface="Calibri" pitchFamily="34" charset="-122"/>
-                <a:cs typeface="Calibri" pitchFamily="34" charset="-120"/>
-              </a:rPr>
-              <a:t>Use neutral-buffered formalin with controlled fixation time.</a:t>
-            </a:r>
-            <a:endParaRPr lang="en-US" sz="1250" dirty="0"/>
-          </a:p>
-          <a:p>
-            <a:pPr algn="l" marL="177800" indent="-177800">
-              <a:spcAft>
-                <a:spcPts val="900"/>
-              </a:spcAft>
-              <a:buSzPct val="100000"/>
-              <a:buChar char="•"/>
-            </a:pPr>
-            <a:r>
-              <a:rPr lang="en-US" sz="1250" dirty="0">
-                <a:solidFill>
-                  <a:srgbClr val="33444F"/>
-                </a:solidFill>
-                <a:latin typeface="Calibri" pitchFamily="34" charset="0"/>
-                <a:ea typeface="Calibri" pitchFamily="34" charset="-122"/>
-                <a:cs typeface="Calibri" pitchFamily="34" charset="-120"/>
-              </a:rPr>
-              <a:t>Triage limited tissue across needed studies.</a:t>
-            </a:r>
-            <a:endParaRPr lang="en-US" sz="1250" dirty="0"/>
-          </a:p>
-          <a:p>
-            <a:pPr algn="l" marL="177800" indent="-177800">
-              <a:spcAft>
-                <a:spcPts val="900"/>
-              </a:spcAft>
-              <a:buSzPct val="100000"/>
-              <a:buChar char="•"/>
-            </a:pPr>
-            <a:r>
-              <a:rPr lang="en-US" sz="1250" dirty="0">
-                <a:solidFill>
-                  <a:srgbClr val="33444F"/>
-                </a:solidFill>
-                <a:latin typeface="Calibri" pitchFamily="34" charset="0"/>
-                <a:ea typeface="Calibri" pitchFamily="34" charset="-122"/>
-                <a:cs typeface="Calibri" pitchFamily="34" charset="-120"/>
-              </a:rPr>
-              <a:t>State the limit of detection and regions not adequately covered.</a:t>
-            </a:r>
-            <a:endParaRPr lang="en-US" sz="1250" dirty="0"/>
-          </a:p>
-        </p:txBody>
-      </p:sp>
-      <p:sp>
-        <p:nvSpPr>
-          <p:cNvPr id="10" name="Text 8"/>
+            <a:pPr algn="ctr" indent="0" marL="0">
+              <a:buNone/>
+            </a:pPr>
+            <a:r>
+              <a:rPr lang="en-US" sz="1150" i="1" dirty="0">
+                <a:solidFill>
+                  <a:srgbClr val="6B7B8A"/>
+                </a:solidFill>
+                <a:latin typeface="Calibri" pitchFamily="34" charset="0"/>
+                <a:ea typeface="Calibri" pitchFamily="34" charset="-122"/>
+                <a:cs typeface="Calibri" pitchFamily="34" charset="-120"/>
+              </a:rPr>
+              <a:t>Original schematic. Microarray (copy number/LOH) and FISH (amplification/fusion) complement sequencing in solid tumors.</a:t>
+            </a:r>
+            <a:endParaRPr lang="en-US" sz="1150" dirty="0"/>
+          </a:p>
+        </p:txBody>
+      </p:sp>
+      <p:sp>
+        <p:nvSpPr>
+          <p:cNvPr id="7" name="Text 4"/>
           <p:cNvSpPr/>
           <p:nvPr/>
         </p:nvSpPr>
@@ -12892,7 +14930,7 @@
       </p:sp>
       <p:sp>
         <p:nvSpPr>
-          <p:cNvPr id="11" name="Text 9"/>
+          <p:cNvPr id="8" name="Text 5"/>
           <p:cNvSpPr/>
           <p:nvPr/>
         </p:nvSpPr>
@@ -13144,7 +15182,7 @@
                 <a:ea typeface="Calibri" pitchFamily="34" charset="-122"/>
                 <a:cs typeface="Calibri" pitchFamily="34" charset="-120"/>
               </a:rPr>
-              <a:t>Germline, Liquid Biopsy &amp; Signatures</a:t>
+              <a:t>Somatic vs Germline &amp; Liquid Biopsy</a:t>
             </a:r>
             <a:endParaRPr lang="en-US" sz="3800" dirty="0"/>
           </a:p>

--- a/decks/Molecular_04_Solid-Tumor-and-Germline-Testing.pptx
+++ b/decks/Molecular_04_Solid-Tumor-and-Germline-Testing.pptx
@@ -25,9 +25,13 @@
     <p:sldId id="273" r:id="rId19"/>
     <p:sldId id="274" r:id="rId20"/>
     <p:sldId id="275" r:id="rId21"/>
+    <p:sldId id="284" r:id="rId35"/>
     <p:sldId id="276" r:id="rId22"/>
+    <p:sldId id="283" r:id="rId34"/>
     <p:sldId id="277" r:id="rId23"/>
+    <p:sldId id="282" r:id="rId33"/>
     <p:sldId id="278" r:id="rId24"/>
+    <p:sldId id="281" r:id="rId32"/>
     <p:sldId id="279" r:id="rId25"/>
     <p:sldId id="280" r:id="rId26"/>
   </p:sldIdLst>
@@ -3032,6 +3036,10 @@
           </a:solidFill>
           <a:ln/>
         </p:spPr>
+        <p:txBody>
+          <a:bodyPr/>
+          <a:p/>
+        </p:txBody>
       </p:sp>
       <p:sp>
         <p:nvSpPr>
@@ -3054,6 +3062,10 @@
           </a:solidFill>
           <a:ln/>
         </p:spPr>
+        <p:txBody>
+          <a:bodyPr/>
+          <a:p/>
+        </p:txBody>
       </p:sp>
       <p:sp>
         <p:nvSpPr>
@@ -3076,6 +3088,10 @@
           </a:solidFill>
           <a:ln/>
         </p:spPr>
+        <p:txBody>
+          <a:bodyPr/>
+          <a:p/>
+        </p:txBody>
       </p:sp>
       <p:sp>
         <p:nvSpPr>
@@ -3098,6 +3114,10 @@
           </a:solidFill>
           <a:ln/>
         </p:spPr>
+        <p:txBody>
+          <a:bodyPr/>
+          <a:p/>
+        </p:txBody>
       </p:sp>
       <p:sp>
         <p:nvSpPr>
@@ -3519,6 +3539,10 @@
             </a:outerShdw>
           </a:effectLst>
         </p:spPr>
+        <p:txBody>
+          <a:bodyPr/>
+          <a:p/>
+        </p:txBody>
       </p:sp>
       <p:pic>
         <p:nvPicPr>
@@ -3827,6 +3851,10 @@
             </a:outerShdw>
           </a:effectLst>
         </p:spPr>
+        <p:txBody>
+          <a:bodyPr/>
+          <a:p/>
+        </p:txBody>
       </p:sp>
       <p:sp>
         <p:nvSpPr>
@@ -4001,6 +4029,10 @@
             </a:outerShdw>
           </a:effectLst>
         </p:spPr>
+        <p:txBody>
+          <a:bodyPr/>
+          <a:p/>
+        </p:txBody>
       </p:sp>
       <p:sp>
         <p:nvSpPr>
@@ -4391,6 +4423,10 @@
             </a:outerShdw>
           </a:effectLst>
         </p:spPr>
+        <p:txBody>
+          <a:bodyPr/>
+          <a:p/>
+        </p:txBody>
       </p:sp>
       <p:sp>
         <p:nvSpPr>
@@ -4565,6 +4601,10 @@
             </a:outerShdw>
           </a:effectLst>
         </p:spPr>
+        <p:txBody>
+          <a:bodyPr/>
+          <a:p/>
+        </p:txBody>
       </p:sp>
       <p:sp>
         <p:nvSpPr>
@@ -4870,6 +4910,10 @@
           </a:solidFill>
           <a:ln/>
         </p:spPr>
+        <p:txBody>
+          <a:bodyPr/>
+          <a:p/>
+        </p:txBody>
       </p:sp>
       <p:sp>
         <p:nvSpPr>
@@ -4892,6 +4936,10 @@
           </a:solidFill>
           <a:ln/>
         </p:spPr>
+        <p:txBody>
+          <a:bodyPr/>
+          <a:p/>
+        </p:txBody>
       </p:sp>
       <p:sp>
         <p:nvSpPr>
@@ -5148,6 +5196,10 @@
             </a:outerShdw>
           </a:effectLst>
         </p:spPr>
+        <p:txBody>
+          <a:bodyPr/>
+          <a:p/>
+        </p:txBody>
       </p:sp>
       <p:sp>
         <p:nvSpPr>
@@ -5258,6 +5310,10 @@
             </a:outerShdw>
           </a:effectLst>
         </p:spPr>
+        <p:txBody>
+          <a:bodyPr/>
+          <a:p/>
+        </p:txBody>
       </p:sp>
       <p:sp>
         <p:nvSpPr>
@@ -5687,6 +5743,10 @@
             </a:outerShdw>
           </a:effectLst>
         </p:spPr>
+        <p:txBody>
+          <a:bodyPr/>
+          <a:p/>
+        </p:txBody>
       </p:sp>
       <p:sp>
         <p:nvSpPr>
@@ -6013,6 +6073,10 @@
             </a:outerShdw>
           </a:effectLst>
         </p:spPr>
+        <p:txBody>
+          <a:bodyPr/>
+          <a:p/>
+        </p:txBody>
       </p:sp>
       <p:sp>
         <p:nvSpPr>
@@ -6123,6 +6187,10 @@
             </a:outerShdw>
           </a:effectLst>
         </p:spPr>
+        <p:txBody>
+          <a:bodyPr/>
+          <a:p/>
+        </p:txBody>
       </p:sp>
       <p:sp>
         <p:nvSpPr>
@@ -6552,6 +6620,10 @@
             </a:outerShdw>
           </a:effectLst>
         </p:spPr>
+        <p:txBody>
+          <a:bodyPr/>
+          <a:p/>
+        </p:txBody>
       </p:sp>
       <p:sp>
         <p:nvSpPr>
@@ -6878,6 +6950,10 @@
             </a:outerShdw>
           </a:effectLst>
         </p:spPr>
+        <p:txBody>
+          <a:bodyPr/>
+          <a:p/>
+        </p:txBody>
       </p:sp>
       <p:sp>
         <p:nvSpPr>
@@ -6988,6 +7064,10 @@
             </a:outerShdw>
           </a:effectLst>
         </p:spPr>
+        <p:txBody>
+          <a:bodyPr/>
+          <a:p/>
+        </p:txBody>
       </p:sp>
       <p:sp>
         <p:nvSpPr>
@@ -7417,6 +7497,10 @@
             </a:outerShdw>
           </a:effectLst>
         </p:spPr>
+        <p:txBody>
+          <a:bodyPr/>
+          <a:p/>
+        </p:txBody>
       </p:sp>
       <p:sp>
         <p:nvSpPr>
@@ -7743,6 +7827,10 @@
             </a:outerShdw>
           </a:effectLst>
         </p:spPr>
+        <p:txBody>
+          <a:bodyPr/>
+          <a:p/>
+        </p:txBody>
       </p:sp>
       <p:sp>
         <p:nvSpPr>
@@ -7850,6 +7938,10 @@
             </a:outerShdw>
           </a:effectLst>
         </p:spPr>
+        <p:txBody>
+          <a:bodyPr/>
+          <a:p/>
+        </p:txBody>
       </p:sp>
       <p:sp>
         <p:nvSpPr>
@@ -7957,6 +8049,10 @@
             </a:outerShdw>
           </a:effectLst>
         </p:spPr>
+        <p:txBody>
+          <a:bodyPr/>
+          <a:p/>
+        </p:txBody>
       </p:sp>
       <p:sp>
         <p:nvSpPr>
@@ -8064,6 +8160,10 @@
             </a:outerShdw>
           </a:effectLst>
         </p:spPr>
+        <p:txBody>
+          <a:bodyPr/>
+          <a:p/>
+        </p:txBody>
       </p:sp>
       <p:sp>
         <p:nvSpPr>
@@ -8456,9 +8556,9 @@
               <a:buNone/>
             </a:pPr>
             <a:r>
-              <a:rPr lang="en-US" sz="1350" b="1" dirty="0">
-                <a:solidFill>
-                  <a:srgbClr val="005A63"/>
+              <a:rPr lang="en-US" sz="1350" b="0" dirty="0">
+                <a:solidFill>
+                  <a:srgbClr val="33444F"/>
                 </a:solidFill>
                 <a:latin typeface="Calibri" pitchFamily="34" charset="0"/>
                 <a:ea typeface="Calibri" pitchFamily="34" charset="-122"/>
@@ -8527,130 +8627,6 @@
               <a:t>E. Prognostic marker only</a:t>
             </a:r>
             <a:endParaRPr lang="en-US" sz="1350" dirty="0"/>
-          </a:p>
-        </p:txBody>
-      </p:sp>
-      <p:sp>
-        <p:nvSpPr>
-          <p:cNvPr id="6" name="Shape 4"/>
-          <p:cNvSpPr/>
-          <p:nvPr/>
-        </p:nvSpPr>
-        <p:spPr>
-          <a:xfrm>
-            <a:off x="7201632" y="2395728"/>
-            <a:ext cx="4423136" cy="3246120"/>
-          </a:xfrm>
-          <a:prstGeom prst="roundRect">
-            <a:avLst>
-              <a:gd name="adj" fmla="val 2535"/>
-            </a:avLst>
-          </a:prstGeom>
-          <a:solidFill>
-            <a:srgbClr val="E0F2F4"/>
-          </a:solidFill>
-          <a:ln/>
-          <a:effectLst>
-            <a:outerShdw sx="100000" sy="100000" kx="0" ky="0" algn="bl" rotWithShape="0" blurRad="88900" dist="25400" dir="5400000">
-              <a:srgbClr val="22303C">
-                <a:alpha val="12000"/>
-              </a:srgbClr>
-            </a:outerShdw>
-          </a:effectLst>
-        </p:spPr>
-      </p:sp>
-      <p:sp>
-        <p:nvSpPr>
-          <p:cNvPr id="7" name="Text 5"/>
-          <p:cNvSpPr/>
-          <p:nvPr/>
-        </p:nvSpPr>
-        <p:spPr>
-          <a:xfrm>
-            <a:off x="7439376" y="2578608"/>
-            <a:ext cx="3965936" cy="457200"/>
-          </a:xfrm>
-          <a:prstGeom prst="rect">
-            <a:avLst/>
-          </a:prstGeom>
-          <a:noFill/>
-          <a:ln/>
-        </p:spPr>
-        <p:txBody>
-          <a:bodyPr wrap="square" lIns="0" tIns="0" rIns="0" bIns="0" rtlCol="0" anchor="ctr"/>
-          <a:lstStyle/>
-          <a:p>
-            <a:pPr indent="0" marL="0">
-              <a:buNone/>
-            </a:pPr>
-            <a:r>
-              <a:rPr lang="en-US" sz="1500" b="1" dirty="0">
-                <a:solidFill>
-                  <a:srgbClr val="00838F"/>
-                </a:solidFill>
-                <a:latin typeface="Calibri" pitchFamily="34" charset="0"/>
-                <a:ea typeface="Calibri" pitchFamily="34" charset="-122"/>
-                <a:cs typeface="Calibri" pitchFamily="34" charset="-120"/>
-              </a:rPr>
-              <a:t>ANSWER  </a:t>
-            </a:r>
-            <a:pPr indent="0" marL="0">
-              <a:buNone/>
-            </a:pPr>
-            <a:r>
-              <a:rPr lang="en-US" sz="1500" b="1" dirty="0">
-                <a:solidFill>
-                  <a:srgbClr val="1B2A38"/>
-                </a:solidFill>
-                <a:latin typeface="Calibri" pitchFamily="34" charset="0"/>
-                <a:ea typeface="Calibri" pitchFamily="34" charset="-122"/>
-                <a:cs typeface="Calibri" pitchFamily="34" charset="-120"/>
-              </a:rPr>
-              <a:t>B — Resistance to anti-EGFR</a:t>
-            </a:r>
-            <a:endParaRPr lang="en-US" sz="1500" dirty="0"/>
-          </a:p>
-        </p:txBody>
-      </p:sp>
-      <p:sp>
-        <p:nvSpPr>
-          <p:cNvPr id="8" name="Text 6"/>
-          <p:cNvSpPr/>
-          <p:nvPr/>
-        </p:nvSpPr>
-        <p:spPr>
-          <a:xfrm>
-            <a:off x="7439376" y="3127248"/>
-            <a:ext cx="3947648" cy="2377440"/>
-          </a:xfrm>
-          <a:prstGeom prst="rect">
-            <a:avLst/>
-          </a:prstGeom>
-          <a:noFill/>
-          <a:ln/>
-        </p:spPr>
-        <p:txBody>
-          <a:bodyPr wrap="square" lIns="0" tIns="0" rIns="0" bIns="0" rtlCol="0" anchor="t"/>
-          <a:lstStyle/>
-          <a:p>
-            <a:pPr algn="l" indent="0" marL="0">
-              <a:lnSpc>
-                <a:spcPct val="108000"/>
-              </a:lnSpc>
-              <a:buNone/>
-            </a:pPr>
-            <a:r>
-              <a:rPr lang="en-US" sz="1250" dirty="0">
-                <a:solidFill>
-                  <a:srgbClr val="33444F"/>
-                </a:solidFill>
-                <a:latin typeface="Calibri" pitchFamily="34" charset="0"/>
-                <a:ea typeface="Calibri" pitchFamily="34" charset="-122"/>
-                <a:cs typeface="Calibri" pitchFamily="34" charset="-120"/>
-              </a:rPr>
-              <a:t>KRAS/NRAS mutations predict lack of response to anti-EGFR antibodies in colorectal cancer.</a:t>
-            </a:r>
-            <a:endParaRPr lang="en-US" sz="1250" dirty="0"/>
           </a:p>
         </p:txBody>
       </p:sp>
@@ -8960,9 +8936,9 @@
               <a:buNone/>
             </a:pPr>
             <a:r>
-              <a:rPr lang="en-US" sz="1350" b="1" dirty="0">
-                <a:solidFill>
-                  <a:srgbClr val="005A63"/>
+              <a:rPr lang="en-US" sz="1350" b="0" dirty="0">
+                <a:solidFill>
+                  <a:srgbClr val="33444F"/>
                 </a:solidFill>
                 <a:latin typeface="Calibri" pitchFamily="34" charset="0"/>
                 <a:ea typeface="Calibri" pitchFamily="34" charset="-122"/>
@@ -9031,130 +9007,6 @@
               <a:t>E. A balanced translocation</a:t>
             </a:r>
             <a:endParaRPr lang="en-US" sz="1350" dirty="0"/>
-          </a:p>
-        </p:txBody>
-      </p:sp>
-      <p:sp>
-        <p:nvSpPr>
-          <p:cNvPr id="6" name="Shape 4"/>
-          <p:cNvSpPr/>
-          <p:nvPr/>
-        </p:nvSpPr>
-        <p:spPr>
-          <a:xfrm>
-            <a:off x="7201632" y="2395728"/>
-            <a:ext cx="4423136" cy="3246120"/>
-          </a:xfrm>
-          <a:prstGeom prst="roundRect">
-            <a:avLst>
-              <a:gd name="adj" fmla="val 2535"/>
-            </a:avLst>
-          </a:prstGeom>
-          <a:solidFill>
-            <a:srgbClr val="E0F2F4"/>
-          </a:solidFill>
-          <a:ln/>
-          <a:effectLst>
-            <a:outerShdw sx="100000" sy="100000" kx="0" ky="0" algn="bl" rotWithShape="0" blurRad="88900" dist="25400" dir="5400000">
-              <a:srgbClr val="22303C">
-                <a:alpha val="12000"/>
-              </a:srgbClr>
-            </a:outerShdw>
-          </a:effectLst>
-        </p:spPr>
-      </p:sp>
-      <p:sp>
-        <p:nvSpPr>
-          <p:cNvPr id="7" name="Text 5"/>
-          <p:cNvSpPr/>
-          <p:nvPr/>
-        </p:nvSpPr>
-        <p:spPr>
-          <a:xfrm>
-            <a:off x="7439376" y="2578608"/>
-            <a:ext cx="3965936" cy="457200"/>
-          </a:xfrm>
-          <a:prstGeom prst="rect">
-            <a:avLst/>
-          </a:prstGeom>
-          <a:noFill/>
-          <a:ln/>
-        </p:spPr>
-        <p:txBody>
-          <a:bodyPr wrap="square" lIns="0" tIns="0" rIns="0" bIns="0" rtlCol="0" anchor="ctr"/>
-          <a:lstStyle/>
-          <a:p>
-            <a:pPr indent="0" marL="0">
-              <a:buNone/>
-            </a:pPr>
-            <a:r>
-              <a:rPr lang="en-US" sz="1500" b="1" dirty="0">
-                <a:solidFill>
-                  <a:srgbClr val="00838F"/>
-                </a:solidFill>
-                <a:latin typeface="Calibri" pitchFamily="34" charset="0"/>
-                <a:ea typeface="Calibri" pitchFamily="34" charset="-122"/>
-                <a:cs typeface="Calibri" pitchFamily="34" charset="-120"/>
-              </a:rPr>
-              <a:t>ANSWER  </a:t>
-            </a:r>
-            <a:pPr indent="0" marL="0">
-              <a:buNone/>
-            </a:pPr>
-            <a:r>
-              <a:rPr lang="en-US" sz="1500" b="1" dirty="0">
-                <a:solidFill>
-                  <a:srgbClr val="1B2A38"/>
-                </a:solidFill>
-                <a:latin typeface="Calibri" pitchFamily="34" charset="0"/>
-                <a:ea typeface="Calibri" pitchFamily="34" charset="-122"/>
-                <a:cs typeface="Calibri" pitchFamily="34" charset="-120"/>
-              </a:rPr>
-              <a:t>B — Possible Lynch syndrome</a:t>
-            </a:r>
-            <a:endParaRPr lang="en-US" sz="1500" dirty="0"/>
-          </a:p>
-        </p:txBody>
-      </p:sp>
-      <p:sp>
-        <p:nvSpPr>
-          <p:cNvPr id="8" name="Text 6"/>
-          <p:cNvSpPr/>
-          <p:nvPr/>
-        </p:nvSpPr>
-        <p:spPr>
-          <a:xfrm>
-            <a:off x="7439376" y="3127248"/>
-            <a:ext cx="3947648" cy="2377440"/>
-          </a:xfrm>
-          <a:prstGeom prst="rect">
-            <a:avLst/>
-          </a:prstGeom>
-          <a:noFill/>
-          <a:ln/>
-        </p:spPr>
-        <p:txBody>
-          <a:bodyPr wrap="square" lIns="0" tIns="0" rIns="0" bIns="0" rtlCol="0" anchor="t"/>
-          <a:lstStyle/>
-          <a:p>
-            <a:pPr algn="l" indent="0" marL="0">
-              <a:lnSpc>
-                <a:spcPct val="108000"/>
-              </a:lnSpc>
-              <a:buNone/>
-            </a:pPr>
-            <a:r>
-              <a:rPr lang="en-US" sz="1250" dirty="0">
-                <a:solidFill>
-                  <a:srgbClr val="33444F"/>
-                </a:solidFill>
-                <a:latin typeface="Calibri" pitchFamily="34" charset="0"/>
-                <a:ea typeface="Calibri" pitchFamily="34" charset="-122"/>
-                <a:cs typeface="Calibri" pitchFamily="34" charset="-120"/>
-              </a:rPr>
-              <a:t>MMR deficiency/MSI-high can reflect germline Lynch syndrome and predicts response to immune checkpoint inhibitors.</a:t>
-            </a:r>
-            <a:endParaRPr lang="en-US" sz="1250" dirty="0"/>
           </a:p>
         </p:txBody>
       </p:sp>
@@ -9464,9 +9316,9 @@
               <a:buNone/>
             </a:pPr>
             <a:r>
-              <a:rPr lang="en-US" sz="1350" b="1" dirty="0">
-                <a:solidFill>
-                  <a:srgbClr val="005A63"/>
+              <a:rPr lang="en-US" sz="1350" b="0" dirty="0">
+                <a:solidFill>
+                  <a:srgbClr val="33444F"/>
                 </a:solidFill>
                 <a:latin typeface="Calibri" pitchFamily="34" charset="0"/>
                 <a:ea typeface="Calibri" pitchFamily="34" charset="-122"/>
@@ -9535,130 +9387,6 @@
               <a:t>E. Repeat tumor testing only</a:t>
             </a:r>
             <a:endParaRPr lang="en-US" sz="1350" dirty="0"/>
-          </a:p>
-        </p:txBody>
-      </p:sp>
-      <p:sp>
-        <p:nvSpPr>
-          <p:cNvPr id="6" name="Shape 4"/>
-          <p:cNvSpPr/>
-          <p:nvPr/>
-        </p:nvSpPr>
-        <p:spPr>
-          <a:xfrm>
-            <a:off x="7201632" y="2395728"/>
-            <a:ext cx="4423136" cy="3246120"/>
-          </a:xfrm>
-          <a:prstGeom prst="roundRect">
-            <a:avLst>
-              <a:gd name="adj" fmla="val 2535"/>
-            </a:avLst>
-          </a:prstGeom>
-          <a:solidFill>
-            <a:srgbClr val="E0F2F4"/>
-          </a:solidFill>
-          <a:ln/>
-          <a:effectLst>
-            <a:outerShdw sx="100000" sy="100000" kx="0" ky="0" algn="bl" rotWithShape="0" blurRad="88900" dist="25400" dir="5400000">
-              <a:srgbClr val="22303C">
-                <a:alpha val="12000"/>
-              </a:srgbClr>
-            </a:outerShdw>
-          </a:effectLst>
-        </p:spPr>
-      </p:sp>
-      <p:sp>
-        <p:nvSpPr>
-          <p:cNvPr id="7" name="Text 5"/>
-          <p:cNvSpPr/>
-          <p:nvPr/>
-        </p:nvSpPr>
-        <p:spPr>
-          <a:xfrm>
-            <a:off x="7439376" y="2578608"/>
-            <a:ext cx="3965936" cy="457200"/>
-          </a:xfrm>
-          <a:prstGeom prst="rect">
-            <a:avLst/>
-          </a:prstGeom>
-          <a:noFill/>
-          <a:ln/>
-        </p:spPr>
-        <p:txBody>
-          <a:bodyPr wrap="square" lIns="0" tIns="0" rIns="0" bIns="0" rtlCol="0" anchor="ctr"/>
-          <a:lstStyle/>
-          <a:p>
-            <a:pPr indent="0" marL="0">
-              <a:buNone/>
-            </a:pPr>
-            <a:r>
-              <a:rPr lang="en-US" sz="1500" b="1" dirty="0">
-                <a:solidFill>
-                  <a:srgbClr val="00838F"/>
-                </a:solidFill>
-                <a:latin typeface="Calibri" pitchFamily="34" charset="0"/>
-                <a:ea typeface="Calibri" pitchFamily="34" charset="-122"/>
-                <a:cs typeface="Calibri" pitchFamily="34" charset="-120"/>
-              </a:rPr>
-              <a:t>ANSWER  </a:t>
-            </a:r>
-            <a:pPr indent="0" marL="0">
-              <a:buNone/>
-            </a:pPr>
-            <a:r>
-              <a:rPr lang="en-US" sz="1500" b="1" dirty="0">
-                <a:solidFill>
-                  <a:srgbClr val="1B2A38"/>
-                </a:solidFill>
-                <a:latin typeface="Calibri" pitchFamily="34" charset="0"/>
-                <a:ea typeface="Calibri" pitchFamily="34" charset="-122"/>
-                <a:cs typeface="Calibri" pitchFamily="34" charset="-120"/>
-              </a:rPr>
-              <a:t>B — Germline confirmation/counseling</a:t>
-            </a:r>
-            <a:endParaRPr lang="en-US" sz="1500" dirty="0"/>
-          </a:p>
-        </p:txBody>
-      </p:sp>
-      <p:sp>
-        <p:nvSpPr>
-          <p:cNvPr id="8" name="Text 6"/>
-          <p:cNvSpPr/>
-          <p:nvPr/>
-        </p:nvSpPr>
-        <p:spPr>
-          <a:xfrm>
-            <a:off x="7439376" y="3127248"/>
-            <a:ext cx="3947648" cy="2377440"/>
-          </a:xfrm>
-          <a:prstGeom prst="rect">
-            <a:avLst/>
-          </a:prstGeom>
-          <a:noFill/>
-          <a:ln/>
-        </p:spPr>
-        <p:txBody>
-          <a:bodyPr wrap="square" lIns="0" tIns="0" rIns="0" bIns="0" rtlCol="0" anchor="t"/>
-          <a:lstStyle/>
-          <a:p>
-            <a:pPr algn="l" indent="0" marL="0">
-              <a:lnSpc>
-                <a:spcPct val="108000"/>
-              </a:lnSpc>
-              <a:buNone/>
-            </a:pPr>
-            <a:r>
-              <a:rPr lang="en-US" sz="1250" dirty="0">
-                <a:solidFill>
-                  <a:srgbClr val="33444F"/>
-                </a:solidFill>
-                <a:latin typeface="Calibri" pitchFamily="34" charset="0"/>
-                <a:ea typeface="Calibri" pitchFamily="34" charset="-122"/>
-                <a:cs typeface="Calibri" pitchFamily="34" charset="-120"/>
-              </a:rPr>
-              <a:t>A ~50% VAF in a predisposition gene may be germline; confirm in normal tissue with appropriate consent and counseling.</a:t>
-            </a:r>
-            <a:endParaRPr lang="en-US" sz="1250" dirty="0"/>
           </a:p>
         </p:txBody>
       </p:sp>
@@ -9968,9 +9696,9 @@
               <a:buNone/>
             </a:pPr>
             <a:r>
-              <a:rPr lang="en-US" sz="1350" b="1" dirty="0">
-                <a:solidFill>
-                  <a:srgbClr val="005A63"/>
+              <a:rPr lang="en-US" sz="1350" b="0" dirty="0">
+                <a:solidFill>
+                  <a:srgbClr val="33444F"/>
                 </a:solidFill>
                 <a:latin typeface="Calibri" pitchFamily="34" charset="0"/>
                 <a:ea typeface="Calibri" pitchFamily="34" charset="-122"/>
@@ -10039,130 +9767,6 @@
               <a:t>E. It detects only germline variants</a:t>
             </a:r>
             <a:endParaRPr lang="en-US" sz="1350" dirty="0"/>
-          </a:p>
-        </p:txBody>
-      </p:sp>
-      <p:sp>
-        <p:nvSpPr>
-          <p:cNvPr id="6" name="Shape 4"/>
-          <p:cNvSpPr/>
-          <p:nvPr/>
-        </p:nvSpPr>
-        <p:spPr>
-          <a:xfrm>
-            <a:off x="7201632" y="2395728"/>
-            <a:ext cx="4423136" cy="3246120"/>
-          </a:xfrm>
-          <a:prstGeom prst="roundRect">
-            <a:avLst>
-              <a:gd name="adj" fmla="val 2535"/>
-            </a:avLst>
-          </a:prstGeom>
-          <a:solidFill>
-            <a:srgbClr val="E0F2F4"/>
-          </a:solidFill>
-          <a:ln/>
-          <a:effectLst>
-            <a:outerShdw sx="100000" sy="100000" kx="0" ky="0" algn="bl" rotWithShape="0" blurRad="88900" dist="25400" dir="5400000">
-              <a:srgbClr val="22303C">
-                <a:alpha val="12000"/>
-              </a:srgbClr>
-            </a:outerShdw>
-          </a:effectLst>
-        </p:spPr>
-      </p:sp>
-      <p:sp>
-        <p:nvSpPr>
-          <p:cNvPr id="7" name="Text 5"/>
-          <p:cNvSpPr/>
-          <p:nvPr/>
-        </p:nvSpPr>
-        <p:spPr>
-          <a:xfrm>
-            <a:off x="7439376" y="2578608"/>
-            <a:ext cx="3965936" cy="457200"/>
-          </a:xfrm>
-          <a:prstGeom prst="rect">
-            <a:avLst/>
-          </a:prstGeom>
-          <a:noFill/>
-          <a:ln/>
-        </p:spPr>
-        <p:txBody>
-          <a:bodyPr wrap="square" lIns="0" tIns="0" rIns="0" bIns="0" rtlCol="0" anchor="ctr"/>
-          <a:lstStyle/>
-          <a:p>
-            <a:pPr indent="0" marL="0">
-              <a:buNone/>
-            </a:pPr>
-            <a:r>
-              <a:rPr lang="en-US" sz="1500" b="1" dirty="0">
-                <a:solidFill>
-                  <a:srgbClr val="00838F"/>
-                </a:solidFill>
-                <a:latin typeface="Calibri" pitchFamily="34" charset="0"/>
-                <a:ea typeface="Calibri" pitchFamily="34" charset="-122"/>
-                <a:cs typeface="Calibri" pitchFamily="34" charset="-120"/>
-              </a:rPr>
-              <a:t>ANSWER  </a:t>
-            </a:r>
-            <a:pPr indent="0" marL="0">
-              <a:buNone/>
-            </a:pPr>
-            <a:r>
-              <a:rPr lang="en-US" sz="1500" b="1" dirty="0">
-                <a:solidFill>
-                  <a:srgbClr val="1B2A38"/>
-                </a:solidFill>
-                <a:latin typeface="Calibri" pitchFamily="34" charset="0"/>
-                <a:ea typeface="Calibri" pitchFamily="34" charset="-122"/>
-                <a:cs typeface="Calibri" pitchFamily="34" charset="-120"/>
-              </a:rPr>
-              <a:t>B — Negative does not exclude</a:t>
-            </a:r>
-            <a:endParaRPr lang="en-US" sz="1500" dirty="0"/>
-          </a:p>
-        </p:txBody>
-      </p:sp>
-      <p:sp>
-        <p:nvSpPr>
-          <p:cNvPr id="8" name="Text 6"/>
-          <p:cNvSpPr/>
-          <p:nvPr/>
-        </p:nvSpPr>
-        <p:spPr>
-          <a:xfrm>
-            <a:off x="7439376" y="3127248"/>
-            <a:ext cx="3947648" cy="2377440"/>
-          </a:xfrm>
-          <a:prstGeom prst="rect">
-            <a:avLst/>
-          </a:prstGeom>
-          <a:noFill/>
-          <a:ln/>
-        </p:spPr>
-        <p:txBody>
-          <a:bodyPr wrap="square" lIns="0" tIns="0" rIns="0" bIns="0" rtlCol="0" anchor="t"/>
-          <a:lstStyle/>
-          <a:p>
-            <a:pPr algn="l" indent="0" marL="0">
-              <a:lnSpc>
-                <a:spcPct val="108000"/>
-              </a:lnSpc>
-              <a:buNone/>
-            </a:pPr>
-            <a:r>
-              <a:rPr lang="en-US" sz="1250" dirty="0">
-                <a:solidFill>
-                  <a:srgbClr val="33444F"/>
-                </a:solidFill>
-                <a:latin typeface="Calibri" pitchFamily="34" charset="0"/>
-                <a:ea typeface="Calibri" pitchFamily="34" charset="-122"/>
-                <a:cs typeface="Calibri" pitchFamily="34" charset="-120"/>
-              </a:rPr>
-              <a:t>Low tumor shedding limits sensitivity; negative cfDNA results may require tissue confirmation.</a:t>
-            </a:r>
-            <a:endParaRPr lang="en-US" sz="1250" dirty="0"/>
           </a:p>
         </p:txBody>
       </p:sp>
@@ -10403,6 +10007,10 @@
           </a:solidFill>
           <a:ln/>
         </p:spPr>
+        <p:txBody>
+          <a:bodyPr/>
+          <a:p/>
+        </p:txBody>
       </p:sp>
       <p:sp>
         <p:nvSpPr>
@@ -10430,6 +10038,10 @@
             </a:outerShdw>
           </a:effectLst>
         </p:spPr>
+        <p:txBody>
+          <a:bodyPr/>
+          <a:p/>
+        </p:txBody>
       </p:sp>
       <p:sp>
         <p:nvSpPr>
@@ -10530,6 +10142,10 @@
           </a:solidFill>
           <a:ln/>
         </p:spPr>
+        <p:txBody>
+          <a:bodyPr/>
+          <a:p/>
+        </p:txBody>
       </p:sp>
       <p:sp>
         <p:nvSpPr>
@@ -10557,6 +10173,10 @@
             </a:outerShdw>
           </a:effectLst>
         </p:spPr>
+        <p:txBody>
+          <a:bodyPr/>
+          <a:p/>
+        </p:txBody>
       </p:sp>
       <p:sp>
         <p:nvSpPr>
@@ -10657,6 +10277,10 @@
           </a:solidFill>
           <a:ln/>
         </p:spPr>
+        <p:txBody>
+          <a:bodyPr/>
+          <a:p/>
+        </p:txBody>
       </p:sp>
       <p:sp>
         <p:nvSpPr>
@@ -10684,6 +10308,10 @@
             </a:outerShdw>
           </a:effectLst>
         </p:spPr>
+        <p:txBody>
+          <a:bodyPr/>
+          <a:p/>
+        </p:txBody>
       </p:sp>
       <p:sp>
         <p:nvSpPr>
@@ -10784,6 +10412,10 @@
           </a:solidFill>
           <a:ln/>
         </p:spPr>
+        <p:txBody>
+          <a:bodyPr/>
+          <a:p/>
+        </p:txBody>
       </p:sp>
       <p:sp>
         <p:nvSpPr>
@@ -10811,6 +10443,10 @@
             </a:outerShdw>
           </a:effectLst>
         </p:spPr>
+        <p:txBody>
+          <a:bodyPr/>
+          <a:p/>
+        </p:txBody>
       </p:sp>
       <p:sp>
         <p:nvSpPr>
@@ -10911,6 +10547,10 @@
           </a:solidFill>
           <a:ln/>
         </p:spPr>
+        <p:txBody>
+          <a:bodyPr/>
+          <a:p/>
+        </p:txBody>
       </p:sp>
       <p:sp>
         <p:nvSpPr>
@@ -10938,6 +10578,10 @@
             </a:outerShdw>
           </a:effectLst>
         </p:spPr>
+        <p:txBody>
+          <a:bodyPr/>
+          <a:p/>
+        </p:txBody>
       </p:sp>
       <p:sp>
         <p:nvSpPr>
@@ -11421,6 +11065,1982 @@
 </p:sld>
 </file>
 
+<file path=ppt/slides/slide26.xml><?xml version="1.0" encoding="utf-8"?>
+<p:sld xmlns:a="http://schemas.openxmlformats.org/drawingml/2006/main" xmlns:p="http://schemas.openxmlformats.org/presentationml/2006/main" xmlns:r="http://schemas.openxmlformats.org/officeDocument/2006/relationships">
+  <p:cSld>
+    <p:spTree>
+      <p:nvGrpSpPr>
+        <p:cNvPr id="1" name=""/>
+        <p:cNvGrpSpPr/>
+        <p:nvPr/>
+      </p:nvGrpSpPr>
+      <p:grpSpPr/>
+      <p:sp>
+        <p:nvSpPr>
+          <p:cNvPr id="2" name="Text 0"/>
+          <p:cNvSpPr/>
+          <p:nvPr/>
+        </p:nvSpPr>
+        <p:spPr>
+          <a:xfrm>
+            <a:off x="566928" y="329184"/>
+            <a:ext cx="10515600" cy="310896"/>
+          </a:xfrm>
+          <a:prstGeom prst="rect">
+            <a:avLst/>
+          </a:prstGeom>
+          <a:noFill/>
+          <a:ln/>
+        </p:spPr>
+        <p:txBody>
+          <a:bodyPr wrap="square" lIns="0" tIns="0" rIns="0" bIns="0" rtlCol="0" anchor="ctr"/>
+          <a:lstStyle/>
+          <a:p>
+            <a:pPr algn="l" indent="0" marL="0">
+              <a:buNone/>
+            </a:pPr>
+            <a:r>
+              <a:rPr lang="en-US" sz="1100" b="1" spc="150" kern="0" dirty="0">
+                <a:solidFill>
+                  <a:srgbClr val="00838F"/>
+                </a:solidFill>
+                <a:latin typeface="Calibri" pitchFamily="34" charset="0"/>
+                <a:ea typeface="Calibri" pitchFamily="34" charset="-122"/>
+                <a:cs typeface="Calibri" pitchFamily="34" charset="-120"/>
+              </a:rPr>
+              <a:t>MOLECULAR &amp; CYTOGENETICS   ·   BOARD REVIEW  ·  Q4</a:t>
+            </a:r>
+            <a:endParaRPr lang="en-US" sz="1100" dirty="0"/>
+          </a:p>
+        </p:txBody>
+      </p:sp>
+      <p:sp>
+        <p:nvSpPr>
+          <p:cNvPr id="3" name="Text 1"/>
+          <p:cNvSpPr/>
+          <p:nvPr/>
+        </p:nvSpPr>
+        <p:spPr>
+          <a:xfrm>
+            <a:off x="566928" y="713232"/>
+            <a:ext cx="11064240" cy="749808"/>
+          </a:xfrm>
+          <a:prstGeom prst="rect">
+            <a:avLst/>
+          </a:prstGeom>
+          <a:noFill/>
+          <a:ln/>
+        </p:spPr>
+        <p:txBody>
+          <a:bodyPr wrap="square" lIns="0" tIns="0" rIns="0" bIns="0" rtlCol="0" anchor="ctr"/>
+          <a:lstStyle/>
+          <a:p>
+            <a:pPr algn="l" indent="0" marL="0">
+              <a:buNone/>
+            </a:pPr>
+            <a:r>
+              <a:rPr lang="en-US" sz="2600" b="1" dirty="0">
+                <a:solidFill>
+                  <a:srgbClr val="0E3A5F"/>
+                </a:solidFill>
+                <a:latin typeface="Calibri" pitchFamily="34" charset="0"/>
+                <a:ea typeface="Calibri" pitchFamily="34" charset="-122"/>
+                <a:cs typeface="Calibri" pitchFamily="34" charset="-120"/>
+              </a:rPr>
+              <a:t>Board-Style Review</a:t>
+            </a:r>
+            <a:endParaRPr lang="en-US" sz="2600" dirty="0"/>
+          </a:p>
+        </p:txBody>
+      </p:sp>
+      <p:sp>
+        <p:nvSpPr>
+          <p:cNvPr id="4" name="Text 2"/>
+          <p:cNvSpPr/>
+          <p:nvPr/>
+        </p:nvSpPr>
+        <p:spPr>
+          <a:xfrm>
+            <a:off x="566928" y="1417320"/>
+            <a:ext cx="11057839" cy="914400"/>
+          </a:xfrm>
+          <a:prstGeom prst="rect">
+            <a:avLst/>
+          </a:prstGeom>
+          <a:noFill/>
+          <a:ln/>
+        </p:spPr>
+        <p:txBody>
+          <a:bodyPr wrap="square" lIns="0" tIns="0" rIns="0" bIns="0" rtlCol="0" anchor="t"/>
+          <a:lstStyle/>
+          <a:p>
+            <a:pPr algn="l" indent="0" marL="0">
+              <a:lnSpc>
+                <a:spcPct val="105000"/>
+              </a:lnSpc>
+              <a:buNone/>
+            </a:pPr>
+            <a:r>
+              <a:rPr lang="en-US" sz="1450" b="1" dirty="0">
+                <a:solidFill>
+                  <a:srgbClr val="1B2A38"/>
+                </a:solidFill>
+                <a:latin typeface="Calibri" pitchFamily="34" charset="0"/>
+                <a:ea typeface="Calibri" pitchFamily="34" charset="-122"/>
+                <a:cs typeface="Calibri" pitchFamily="34" charset="-120"/>
+              </a:rPr>
+              <a:t>A key limitation of cfDNA (liquid biopsy) testing is:</a:t>
+            </a:r>
+            <a:endParaRPr lang="en-US" sz="1450" dirty="0"/>
+          </a:p>
+        </p:txBody>
+      </p:sp>
+      <p:sp>
+        <p:nvSpPr>
+          <p:cNvPr id="5" name="Text 3"/>
+          <p:cNvSpPr/>
+          <p:nvPr/>
+        </p:nvSpPr>
+        <p:spPr>
+          <a:xfrm>
+            <a:off x="658368" y="2395728"/>
+            <a:ext cx="6192390" cy="3017520"/>
+          </a:xfrm>
+          <a:prstGeom prst="rect">
+            <a:avLst/>
+          </a:prstGeom>
+          <a:noFill/>
+          <a:ln/>
+        </p:spPr>
+        <p:txBody>
+          <a:bodyPr wrap="square" lIns="0" tIns="0" rIns="0" bIns="0" rtlCol="0" anchor="t"/>
+          <a:lstStyle/>
+          <a:p>
+            <a:pPr algn="l" indent="0" marL="0">
+              <a:spcAft>
+                <a:spcPts val="600"/>
+              </a:spcAft>
+              <a:buNone/>
+            </a:pPr>
+            <a:r>
+              <a:rPr lang="en-US" sz="1350" dirty="0">
+                <a:solidFill>
+                  <a:srgbClr val="33444F"/>
+                </a:solidFill>
+                <a:latin typeface="Calibri" pitchFamily="34" charset="0"/>
+                <a:ea typeface="Calibri" pitchFamily="34" charset="-122"/>
+                <a:cs typeface="Calibri" pitchFamily="34" charset="-120"/>
+              </a:rPr>
+              <a:t>A. It is more sensitive than tissue</a:t>
+            </a:r>
+            <a:endParaRPr lang="en-US" sz="1350" dirty="0"/>
+          </a:p>
+          <a:p>
+            <a:pPr algn="l" indent="0" marL="0">
+              <a:spcAft>
+                <a:spcPts val="600"/>
+              </a:spcAft>
+              <a:buNone/>
+            </a:pPr>
+            <a:r>
+              <a:rPr lang="en-US" sz="1350" b="1" dirty="0">
+                <a:solidFill>
+                  <a:srgbClr val="005A63"/>
+                </a:solidFill>
+                <a:latin typeface="Calibri" pitchFamily="34" charset="0"/>
+                <a:ea typeface="Calibri" pitchFamily="34" charset="-122"/>
+                <a:cs typeface="Calibri" pitchFamily="34" charset="-120"/>
+              </a:rPr>
+              <a:t>B. A negative result does not exclude a mutation</a:t>
+            </a:r>
+            <a:endParaRPr lang="en-US" sz="1350" dirty="0"/>
+          </a:p>
+          <a:p>
+            <a:pPr algn="l" indent="0" marL="0">
+              <a:spcAft>
+                <a:spcPts val="600"/>
+              </a:spcAft>
+              <a:buNone/>
+            </a:pPr>
+            <a:r>
+              <a:rPr lang="en-US" sz="1350" dirty="0">
+                <a:solidFill>
+                  <a:srgbClr val="33444F"/>
+                </a:solidFill>
+                <a:latin typeface="Calibri" pitchFamily="34" charset="0"/>
+                <a:ea typeface="Calibri" pitchFamily="34" charset="-122"/>
+                <a:cs typeface="Calibri" pitchFamily="34" charset="-120"/>
+              </a:rPr>
+              <a:t>C. It cannot detect any mutations</a:t>
+            </a:r>
+            <a:endParaRPr lang="en-US" sz="1350" dirty="0"/>
+          </a:p>
+          <a:p>
+            <a:pPr algn="l" indent="0" marL="0">
+              <a:spcAft>
+                <a:spcPts val="600"/>
+              </a:spcAft>
+              <a:buNone/>
+            </a:pPr>
+            <a:r>
+              <a:rPr lang="en-US" sz="1350" dirty="0">
+                <a:solidFill>
+                  <a:srgbClr val="33444F"/>
+                </a:solidFill>
+                <a:latin typeface="Calibri" pitchFamily="34" charset="0"/>
+                <a:ea typeface="Calibri" pitchFamily="34" charset="-122"/>
+                <a:cs typeface="Calibri" pitchFamily="34" charset="-120"/>
+              </a:rPr>
+              <a:t>D. It requires surgery</a:t>
+            </a:r>
+            <a:endParaRPr lang="en-US" sz="1350" dirty="0"/>
+          </a:p>
+          <a:p>
+            <a:pPr algn="l" indent="0" marL="0">
+              <a:spcAft>
+                <a:spcPts val="600"/>
+              </a:spcAft>
+              <a:buNone/>
+            </a:pPr>
+            <a:r>
+              <a:rPr lang="en-US" sz="1350" dirty="0">
+                <a:solidFill>
+                  <a:srgbClr val="33444F"/>
+                </a:solidFill>
+                <a:latin typeface="Calibri" pitchFamily="34" charset="0"/>
+                <a:ea typeface="Calibri" pitchFamily="34" charset="-122"/>
+                <a:cs typeface="Calibri" pitchFamily="34" charset="-120"/>
+              </a:rPr>
+              <a:t>E. It detects only germline variants</a:t>
+            </a:r>
+            <a:endParaRPr lang="en-US" sz="1350" dirty="0"/>
+          </a:p>
+        </p:txBody>
+      </p:sp>
+      <p:sp>
+        <p:nvSpPr>
+          <p:cNvPr id="6" name="Shape 4"/>
+          <p:cNvSpPr/>
+          <p:nvPr/>
+        </p:nvSpPr>
+        <p:spPr>
+          <a:xfrm>
+            <a:off x="7201632" y="2395728"/>
+            <a:ext cx="4423136" cy="3246120"/>
+          </a:xfrm>
+          <a:prstGeom prst="roundRect">
+            <a:avLst>
+              <a:gd name="adj" fmla="val 2535"/>
+            </a:avLst>
+          </a:prstGeom>
+          <a:solidFill>
+            <a:srgbClr val="E0F2F4"/>
+          </a:solidFill>
+          <a:ln/>
+          <a:effectLst>
+            <a:outerShdw sx="100000" sy="100000" kx="0" ky="0" algn="bl" rotWithShape="0" blurRad="88900" dist="25400" dir="5400000">
+              <a:srgbClr val="22303C">
+                <a:alpha val="12000"/>
+              </a:srgbClr>
+            </a:outerShdw>
+          </a:effectLst>
+        </p:spPr>
+        <p:txBody>
+          <a:bodyPr/>
+          <a:p/>
+        </p:txBody>
+      </p:sp>
+      <p:sp>
+        <p:nvSpPr>
+          <p:cNvPr id="7" name="Text 5"/>
+          <p:cNvSpPr/>
+          <p:nvPr/>
+        </p:nvSpPr>
+        <p:spPr>
+          <a:xfrm>
+            <a:off x="7439376" y="2578608"/>
+            <a:ext cx="3965936" cy="457200"/>
+          </a:xfrm>
+          <a:prstGeom prst="rect">
+            <a:avLst/>
+          </a:prstGeom>
+          <a:noFill/>
+          <a:ln/>
+        </p:spPr>
+        <p:txBody>
+          <a:bodyPr wrap="square" lIns="0" tIns="0" rIns="0" bIns="0" rtlCol="0" anchor="ctr"/>
+          <a:lstStyle/>
+          <a:p>
+            <a:pPr indent="0" marL="0">
+              <a:buNone/>
+            </a:pPr>
+            <a:r>
+              <a:rPr lang="en-US" sz="1500" b="1" dirty="0">
+                <a:solidFill>
+                  <a:srgbClr val="00838F"/>
+                </a:solidFill>
+                <a:latin typeface="Calibri" pitchFamily="34" charset="0"/>
+                <a:ea typeface="Calibri" pitchFamily="34" charset="-122"/>
+                <a:cs typeface="Calibri" pitchFamily="34" charset="-120"/>
+              </a:rPr>
+              <a:t>ANSWER  </a:t>
+            </a:r>
+            <a:pPr indent="0" marL="0">
+              <a:buNone/>
+            </a:pPr>
+            <a:r>
+              <a:rPr lang="en-US" sz="1500" b="1" dirty="0">
+                <a:solidFill>
+                  <a:srgbClr val="1B2A38"/>
+                </a:solidFill>
+                <a:latin typeface="Calibri" pitchFamily="34" charset="0"/>
+                <a:ea typeface="Calibri" pitchFamily="34" charset="-122"/>
+                <a:cs typeface="Calibri" pitchFamily="34" charset="-120"/>
+              </a:rPr>
+              <a:t>B — Negative does not exclude</a:t>
+            </a:r>
+            <a:endParaRPr lang="en-US" sz="1500" dirty="0"/>
+          </a:p>
+        </p:txBody>
+      </p:sp>
+      <p:sp>
+        <p:nvSpPr>
+          <p:cNvPr id="8" name="Text 6"/>
+          <p:cNvSpPr/>
+          <p:nvPr/>
+        </p:nvSpPr>
+        <p:spPr>
+          <a:xfrm>
+            <a:off x="7439376" y="3127248"/>
+            <a:ext cx="3947648" cy="2377440"/>
+          </a:xfrm>
+          <a:prstGeom prst="rect">
+            <a:avLst/>
+          </a:prstGeom>
+          <a:noFill/>
+          <a:ln/>
+        </p:spPr>
+        <p:txBody>
+          <a:bodyPr wrap="square" lIns="0" tIns="0" rIns="0" bIns="0" rtlCol="0" anchor="t"/>
+          <a:lstStyle/>
+          <a:p>
+            <a:pPr algn="l" indent="0" marL="0">
+              <a:lnSpc>
+                <a:spcPct val="108000"/>
+              </a:lnSpc>
+              <a:buNone/>
+            </a:pPr>
+            <a:r>
+              <a:rPr lang="en-US" sz="1250" dirty="0">
+                <a:solidFill>
+                  <a:srgbClr val="33444F"/>
+                </a:solidFill>
+                <a:latin typeface="Calibri" pitchFamily="34" charset="0"/>
+                <a:ea typeface="Calibri" pitchFamily="34" charset="-122"/>
+                <a:cs typeface="Calibri" pitchFamily="34" charset="-120"/>
+              </a:rPr>
+              <a:t>Low tumor shedding limits sensitivity; negative cfDNA results may require tissue confirmation.</a:t>
+            </a:r>
+            <a:endParaRPr lang="en-US" sz="1250" dirty="0"/>
+          </a:p>
+        </p:txBody>
+      </p:sp>
+      <p:sp>
+        <p:nvSpPr>
+          <p:cNvPr id="9" name="Text 7"/>
+          <p:cNvSpPr/>
+          <p:nvPr/>
+        </p:nvSpPr>
+        <p:spPr>
+          <a:xfrm>
+            <a:off x="566928" y="6473952"/>
+            <a:ext cx="7772400" cy="274320"/>
+          </a:xfrm>
+          <a:prstGeom prst="rect">
+            <a:avLst/>
+          </a:prstGeom>
+          <a:noFill/>
+          <a:ln/>
+        </p:spPr>
+        <p:txBody>
+          <a:bodyPr wrap="square" lIns="0" tIns="0" rIns="0" bIns="0" rtlCol="0" anchor="ctr"/>
+          <a:lstStyle/>
+          <a:p>
+            <a:pPr algn="l" indent="0" marL="0">
+              <a:buNone/>
+            </a:pPr>
+            <a:r>
+              <a:rPr lang="en-US" sz="850" dirty="0">
+                <a:solidFill>
+                  <a:srgbClr val="9AA8B4"/>
+                </a:solidFill>
+                <a:latin typeface="Calibri" pitchFamily="34" charset="0"/>
+                <a:ea typeface="Calibri" pitchFamily="34" charset="-122"/>
+                <a:cs typeface="Calibri" pitchFamily="34" charset="-120"/>
+              </a:rPr>
+              <a:t>Makassed General Hospital  ·  Department of Laboratory Medicine</a:t>
+            </a:r>
+            <a:endParaRPr lang="en-US" sz="850" dirty="0"/>
+          </a:p>
+        </p:txBody>
+      </p:sp>
+      <p:sp>
+        <p:nvSpPr>
+          <p:cNvPr id="10" name="Text 8"/>
+          <p:cNvSpPr/>
+          <p:nvPr/>
+        </p:nvSpPr>
+        <p:spPr>
+          <a:xfrm>
+            <a:off x="9814255" y="6473952"/>
+            <a:ext cx="1828800" cy="274320"/>
+          </a:xfrm>
+          <a:prstGeom prst="rect">
+            <a:avLst/>
+          </a:prstGeom>
+          <a:noFill/>
+          <a:ln/>
+        </p:spPr>
+        <p:txBody>
+          <a:bodyPr wrap="square" lIns="0" tIns="0" rIns="0" bIns="0" rtlCol="0" anchor="ctr"/>
+          <a:lstStyle/>
+          <a:p>
+            <a:pPr algn="r" indent="0" marL="0">
+              <a:buNone/>
+            </a:pPr>
+            <a:r>
+              <a:rPr lang="en-US" sz="850" dirty="0">
+                <a:solidFill>
+                  <a:srgbClr val="9AA8B4"/>
+                </a:solidFill>
+                <a:latin typeface="Calibri" pitchFamily="34" charset="0"/>
+                <a:ea typeface="Calibri" pitchFamily="34" charset="-122"/>
+                <a:cs typeface="Calibri" pitchFamily="34" charset="-120"/>
+              </a:rPr>
+              <a:t>CP Lecture Series</a:t>
+            </a:r>
+            <a:pPr algn="r" indent="0" marL="0">
+              <a:buNone/>
+            </a:pPr>
+            <a:r>
+              <a:rPr lang="en-US" sz="850" dirty="0">
+                <a:solidFill>
+                  <a:srgbClr val="DCE4EC"/>
+                </a:solidFill>
+                <a:latin typeface="Calibri" pitchFamily="34" charset="0"/>
+                <a:ea typeface="Calibri" pitchFamily="34" charset="-122"/>
+                <a:cs typeface="Calibri" pitchFamily="34" charset="-120"/>
+              </a:rPr>
+              <a:t>   ·   </a:t>
+            </a:r>
+            <a:pPr algn="r" indent="0" marL="0">
+              <a:buNone/>
+            </a:pPr>
+            <a:r>
+              <a:rPr lang="en-US" sz="850" b="1" dirty="0">
+                <a:solidFill>
+                  <a:srgbClr val="00838F"/>
+                </a:solidFill>
+                <a:latin typeface="Calibri" pitchFamily="34" charset="0"/>
+                <a:ea typeface="Calibri" pitchFamily="34" charset="-122"/>
+                <a:cs typeface="Calibri" pitchFamily="34" charset="-120"/>
+              </a:rPr>
+              <a:t>20</a:t>
+            </a:r>
+            <a:endParaRPr lang="en-US" sz="850" dirty="0"/>
+          </a:p>
+        </p:txBody>
+      </p:sp>
+    </p:spTree>
+  </p:cSld>
+  <p:clrMapOvr>
+    <a:masterClrMapping/>
+  </p:clrMapOvr>
+</p:sld>
+</file>
+
+<file path=ppt/slides/slide27.xml><?xml version="1.0" encoding="utf-8"?>
+<p:sld xmlns:a="http://schemas.openxmlformats.org/drawingml/2006/main" xmlns:p="http://schemas.openxmlformats.org/presentationml/2006/main" xmlns:r="http://schemas.openxmlformats.org/officeDocument/2006/relationships">
+  <p:cSld>
+    <p:spTree>
+      <p:nvGrpSpPr>
+        <p:cNvPr id="1" name=""/>
+        <p:cNvGrpSpPr/>
+        <p:nvPr/>
+      </p:nvGrpSpPr>
+      <p:grpSpPr/>
+      <p:sp>
+        <p:nvSpPr>
+          <p:cNvPr id="2" name="Text 0"/>
+          <p:cNvSpPr/>
+          <p:nvPr/>
+        </p:nvSpPr>
+        <p:spPr>
+          <a:xfrm>
+            <a:off x="566928" y="329184"/>
+            <a:ext cx="10515600" cy="310896"/>
+          </a:xfrm>
+          <a:prstGeom prst="rect">
+            <a:avLst/>
+          </a:prstGeom>
+          <a:noFill/>
+          <a:ln/>
+        </p:spPr>
+        <p:txBody>
+          <a:bodyPr wrap="square" lIns="0" tIns="0" rIns="0" bIns="0" rtlCol="0" anchor="ctr"/>
+          <a:lstStyle/>
+          <a:p>
+            <a:pPr algn="l" indent="0" marL="0">
+              <a:buNone/>
+            </a:pPr>
+            <a:r>
+              <a:rPr lang="en-US" sz="1100" b="1" spc="150" kern="0" dirty="0">
+                <a:solidFill>
+                  <a:srgbClr val="00838F"/>
+                </a:solidFill>
+                <a:latin typeface="Calibri" pitchFamily="34" charset="0"/>
+                <a:ea typeface="Calibri" pitchFamily="34" charset="-122"/>
+                <a:cs typeface="Calibri" pitchFamily="34" charset="-120"/>
+              </a:rPr>
+              <a:t>MOLECULAR &amp; CYTOGENETICS   ·   BOARD REVIEW  ·  Q3</a:t>
+            </a:r>
+            <a:endParaRPr lang="en-US" sz="1100" dirty="0"/>
+          </a:p>
+        </p:txBody>
+      </p:sp>
+      <p:sp>
+        <p:nvSpPr>
+          <p:cNvPr id="3" name="Text 1"/>
+          <p:cNvSpPr/>
+          <p:nvPr/>
+        </p:nvSpPr>
+        <p:spPr>
+          <a:xfrm>
+            <a:off x="566928" y="713232"/>
+            <a:ext cx="11064240" cy="749808"/>
+          </a:xfrm>
+          <a:prstGeom prst="rect">
+            <a:avLst/>
+          </a:prstGeom>
+          <a:noFill/>
+          <a:ln/>
+        </p:spPr>
+        <p:txBody>
+          <a:bodyPr wrap="square" lIns="0" tIns="0" rIns="0" bIns="0" rtlCol="0" anchor="ctr"/>
+          <a:lstStyle/>
+          <a:p>
+            <a:pPr algn="l" indent="0" marL="0">
+              <a:buNone/>
+            </a:pPr>
+            <a:r>
+              <a:rPr lang="en-US" sz="2600" b="1" dirty="0">
+                <a:solidFill>
+                  <a:srgbClr val="0E3A5F"/>
+                </a:solidFill>
+                <a:latin typeface="Calibri" pitchFamily="34" charset="0"/>
+                <a:ea typeface="Calibri" pitchFamily="34" charset="-122"/>
+                <a:cs typeface="Calibri" pitchFamily="34" charset="-120"/>
+              </a:rPr>
+              <a:t>Board-Style Review</a:t>
+            </a:r>
+            <a:endParaRPr lang="en-US" sz="2600" dirty="0"/>
+          </a:p>
+        </p:txBody>
+      </p:sp>
+      <p:sp>
+        <p:nvSpPr>
+          <p:cNvPr id="4" name="Text 2"/>
+          <p:cNvSpPr/>
+          <p:nvPr/>
+        </p:nvSpPr>
+        <p:spPr>
+          <a:xfrm>
+            <a:off x="566928" y="1417320"/>
+            <a:ext cx="11057839" cy="914400"/>
+          </a:xfrm>
+          <a:prstGeom prst="rect">
+            <a:avLst/>
+          </a:prstGeom>
+          <a:noFill/>
+          <a:ln/>
+        </p:spPr>
+        <p:txBody>
+          <a:bodyPr wrap="square" lIns="0" tIns="0" rIns="0" bIns="0" rtlCol="0" anchor="t"/>
+          <a:lstStyle/>
+          <a:p>
+            <a:pPr algn="l" indent="0" marL="0">
+              <a:lnSpc>
+                <a:spcPct val="105000"/>
+              </a:lnSpc>
+              <a:buNone/>
+            </a:pPr>
+            <a:r>
+              <a:rPr lang="en-US" sz="1450" b="1" dirty="0">
+                <a:solidFill>
+                  <a:srgbClr val="1B2A38"/>
+                </a:solidFill>
+                <a:latin typeface="Calibri" pitchFamily="34" charset="0"/>
+                <a:ea typeface="Calibri" pitchFamily="34" charset="-122"/>
+                <a:cs typeface="Calibri" pitchFamily="34" charset="-120"/>
+              </a:rPr>
+              <a:t>A tumor variant at ~50% VAF in BRCA1 should prompt:</a:t>
+            </a:r>
+            <a:endParaRPr lang="en-US" sz="1450" dirty="0"/>
+          </a:p>
+        </p:txBody>
+      </p:sp>
+      <p:sp>
+        <p:nvSpPr>
+          <p:cNvPr id="5" name="Text 3"/>
+          <p:cNvSpPr/>
+          <p:nvPr/>
+        </p:nvSpPr>
+        <p:spPr>
+          <a:xfrm>
+            <a:off x="658368" y="2395728"/>
+            <a:ext cx="6192390" cy="3017520"/>
+          </a:xfrm>
+          <a:prstGeom prst="rect">
+            <a:avLst/>
+          </a:prstGeom>
+          <a:noFill/>
+          <a:ln/>
+        </p:spPr>
+        <p:txBody>
+          <a:bodyPr wrap="square" lIns="0" tIns="0" rIns="0" bIns="0" rtlCol="0" anchor="t"/>
+          <a:lstStyle/>
+          <a:p>
+            <a:pPr algn="l" indent="0" marL="0">
+              <a:spcAft>
+                <a:spcPts val="600"/>
+              </a:spcAft>
+              <a:buNone/>
+            </a:pPr>
+            <a:r>
+              <a:rPr lang="en-US" sz="1350" dirty="0">
+                <a:solidFill>
+                  <a:srgbClr val="33444F"/>
+                </a:solidFill>
+                <a:latin typeface="Calibri" pitchFamily="34" charset="0"/>
+                <a:ea typeface="Calibri" pitchFamily="34" charset="-122"/>
+                <a:cs typeface="Calibri" pitchFamily="34" charset="-120"/>
+              </a:rPr>
+              <a:t>A. Reporting as somatic only</a:t>
+            </a:r>
+            <a:endParaRPr lang="en-US" sz="1350" dirty="0"/>
+          </a:p>
+          <a:p>
+            <a:pPr algn="l" indent="0" marL="0">
+              <a:spcAft>
+                <a:spcPts val="600"/>
+              </a:spcAft>
+              <a:buNone/>
+            </a:pPr>
+            <a:r>
+              <a:rPr lang="en-US" sz="1350" b="1" dirty="0">
+                <a:solidFill>
+                  <a:srgbClr val="005A63"/>
+                </a:solidFill>
+                <a:latin typeface="Calibri" pitchFamily="34" charset="0"/>
+                <a:ea typeface="Calibri" pitchFamily="34" charset="-122"/>
+                <a:cs typeface="Calibri" pitchFamily="34" charset="-120"/>
+              </a:rPr>
+              <a:t>B. Germline confirmation with consent and counseling</a:t>
+            </a:r>
+            <a:endParaRPr lang="en-US" sz="1350" dirty="0"/>
+          </a:p>
+          <a:p>
+            <a:pPr algn="l" indent="0" marL="0">
+              <a:spcAft>
+                <a:spcPts val="600"/>
+              </a:spcAft>
+              <a:buNone/>
+            </a:pPr>
+            <a:r>
+              <a:rPr lang="en-US" sz="1350" dirty="0">
+                <a:solidFill>
+                  <a:srgbClr val="33444F"/>
+                </a:solidFill>
+                <a:latin typeface="Calibri" pitchFamily="34" charset="0"/>
+                <a:ea typeface="Calibri" pitchFamily="34" charset="-122"/>
+                <a:cs typeface="Calibri" pitchFamily="34" charset="-120"/>
+              </a:rPr>
+              <a:t>C. No action</a:t>
+            </a:r>
+            <a:endParaRPr lang="en-US" sz="1350" dirty="0"/>
+          </a:p>
+          <a:p>
+            <a:pPr algn="l" indent="0" marL="0">
+              <a:spcAft>
+                <a:spcPts val="600"/>
+              </a:spcAft>
+              <a:buNone/>
+            </a:pPr>
+            <a:r>
+              <a:rPr lang="en-US" sz="1350" dirty="0">
+                <a:solidFill>
+                  <a:srgbClr val="33444F"/>
+                </a:solidFill>
+                <a:latin typeface="Calibri" pitchFamily="34" charset="0"/>
+                <a:ea typeface="Calibri" pitchFamily="34" charset="-122"/>
+                <a:cs typeface="Calibri" pitchFamily="34" charset="-120"/>
+              </a:rPr>
+              <a:t>D. Immediate diagnosis of hereditary cancer</a:t>
+            </a:r>
+            <a:endParaRPr lang="en-US" sz="1350" dirty="0"/>
+          </a:p>
+          <a:p>
+            <a:pPr algn="l" indent="0" marL="0">
+              <a:spcAft>
+                <a:spcPts val="600"/>
+              </a:spcAft>
+              <a:buNone/>
+            </a:pPr>
+            <a:r>
+              <a:rPr lang="en-US" sz="1350" dirty="0">
+                <a:solidFill>
+                  <a:srgbClr val="33444F"/>
+                </a:solidFill>
+                <a:latin typeface="Calibri" pitchFamily="34" charset="0"/>
+                <a:ea typeface="Calibri" pitchFamily="34" charset="-122"/>
+                <a:cs typeface="Calibri" pitchFamily="34" charset="-120"/>
+              </a:rPr>
+              <a:t>E. Repeat tumor testing only</a:t>
+            </a:r>
+            <a:endParaRPr lang="en-US" sz="1350" dirty="0"/>
+          </a:p>
+        </p:txBody>
+      </p:sp>
+      <p:sp>
+        <p:nvSpPr>
+          <p:cNvPr id="6" name="Shape 4"/>
+          <p:cNvSpPr/>
+          <p:nvPr/>
+        </p:nvSpPr>
+        <p:spPr>
+          <a:xfrm>
+            <a:off x="7201632" y="2395728"/>
+            <a:ext cx="4423136" cy="3246120"/>
+          </a:xfrm>
+          <a:prstGeom prst="roundRect">
+            <a:avLst>
+              <a:gd name="adj" fmla="val 2535"/>
+            </a:avLst>
+          </a:prstGeom>
+          <a:solidFill>
+            <a:srgbClr val="E0F2F4"/>
+          </a:solidFill>
+          <a:ln/>
+          <a:effectLst>
+            <a:outerShdw sx="100000" sy="100000" kx="0" ky="0" algn="bl" rotWithShape="0" blurRad="88900" dist="25400" dir="5400000">
+              <a:srgbClr val="22303C">
+                <a:alpha val="12000"/>
+              </a:srgbClr>
+            </a:outerShdw>
+          </a:effectLst>
+        </p:spPr>
+        <p:txBody>
+          <a:bodyPr/>
+          <a:p/>
+        </p:txBody>
+      </p:sp>
+      <p:sp>
+        <p:nvSpPr>
+          <p:cNvPr id="7" name="Text 5"/>
+          <p:cNvSpPr/>
+          <p:nvPr/>
+        </p:nvSpPr>
+        <p:spPr>
+          <a:xfrm>
+            <a:off x="7439376" y="2578608"/>
+            <a:ext cx="3965936" cy="457200"/>
+          </a:xfrm>
+          <a:prstGeom prst="rect">
+            <a:avLst/>
+          </a:prstGeom>
+          <a:noFill/>
+          <a:ln/>
+        </p:spPr>
+        <p:txBody>
+          <a:bodyPr wrap="square" lIns="0" tIns="0" rIns="0" bIns="0" rtlCol="0" anchor="ctr"/>
+          <a:lstStyle/>
+          <a:p>
+            <a:pPr indent="0" marL="0">
+              <a:buNone/>
+            </a:pPr>
+            <a:r>
+              <a:rPr lang="en-US" sz="1500" b="1" dirty="0">
+                <a:solidFill>
+                  <a:srgbClr val="00838F"/>
+                </a:solidFill>
+                <a:latin typeface="Calibri" pitchFamily="34" charset="0"/>
+                <a:ea typeface="Calibri" pitchFamily="34" charset="-122"/>
+                <a:cs typeface="Calibri" pitchFamily="34" charset="-120"/>
+              </a:rPr>
+              <a:t>ANSWER  </a:t>
+            </a:r>
+            <a:pPr indent="0" marL="0">
+              <a:buNone/>
+            </a:pPr>
+            <a:r>
+              <a:rPr lang="en-US" sz="1500" b="1" dirty="0">
+                <a:solidFill>
+                  <a:srgbClr val="1B2A38"/>
+                </a:solidFill>
+                <a:latin typeface="Calibri" pitchFamily="34" charset="0"/>
+                <a:ea typeface="Calibri" pitchFamily="34" charset="-122"/>
+                <a:cs typeface="Calibri" pitchFamily="34" charset="-120"/>
+              </a:rPr>
+              <a:t>B — Germline confirmation/counseling</a:t>
+            </a:r>
+            <a:endParaRPr lang="en-US" sz="1500" dirty="0"/>
+          </a:p>
+        </p:txBody>
+      </p:sp>
+      <p:sp>
+        <p:nvSpPr>
+          <p:cNvPr id="8" name="Text 6"/>
+          <p:cNvSpPr/>
+          <p:nvPr/>
+        </p:nvSpPr>
+        <p:spPr>
+          <a:xfrm>
+            <a:off x="7439376" y="3127248"/>
+            <a:ext cx="3947648" cy="2377440"/>
+          </a:xfrm>
+          <a:prstGeom prst="rect">
+            <a:avLst/>
+          </a:prstGeom>
+          <a:noFill/>
+          <a:ln/>
+        </p:spPr>
+        <p:txBody>
+          <a:bodyPr wrap="square" lIns="0" tIns="0" rIns="0" bIns="0" rtlCol="0" anchor="t"/>
+          <a:lstStyle/>
+          <a:p>
+            <a:pPr algn="l" indent="0" marL="0">
+              <a:lnSpc>
+                <a:spcPct val="108000"/>
+              </a:lnSpc>
+              <a:buNone/>
+            </a:pPr>
+            <a:r>
+              <a:rPr lang="en-US" sz="1250" dirty="0">
+                <a:solidFill>
+                  <a:srgbClr val="33444F"/>
+                </a:solidFill>
+                <a:latin typeface="Calibri" pitchFamily="34" charset="0"/>
+                <a:ea typeface="Calibri" pitchFamily="34" charset="-122"/>
+                <a:cs typeface="Calibri" pitchFamily="34" charset="-120"/>
+              </a:rPr>
+              <a:t>A ~50% VAF in a predisposition gene may be germline; confirm in normal tissue with appropriate consent and counseling.</a:t>
+            </a:r>
+            <a:endParaRPr lang="en-US" sz="1250" dirty="0"/>
+          </a:p>
+        </p:txBody>
+      </p:sp>
+      <p:sp>
+        <p:nvSpPr>
+          <p:cNvPr id="9" name="Text 7"/>
+          <p:cNvSpPr/>
+          <p:nvPr/>
+        </p:nvSpPr>
+        <p:spPr>
+          <a:xfrm>
+            <a:off x="566928" y="6473952"/>
+            <a:ext cx="7772400" cy="274320"/>
+          </a:xfrm>
+          <a:prstGeom prst="rect">
+            <a:avLst/>
+          </a:prstGeom>
+          <a:noFill/>
+          <a:ln/>
+        </p:spPr>
+        <p:txBody>
+          <a:bodyPr wrap="square" lIns="0" tIns="0" rIns="0" bIns="0" rtlCol="0" anchor="ctr"/>
+          <a:lstStyle/>
+          <a:p>
+            <a:pPr algn="l" indent="0" marL="0">
+              <a:buNone/>
+            </a:pPr>
+            <a:r>
+              <a:rPr lang="en-US" sz="850" dirty="0">
+                <a:solidFill>
+                  <a:srgbClr val="9AA8B4"/>
+                </a:solidFill>
+                <a:latin typeface="Calibri" pitchFamily="34" charset="0"/>
+                <a:ea typeface="Calibri" pitchFamily="34" charset="-122"/>
+                <a:cs typeface="Calibri" pitchFamily="34" charset="-120"/>
+              </a:rPr>
+              <a:t>Makassed General Hospital  ·  Department of Laboratory Medicine</a:t>
+            </a:r>
+            <a:endParaRPr lang="en-US" sz="850" dirty="0"/>
+          </a:p>
+        </p:txBody>
+      </p:sp>
+      <p:sp>
+        <p:nvSpPr>
+          <p:cNvPr id="10" name="Text 8"/>
+          <p:cNvSpPr/>
+          <p:nvPr/>
+        </p:nvSpPr>
+        <p:spPr>
+          <a:xfrm>
+            <a:off x="9814255" y="6473952"/>
+            <a:ext cx="1828800" cy="274320"/>
+          </a:xfrm>
+          <a:prstGeom prst="rect">
+            <a:avLst/>
+          </a:prstGeom>
+          <a:noFill/>
+          <a:ln/>
+        </p:spPr>
+        <p:txBody>
+          <a:bodyPr wrap="square" lIns="0" tIns="0" rIns="0" bIns="0" rtlCol="0" anchor="ctr"/>
+          <a:lstStyle/>
+          <a:p>
+            <a:pPr algn="r" indent="0" marL="0">
+              <a:buNone/>
+            </a:pPr>
+            <a:r>
+              <a:rPr lang="en-US" sz="850" dirty="0">
+                <a:solidFill>
+                  <a:srgbClr val="9AA8B4"/>
+                </a:solidFill>
+                <a:latin typeface="Calibri" pitchFamily="34" charset="0"/>
+                <a:ea typeface="Calibri" pitchFamily="34" charset="-122"/>
+                <a:cs typeface="Calibri" pitchFamily="34" charset="-120"/>
+              </a:rPr>
+              <a:t>CP Lecture Series</a:t>
+            </a:r>
+            <a:pPr algn="r" indent="0" marL="0">
+              <a:buNone/>
+            </a:pPr>
+            <a:r>
+              <a:rPr lang="en-US" sz="850" dirty="0">
+                <a:solidFill>
+                  <a:srgbClr val="DCE4EC"/>
+                </a:solidFill>
+                <a:latin typeface="Calibri" pitchFamily="34" charset="0"/>
+                <a:ea typeface="Calibri" pitchFamily="34" charset="-122"/>
+                <a:cs typeface="Calibri" pitchFamily="34" charset="-120"/>
+              </a:rPr>
+              <a:t>   ·   </a:t>
+            </a:r>
+            <a:pPr algn="r" indent="0" marL="0">
+              <a:buNone/>
+            </a:pPr>
+            <a:r>
+              <a:rPr lang="en-US" sz="850" b="1" dirty="0">
+                <a:solidFill>
+                  <a:srgbClr val="00838F"/>
+                </a:solidFill>
+                <a:latin typeface="Calibri" pitchFamily="34" charset="0"/>
+                <a:ea typeface="Calibri" pitchFamily="34" charset="-122"/>
+                <a:cs typeface="Calibri" pitchFamily="34" charset="-120"/>
+              </a:rPr>
+              <a:t>19</a:t>
+            </a:r>
+            <a:endParaRPr lang="en-US" sz="850" dirty="0"/>
+          </a:p>
+        </p:txBody>
+      </p:sp>
+    </p:spTree>
+  </p:cSld>
+  <p:clrMapOvr>
+    <a:masterClrMapping/>
+  </p:clrMapOvr>
+</p:sld>
+</file>
+
+<file path=ppt/slides/slide28.xml><?xml version="1.0" encoding="utf-8"?>
+<p:sld xmlns:a="http://schemas.openxmlformats.org/drawingml/2006/main" xmlns:p="http://schemas.openxmlformats.org/presentationml/2006/main" xmlns:r="http://schemas.openxmlformats.org/officeDocument/2006/relationships">
+  <p:cSld>
+    <p:spTree>
+      <p:nvGrpSpPr>
+        <p:cNvPr id="1" name=""/>
+        <p:cNvGrpSpPr/>
+        <p:nvPr/>
+      </p:nvGrpSpPr>
+      <p:grpSpPr/>
+      <p:sp>
+        <p:nvSpPr>
+          <p:cNvPr id="2" name="Text 0"/>
+          <p:cNvSpPr/>
+          <p:nvPr/>
+        </p:nvSpPr>
+        <p:spPr>
+          <a:xfrm>
+            <a:off x="566928" y="329184"/>
+            <a:ext cx="10515600" cy="310896"/>
+          </a:xfrm>
+          <a:prstGeom prst="rect">
+            <a:avLst/>
+          </a:prstGeom>
+          <a:noFill/>
+          <a:ln/>
+        </p:spPr>
+        <p:txBody>
+          <a:bodyPr wrap="square" lIns="0" tIns="0" rIns="0" bIns="0" rtlCol="0" anchor="ctr"/>
+          <a:lstStyle/>
+          <a:p>
+            <a:pPr algn="l" indent="0" marL="0">
+              <a:buNone/>
+            </a:pPr>
+            <a:r>
+              <a:rPr lang="en-US" sz="1100" b="1" spc="150" kern="0" dirty="0">
+                <a:solidFill>
+                  <a:srgbClr val="00838F"/>
+                </a:solidFill>
+                <a:latin typeface="Calibri" pitchFamily="34" charset="0"/>
+                <a:ea typeface="Calibri" pitchFamily="34" charset="-122"/>
+                <a:cs typeface="Calibri" pitchFamily="34" charset="-120"/>
+              </a:rPr>
+              <a:t>MOLECULAR &amp; CYTOGENETICS   ·   BOARD REVIEW  ·  Q2</a:t>
+            </a:r>
+            <a:endParaRPr lang="en-US" sz="1100" dirty="0"/>
+          </a:p>
+        </p:txBody>
+      </p:sp>
+      <p:sp>
+        <p:nvSpPr>
+          <p:cNvPr id="3" name="Text 1"/>
+          <p:cNvSpPr/>
+          <p:nvPr/>
+        </p:nvSpPr>
+        <p:spPr>
+          <a:xfrm>
+            <a:off x="566928" y="713232"/>
+            <a:ext cx="11064240" cy="749808"/>
+          </a:xfrm>
+          <a:prstGeom prst="rect">
+            <a:avLst/>
+          </a:prstGeom>
+          <a:noFill/>
+          <a:ln/>
+        </p:spPr>
+        <p:txBody>
+          <a:bodyPr wrap="square" lIns="0" tIns="0" rIns="0" bIns="0" rtlCol="0" anchor="ctr"/>
+          <a:lstStyle/>
+          <a:p>
+            <a:pPr algn="l" indent="0" marL="0">
+              <a:buNone/>
+            </a:pPr>
+            <a:r>
+              <a:rPr lang="en-US" sz="2600" b="1" dirty="0">
+                <a:solidFill>
+                  <a:srgbClr val="0E3A5F"/>
+                </a:solidFill>
+                <a:latin typeface="Calibri" pitchFamily="34" charset="0"/>
+                <a:ea typeface="Calibri" pitchFamily="34" charset="-122"/>
+                <a:cs typeface="Calibri" pitchFamily="34" charset="-120"/>
+              </a:rPr>
+              <a:t>Board-Style Review</a:t>
+            </a:r>
+            <a:endParaRPr lang="en-US" sz="2600" dirty="0"/>
+          </a:p>
+        </p:txBody>
+      </p:sp>
+      <p:sp>
+        <p:nvSpPr>
+          <p:cNvPr id="4" name="Text 2"/>
+          <p:cNvSpPr/>
+          <p:nvPr/>
+        </p:nvSpPr>
+        <p:spPr>
+          <a:xfrm>
+            <a:off x="566928" y="1417320"/>
+            <a:ext cx="11057839" cy="914400"/>
+          </a:xfrm>
+          <a:prstGeom prst="rect">
+            <a:avLst/>
+          </a:prstGeom>
+          <a:noFill/>
+          <a:ln/>
+        </p:spPr>
+        <p:txBody>
+          <a:bodyPr wrap="square" lIns="0" tIns="0" rIns="0" bIns="0" rtlCol="0" anchor="t"/>
+          <a:lstStyle/>
+          <a:p>
+            <a:pPr algn="l" indent="0" marL="0">
+              <a:lnSpc>
+                <a:spcPct val="105000"/>
+              </a:lnSpc>
+              <a:buNone/>
+            </a:pPr>
+            <a:r>
+              <a:rPr lang="en-US" sz="1450" b="1" dirty="0">
+                <a:solidFill>
+                  <a:srgbClr val="1B2A38"/>
+                </a:solidFill>
+                <a:latin typeface="Calibri" pitchFamily="34" charset="0"/>
+                <a:ea typeface="Calibri" pitchFamily="34" charset="-122"/>
+                <a:cs typeface="Calibri" pitchFamily="34" charset="-120"/>
+              </a:rPr>
+              <a:t>MSI-high status in a tumor may indicate both immunotherapy responsiveness and:</a:t>
+            </a:r>
+            <a:endParaRPr lang="en-US" sz="1450" dirty="0"/>
+          </a:p>
+        </p:txBody>
+      </p:sp>
+      <p:sp>
+        <p:nvSpPr>
+          <p:cNvPr id="5" name="Text 3"/>
+          <p:cNvSpPr/>
+          <p:nvPr/>
+        </p:nvSpPr>
+        <p:spPr>
+          <a:xfrm>
+            <a:off x="658368" y="2395728"/>
+            <a:ext cx="6192390" cy="3017520"/>
+          </a:xfrm>
+          <a:prstGeom prst="rect">
+            <a:avLst/>
+          </a:prstGeom>
+          <a:noFill/>
+          <a:ln/>
+        </p:spPr>
+        <p:txBody>
+          <a:bodyPr wrap="square" lIns="0" tIns="0" rIns="0" bIns="0" rtlCol="0" anchor="t"/>
+          <a:lstStyle/>
+          <a:p>
+            <a:pPr algn="l" indent="0" marL="0">
+              <a:spcAft>
+                <a:spcPts val="600"/>
+              </a:spcAft>
+              <a:buNone/>
+            </a:pPr>
+            <a:r>
+              <a:rPr lang="en-US" sz="1350" dirty="0">
+                <a:solidFill>
+                  <a:srgbClr val="33444F"/>
+                </a:solidFill>
+                <a:latin typeface="Calibri" pitchFamily="34" charset="0"/>
+                <a:ea typeface="Calibri" pitchFamily="34" charset="-122"/>
+                <a:cs typeface="Calibri" pitchFamily="34" charset="-120"/>
+              </a:rPr>
+              <a:t>A. Resistance to all therapy</a:t>
+            </a:r>
+            <a:endParaRPr lang="en-US" sz="1350" dirty="0"/>
+          </a:p>
+          <a:p>
+            <a:pPr algn="l" indent="0" marL="0">
+              <a:spcAft>
+                <a:spcPts val="600"/>
+              </a:spcAft>
+              <a:buNone/>
+            </a:pPr>
+            <a:r>
+              <a:rPr lang="en-US" sz="1350" b="1" dirty="0">
+                <a:solidFill>
+                  <a:srgbClr val="005A63"/>
+                </a:solidFill>
+                <a:latin typeface="Calibri" pitchFamily="34" charset="0"/>
+                <a:ea typeface="Calibri" pitchFamily="34" charset="-122"/>
+                <a:cs typeface="Calibri" pitchFamily="34" charset="-120"/>
+              </a:rPr>
+              <a:t>B. Possible Lynch syndrome (germline)</a:t>
+            </a:r>
+            <a:endParaRPr lang="en-US" sz="1350" dirty="0"/>
+          </a:p>
+          <a:p>
+            <a:pPr algn="l" indent="0" marL="0">
+              <a:spcAft>
+                <a:spcPts val="600"/>
+              </a:spcAft>
+              <a:buNone/>
+            </a:pPr>
+            <a:r>
+              <a:rPr lang="en-US" sz="1350" dirty="0">
+                <a:solidFill>
+                  <a:srgbClr val="33444F"/>
+                </a:solidFill>
+                <a:latin typeface="Calibri" pitchFamily="34" charset="0"/>
+                <a:ea typeface="Calibri" pitchFamily="34" charset="-122"/>
+                <a:cs typeface="Calibri" pitchFamily="34" charset="-120"/>
+              </a:rPr>
+              <a:t>C. A benign tumor</a:t>
+            </a:r>
+            <a:endParaRPr lang="en-US" sz="1350" dirty="0"/>
+          </a:p>
+          <a:p>
+            <a:pPr algn="l" indent="0" marL="0">
+              <a:spcAft>
+                <a:spcPts val="600"/>
+              </a:spcAft>
+              <a:buNone/>
+            </a:pPr>
+            <a:r>
+              <a:rPr lang="en-US" sz="1350" dirty="0">
+                <a:solidFill>
+                  <a:srgbClr val="33444F"/>
+                </a:solidFill>
+                <a:latin typeface="Calibri" pitchFamily="34" charset="0"/>
+                <a:ea typeface="Calibri" pitchFamily="34" charset="-122"/>
+                <a:cs typeface="Calibri" pitchFamily="34" charset="-120"/>
+              </a:rPr>
+              <a:t>D. Low TMB</a:t>
+            </a:r>
+            <a:endParaRPr lang="en-US" sz="1350" dirty="0"/>
+          </a:p>
+          <a:p>
+            <a:pPr algn="l" indent="0" marL="0">
+              <a:spcAft>
+                <a:spcPts val="600"/>
+              </a:spcAft>
+              <a:buNone/>
+            </a:pPr>
+            <a:r>
+              <a:rPr lang="en-US" sz="1350" dirty="0">
+                <a:solidFill>
+                  <a:srgbClr val="33444F"/>
+                </a:solidFill>
+                <a:latin typeface="Calibri" pitchFamily="34" charset="0"/>
+                <a:ea typeface="Calibri" pitchFamily="34" charset="-122"/>
+                <a:cs typeface="Calibri" pitchFamily="34" charset="-120"/>
+              </a:rPr>
+              <a:t>E. A balanced translocation</a:t>
+            </a:r>
+            <a:endParaRPr lang="en-US" sz="1350" dirty="0"/>
+          </a:p>
+        </p:txBody>
+      </p:sp>
+      <p:sp>
+        <p:nvSpPr>
+          <p:cNvPr id="6" name="Shape 4"/>
+          <p:cNvSpPr/>
+          <p:nvPr/>
+        </p:nvSpPr>
+        <p:spPr>
+          <a:xfrm>
+            <a:off x="7201632" y="2395728"/>
+            <a:ext cx="4423136" cy="3246120"/>
+          </a:xfrm>
+          <a:prstGeom prst="roundRect">
+            <a:avLst>
+              <a:gd name="adj" fmla="val 2535"/>
+            </a:avLst>
+          </a:prstGeom>
+          <a:solidFill>
+            <a:srgbClr val="E0F2F4"/>
+          </a:solidFill>
+          <a:ln/>
+          <a:effectLst>
+            <a:outerShdw sx="100000" sy="100000" kx="0" ky="0" algn="bl" rotWithShape="0" blurRad="88900" dist="25400" dir="5400000">
+              <a:srgbClr val="22303C">
+                <a:alpha val="12000"/>
+              </a:srgbClr>
+            </a:outerShdw>
+          </a:effectLst>
+        </p:spPr>
+        <p:txBody>
+          <a:bodyPr/>
+          <a:p/>
+        </p:txBody>
+      </p:sp>
+      <p:sp>
+        <p:nvSpPr>
+          <p:cNvPr id="7" name="Text 5"/>
+          <p:cNvSpPr/>
+          <p:nvPr/>
+        </p:nvSpPr>
+        <p:spPr>
+          <a:xfrm>
+            <a:off x="7439376" y="2578608"/>
+            <a:ext cx="3965936" cy="457200"/>
+          </a:xfrm>
+          <a:prstGeom prst="rect">
+            <a:avLst/>
+          </a:prstGeom>
+          <a:noFill/>
+          <a:ln/>
+        </p:spPr>
+        <p:txBody>
+          <a:bodyPr wrap="square" lIns="0" tIns="0" rIns="0" bIns="0" rtlCol="0" anchor="ctr"/>
+          <a:lstStyle/>
+          <a:p>
+            <a:pPr indent="0" marL="0">
+              <a:buNone/>
+            </a:pPr>
+            <a:r>
+              <a:rPr lang="en-US" sz="1500" b="1" dirty="0">
+                <a:solidFill>
+                  <a:srgbClr val="00838F"/>
+                </a:solidFill>
+                <a:latin typeface="Calibri" pitchFamily="34" charset="0"/>
+                <a:ea typeface="Calibri" pitchFamily="34" charset="-122"/>
+                <a:cs typeface="Calibri" pitchFamily="34" charset="-120"/>
+              </a:rPr>
+              <a:t>ANSWER  </a:t>
+            </a:r>
+            <a:pPr indent="0" marL="0">
+              <a:buNone/>
+            </a:pPr>
+            <a:r>
+              <a:rPr lang="en-US" sz="1500" b="1" dirty="0">
+                <a:solidFill>
+                  <a:srgbClr val="1B2A38"/>
+                </a:solidFill>
+                <a:latin typeface="Calibri" pitchFamily="34" charset="0"/>
+                <a:ea typeface="Calibri" pitchFamily="34" charset="-122"/>
+                <a:cs typeface="Calibri" pitchFamily="34" charset="-120"/>
+              </a:rPr>
+              <a:t>B — Possible Lynch syndrome</a:t>
+            </a:r>
+            <a:endParaRPr lang="en-US" sz="1500" dirty="0"/>
+          </a:p>
+        </p:txBody>
+      </p:sp>
+      <p:sp>
+        <p:nvSpPr>
+          <p:cNvPr id="8" name="Text 6"/>
+          <p:cNvSpPr/>
+          <p:nvPr/>
+        </p:nvSpPr>
+        <p:spPr>
+          <a:xfrm>
+            <a:off x="7439376" y="3127248"/>
+            <a:ext cx="3947648" cy="2377440"/>
+          </a:xfrm>
+          <a:prstGeom prst="rect">
+            <a:avLst/>
+          </a:prstGeom>
+          <a:noFill/>
+          <a:ln/>
+        </p:spPr>
+        <p:txBody>
+          <a:bodyPr wrap="square" lIns="0" tIns="0" rIns="0" bIns="0" rtlCol="0" anchor="t"/>
+          <a:lstStyle/>
+          <a:p>
+            <a:pPr algn="l" indent="0" marL="0">
+              <a:lnSpc>
+                <a:spcPct val="108000"/>
+              </a:lnSpc>
+              <a:buNone/>
+            </a:pPr>
+            <a:r>
+              <a:rPr lang="en-US" sz="1250" dirty="0">
+                <a:solidFill>
+                  <a:srgbClr val="33444F"/>
+                </a:solidFill>
+                <a:latin typeface="Calibri" pitchFamily="34" charset="0"/>
+                <a:ea typeface="Calibri" pitchFamily="34" charset="-122"/>
+                <a:cs typeface="Calibri" pitchFamily="34" charset="-120"/>
+              </a:rPr>
+              <a:t>MMR deficiency/MSI-high can reflect germline Lynch syndrome and predicts response to immune checkpoint inhibitors.</a:t>
+            </a:r>
+            <a:endParaRPr lang="en-US" sz="1250" dirty="0"/>
+          </a:p>
+        </p:txBody>
+      </p:sp>
+      <p:sp>
+        <p:nvSpPr>
+          <p:cNvPr id="9" name="Text 7"/>
+          <p:cNvSpPr/>
+          <p:nvPr/>
+        </p:nvSpPr>
+        <p:spPr>
+          <a:xfrm>
+            <a:off x="566928" y="6473952"/>
+            <a:ext cx="7772400" cy="274320"/>
+          </a:xfrm>
+          <a:prstGeom prst="rect">
+            <a:avLst/>
+          </a:prstGeom>
+          <a:noFill/>
+          <a:ln/>
+        </p:spPr>
+        <p:txBody>
+          <a:bodyPr wrap="square" lIns="0" tIns="0" rIns="0" bIns="0" rtlCol="0" anchor="ctr"/>
+          <a:lstStyle/>
+          <a:p>
+            <a:pPr algn="l" indent="0" marL="0">
+              <a:buNone/>
+            </a:pPr>
+            <a:r>
+              <a:rPr lang="en-US" sz="850" dirty="0">
+                <a:solidFill>
+                  <a:srgbClr val="9AA8B4"/>
+                </a:solidFill>
+                <a:latin typeface="Calibri" pitchFamily="34" charset="0"/>
+                <a:ea typeface="Calibri" pitchFamily="34" charset="-122"/>
+                <a:cs typeface="Calibri" pitchFamily="34" charset="-120"/>
+              </a:rPr>
+              <a:t>Makassed General Hospital  ·  Department of Laboratory Medicine</a:t>
+            </a:r>
+            <a:endParaRPr lang="en-US" sz="850" dirty="0"/>
+          </a:p>
+        </p:txBody>
+      </p:sp>
+      <p:sp>
+        <p:nvSpPr>
+          <p:cNvPr id="10" name="Text 8"/>
+          <p:cNvSpPr/>
+          <p:nvPr/>
+        </p:nvSpPr>
+        <p:spPr>
+          <a:xfrm>
+            <a:off x="9814255" y="6473952"/>
+            <a:ext cx="1828800" cy="274320"/>
+          </a:xfrm>
+          <a:prstGeom prst="rect">
+            <a:avLst/>
+          </a:prstGeom>
+          <a:noFill/>
+          <a:ln/>
+        </p:spPr>
+        <p:txBody>
+          <a:bodyPr wrap="square" lIns="0" tIns="0" rIns="0" bIns="0" rtlCol="0" anchor="ctr"/>
+          <a:lstStyle/>
+          <a:p>
+            <a:pPr algn="r" indent="0" marL="0">
+              <a:buNone/>
+            </a:pPr>
+            <a:r>
+              <a:rPr lang="en-US" sz="850" dirty="0">
+                <a:solidFill>
+                  <a:srgbClr val="9AA8B4"/>
+                </a:solidFill>
+                <a:latin typeface="Calibri" pitchFamily="34" charset="0"/>
+                <a:ea typeface="Calibri" pitchFamily="34" charset="-122"/>
+                <a:cs typeface="Calibri" pitchFamily="34" charset="-120"/>
+              </a:rPr>
+              <a:t>CP Lecture Series</a:t>
+            </a:r>
+            <a:pPr algn="r" indent="0" marL="0">
+              <a:buNone/>
+            </a:pPr>
+            <a:r>
+              <a:rPr lang="en-US" sz="850" dirty="0">
+                <a:solidFill>
+                  <a:srgbClr val="DCE4EC"/>
+                </a:solidFill>
+                <a:latin typeface="Calibri" pitchFamily="34" charset="0"/>
+                <a:ea typeface="Calibri" pitchFamily="34" charset="-122"/>
+                <a:cs typeface="Calibri" pitchFamily="34" charset="-120"/>
+              </a:rPr>
+              <a:t>   ·   </a:t>
+            </a:r>
+            <a:pPr algn="r" indent="0" marL="0">
+              <a:buNone/>
+            </a:pPr>
+            <a:r>
+              <a:rPr lang="en-US" sz="850" b="1" dirty="0">
+                <a:solidFill>
+                  <a:srgbClr val="00838F"/>
+                </a:solidFill>
+                <a:latin typeface="Calibri" pitchFamily="34" charset="0"/>
+                <a:ea typeface="Calibri" pitchFamily="34" charset="-122"/>
+                <a:cs typeface="Calibri" pitchFamily="34" charset="-120"/>
+              </a:rPr>
+              <a:t>18</a:t>
+            </a:r>
+            <a:endParaRPr lang="en-US" sz="850" dirty="0"/>
+          </a:p>
+        </p:txBody>
+      </p:sp>
+    </p:spTree>
+  </p:cSld>
+  <p:clrMapOvr>
+    <a:masterClrMapping/>
+  </p:clrMapOvr>
+</p:sld>
+</file>
+
+<file path=ppt/slides/slide29.xml><?xml version="1.0" encoding="utf-8"?>
+<p:sld xmlns:a="http://schemas.openxmlformats.org/drawingml/2006/main" xmlns:p="http://schemas.openxmlformats.org/presentationml/2006/main" xmlns:r="http://schemas.openxmlformats.org/officeDocument/2006/relationships">
+  <p:cSld>
+    <p:spTree>
+      <p:nvGrpSpPr>
+        <p:cNvPr id="1" name=""/>
+        <p:cNvGrpSpPr/>
+        <p:nvPr/>
+      </p:nvGrpSpPr>
+      <p:grpSpPr/>
+      <p:sp>
+        <p:nvSpPr>
+          <p:cNvPr id="2" name="Text 0"/>
+          <p:cNvSpPr/>
+          <p:nvPr/>
+        </p:nvSpPr>
+        <p:spPr>
+          <a:xfrm>
+            <a:off x="566928" y="329184"/>
+            <a:ext cx="10515600" cy="310896"/>
+          </a:xfrm>
+          <a:prstGeom prst="rect">
+            <a:avLst/>
+          </a:prstGeom>
+          <a:noFill/>
+          <a:ln/>
+        </p:spPr>
+        <p:txBody>
+          <a:bodyPr wrap="square" lIns="0" tIns="0" rIns="0" bIns="0" rtlCol="0" anchor="ctr"/>
+          <a:lstStyle/>
+          <a:p>
+            <a:pPr algn="l" indent="0" marL="0">
+              <a:buNone/>
+            </a:pPr>
+            <a:r>
+              <a:rPr lang="en-US" sz="1100" b="1" spc="150" kern="0" dirty="0">
+                <a:solidFill>
+                  <a:srgbClr val="00838F"/>
+                </a:solidFill>
+                <a:latin typeface="Calibri" pitchFamily="34" charset="0"/>
+                <a:ea typeface="Calibri" pitchFamily="34" charset="-122"/>
+                <a:cs typeface="Calibri" pitchFamily="34" charset="-120"/>
+              </a:rPr>
+              <a:t>MOLECULAR &amp; CYTOGENETICS   ·   BOARD REVIEW  ·  Q1</a:t>
+            </a:r>
+            <a:endParaRPr lang="en-US" sz="1100" dirty="0"/>
+          </a:p>
+        </p:txBody>
+      </p:sp>
+      <p:sp>
+        <p:nvSpPr>
+          <p:cNvPr id="3" name="Text 1"/>
+          <p:cNvSpPr/>
+          <p:nvPr/>
+        </p:nvSpPr>
+        <p:spPr>
+          <a:xfrm>
+            <a:off x="566928" y="713232"/>
+            <a:ext cx="11064240" cy="749808"/>
+          </a:xfrm>
+          <a:prstGeom prst="rect">
+            <a:avLst/>
+          </a:prstGeom>
+          <a:noFill/>
+          <a:ln/>
+        </p:spPr>
+        <p:txBody>
+          <a:bodyPr wrap="square" lIns="0" tIns="0" rIns="0" bIns="0" rtlCol="0" anchor="ctr"/>
+          <a:lstStyle/>
+          <a:p>
+            <a:pPr algn="l" indent="0" marL="0">
+              <a:buNone/>
+            </a:pPr>
+            <a:r>
+              <a:rPr lang="en-US" sz="2600" b="1" dirty="0">
+                <a:solidFill>
+                  <a:srgbClr val="0E3A5F"/>
+                </a:solidFill>
+                <a:latin typeface="Calibri" pitchFamily="34" charset="0"/>
+                <a:ea typeface="Calibri" pitchFamily="34" charset="-122"/>
+                <a:cs typeface="Calibri" pitchFamily="34" charset="-120"/>
+              </a:rPr>
+              <a:t>Board-Style Review</a:t>
+            </a:r>
+            <a:endParaRPr lang="en-US" sz="2600" dirty="0"/>
+          </a:p>
+        </p:txBody>
+      </p:sp>
+      <p:sp>
+        <p:nvSpPr>
+          <p:cNvPr id="4" name="Text 2"/>
+          <p:cNvSpPr/>
+          <p:nvPr/>
+        </p:nvSpPr>
+        <p:spPr>
+          <a:xfrm>
+            <a:off x="566928" y="1417320"/>
+            <a:ext cx="11057839" cy="914400"/>
+          </a:xfrm>
+          <a:prstGeom prst="rect">
+            <a:avLst/>
+          </a:prstGeom>
+          <a:noFill/>
+          <a:ln/>
+        </p:spPr>
+        <p:txBody>
+          <a:bodyPr wrap="square" lIns="0" tIns="0" rIns="0" bIns="0" rtlCol="0" anchor="t"/>
+          <a:lstStyle/>
+          <a:p>
+            <a:pPr algn="l" indent="0" marL="0">
+              <a:lnSpc>
+                <a:spcPct val="105000"/>
+              </a:lnSpc>
+              <a:buNone/>
+            </a:pPr>
+            <a:r>
+              <a:rPr lang="en-US" sz="1450" b="1" dirty="0">
+                <a:solidFill>
+                  <a:srgbClr val="1B2A38"/>
+                </a:solidFill>
+                <a:latin typeface="Calibri" pitchFamily="34" charset="0"/>
+                <a:ea typeface="Calibri" pitchFamily="34" charset="-122"/>
+                <a:cs typeface="Calibri" pitchFamily="34" charset="-120"/>
+              </a:rPr>
+              <a:t>A KRAS mutation in colorectal cancer is a:</a:t>
+            </a:r>
+            <a:endParaRPr lang="en-US" sz="1450" dirty="0"/>
+          </a:p>
+        </p:txBody>
+      </p:sp>
+      <p:sp>
+        <p:nvSpPr>
+          <p:cNvPr id="5" name="Text 3"/>
+          <p:cNvSpPr/>
+          <p:nvPr/>
+        </p:nvSpPr>
+        <p:spPr>
+          <a:xfrm>
+            <a:off x="658368" y="2395728"/>
+            <a:ext cx="6192390" cy="3017520"/>
+          </a:xfrm>
+          <a:prstGeom prst="rect">
+            <a:avLst/>
+          </a:prstGeom>
+          <a:noFill/>
+          <a:ln/>
+        </p:spPr>
+        <p:txBody>
+          <a:bodyPr wrap="square" lIns="0" tIns="0" rIns="0" bIns="0" rtlCol="0" anchor="t"/>
+          <a:lstStyle/>
+          <a:p>
+            <a:pPr algn="l" indent="0" marL="0">
+              <a:spcAft>
+                <a:spcPts val="600"/>
+              </a:spcAft>
+              <a:buNone/>
+            </a:pPr>
+            <a:r>
+              <a:rPr lang="en-US" sz="1350" dirty="0">
+                <a:solidFill>
+                  <a:srgbClr val="33444F"/>
+                </a:solidFill>
+                <a:latin typeface="Calibri" pitchFamily="34" charset="0"/>
+                <a:ea typeface="Calibri" pitchFamily="34" charset="-122"/>
+                <a:cs typeface="Calibri" pitchFamily="34" charset="-120"/>
+              </a:rPr>
+              <a:t>A. Positive predictive marker for anti-EGFR therapy</a:t>
+            </a:r>
+            <a:endParaRPr lang="en-US" sz="1350" dirty="0"/>
+          </a:p>
+          <a:p>
+            <a:pPr algn="l" indent="0" marL="0">
+              <a:spcAft>
+                <a:spcPts val="600"/>
+              </a:spcAft>
+              <a:buNone/>
+            </a:pPr>
+            <a:r>
+              <a:rPr lang="en-US" sz="1350" b="1" dirty="0">
+                <a:solidFill>
+                  <a:srgbClr val="005A63"/>
+                </a:solidFill>
+                <a:latin typeface="Calibri" pitchFamily="34" charset="0"/>
+                <a:ea typeface="Calibri" pitchFamily="34" charset="-122"/>
+                <a:cs typeface="Calibri" pitchFamily="34" charset="-120"/>
+              </a:rPr>
+              <a:t>B. Negative predictive marker (resistance) for anti-EGFR therapy</a:t>
+            </a:r>
+            <a:endParaRPr lang="en-US" sz="1350" dirty="0"/>
+          </a:p>
+          <a:p>
+            <a:pPr algn="l" indent="0" marL="0">
+              <a:spcAft>
+                <a:spcPts val="600"/>
+              </a:spcAft>
+              <a:buNone/>
+            </a:pPr>
+            <a:r>
+              <a:rPr lang="en-US" sz="1350" dirty="0">
+                <a:solidFill>
+                  <a:srgbClr val="33444F"/>
+                </a:solidFill>
+                <a:latin typeface="Calibri" pitchFamily="34" charset="0"/>
+                <a:ea typeface="Calibri" pitchFamily="34" charset="-122"/>
+                <a:cs typeface="Calibri" pitchFamily="34" charset="-120"/>
+              </a:rPr>
+              <a:t>C. Germline-only finding</a:t>
+            </a:r>
+            <a:endParaRPr lang="en-US" sz="1350" dirty="0"/>
+          </a:p>
+          <a:p>
+            <a:pPr algn="l" indent="0" marL="0">
+              <a:spcAft>
+                <a:spcPts val="600"/>
+              </a:spcAft>
+              <a:buNone/>
+            </a:pPr>
+            <a:r>
+              <a:rPr lang="en-US" sz="1350" dirty="0">
+                <a:solidFill>
+                  <a:srgbClr val="33444F"/>
+                </a:solidFill>
+                <a:latin typeface="Calibri" pitchFamily="34" charset="0"/>
+                <a:ea typeface="Calibri" pitchFamily="34" charset="-122"/>
+                <a:cs typeface="Calibri" pitchFamily="34" charset="-120"/>
+              </a:rPr>
+              <a:t>D. Marker of MSI</a:t>
+            </a:r>
+            <a:endParaRPr lang="en-US" sz="1350" dirty="0"/>
+          </a:p>
+          <a:p>
+            <a:pPr algn="l" indent="0" marL="0">
+              <a:spcAft>
+                <a:spcPts val="600"/>
+              </a:spcAft>
+              <a:buNone/>
+            </a:pPr>
+            <a:r>
+              <a:rPr lang="en-US" sz="1350" dirty="0">
+                <a:solidFill>
+                  <a:srgbClr val="33444F"/>
+                </a:solidFill>
+                <a:latin typeface="Calibri" pitchFamily="34" charset="0"/>
+                <a:ea typeface="Calibri" pitchFamily="34" charset="-122"/>
+                <a:cs typeface="Calibri" pitchFamily="34" charset="-120"/>
+              </a:rPr>
+              <a:t>E. Prognostic marker only</a:t>
+            </a:r>
+            <a:endParaRPr lang="en-US" sz="1350" dirty="0"/>
+          </a:p>
+        </p:txBody>
+      </p:sp>
+      <p:sp>
+        <p:nvSpPr>
+          <p:cNvPr id="6" name="Shape 4"/>
+          <p:cNvSpPr/>
+          <p:nvPr/>
+        </p:nvSpPr>
+        <p:spPr>
+          <a:xfrm>
+            <a:off x="7201632" y="2395728"/>
+            <a:ext cx="4423136" cy="3246120"/>
+          </a:xfrm>
+          <a:prstGeom prst="roundRect">
+            <a:avLst>
+              <a:gd name="adj" fmla="val 2535"/>
+            </a:avLst>
+          </a:prstGeom>
+          <a:solidFill>
+            <a:srgbClr val="E0F2F4"/>
+          </a:solidFill>
+          <a:ln/>
+          <a:effectLst>
+            <a:outerShdw sx="100000" sy="100000" kx="0" ky="0" algn="bl" rotWithShape="0" blurRad="88900" dist="25400" dir="5400000">
+              <a:srgbClr val="22303C">
+                <a:alpha val="12000"/>
+              </a:srgbClr>
+            </a:outerShdw>
+          </a:effectLst>
+        </p:spPr>
+        <p:txBody>
+          <a:bodyPr/>
+          <a:p/>
+        </p:txBody>
+      </p:sp>
+      <p:sp>
+        <p:nvSpPr>
+          <p:cNvPr id="7" name="Text 5"/>
+          <p:cNvSpPr/>
+          <p:nvPr/>
+        </p:nvSpPr>
+        <p:spPr>
+          <a:xfrm>
+            <a:off x="7439376" y="2578608"/>
+            <a:ext cx="3965936" cy="457200"/>
+          </a:xfrm>
+          <a:prstGeom prst="rect">
+            <a:avLst/>
+          </a:prstGeom>
+          <a:noFill/>
+          <a:ln/>
+        </p:spPr>
+        <p:txBody>
+          <a:bodyPr wrap="square" lIns="0" tIns="0" rIns="0" bIns="0" rtlCol="0" anchor="ctr"/>
+          <a:lstStyle/>
+          <a:p>
+            <a:pPr indent="0" marL="0">
+              <a:buNone/>
+            </a:pPr>
+            <a:r>
+              <a:rPr lang="en-US" sz="1500" b="1" dirty="0">
+                <a:solidFill>
+                  <a:srgbClr val="00838F"/>
+                </a:solidFill>
+                <a:latin typeface="Calibri" pitchFamily="34" charset="0"/>
+                <a:ea typeface="Calibri" pitchFamily="34" charset="-122"/>
+                <a:cs typeface="Calibri" pitchFamily="34" charset="-120"/>
+              </a:rPr>
+              <a:t>ANSWER  </a:t>
+            </a:r>
+            <a:pPr indent="0" marL="0">
+              <a:buNone/>
+            </a:pPr>
+            <a:r>
+              <a:rPr lang="en-US" sz="1500" b="1" dirty="0">
+                <a:solidFill>
+                  <a:srgbClr val="1B2A38"/>
+                </a:solidFill>
+                <a:latin typeface="Calibri" pitchFamily="34" charset="0"/>
+                <a:ea typeface="Calibri" pitchFamily="34" charset="-122"/>
+                <a:cs typeface="Calibri" pitchFamily="34" charset="-120"/>
+              </a:rPr>
+              <a:t>B — Resistance to anti-EGFR</a:t>
+            </a:r>
+            <a:endParaRPr lang="en-US" sz="1500" dirty="0"/>
+          </a:p>
+        </p:txBody>
+      </p:sp>
+      <p:sp>
+        <p:nvSpPr>
+          <p:cNvPr id="8" name="Text 6"/>
+          <p:cNvSpPr/>
+          <p:nvPr/>
+        </p:nvSpPr>
+        <p:spPr>
+          <a:xfrm>
+            <a:off x="7439376" y="3127248"/>
+            <a:ext cx="3947648" cy="2377440"/>
+          </a:xfrm>
+          <a:prstGeom prst="rect">
+            <a:avLst/>
+          </a:prstGeom>
+          <a:noFill/>
+          <a:ln/>
+        </p:spPr>
+        <p:txBody>
+          <a:bodyPr wrap="square" lIns="0" tIns="0" rIns="0" bIns="0" rtlCol="0" anchor="t"/>
+          <a:lstStyle/>
+          <a:p>
+            <a:pPr algn="l" indent="0" marL="0">
+              <a:lnSpc>
+                <a:spcPct val="108000"/>
+              </a:lnSpc>
+              <a:buNone/>
+            </a:pPr>
+            <a:r>
+              <a:rPr lang="en-US" sz="1250" dirty="0">
+                <a:solidFill>
+                  <a:srgbClr val="33444F"/>
+                </a:solidFill>
+                <a:latin typeface="Calibri" pitchFamily="34" charset="0"/>
+                <a:ea typeface="Calibri" pitchFamily="34" charset="-122"/>
+                <a:cs typeface="Calibri" pitchFamily="34" charset="-120"/>
+              </a:rPr>
+              <a:t>KRAS/NRAS mutations predict lack of response to anti-EGFR antibodies in colorectal cancer.</a:t>
+            </a:r>
+            <a:endParaRPr lang="en-US" sz="1250" dirty="0"/>
+          </a:p>
+        </p:txBody>
+      </p:sp>
+      <p:sp>
+        <p:nvSpPr>
+          <p:cNvPr id="9" name="Text 7"/>
+          <p:cNvSpPr/>
+          <p:nvPr/>
+        </p:nvSpPr>
+        <p:spPr>
+          <a:xfrm>
+            <a:off x="566928" y="6473952"/>
+            <a:ext cx="7772400" cy="274320"/>
+          </a:xfrm>
+          <a:prstGeom prst="rect">
+            <a:avLst/>
+          </a:prstGeom>
+          <a:noFill/>
+          <a:ln/>
+        </p:spPr>
+        <p:txBody>
+          <a:bodyPr wrap="square" lIns="0" tIns="0" rIns="0" bIns="0" rtlCol="0" anchor="ctr"/>
+          <a:lstStyle/>
+          <a:p>
+            <a:pPr algn="l" indent="0" marL="0">
+              <a:buNone/>
+            </a:pPr>
+            <a:r>
+              <a:rPr lang="en-US" sz="850" dirty="0">
+                <a:solidFill>
+                  <a:srgbClr val="9AA8B4"/>
+                </a:solidFill>
+                <a:latin typeface="Calibri" pitchFamily="34" charset="0"/>
+                <a:ea typeface="Calibri" pitchFamily="34" charset="-122"/>
+                <a:cs typeface="Calibri" pitchFamily="34" charset="-120"/>
+              </a:rPr>
+              <a:t>Makassed General Hospital  ·  Department of Laboratory Medicine</a:t>
+            </a:r>
+            <a:endParaRPr lang="en-US" sz="850" dirty="0"/>
+          </a:p>
+        </p:txBody>
+      </p:sp>
+      <p:sp>
+        <p:nvSpPr>
+          <p:cNvPr id="10" name="Text 8"/>
+          <p:cNvSpPr/>
+          <p:nvPr/>
+        </p:nvSpPr>
+        <p:spPr>
+          <a:xfrm>
+            <a:off x="9814255" y="6473952"/>
+            <a:ext cx="1828800" cy="274320"/>
+          </a:xfrm>
+          <a:prstGeom prst="rect">
+            <a:avLst/>
+          </a:prstGeom>
+          <a:noFill/>
+          <a:ln/>
+        </p:spPr>
+        <p:txBody>
+          <a:bodyPr wrap="square" lIns="0" tIns="0" rIns="0" bIns="0" rtlCol="0" anchor="ctr"/>
+          <a:lstStyle/>
+          <a:p>
+            <a:pPr algn="r" indent="0" marL="0">
+              <a:buNone/>
+            </a:pPr>
+            <a:r>
+              <a:rPr lang="en-US" sz="850" dirty="0">
+                <a:solidFill>
+                  <a:srgbClr val="9AA8B4"/>
+                </a:solidFill>
+                <a:latin typeface="Calibri" pitchFamily="34" charset="0"/>
+                <a:ea typeface="Calibri" pitchFamily="34" charset="-122"/>
+                <a:cs typeface="Calibri" pitchFamily="34" charset="-120"/>
+              </a:rPr>
+              <a:t>CP Lecture Series</a:t>
+            </a:r>
+            <a:pPr algn="r" indent="0" marL="0">
+              <a:buNone/>
+            </a:pPr>
+            <a:r>
+              <a:rPr lang="en-US" sz="850" dirty="0">
+                <a:solidFill>
+                  <a:srgbClr val="DCE4EC"/>
+                </a:solidFill>
+                <a:latin typeface="Calibri" pitchFamily="34" charset="0"/>
+                <a:ea typeface="Calibri" pitchFamily="34" charset="-122"/>
+                <a:cs typeface="Calibri" pitchFamily="34" charset="-120"/>
+              </a:rPr>
+              <a:t>   ·   </a:t>
+            </a:r>
+            <a:pPr algn="r" indent="0" marL="0">
+              <a:buNone/>
+            </a:pPr>
+            <a:r>
+              <a:rPr lang="en-US" sz="850" b="1" dirty="0">
+                <a:solidFill>
+                  <a:srgbClr val="00838F"/>
+                </a:solidFill>
+                <a:latin typeface="Calibri" pitchFamily="34" charset="0"/>
+                <a:ea typeface="Calibri" pitchFamily="34" charset="-122"/>
+                <a:cs typeface="Calibri" pitchFamily="34" charset="-120"/>
+              </a:rPr>
+              <a:t>17</a:t>
+            </a:r>
+            <a:endParaRPr lang="en-US" sz="850" dirty="0"/>
+          </a:p>
+        </p:txBody>
+      </p:sp>
+    </p:spTree>
+  </p:cSld>
+  <p:clrMapOvr>
+    <a:masterClrMapping/>
+  </p:clrMapOvr>
+</p:sld>
+</file>
+
 <file path=ppt/slides/slide3.xml><?xml version="1.0" encoding="utf-8"?>
 <p:sld xmlns:a="http://schemas.openxmlformats.org/drawingml/2006/main" xmlns:r="http://schemas.openxmlformats.org/officeDocument/2006/relationships" xmlns:p="http://schemas.openxmlformats.org/presentationml/2006/main">
   <p:cSld name="Slide 3">
@@ -11551,6 +13171,10 @@
             </a:outerShdw>
           </a:effectLst>
         </p:spPr>
+        <p:txBody>
+          <a:bodyPr/>
+          <a:p/>
+        </p:txBody>
       </p:sp>
       <p:sp>
         <p:nvSpPr>
@@ -11578,6 +13202,10 @@
             </a:outerShdw>
           </a:effectLst>
         </p:spPr>
+        <p:txBody>
+          <a:bodyPr/>
+          <a:p/>
+        </p:txBody>
       </p:sp>
       <p:sp>
         <p:nvSpPr>
@@ -11685,6 +13313,10 @@
             </a:outerShdw>
           </a:effectLst>
         </p:spPr>
+        <p:txBody>
+          <a:bodyPr/>
+          <a:p/>
+        </p:txBody>
       </p:sp>
       <p:sp>
         <p:nvSpPr>
@@ -11712,6 +13344,10 @@
             </a:outerShdw>
           </a:effectLst>
         </p:spPr>
+        <p:txBody>
+          <a:bodyPr/>
+          <a:p/>
+        </p:txBody>
       </p:sp>
       <p:sp>
         <p:nvSpPr>
@@ -11819,6 +13455,10 @@
             </a:outerShdw>
           </a:effectLst>
         </p:spPr>
+        <p:txBody>
+          <a:bodyPr/>
+          <a:p/>
+        </p:txBody>
       </p:sp>
       <p:sp>
         <p:nvSpPr>
@@ -11846,6 +13486,10 @@
             </a:outerShdw>
           </a:effectLst>
         </p:spPr>
+        <p:txBody>
+          <a:bodyPr/>
+          <a:p/>
+        </p:txBody>
       </p:sp>
       <p:sp>
         <p:nvSpPr>
@@ -11953,6 +13597,10 @@
             </a:outerShdw>
           </a:effectLst>
         </p:spPr>
+        <p:txBody>
+          <a:bodyPr/>
+          <a:p/>
+        </p:txBody>
       </p:sp>
       <p:sp>
         <p:nvSpPr>
@@ -11980,6 +13628,10 @@
             </a:outerShdw>
           </a:effectLst>
         </p:spPr>
+        <p:txBody>
+          <a:bodyPr/>
+          <a:p/>
+        </p:txBody>
       </p:sp>
       <p:sp>
         <p:nvSpPr>
@@ -12087,6 +13739,10 @@
             </a:outerShdw>
           </a:effectLst>
         </p:spPr>
+        <p:txBody>
+          <a:bodyPr/>
+          <a:p/>
+        </p:txBody>
       </p:sp>
       <p:sp>
         <p:nvSpPr>
@@ -12114,6 +13770,10 @@
             </a:outerShdw>
           </a:effectLst>
         </p:spPr>
+        <p:txBody>
+          <a:bodyPr/>
+          <a:p/>
+        </p:txBody>
       </p:sp>
       <p:sp>
         <p:nvSpPr>
@@ -12221,6 +13881,10 @@
             </a:outerShdw>
           </a:effectLst>
         </p:spPr>
+        <p:txBody>
+          <a:bodyPr/>
+          <a:p/>
+        </p:txBody>
       </p:sp>
       <p:sp>
         <p:nvSpPr>
@@ -12248,6 +13912,10 @@
             </a:outerShdw>
           </a:effectLst>
         </p:spPr>
+        <p:txBody>
+          <a:bodyPr/>
+          <a:p/>
+        </p:txBody>
       </p:sp>
       <p:sp>
         <p:nvSpPr>
@@ -12571,6 +14239,10 @@
             </a:outerShdw>
           </a:effectLst>
         </p:spPr>
+        <p:txBody>
+          <a:bodyPr/>
+          <a:p/>
+        </p:txBody>
       </p:sp>
       <p:sp>
         <p:nvSpPr>
@@ -12598,6 +14270,10 @@
             </a:outerShdw>
           </a:effectLst>
         </p:spPr>
+        <p:txBody>
+          <a:bodyPr/>
+          <a:p/>
+        </p:txBody>
       </p:sp>
       <p:sp>
         <p:nvSpPr>
@@ -12712,6 +14388,10 @@
           </a:solidFill>
           <a:ln/>
         </p:spPr>
+        <p:txBody>
+          <a:bodyPr/>
+          <a:p/>
+        </p:txBody>
       </p:sp>
       <p:sp>
         <p:nvSpPr>
@@ -12739,6 +14419,10 @@
             </a:outerShdw>
           </a:effectLst>
         </p:spPr>
+        <p:txBody>
+          <a:bodyPr/>
+          <a:p/>
+        </p:txBody>
       </p:sp>
       <p:sp>
         <p:nvSpPr>
@@ -12860,6 +14544,10 @@
             </a:outerShdw>
           </a:effectLst>
         </p:spPr>
+        <p:txBody>
+          <a:bodyPr/>
+          <a:p/>
+        </p:txBody>
       </p:sp>
       <p:sp>
         <p:nvSpPr>
@@ -12887,6 +14575,10 @@
             </a:outerShdw>
           </a:effectLst>
         </p:spPr>
+        <p:txBody>
+          <a:bodyPr/>
+          <a:p/>
+        </p:txBody>
       </p:sp>
       <p:sp>
         <p:nvSpPr>
@@ -13001,6 +14693,10 @@
           </a:solidFill>
           <a:ln/>
         </p:spPr>
+        <p:txBody>
+          <a:bodyPr/>
+          <a:p/>
+        </p:txBody>
       </p:sp>
       <p:sp>
         <p:nvSpPr>
@@ -13028,6 +14724,10 @@
             </a:outerShdw>
           </a:effectLst>
         </p:spPr>
+        <p:txBody>
+          <a:bodyPr/>
+          <a:p/>
+        </p:txBody>
       </p:sp>
       <p:sp>
         <p:nvSpPr>
@@ -13149,6 +14849,10 @@
             </a:outerShdw>
           </a:effectLst>
         </p:spPr>
+        <p:txBody>
+          <a:bodyPr/>
+          <a:p/>
+        </p:txBody>
       </p:sp>
       <p:sp>
         <p:nvSpPr>
@@ -13176,6 +14880,10 @@
             </a:outerShdw>
           </a:effectLst>
         </p:spPr>
+        <p:txBody>
+          <a:bodyPr/>
+          <a:p/>
+        </p:txBody>
       </p:sp>
       <p:sp>
         <p:nvSpPr>
@@ -13414,6 +15122,10 @@
           </a:solidFill>
           <a:ln/>
         </p:spPr>
+        <p:txBody>
+          <a:bodyPr/>
+          <a:p/>
+        </p:txBody>
       </p:sp>
       <p:sp>
         <p:nvSpPr>
@@ -13436,6 +15148,10 @@
           </a:solidFill>
           <a:ln/>
         </p:spPr>
+        <p:txBody>
+          <a:bodyPr/>
+          <a:p/>
+        </p:txBody>
       </p:sp>
       <p:sp>
         <p:nvSpPr>
@@ -13692,6 +15408,10 @@
             </a:outerShdw>
           </a:effectLst>
         </p:spPr>
+        <p:txBody>
+          <a:bodyPr/>
+          <a:p/>
+        </p:txBody>
       </p:sp>
       <p:sp>
         <p:nvSpPr>
@@ -13866,6 +15586,10 @@
             </a:outerShdw>
           </a:effectLst>
         </p:spPr>
+        <p:txBody>
+          <a:bodyPr/>
+          <a:p/>
+        </p:txBody>
       </p:sp>
       <p:sp>
         <p:nvSpPr>
@@ -14256,6 +15980,10 @@
             </a:outerShdw>
           </a:effectLst>
         </p:spPr>
+        <p:txBody>
+          <a:bodyPr/>
+          <a:p/>
+        </p:txBody>
       </p:sp>
       <p:sp>
         <p:nvSpPr>
@@ -14430,6 +16158,10 @@
             </a:outerShdw>
           </a:effectLst>
         </p:spPr>
+        <p:txBody>
+          <a:bodyPr/>
+          <a:p/>
+        </p:txBody>
       </p:sp>
       <p:sp>
         <p:nvSpPr>
@@ -14825,6 +16557,10 @@
             </a:outerShdw>
           </a:effectLst>
         </p:spPr>
+        <p:txBody>
+          <a:bodyPr/>
+          <a:p/>
+        </p:txBody>
       </p:sp>
       <p:pic>
         <p:nvPicPr>
@@ -15048,6 +16784,10 @@
           </a:solidFill>
           <a:ln/>
         </p:spPr>
+        <p:txBody>
+          <a:bodyPr/>
+          <a:p/>
+        </p:txBody>
       </p:sp>
       <p:sp>
         <p:nvSpPr>
@@ -15070,6 +16810,10 @@
           </a:solidFill>
           <a:ln/>
         </p:spPr>
+        <p:txBody>
+          <a:bodyPr/>
+          <a:p/>
+        </p:txBody>
       </p:sp>
       <p:sp>
         <p:nvSpPr>
